--- a/IrisEXP_VN改善提案報告_JP.pptx
+++ b/IrisEXP_VN改善提案報告_JP.pptx
@@ -11,10 +11,10 @@
     <p:sldId id="259" r:id="rId10"/>
     <p:sldId id="260" r:id="rId11"/>
     <p:sldId id="261" r:id="rId12"/>
+    <p:sldId id="265" r:id="rId16"/>
     <p:sldId id="262" r:id="rId13"/>
     <p:sldId id="263" r:id="rId14"/>
     <p:sldId id="264" r:id="rId15"/>
-    <p:sldId id="265" r:id="rId16"/>
     <p:sldId id="266" r:id="rId17"/>
     <p:sldId id="267" r:id="rId18"/>
     <p:sldId id="268" r:id="rId19"/>
@@ -4054,7 +4054,7 @@
               </a:defRPr>
             </a:pPr>
             <a:r>
-              <a:t>4.5 投資試算・承認申請</a:t>
+              <a:t>4.4 追加提案・PDCA</a:t>
             </a:r>
           </a:p>
         </p:txBody>
@@ -4090,7 +4090,7 @@
               </a:defRPr>
             </a:pPr>
             <a:r>
-              <a:t>No.22詳細見積（101.69百万VND / 3,911.15 USD）と稟議承認申請の2つの選択案</a:t>
+              <a:t>ベトナム第2次追加提案（No.29 ～ No.37）と2026年10月度PDCA実績</a:t>
             </a:r>
           </a:p>
         </p:txBody>
@@ -4117,8 +4117,8 @@
           </a:bodyPr>
           <a:lstStyle/>
           <a:p>
-            <a:pPr algn="r">
-              <a:defRPr sz="1000" b="1">
+            <a:pPr>
+              <a:defRPr sz="1200">
                 <a:solidFill>
                   <a:srgbClr val="D0D8E8"/>
                 </a:solidFill>
@@ -4173,7 +4173,7 @@
           <a:lstStyle/>
           <a:p>
             <a:pPr algn="ctr">
-              <a:defRPr sz="960" b="1">
+              <a:defRPr sz="1200" b="1">
                 <a:solidFill>
                   <a:srgbClr val="1B365D"/>
                 </a:solidFill>
@@ -4181,58 +4181,28 @@
               </a:defRPr>
             </a:pPr>
             <a:r>
-              <a:t>■ 案A（推奨：No.22耐圧安全検査治具 101,690,000 VND / 3,911.15 USDの先行承認、高額ロボットNo.23, 24はDP・Host PCへ置換）または 案B（見積書3案件一括：855,690,000 VND / 32,911.15 USD）の決裁を仰ぐ。</a:t>
-            </a:r>
-          </a:p>
-        </p:txBody>
-      </p:sp>
-      <p:sp>
-        <p:nvSpPr>
-          <p:cNvPr id="7" name="TextBox 6"/>
-          <p:cNvSpPr txBox="1"/>
-          <p:nvPr/>
-        </p:nvSpPr>
-        <p:spPr>
-          <a:xfrm>
-            <a:off x="256032" y="1152144"/>
-            <a:ext cx="6629400" cy="201168"/>
-          </a:xfrm>
-          <a:prstGeom prst="rect">
-            <a:avLst/>
-          </a:prstGeom>
-          <a:noFill/>
-        </p:spPr>
-        <p:txBody>
-          <a:bodyPr wrap="square" lIns="18288" rIns="18288" tIns="9144" bIns="9144">
-            <a:spAutoFit/>
-          </a:bodyPr>
-          <a:lstStyle/>
-          <a:p>
-            <a:pPr>
-              <a:defRPr sz="780" b="1">
+              <a:rPr sz="1200" b="1">
                 <a:solidFill>
-                  <a:srgbClr val="1E6E3E"/>
+                  <a:srgbClr val="1B365D"/>
                 </a:solidFill>
                 <a:latin typeface="Meiryo UI"/>
-              </a:defRPr>
-            </a:pPr>
-            <a:r>
-              <a:t>■ 1. 投資試算シート（IRIS EXPのVN提案.xlsx）記載の費用構成（社内レート 26,000 VND/USD）</a:t>
+              </a:rPr>
+              <a:t>■ 追加9提案（No.29～37）は基板・ソフトの自己診断改善およびチャート統合（RCG Ledger、LSU Skew、Halftone U410、Mono）を推進し、低設備投資で工数削減。2026年10月度にはSOP改定により4工程を先行削除（-4.32s/台）。</a:t>
             </a:r>
           </a:p>
         </p:txBody>
       </p:sp>
       <p:graphicFrame>
         <p:nvGraphicFramePr>
-          <p:cNvPr id="8" name="Table 7"/>
+          <p:cNvPr id="7" name="Table 6"/>
           <p:cNvGraphicFramePr>
             <a:graphicFrameLocks noGrp="1"/>
           </p:cNvGraphicFramePr>
           <p:nvPr/>
         </p:nvGraphicFramePr>
         <p:xfrm>
-          <a:off x="256032" y="1353312"/>
-          <a:ext cx="6629400" cy="2651760"/>
+          <a:off x="256032" y="1170432"/>
+          <a:ext cx="11679631" cy="5349240"/>
         </p:xfrm>
         <a:graphic>
           <a:graphicData uri="http://schemas.openxmlformats.org/drawingml/2006/table">
@@ -4241,20 +4211,21 @@
                 <a:tableStyleId>{5C22544A-7EE6-4342-B048-85BDC9FD1C3A}</a:tableStyleId>
               </a:tblPr>
               <a:tblGrid>
-                <a:gridCol w="502920"/>
-                <a:gridCol w="2697480"/>
-                <a:gridCol w="1188720"/>
-                <a:gridCol w="1097280"/>
-                <a:gridCol w="1143000"/>
+                <a:gridCol w="868680"/>
+                <a:gridCol w="2331720"/>
+                <a:gridCol w="2423160"/>
+                <a:gridCol w="2971800"/>
+                <a:gridCol w="1508760"/>
+                <a:gridCol w="1575511"/>
               </a:tblGrid>
-              <a:tr h="241069">
-                <a:tc>
-                  <a:txBody>
-                    <a:bodyPr wrap="square"/>
-                    <a:lstStyle/>
-                    <a:p>
-                      <a:pPr algn="ctr">
-                        <a:defRPr sz="620" b="1">
+              <a:tr h="486294">
+                <a:tc>
+                  <a:txBody>
+                    <a:bodyPr wrap="square"/>
+                    <a:lstStyle/>
+                    <a:p>
+                      <a:pPr algn="ctr">
+                        <a:defRPr sz="740" b="1">
                           <a:solidFill>
                             <a:srgbClr val="FFFFFF"/>
                           </a:solidFill>
@@ -4262,7 +4233,11 @@
                         </a:defRPr>
                       </a:pPr>
                       <a:r>
-                        <a:t>項目</a:t>
+                        <a:t>提案番号</a:t>
+                      </a:r>
+                      <a:br/>
+                      <a:r>
+                        <a:t>（担当工程）</a:t>
                       </a:r>
                     </a:p>
                   </a:txBody>
@@ -4278,7 +4253,7 @@
                     <a:lstStyle/>
                     <a:p>
                       <a:pPr algn="ctr">
-                        <a:defRPr sz="620" b="1">
+                        <a:defRPr sz="740" b="1">
                           <a:solidFill>
                             <a:srgbClr val="FFFFFF"/>
                           </a:solidFill>
@@ -4286,7 +4261,7 @@
                         </a:defRPr>
                       </a:pPr>
                       <a:r>
-                        <a:t>設備項目（Iris EXPのVN提案.xlsx）</a:t>
+                        <a:t>ベトナム追加提案名称</a:t>
                       </a:r>
                     </a:p>
                   </a:txBody>
@@ -4302,7 +4277,7 @@
                     <a:lstStyle/>
                     <a:p>
                       <a:pPr algn="ctr">
-                        <a:defRPr sz="620" b="1">
+                        <a:defRPr sz="740" b="1">
                           <a:solidFill>
                             <a:srgbClr val="FFFFFF"/>
                           </a:solidFill>
@@ -4310,7 +4285,11 @@
                         </a:defRPr>
                       </a:pPr>
                       <a:r>
-                        <a:t>金額（VND）</a:t>
+                        <a:t>現行ラインの作業実態</a:t>
+                      </a:r>
+                      <a:br/>
+                      <a:r>
+                        <a:t>（工程表および一覧表記載内容）</a:t>
                       </a:r>
                     </a:p>
                   </a:txBody>
@@ -4326,7 +4305,7 @@
                     <a:lstStyle/>
                     <a:p>
                       <a:pPr algn="ctr">
-                        <a:defRPr sz="620" b="1">
+                        <a:defRPr sz="740" b="1">
                           <a:solidFill>
                             <a:srgbClr val="FFFFFF"/>
                           </a:solidFill>
@@ -4334,7 +4313,7 @@
                         </a:defRPr>
                       </a:pPr>
                       <a:r>
-                        <a:t>換算額（USD）</a:t>
+                        <a:t>改善技術内容およびチャート統合・自動化</a:t>
                       </a:r>
                     </a:p>
                   </a:txBody>
@@ -4350,7 +4329,7 @@
                     <a:lstStyle/>
                     <a:p>
                       <a:pPr algn="ctr">
-                        <a:defRPr sz="620" b="1">
+                        <a:defRPr sz="740" b="1">
                           <a:solidFill>
                             <a:srgbClr val="FFFFFF"/>
                           </a:solidFill>
@@ -4358,7 +4337,11 @@
                         </a:defRPr>
                       </a:pPr>
                       <a:r>
-                        <a:t>効果および費用割合</a:t>
+                        <a:t>工数削減効果</a:t>
+                      </a:r>
+                      <a:br/>
+                      <a:r>
+                        <a:t>および設備費</a:t>
                       </a:r>
                     </a:p>
                   </a:txBody>
@@ -4368,27 +4351,55 @@
                     </a:solidFill>
                   </a:tcPr>
                 </a:tc>
+                <a:tc>
+                  <a:txBody>
+                    <a:bodyPr wrap="square"/>
+                    <a:lstStyle/>
+                    <a:p>
+                      <a:pPr algn="ctr">
+                        <a:defRPr sz="740" b="1">
+                          <a:solidFill>
+                            <a:srgbClr val="FFFFFF"/>
+                          </a:solidFill>
+                          <a:latin typeface="Meiryo UI"/>
+                        </a:defRPr>
+                      </a:pPr>
+                      <a:r>
+                        <a:t>連携部署</a:t>
+                      </a:r>
+                      <a:br/>
+                      <a:r>
+                        <a:t>および進捗</a:t>
+                      </a:r>
+                    </a:p>
+                  </a:txBody>
+                  <a:tcPr anchor="ctr" marL="36576" marR="36576" marT="9144" marB="9144">
+                    <a:solidFill>
+                      <a:srgbClr val="1B365D"/>
+                    </a:solidFill>
+                  </a:tcPr>
+                </a:tc>
               </a:tr>
-              <a:tr h="241069">
-                <a:tc>
-                  <a:txBody>
-                    <a:bodyPr wrap="square"/>
-                    <a:lstStyle/>
-                    <a:p>
-                      <a:pPr algn="ctr">
-                        <a:defRPr sz="530" b="1">
-                          <a:solidFill>
-                            <a:srgbClr val="1E242B"/>
-                          </a:solidFill>
-                          <a:latin typeface="Meiryo UI"/>
-                        </a:defRPr>
-                      </a:pPr>
-                      <a:r>
-                        <a:t>No.22</a:t>
-                      </a:r>
-                      <a:br/>
-                      <a:r>
-                        <a:t>グループ1</a:t>
+              <a:tr h="486294">
+                <a:tc>
+                  <a:txBody>
+                    <a:bodyPr wrap="square"/>
+                    <a:lstStyle/>
+                    <a:p>
+                      <a:pPr algn="ctr">
+                        <a:defRPr sz="650" b="1">
+                          <a:solidFill>
+                            <a:srgbClr val="1E242B"/>
+                          </a:solidFill>
+                          <a:latin typeface="Meiryo UI"/>
+                        </a:defRPr>
+                      </a:pPr>
+                      <a:r>
+                        <a:t>No.29</a:t>
+                      </a:r>
+                      <a:br/>
+                      <a:r>
+                        <a:t>(A-1 / K1)</a:t>
                       </a:r>
                     </a:p>
                   </a:txBody>
@@ -4404,15 +4415,15 @@
                     <a:lstStyle/>
                     <a:p>
                       <a:pPr algn="l">
-                        <a:defRPr sz="530">
-                          <a:solidFill>
-                            <a:srgbClr val="1E242B"/>
-                          </a:solidFill>
-                          <a:latin typeface="Meiryo UI"/>
-                        </a:defRPr>
-                      </a:pPr>
-                      <a:r>
-                        <a:t>SMCエア機器（No.18～19）：電磁弁 SY5120-5LZD 5個（5M）＋シリンダ MGCLB16-50（4M）、CXSL15-50（5.1M）、CXSL15-70（5.6M）、CXSL15-100 3本（18M）</a:t>
+                        <a:defRPr sz="650">
+                          <a:solidFill>
+                            <a:srgbClr val="1E242B"/>
+                          </a:solidFill>
+                          <a:latin typeface="Meiryo UI"/>
+                        </a:defRPr>
+                      </a:pPr>
+                      <a:r>
+                        <a:t>A1：トナーコンテナ認識の基板・FW改善による自動化</a:t>
                       </a:r>
                     </a:p>
                   </a:txBody>
@@ -4427,16 +4438,16 @@
                     <a:bodyPr wrap="square"/>
                     <a:lstStyle/>
                     <a:p>
-                      <a:pPr algn="r">
-                        <a:defRPr sz="530">
-                          <a:solidFill>
-                            <a:srgbClr val="1E242B"/>
-                          </a:solidFill>
-                          <a:latin typeface="Meiryo UI"/>
-                        </a:defRPr>
-                      </a:pPr>
-                      <a:r>
-                        <a:t>37,700,000 VND</a:t>
+                      <a:pPr algn="l">
+                        <a:defRPr sz="650">
+                          <a:solidFill>
+                            <a:srgbClr val="1E242B"/>
+                          </a:solidFill>
+                          <a:latin typeface="Meiryo UI"/>
+                        </a:defRPr>
+                      </a:pPr>
+                      <a:r>
+                        <a:t>ライン投入時に「トナーコンテナが正しくセットされていません」等の警告が出現し、治具着脱に55秒を要している。</a:t>
                       </a:r>
                     </a:p>
                   </a:txBody>
@@ -4451,16 +4462,16 @@
                     <a:bodyPr wrap="square"/>
                     <a:lstStyle/>
                     <a:p>
-                      <a:pPr algn="r">
-                        <a:defRPr sz="530">
-                          <a:solidFill>
-                            <a:srgbClr val="1E242B"/>
-                          </a:solidFill>
-                          <a:latin typeface="Meiryo UI"/>
-                        </a:defRPr>
-                      </a:pPr>
-                      <a:r>
-                        <a:t>1,450.00 USD</a:t>
+                      <a:pPr algn="l">
+                        <a:defRPr sz="650">
+                          <a:solidFill>
+                            <a:srgbClr val="1E242B"/>
+                          </a:solidFill>
+                          <a:latin typeface="Meiryo UI"/>
+                        </a:defRPr>
+                      </a:pPr>
+                      <a:r>
+                        <a:t>設計部門へ基板・FWの自己診断改善を要請し、治具着脱なしでトナーコンテナ装着を自動検知可能とする。</a:t>
                       </a:r>
                     </a:p>
                   </a:txBody>
@@ -4476,15 +4487,19 @@
                     <a:lstStyle/>
                     <a:p>
                       <a:pPr algn="l">
-                        <a:defRPr sz="530">
-                          <a:solidFill>
-                            <a:srgbClr val="1E242B"/>
-                          </a:solidFill>
-                          <a:latin typeface="Meiryo UI"/>
-                        </a:defRPr>
-                      </a:pPr>
-                      <a:r>
-                        <a:t>No.22全体の 37.1%</a:t>
+                        <a:defRPr sz="650">
+                          <a:solidFill>
+                            <a:srgbClr val="1E242B"/>
+                          </a:solidFill>
+                          <a:latin typeface="Meiryo UI"/>
+                        </a:defRPr>
+                      </a:pPr>
+                      <a:r>
+                        <a:t>トナー治具着脱の廃止</a:t>
+                      </a:r>
+                      <a:br/>
+                      <a:r>
+                        <a:t>（現場設備費 0 円）</a:t>
                       </a:r>
                     </a:p>
                   </a:txBody>
@@ -4494,27 +4509,367 @@
                     </a:solidFill>
                   </a:tcPr>
                 </a:tc>
+                <a:tc>
+                  <a:txBody>
+                    <a:bodyPr wrap="square"/>
+                    <a:lstStyle/>
+                    <a:p>
+                      <a:pPr algn="l">
+                        <a:defRPr sz="650">
+                          <a:solidFill>
+                            <a:srgbClr val="1E242B"/>
+                          </a:solidFill>
+                          <a:latin typeface="Meiryo UI"/>
+                        </a:defRPr>
+                      </a:pPr>
+                      <a:r>
+                        <a:t>日本設計側確認中</a:t>
+                      </a:r>
+                    </a:p>
+                  </a:txBody>
+                  <a:tcPr anchor="ctr" marL="36576" marR="36576" marT="9144" marB="9144">
+                    <a:solidFill>
+                      <a:srgbClr val="FFFFFF"/>
+                    </a:solidFill>
+                  </a:tcPr>
+                </a:tc>
               </a:tr>
-              <a:tr h="241069">
-                <a:tc>
-                  <a:txBody>
-                    <a:bodyPr wrap="square"/>
-                    <a:lstStyle/>
-                    <a:p>
-                      <a:pPr algn="ctr">
-                        <a:defRPr sz="530" b="1">
-                          <a:solidFill>
-                            <a:srgbClr val="1E242B"/>
-                          </a:solidFill>
-                          <a:latin typeface="Meiryo UI"/>
-                        </a:defRPr>
-                      </a:pPr>
-                      <a:r>
-                        <a:t>No.22</a:t>
-                      </a:r>
-                      <a:br/>
-                      <a:r>
-                        <a:t>グループ2</a:t>
+              <a:tr h="486294">
+                <a:tc>
+                  <a:txBody>
+                    <a:bodyPr wrap="square"/>
+                    <a:lstStyle/>
+                    <a:p>
+                      <a:pPr algn="ctr">
+                        <a:defRPr sz="650" b="1">
+                          <a:solidFill>
+                            <a:srgbClr val="1E242B"/>
+                          </a:solidFill>
+                          <a:latin typeface="Meiryo UI"/>
+                        </a:defRPr>
+                      </a:pPr>
+                      <a:r>
+                        <a:t>No.30</a:t>
+                      </a:r>
+                      <a:br/>
+                      <a:r>
+                        <a:t>(A-1 / K1)</a:t>
+                      </a:r>
+                    </a:p>
+                  </a:txBody>
+                  <a:tcPr anchor="ctr" marL="36576" marR="36576" marT="9144" marB="9144">
+                    <a:solidFill>
+                      <a:srgbClr val="EAF7EE"/>
+                    </a:solidFill>
+                  </a:tcPr>
+                </a:tc>
+                <a:tc>
+                  <a:txBody>
+                    <a:bodyPr wrap="square"/>
+                    <a:lstStyle/>
+                    <a:p>
+                      <a:pPr algn="l">
+                        <a:defRPr sz="650">
+                          <a:solidFill>
+                            <a:srgbClr val="1E242B"/>
+                          </a:solidFill>
+                          <a:latin typeface="Meiryo UI"/>
+                        </a:defRPr>
+                      </a:pPr>
+                      <a:r>
+                        <a:t>A1：本体バーコード自動読取および廃トナーU155設定廃止</a:t>
+                      </a:r>
+                    </a:p>
+                  </a:txBody>
+                  <a:tcPr anchor="ctr" marL="36576" marR="36576" marT="9144" marB="9144">
+                    <a:solidFill>
+                      <a:srgbClr val="EAF7EE"/>
+                    </a:solidFill>
+                  </a:tcPr>
+                </a:tc>
+                <a:tc>
+                  <a:txBody>
+                    <a:bodyPr wrap="square"/>
+                    <a:lstStyle/>
+                    <a:p>
+                      <a:pPr algn="l">
+                        <a:defRPr sz="650">
+                          <a:solidFill>
+                            <a:srgbClr val="1E242B"/>
+                          </a:solidFill>
+                          <a:latin typeface="Meiryo UI"/>
+                        </a:defRPr>
+                      </a:pPr>
+                      <a:r>
+                        <a:t>バーコードの手動スキャンおよび廃トナー満杯しきい値U155の設定作業（標準29.16s / K1にて60s＋WTB確認10s）。</a:t>
+                      </a:r>
+                    </a:p>
+                  </a:txBody>
+                  <a:tcPr anchor="ctr" marL="36576" marR="36576" marT="9144" marB="9144">
+                    <a:solidFill>
+                      <a:srgbClr val="EAF7EE"/>
+                    </a:solidFill>
+                  </a:tcPr>
+                </a:tc>
+                <a:tc>
+                  <a:txBody>
+                    <a:bodyPr wrap="square"/>
+                    <a:lstStyle/>
+                    <a:p>
+                      <a:pPr algn="l">
+                        <a:defRPr sz="650">
+                          <a:solidFill>
+                            <a:srgbClr val="1E242B"/>
+                          </a:solidFill>
+                          <a:latin typeface="Meiryo UI"/>
+                        </a:defRPr>
+                      </a:pPr>
+                      <a:r>
+                        <a:t>A-1にてバーコード自動読取機を導入（生技製作）。本体側Push Switch追加とSub-Assy抵抗測定保証によりU155設定を全廃。</a:t>
+                      </a:r>
+                    </a:p>
+                  </a:txBody>
+                  <a:tcPr anchor="ctr" marL="36576" marR="36576" marT="9144" marB="9144">
+                    <a:solidFill>
+                      <a:srgbClr val="EAF7EE"/>
+                    </a:solidFill>
+                  </a:tcPr>
+                </a:tc>
+                <a:tc>
+                  <a:txBody>
+                    <a:bodyPr wrap="square"/>
+                    <a:lstStyle/>
+                    <a:p>
+                      <a:pPr algn="l">
+                        <a:defRPr sz="650">
+                          <a:solidFill>
+                            <a:srgbClr val="1E242B"/>
+                          </a:solidFill>
+                          <a:latin typeface="Meiryo UI"/>
+                        </a:defRPr>
+                      </a:pPr>
+                      <a:r>
+                        <a:t>• 29.16秒/台 短縮</a:t>
+                      </a:r>
+                      <a:br/>
+                      <a:r>
+                        <a:t>• 21ステップを全削除</a:t>
+                      </a:r>
+                    </a:p>
+                  </a:txBody>
+                  <a:tcPr anchor="ctr" marL="36576" marR="36576" marT="9144" marB="9144">
+                    <a:solidFill>
+                      <a:srgbClr val="EAF7EE"/>
+                    </a:solidFill>
+                  </a:tcPr>
+                </a:tc>
+                <a:tc>
+                  <a:txBody>
+                    <a:bodyPr wrap="square"/>
+                    <a:lstStyle/>
+                    <a:p>
+                      <a:pPr algn="l">
+                        <a:defRPr sz="650">
+                          <a:solidFill>
+                            <a:srgbClr val="1E242B"/>
+                          </a:solidFill>
+                          <a:latin typeface="Meiryo UI"/>
+                        </a:defRPr>
+                      </a:pPr>
+                      <a:r>
+                        <a:t>生技 ＆ 日本設計</a:t>
+                      </a:r>
+                      <a:br/>
+                      <a:r>
+                        <a:t>（U155廃止確定済）</a:t>
+                      </a:r>
+                    </a:p>
+                  </a:txBody>
+                  <a:tcPr anchor="ctr" marL="36576" marR="36576" marT="9144" marB="9144">
+                    <a:solidFill>
+                      <a:srgbClr val="EAF7EE"/>
+                    </a:solidFill>
+                  </a:tcPr>
+                </a:tc>
+              </a:tr>
+              <a:tr h="486294">
+                <a:tc>
+                  <a:txBody>
+                    <a:bodyPr wrap="square"/>
+                    <a:lstStyle/>
+                    <a:p>
+                      <a:pPr algn="ctr">
+                        <a:defRPr sz="650" b="1">
+                          <a:solidFill>
+                            <a:srgbClr val="1E242B"/>
+                          </a:solidFill>
+                          <a:latin typeface="Meiryo UI"/>
+                        </a:defRPr>
+                      </a:pPr>
+                      <a:r>
+                        <a:t>No.31</a:t>
+                      </a:r>
+                      <a:br/>
+                      <a:r>
+                        <a:t>(A-2 / A-5)</a:t>
+                      </a:r>
+                    </a:p>
+                  </a:txBody>
+                  <a:tcPr anchor="ctr" marL="36576" marR="36576" marT="9144" marB="9144">
+                    <a:solidFill>
+                      <a:srgbClr val="FFFFFF"/>
+                    </a:solidFill>
+                  </a:tcPr>
+                </a:tc>
+                <a:tc>
+                  <a:txBody>
+                    <a:bodyPr wrap="square"/>
+                    <a:lstStyle/>
+                    <a:p>
+                      <a:pPr algn="l">
+                        <a:defRPr sz="650">
+                          <a:solidFill>
+                            <a:srgbClr val="1E242B"/>
+                          </a:solidFill>
+                          <a:latin typeface="Meiryo UI"/>
+                        </a:defRPr>
+                      </a:pPr>
+                      <a:r>
+                        <a:t>A5：2Wayクラッチ確認をColor Registへ統合 -&gt; U950前RCG廃止</a:t>
+                      </a:r>
+                    </a:p>
+                  </a:txBody>
+                  <a:tcPr anchor="ctr" marL="36576" marR="36576" marT="9144" marB="9144">
+                    <a:solidFill>
+                      <a:srgbClr val="FFFFFF"/>
+                    </a:solidFill>
+                  </a:tcPr>
+                </a:tc>
+                <a:tc>
+                  <a:txBody>
+                    <a:bodyPr wrap="square"/>
+                    <a:lstStyle/>
+                    <a:p>
+                      <a:pPr algn="l">
+                        <a:defRPr sz="650">
+                          <a:solidFill>
+                            <a:srgbClr val="1E242B"/>
+                          </a:solidFill>
+                          <a:latin typeface="Meiryo UI"/>
+                        </a:defRPr>
+                      </a:pPr>
+                      <a:r>
+                        <a:t>K4においてU950前にRCG印刷を実施（標準17.36s / K4にて25s）。K2で重りを用いた有負荷カセット開閉確認（20s）。</a:t>
+                      </a:r>
+                    </a:p>
+                  </a:txBody>
+                  <a:tcPr anchor="ctr" marL="36576" marR="36576" marT="9144" marB="9144">
+                    <a:solidFill>
+                      <a:srgbClr val="FFFFFF"/>
+                    </a:solidFill>
+                  </a:tcPr>
+                </a:tc>
+                <a:tc>
+                  <a:txBody>
+                    <a:bodyPr wrap="square"/>
+                    <a:lstStyle/>
+                    <a:p>
+                      <a:pPr algn="l">
+                        <a:defRPr sz="650">
+                          <a:solidFill>
+                            <a:srgbClr val="1E242B"/>
+                          </a:solidFill>
+                          <a:latin typeface="Meiryo UI"/>
+                        </a:defRPr>
+                      </a:pPr>
+                      <a:r>
+                        <a:t>2Wayクラッチの動作確認を後工程のRCG Color Regist印刷へ統合し、U950前のRCG印刷を完全廃止。有負荷試験治具の自動化を検討。</a:t>
+                      </a:r>
+                    </a:p>
+                  </a:txBody>
+                  <a:tcPr anchor="ctr" marL="36576" marR="36576" marT="9144" marB="9144">
+                    <a:solidFill>
+                      <a:srgbClr val="FFFFFF"/>
+                    </a:solidFill>
+                  </a:tcPr>
+                </a:tc>
+                <a:tc>
+                  <a:txBody>
+                    <a:bodyPr wrap="square"/>
+                    <a:lstStyle/>
+                    <a:p>
+                      <a:pPr algn="l">
+                        <a:defRPr sz="650">
+                          <a:solidFill>
+                            <a:srgbClr val="1E242B"/>
+                          </a:solidFill>
+                          <a:latin typeface="Meiryo UI"/>
+                        </a:defRPr>
+                      </a:pPr>
+                      <a:r>
+                        <a:t>• 17.36s～25s（RCG 1枚削減）</a:t>
+                      </a:r>
+                      <a:br/>
+                      <a:r>
+                        <a:t>• カセット有負荷確認短縮</a:t>
+                      </a:r>
+                    </a:p>
+                  </a:txBody>
+                  <a:tcPr anchor="ctr" marL="36576" marR="36576" marT="9144" marB="9144">
+                    <a:solidFill>
+                      <a:srgbClr val="FFFFFF"/>
+                    </a:solidFill>
+                  </a:tcPr>
+                </a:tc>
+                <a:tc>
+                  <a:txBody>
+                    <a:bodyPr wrap="square"/>
+                    <a:lstStyle/>
+                    <a:p>
+                      <a:pPr algn="l">
+                        <a:defRPr sz="650">
+                          <a:solidFill>
+                            <a:srgbClr val="1E242B"/>
+                          </a:solidFill>
+                          <a:latin typeface="Meiryo UI"/>
+                        </a:defRPr>
+                      </a:pPr>
+                      <a:r>
+                        <a:t>設計 ＆ 生技</a:t>
+                      </a:r>
+                      <a:br/>
+                      <a:r>
+                        <a:t>（確認中）</a:t>
+                      </a:r>
+                    </a:p>
+                  </a:txBody>
+                  <a:tcPr anchor="ctr" marL="36576" marR="36576" marT="9144" marB="9144">
+                    <a:solidFill>
+                      <a:srgbClr val="FFFFFF"/>
+                    </a:solidFill>
+                  </a:tcPr>
+                </a:tc>
+              </a:tr>
+              <a:tr h="486294">
+                <a:tc>
+                  <a:txBody>
+                    <a:bodyPr wrap="square"/>
+                    <a:lstStyle/>
+                    <a:p>
+                      <a:pPr algn="ctr">
+                        <a:defRPr sz="650" b="1">
+                          <a:solidFill>
+                            <a:srgbClr val="1E242B"/>
+                          </a:solidFill>
+                          <a:latin typeface="Meiryo UI"/>
+                        </a:defRPr>
+                      </a:pPr>
+                      <a:r>
+                        <a:t>No.32</a:t>
+                      </a:r>
+                      <a:br/>
+                      <a:r>
+                        <a:t>(A-2 / A-7)</a:t>
                       </a:r>
                     </a:p>
                   </a:txBody>
@@ -4530,15 +4885,15 @@
                     <a:lstStyle/>
                     <a:p>
                       <a:pPr algn="l">
-                        <a:defRPr sz="530">
-                          <a:solidFill>
-                            <a:srgbClr val="1E242B"/>
-                          </a:solidFill>
-                          <a:latin typeface="Meiryo UI"/>
-                        </a:defRPr>
-                      </a:pPr>
-                      <a:r>
-                        <a:t>治具機械加工費および副資材（No.25：治具ブロック加工費および発生追加電気資材）</a:t>
+                        <a:defRPr sz="650">
+                          <a:solidFill>
+                            <a:srgbClr val="1E242B"/>
+                          </a:solidFill>
+                          <a:latin typeface="Meiryo UI"/>
+                        </a:defRPr>
+                      </a:pPr>
+                      <a:r>
+                        <a:t>A7：エージングU950の工程見直し短縮およびオプション非接触検査</a:t>
                       </a:r>
                     </a:p>
                   </a:txBody>
@@ -4553,16 +4908,16 @@
                     <a:bodyPr wrap="square"/>
                     <a:lstStyle/>
                     <a:p>
-                      <a:pPr algn="r">
-                        <a:defRPr sz="530">
-                          <a:solidFill>
-                            <a:srgbClr val="1E242B"/>
-                          </a:solidFill>
-                          <a:latin typeface="Meiryo UI"/>
-                        </a:defRPr>
-                      </a:pPr>
-                      <a:r>
-                        <a:t>20,000,000 VND</a:t>
+                      <a:pPr algn="l">
+                        <a:defRPr sz="650">
+                          <a:solidFill>
+                            <a:srgbClr val="1E242B"/>
+                          </a:solidFill>
+                          <a:latin typeface="Meiryo UI"/>
+                        </a:defRPr>
+                      </a:pPr>
+                      <a:r>
+                        <a:t>K4におけるエージングU950が285秒を要し全工程中最大ボトルネック。K2でのオプション接続確認に90秒。</a:t>
                       </a:r>
                     </a:p>
                   </a:txBody>
@@ -4577,16 +4932,16 @@
                     <a:bodyPr wrap="square"/>
                     <a:lstStyle/>
                     <a:p>
-                      <a:pPr algn="r">
-                        <a:defRPr sz="530">
-                          <a:solidFill>
-                            <a:srgbClr val="1E242B"/>
-                          </a:solidFill>
-                          <a:latin typeface="Meiryo UI"/>
-                        </a:defRPr>
-                      </a:pPr>
-                      <a:r>
-                        <a:t>769.23 USD</a:t>
+                      <a:pPr algn="l">
+                        <a:defRPr sz="650">
+                          <a:solidFill>
+                            <a:srgbClr val="1E242B"/>
+                          </a:solidFill>
+                          <a:latin typeface="Meiryo UI"/>
+                        </a:defRPr>
+                      </a:pPr>
+                      <a:r>
+                        <a:t>エージングU950の技術条件を再検証し運転時間を短縮。オプション接続確認はFW自己診断によりケーブル挿抜なしで完結。</a:t>
                       </a:r>
                     </a:p>
                   </a:txBody>
@@ -4602,15 +4957,19 @@
                     <a:lstStyle/>
                     <a:p>
                       <a:pPr algn="l">
-                        <a:defRPr sz="530">
-                          <a:solidFill>
-                            <a:srgbClr val="1E242B"/>
-                          </a:solidFill>
-                          <a:latin typeface="Meiryo UI"/>
-                        </a:defRPr>
-                      </a:pPr>
-                      <a:r>
-                        <a:t>No.22全体の 19.7%</a:t>
+                        <a:defRPr sz="650">
+                          <a:solidFill>
+                            <a:srgbClr val="1E242B"/>
+                          </a:solidFill>
+                          <a:latin typeface="Meiryo UI"/>
+                        </a:defRPr>
+                      </a:pPr>
+                      <a:r>
+                        <a:t>• 285sエージング短縮</a:t>
+                      </a:r>
+                      <a:br/>
+                      <a:r>
+                        <a:t>• オプション接続工数短縮</a:t>
                       </a:r>
                     </a:p>
                   </a:txBody>
@@ -4620,27 +4979,55 @@
                     </a:solidFill>
                   </a:tcPr>
                 </a:tc>
+                <a:tc>
+                  <a:txBody>
+                    <a:bodyPr wrap="square"/>
+                    <a:lstStyle/>
+                    <a:p>
+                      <a:pPr algn="l">
+                        <a:defRPr sz="650">
+                          <a:solidFill>
+                            <a:srgbClr val="1E242B"/>
+                          </a:solidFill>
+                          <a:latin typeface="Meiryo UI"/>
+                        </a:defRPr>
+                      </a:pPr>
+                      <a:r>
+                        <a:t>日本設計 ＆ 機構生技</a:t>
+                      </a:r>
+                      <a:br/>
+                      <a:r>
+                        <a:t>（検討中）</a:t>
+                      </a:r>
+                    </a:p>
+                  </a:txBody>
+                  <a:tcPr anchor="ctr" marL="36576" marR="36576" marT="9144" marB="9144">
+                    <a:solidFill>
+                      <a:srgbClr val="F7F9FC"/>
+                    </a:solidFill>
+                  </a:tcPr>
+                </a:tc>
               </a:tr>
-              <a:tr h="241069">
-                <a:tc>
-                  <a:txBody>
-                    <a:bodyPr wrap="square"/>
-                    <a:lstStyle/>
-                    <a:p>
-                      <a:pPr algn="ctr">
-                        <a:defRPr sz="530" b="1">
-                          <a:solidFill>
-                            <a:srgbClr val="1E242B"/>
-                          </a:solidFill>
-                          <a:latin typeface="Meiryo UI"/>
-                        </a:defRPr>
-                      </a:pPr>
-                      <a:r>
-                        <a:t>No.22</a:t>
-                      </a:r>
-                      <a:br/>
-                      <a:r>
-                        <a:t>グループ3</a:t>
+              <a:tr h="486294">
+                <a:tc>
+                  <a:txBody>
+                    <a:bodyPr wrap="square"/>
+                    <a:lstStyle/>
+                    <a:p>
+                      <a:pPr algn="ctr">
+                        <a:defRPr sz="650" b="1">
+                          <a:solidFill>
+                            <a:srgbClr val="1E242B"/>
+                          </a:solidFill>
+                          <a:latin typeface="Meiryo UI"/>
+                        </a:defRPr>
+                      </a:pPr>
+                      <a:r>
+                        <a:t>No.33</a:t>
+                      </a:r>
+                      <a:br/>
+                      <a:r>
+                        <a:t>(A-3 / A-8)</a:t>
                       </a:r>
                     </a:p>
                   </a:txBody>
@@ -4656,15 +5043,15 @@
                     <a:lstStyle/>
                     <a:p>
                       <a:pPr algn="l">
-                        <a:defRPr sz="530">
-                          <a:solidFill>
-                            <a:srgbClr val="1E242B"/>
-                          </a:solidFill>
-                          <a:latin typeface="Meiryo UI"/>
-                        </a:defRPr>
-                      </a:pPr>
-                      <a:r>
-                        <a:t>制御機器・センサ（No.1, 3, 20, 21）：PLC FX5U-64MT/ES（9.5M）＋増設FX5-16EYR（2M）＋HMI Wecon（5M）＋オムロン光電センサ2個（3M）</a:t>
+                        <a:defRPr sz="650">
+                          <a:solidFill>
+                            <a:srgbClr val="1E242B"/>
+                          </a:solidFill>
+                          <a:latin typeface="Meiryo UI"/>
+                        </a:defRPr>
+                      </a:pPr>
+                      <a:r>
+                        <a:t>A8：RCG Ledger直角度確認をColor Registへ統合 -&gt; Ledger廃止</a:t>
                       </a:r>
                     </a:p>
                   </a:txBody>
@@ -4679,16 +5066,16 @@
                     <a:bodyPr wrap="square"/>
                     <a:lstStyle/>
                     <a:p>
-                      <a:pPr algn="r">
-                        <a:defRPr sz="530">
-                          <a:solidFill>
-                            <a:srgbClr val="1E242B"/>
-                          </a:solidFill>
-                          <a:latin typeface="Meiryo UI"/>
-                        </a:defRPr>
-                      </a:pPr>
-                      <a:r>
-                        <a:t>19,500,000 VND</a:t>
+                      <a:pPr algn="l">
+                        <a:defRPr sz="650">
+                          <a:solidFill>
+                            <a:srgbClr val="1E242B"/>
+                          </a:solidFill>
+                          <a:latin typeface="Meiryo UI"/>
+                        </a:defRPr>
+                      </a:pPr>
+                      <a:r>
+                        <a:t>KDA/Inch仕向け用にRCG Ledgerを別印刷して直角度を測定（K5にて20s～32s）。K3にて外装カバー6枚を組付け（48.32s～90s）。</a:t>
                       </a:r>
                     </a:p>
                   </a:txBody>
@@ -4703,16 +5090,16 @@
                     <a:bodyPr wrap="square"/>
                     <a:lstStyle/>
                     <a:p>
-                      <a:pPr algn="r">
-                        <a:defRPr sz="530">
-                          <a:solidFill>
-                            <a:srgbClr val="1E242B"/>
-                          </a:solidFill>
-                          <a:latin typeface="Meiryo UI"/>
-                        </a:defRPr>
-                      </a:pPr>
-                      <a:r>
-                        <a:t>750.00 USD</a:t>
+                      <a:pPr algn="l">
+                        <a:defRPr sz="650">
+                          <a:solidFill>
+                            <a:srgbClr val="1E242B"/>
+                          </a:solidFill>
+                          <a:latin typeface="Meiryo UI"/>
+                        </a:defRPr>
+                      </a:pPr>
+                      <a:r>
+                        <a:t>Ledgerサイズの直角度測定パターンをRCG Color Registへ統合し、RCG Ledger印刷を廃止。カバー6枚組付けは本体組立工程へ移管。</a:t>
                       </a:r>
                     </a:p>
                   </a:txBody>
@@ -4728,15 +5115,19 @@
                     <a:lstStyle/>
                     <a:p>
                       <a:pPr algn="l">
-                        <a:defRPr sz="530">
-                          <a:solidFill>
-                            <a:srgbClr val="1E242B"/>
-                          </a:solidFill>
-                          <a:latin typeface="Meiryo UI"/>
-                        </a:defRPr>
-                      </a:pPr>
-                      <a:r>
-                        <a:t>No.22全体の 19.2%</a:t>
+                        <a:defRPr sz="650">
+                          <a:solidFill>
+                            <a:srgbClr val="1E242B"/>
+                          </a:solidFill>
+                          <a:latin typeface="Meiryo UI"/>
+                        </a:defRPr>
+                      </a:pPr>
+                      <a:r>
+                        <a:t>• 印刷1枚削減（Ledger廃止）</a:t>
+                      </a:r>
+                      <a:br/>
+                      <a:r>
+                        <a:t>• カバー組付48s～90sを組立へ</a:t>
                       </a:r>
                     </a:p>
                   </a:txBody>
@@ -4746,153 +5137,213 @@
                     </a:solidFill>
                   </a:tcPr>
                 </a:tc>
+                <a:tc>
+                  <a:txBody>
+                    <a:bodyPr wrap="square"/>
+                    <a:lstStyle/>
+                    <a:p>
+                      <a:pPr algn="l">
+                        <a:defRPr sz="650">
+                          <a:solidFill>
+                            <a:srgbClr val="1E242B"/>
+                          </a:solidFill>
+                          <a:latin typeface="Meiryo UI"/>
+                        </a:defRPr>
+                      </a:pPr>
+                      <a:r>
+                        <a:t>設計 / 品保 / 組立</a:t>
+                      </a:r>
+                      <a:br/>
+                      <a:r>
+                        <a:t>（工程DR合意済）</a:t>
+                      </a:r>
+                    </a:p>
+                  </a:txBody>
+                  <a:tcPr anchor="ctr" marL="36576" marR="36576" marT="9144" marB="9144">
+                    <a:solidFill>
+                      <a:srgbClr val="FFFFFF"/>
+                    </a:solidFill>
+                  </a:tcPr>
+                </a:tc>
               </a:tr>
-              <a:tr h="241069">
-                <a:tc>
-                  <a:txBody>
-                    <a:bodyPr wrap="square"/>
-                    <a:lstStyle/>
-                    <a:p>
-                      <a:pPr algn="ctr">
-                        <a:defRPr sz="530" b="1">
-                          <a:solidFill>
-                            <a:srgbClr val="1E242B"/>
-                          </a:solidFill>
-                          <a:latin typeface="Meiryo UI"/>
-                        </a:defRPr>
-                      </a:pPr>
-                      <a:r>
-                        <a:t>No.22</a:t>
-                      </a:r>
-                      <a:br/>
-                      <a:r>
-                        <a:t>グループ4</a:t>
-                      </a:r>
-                    </a:p>
-                  </a:txBody>
-                  <a:tcPr anchor="ctr" marL="36576" marR="36576" marT="9144" marB="9144">
-                    <a:solidFill>
-                      <a:srgbClr val="F7F9FC"/>
-                    </a:solidFill>
-                  </a:tcPr>
-                </a:tc>
-                <a:tc>
-                  <a:txBody>
-                    <a:bodyPr wrap="square"/>
-                    <a:lstStyle/>
-                    <a:p>
-                      <a:pPr algn="l">
-                        <a:defRPr sz="530">
-                          <a:solidFill>
-                            <a:srgbClr val="1E242B"/>
-                          </a:solidFill>
-                          <a:latin typeface="Meiryo UI"/>
-                        </a:defRPr>
-                      </a:pPr>
-                      <a:r>
-                        <a:t>ミスミアルミフレーム（No.22～24）：アルミフレーム15本 LCF8-4040-2000（7.5M）＋コーナーブラケット50個（3M）＋ナット100個（2M）</a:t>
-                      </a:r>
-                    </a:p>
-                  </a:txBody>
-                  <a:tcPr anchor="ctr" marL="36576" marR="36576" marT="9144" marB="9144">
-                    <a:solidFill>
-                      <a:srgbClr val="F7F9FC"/>
-                    </a:solidFill>
-                  </a:tcPr>
-                </a:tc>
-                <a:tc>
-                  <a:txBody>
-                    <a:bodyPr wrap="square"/>
-                    <a:lstStyle/>
-                    <a:p>
-                      <a:pPr algn="r">
-                        <a:defRPr sz="530">
-                          <a:solidFill>
-                            <a:srgbClr val="1E242B"/>
-                          </a:solidFill>
-                          <a:latin typeface="Meiryo UI"/>
-                        </a:defRPr>
-                      </a:pPr>
-                      <a:r>
-                        <a:t>12,500,000 VND</a:t>
-                      </a:r>
-                    </a:p>
-                  </a:txBody>
-                  <a:tcPr anchor="ctr" marL="36576" marR="36576" marT="9144" marB="9144">
-                    <a:solidFill>
-                      <a:srgbClr val="F7F9FC"/>
-                    </a:solidFill>
-                  </a:tcPr>
-                </a:tc>
-                <a:tc>
-                  <a:txBody>
-                    <a:bodyPr wrap="square"/>
-                    <a:lstStyle/>
-                    <a:p>
-                      <a:pPr algn="r">
-                        <a:defRPr sz="530">
-                          <a:solidFill>
-                            <a:srgbClr val="1E242B"/>
-                          </a:solidFill>
-                          <a:latin typeface="Meiryo UI"/>
-                        </a:defRPr>
-                      </a:pPr>
-                      <a:r>
-                        <a:t>480.77 USD</a:t>
-                      </a:r>
-                    </a:p>
-                  </a:txBody>
-                  <a:tcPr anchor="ctr" marL="36576" marR="36576" marT="9144" marB="9144">
-                    <a:solidFill>
-                      <a:srgbClr val="F7F9FC"/>
-                    </a:solidFill>
-                  </a:tcPr>
-                </a:tc>
-                <a:tc>
-                  <a:txBody>
-                    <a:bodyPr wrap="square"/>
-                    <a:lstStyle/>
-                    <a:p>
-                      <a:pPr algn="l">
-                        <a:defRPr sz="530">
-                          <a:solidFill>
-                            <a:srgbClr val="1E242B"/>
-                          </a:solidFill>
-                          <a:latin typeface="Meiryo UI"/>
-                        </a:defRPr>
-                      </a:pPr>
-                      <a:r>
-                        <a:t>No.22全体の 12.3%</a:t>
-                      </a:r>
-                    </a:p>
-                  </a:txBody>
-                  <a:tcPr anchor="ctr" marL="36576" marR="36576" marT="9144" marB="9144">
-                    <a:solidFill>
-                      <a:srgbClr val="F7F9FC"/>
+              <a:tr h="486294">
+                <a:tc>
+                  <a:txBody>
+                    <a:bodyPr wrap="square"/>
+                    <a:lstStyle/>
+                    <a:p>
+                      <a:pPr algn="ctr">
+                        <a:defRPr sz="650" b="1">
+                          <a:solidFill>
+                            <a:srgbClr val="1E242B"/>
+                          </a:solidFill>
+                          <a:latin typeface="Meiryo UI"/>
+                        </a:defRPr>
+                      </a:pPr>
+                      <a:r>
+                        <a:t>No.34</a:t>
+                      </a:r>
+                      <a:br/>
+                      <a:r>
+                        <a:t>(A-3 / A-8)</a:t>
+                      </a:r>
+                    </a:p>
+                  </a:txBody>
+                  <a:tcPr anchor="ctr" marL="36576" marR="36576" marT="9144" marB="9144">
+                    <a:solidFill>
+                      <a:srgbClr val="EAF7EE"/>
+                    </a:solidFill>
+                  </a:tcPr>
+                </a:tc>
+                <a:tc>
+                  <a:txBody>
+                    <a:bodyPr wrap="square"/>
+                    <a:lstStyle/>
+                    <a:p>
+                      <a:pPr algn="l">
+                        <a:defRPr sz="650">
+                          <a:solidFill>
+                            <a:srgbClr val="1E242B"/>
+                          </a:solidFill>
+                          <a:latin typeface="Meiryo UI"/>
+                        </a:defRPr>
+                      </a:pPr>
+                      <a:r>
+                        <a:t>A8：RCG LSU SKEWをColor Registへ統合 -&gt; LSU Skew廃止</a:t>
+                      </a:r>
+                    </a:p>
+                  </a:txBody>
+                  <a:tcPr anchor="ctr" marL="36576" marR="36576" marT="9144" marB="9144">
+                    <a:solidFill>
+                      <a:srgbClr val="EAF7EE"/>
+                    </a:solidFill>
+                  </a:tcPr>
+                </a:tc>
+                <a:tc>
+                  <a:txBody>
+                    <a:bodyPr wrap="square"/>
+                    <a:lstStyle/>
+                    <a:p>
+                      <a:pPr algn="l">
+                        <a:defRPr sz="650">
+                          <a:solidFill>
+                            <a:srgbClr val="1E242B"/>
+                          </a:solidFill>
+                          <a:latin typeface="Meiryo UI"/>
+                        </a:defRPr>
+                      </a:pPr>
+                      <a:r>
+                        <a:t>K5にてRCG LSU Skewの印刷・調整に130秒（標準36.84s）。K3にてカセット1/2の用紙サイズ認識手動確認に65秒（標準66.68s）。</a:t>
+                      </a:r>
+                    </a:p>
+                  </a:txBody>
+                  <a:tcPr anchor="ctr" marL="36576" marR="36576" marT="9144" marB="9144">
+                    <a:solidFill>
+                      <a:srgbClr val="EAF7EE"/>
+                    </a:solidFill>
+                  </a:tcPr>
+                </a:tc>
+                <a:tc>
+                  <a:txBody>
+                    <a:bodyPr wrap="square"/>
+                    <a:lstStyle/>
+                    <a:p>
+                      <a:pPr algn="l">
+                        <a:defRPr sz="650">
+                          <a:solidFill>
+                            <a:srgbClr val="1E242B"/>
+                          </a:solidFill>
+                          <a:latin typeface="Meiryo UI"/>
+                        </a:defRPr>
+                      </a:pPr>
+                      <a:r>
+                        <a:t>LSU Skew測定パターンをRCG Color Registへ統合してLSU Skew印刷を廃止。Host PCからコマンド送信しカセットサイズを自動認識。</a:t>
+                      </a:r>
+                    </a:p>
+                  </a:txBody>
+                  <a:tcPr anchor="ctr" marL="36576" marR="36576" marT="9144" marB="9144">
+                    <a:solidFill>
+                      <a:srgbClr val="EAF7EE"/>
+                    </a:solidFill>
+                  </a:tcPr>
+                </a:tc>
+                <a:tc>
+                  <a:txBody>
+                    <a:bodyPr wrap="square"/>
+                    <a:lstStyle/>
+                    <a:p>
+                      <a:pPr algn="l">
+                        <a:defRPr sz="650">
+                          <a:solidFill>
+                            <a:srgbClr val="1E242B"/>
+                          </a:solidFill>
+                          <a:latin typeface="Meiryo UI"/>
+                        </a:defRPr>
+                      </a:pPr>
+                      <a:r>
+                        <a:t>• 印刷1枚削減（Skew廃止）</a:t>
+                      </a:r>
+                      <a:br/>
+                      <a:r>
+                        <a:t>• カセットサイズ認識 66.68s減</a:t>
+                      </a:r>
+                    </a:p>
+                  </a:txBody>
+                  <a:tcPr anchor="ctr" marL="36576" marR="36576" marT="9144" marB="9144">
+                    <a:solidFill>
+                      <a:srgbClr val="EAF7EE"/>
+                    </a:solidFill>
+                  </a:tcPr>
+                </a:tc>
+                <a:tc>
+                  <a:txBody>
+                    <a:bodyPr wrap="square"/>
+                    <a:lstStyle/>
+                    <a:p>
+                      <a:pPr algn="l">
+                        <a:defRPr sz="650">
+                          <a:solidFill>
+                            <a:srgbClr val="1E242B"/>
+                          </a:solidFill>
+                          <a:latin typeface="Meiryo UI"/>
+                        </a:defRPr>
+                      </a:pPr>
+                      <a:r>
+                        <a:t>日本設計 ＆ 機構生技</a:t>
+                      </a:r>
+                      <a:br/>
+                      <a:r>
+                        <a:t>（カセット自動化は先行）</a:t>
+                      </a:r>
+                    </a:p>
+                  </a:txBody>
+                  <a:tcPr anchor="ctr" marL="36576" marR="36576" marT="9144" marB="9144">
+                    <a:solidFill>
+                      <a:srgbClr val="EAF7EE"/>
                     </a:solidFill>
                   </a:tcPr>
                 </a:tc>
               </a:tr>
-              <a:tr h="241069">
-                <a:tc>
-                  <a:txBody>
-                    <a:bodyPr wrap="square"/>
-                    <a:lstStyle/>
-                    <a:p>
-                      <a:pPr algn="ctr">
-                        <a:defRPr sz="530" b="1">
-                          <a:solidFill>
-                            <a:srgbClr val="1E242B"/>
-                          </a:solidFill>
-                          <a:latin typeface="Meiryo UI"/>
-                        </a:defRPr>
-                      </a:pPr>
-                      <a:r>
-                        <a:t>No.22</a:t>
-                      </a:r>
-                      <a:br/>
-                      <a:r>
-                        <a:t>グループ5</a:t>
+              <a:tr h="486294">
+                <a:tc>
+                  <a:txBody>
+                    <a:bodyPr wrap="square"/>
+                    <a:lstStyle/>
+                    <a:p>
+                      <a:pPr algn="ctr">
+                        <a:defRPr sz="650" b="1">
+                          <a:solidFill>
+                            <a:srgbClr val="1E242B"/>
+                          </a:solidFill>
+                          <a:latin typeface="Meiryo UI"/>
+                        </a:defRPr>
+                      </a:pPr>
+                      <a:r>
+                        <a:t>No.35</a:t>
+                      </a:r>
+                      <a:br/>
+                      <a:r>
+                        <a:t>(A-4 / A-8)</a:t>
                       </a:r>
                     </a:p>
                   </a:txBody>
@@ -4908,15 +5359,15 @@
                     <a:lstStyle/>
                     <a:p>
                       <a:pPr algn="l">
-                        <a:defRPr sz="530">
-                          <a:solidFill>
-                            <a:srgbClr val="1E242B"/>
-                          </a:solidFill>
-                          <a:latin typeface="Meiryo UI"/>
-                        </a:defRPr>
-                      </a:pPr>
-                      <a:r>
-                        <a:t>制御盤内電装部品（No.2, 4～16）：ブレーカ CP30-BA（0.65M）、電磁接触器3個（1.5M）、電源S8VK（0.7M）、端子台・リレー・スイッチ・ランプ（4.14M）</a:t>
+                        <a:defRPr sz="650">
+                          <a:solidFill>
+                            <a:srgbClr val="1E242B"/>
+                          </a:solidFill>
+                          <a:latin typeface="Meiryo UI"/>
+                        </a:defRPr>
+                      </a:pPr>
+                      <a:r>
+                        <a:t>A8：U410 Halftoneキャリブレーション一括自動化</a:t>
                       </a:r>
                     </a:p>
                   </a:txBody>
@@ -4931,16 +5382,16 @@
                     <a:bodyPr wrap="square"/>
                     <a:lstStyle/>
                     <a:p>
-                      <a:pPr algn="r">
-                        <a:defRPr sz="530">
-                          <a:solidFill>
-                            <a:srgbClr val="1E242B"/>
-                          </a:solidFill>
-                          <a:latin typeface="Meiryo UI"/>
-                        </a:defRPr>
-                      </a:pPr>
-                      <a:r>
-                        <a:t>6,990,000 VND</a:t>
+                      <a:pPr algn="l">
+                        <a:defRPr sz="650">
+                          <a:solidFill>
+                            <a:srgbClr val="1E242B"/>
+                          </a:solidFill>
+                          <a:latin typeface="Meiryo UI"/>
+                        </a:defRPr>
+                      </a:pPr>
+                      <a:r>
+                        <a:t>K5におけるHalftone U410調整（110s）時、キャリブレーションとHalftone測定を別々に画面タップしている。</a:t>
                       </a:r>
                     </a:p>
                   </a:txBody>
@@ -4955,16 +5406,16 @@
                     <a:bodyPr wrap="square"/>
                     <a:lstStyle/>
                     <a:p>
-                      <a:pPr algn="r">
-                        <a:defRPr sz="530">
-                          <a:solidFill>
-                            <a:srgbClr val="1E242B"/>
-                          </a:solidFill>
-                          <a:latin typeface="Meiryo UI"/>
-                        </a:defRPr>
-                      </a:pPr>
-                      <a:r>
-                        <a:t>268.85 USD</a:t>
+                      <a:pPr algn="l">
+                        <a:defRPr sz="650">
+                          <a:solidFill>
+                            <a:srgbClr val="1E242B"/>
+                          </a:solidFill>
+                          <a:latin typeface="Meiryo UI"/>
+                        </a:defRPr>
+                      </a:pPr>
+                      <a:r>
+                        <a:t>Halftone調整実行時にキャリブレーションシーケンスを1つの自動コマンドへ統合し、手動操作と待ち時間を解消。</a:t>
                       </a:r>
                     </a:p>
                   </a:txBody>
@@ -4980,15 +5431,19 @@
                     <a:lstStyle/>
                     <a:p>
                       <a:pPr algn="l">
-                        <a:defRPr sz="530">
-                          <a:solidFill>
-                            <a:srgbClr val="1E242B"/>
-                          </a:solidFill>
-                          <a:latin typeface="Meiryo UI"/>
-                        </a:defRPr>
-                      </a:pPr>
-                      <a:r>
-                        <a:t>No.22全体の 6.9%</a:t>
+                        <a:defRPr sz="650">
+                          <a:solidFill>
+                            <a:srgbClr val="1E242B"/>
+                          </a:solidFill>
+                          <a:latin typeface="Meiryo UI"/>
+                        </a:defRPr>
+                      </a:pPr>
+                      <a:r>
+                        <a:t>• U410 110秒工数を短縮</a:t>
+                      </a:r>
+                      <a:br/>
+                      <a:r>
+                        <a:t>（現場設備費 0 円）</a:t>
                       </a:r>
                     </a:p>
                   </a:txBody>
@@ -4998,291 +5453,371 @@
                     </a:solidFill>
                   </a:tcPr>
                 </a:tc>
+                <a:tc>
+                  <a:txBody>
+                    <a:bodyPr wrap="square"/>
+                    <a:lstStyle/>
+                    <a:p>
+                      <a:pPr algn="l">
+                        <a:defRPr sz="650">
+                          <a:solidFill>
+                            <a:srgbClr val="1E242B"/>
+                          </a:solidFill>
+                          <a:latin typeface="Meiryo UI"/>
+                        </a:defRPr>
+                      </a:pPr>
+                      <a:r>
+                        <a:t>日本ソフト設計</a:t>
+                      </a:r>
+                      <a:br/>
+                      <a:r>
+                        <a:t>（確認中）</a:t>
+                      </a:r>
+                    </a:p>
+                  </a:txBody>
+                  <a:tcPr anchor="ctr" marL="36576" marR="36576" marT="9144" marB="9144">
+                    <a:solidFill>
+                      <a:srgbClr val="FFFFFF"/>
+                    </a:solidFill>
+                  </a:tcPr>
+                </a:tc>
               </a:tr>
-              <a:tr h="241069">
-                <a:tc>
-                  <a:txBody>
-                    <a:bodyPr wrap="square"/>
-                    <a:lstStyle/>
-                    <a:p>
-                      <a:pPr algn="ctr">
-                        <a:defRPr sz="530" b="1">
-                          <a:solidFill>
-                            <a:srgbClr val="1E242B"/>
-                          </a:solidFill>
-                          <a:latin typeface="Meiryo UI"/>
-                        </a:defRPr>
-                      </a:pPr>
-                      <a:r>
-                        <a:t>No.22</a:t>
-                      </a:r>
-                      <a:br/>
-                      <a:r>
-                        <a:t>グループ6</a:t>
-                      </a:r>
-                    </a:p>
-                  </a:txBody>
-                  <a:tcPr anchor="ctr" marL="36576" marR="36576" marT="9144" marB="9144">
-                    <a:solidFill>
-                      <a:srgbClr val="F7F9FC"/>
-                    </a:solidFill>
-                  </a:tcPr>
-                </a:tc>
-                <a:tc>
-                  <a:txBody>
-                    <a:bodyPr wrap="square"/>
-                    <a:lstStyle/>
-                    <a:p>
-                      <a:pPr algn="l">
-                        <a:defRPr sz="530">
-                          <a:solidFill>
-                            <a:srgbClr val="1E242B"/>
-                          </a:solidFill>
-                          <a:latin typeface="Meiryo UI"/>
-                        </a:defRPr>
-                      </a:pPr>
-                      <a:r>
-                        <a:t>制御盤ボックス（No.17：電装ボックス1台 5,000,000 VND；参考欄に「見積依頼中」と注記）</a:t>
-                      </a:r>
-                    </a:p>
-                  </a:txBody>
-                  <a:tcPr anchor="ctr" marL="36576" marR="36576" marT="9144" marB="9144">
-                    <a:solidFill>
-                      <a:srgbClr val="F7F9FC"/>
-                    </a:solidFill>
-                  </a:tcPr>
-                </a:tc>
-                <a:tc>
-                  <a:txBody>
-                    <a:bodyPr wrap="square"/>
-                    <a:lstStyle/>
-                    <a:p>
-                      <a:pPr algn="r">
-                        <a:defRPr sz="530">
-                          <a:solidFill>
-                            <a:srgbClr val="1E242B"/>
-                          </a:solidFill>
-                          <a:latin typeface="Meiryo UI"/>
-                        </a:defRPr>
-                      </a:pPr>
-                      <a:r>
-                        <a:t>5,000,000 VND</a:t>
-                      </a:r>
-                    </a:p>
-                  </a:txBody>
-                  <a:tcPr anchor="ctr" marL="36576" marR="36576" marT="9144" marB="9144">
-                    <a:solidFill>
-                      <a:srgbClr val="F7F9FC"/>
-                    </a:solidFill>
-                  </a:tcPr>
-                </a:tc>
-                <a:tc>
-                  <a:txBody>
-                    <a:bodyPr wrap="square"/>
-                    <a:lstStyle/>
-                    <a:p>
-                      <a:pPr algn="r">
-                        <a:defRPr sz="530">
-                          <a:solidFill>
-                            <a:srgbClr val="1E242B"/>
-                          </a:solidFill>
-                          <a:latin typeface="Meiryo UI"/>
-                        </a:defRPr>
-                      </a:pPr>
-                      <a:r>
-                        <a:t>192.31 USD</a:t>
-                      </a:r>
-                    </a:p>
-                  </a:txBody>
-                  <a:tcPr anchor="ctr" marL="36576" marR="36576" marT="9144" marB="9144">
-                    <a:solidFill>
-                      <a:srgbClr val="F7F9FC"/>
-                    </a:solidFill>
-                  </a:tcPr>
-                </a:tc>
-                <a:tc>
-                  <a:txBody>
-                    <a:bodyPr wrap="square"/>
-                    <a:lstStyle/>
-                    <a:p>
-                      <a:pPr algn="l">
-                        <a:defRPr sz="530">
-                          <a:solidFill>
-                            <a:srgbClr val="1E242B"/>
-                          </a:solidFill>
-                          <a:latin typeface="Meiryo UI"/>
-                        </a:defRPr>
-                      </a:pPr>
-                      <a:r>
-                        <a:t>No.22全体の 4.9%</a:t>
-                      </a:r>
-                    </a:p>
-                  </a:txBody>
-                  <a:tcPr anchor="ctr" marL="36576" marR="36576" marT="9144" marB="9144">
-                    <a:solidFill>
-                      <a:srgbClr val="F7F9FC"/>
+              <a:tr h="486294">
+                <a:tc>
+                  <a:txBody>
+                    <a:bodyPr wrap="square"/>
+                    <a:lstStyle/>
+                    <a:p>
+                      <a:pPr algn="ctr">
+                        <a:defRPr sz="650" b="1">
+                          <a:solidFill>
+                            <a:srgbClr val="1E242B"/>
+                          </a:solidFill>
+                          <a:latin typeface="Meiryo UI"/>
+                        </a:defRPr>
+                      </a:pPr>
+                      <a:r>
+                        <a:t>No.36</a:t>
+                      </a:r>
+                      <a:br/>
+                      <a:r>
+                        <a:t>(A-4 / A-8)</a:t>
+                      </a:r>
+                    </a:p>
+                  </a:txBody>
+                  <a:tcPr anchor="ctr" marL="36576" marR="36576" marT="9144" marB="9144">
+                    <a:solidFill>
+                      <a:srgbClr val="EAF7EE"/>
+                    </a:solidFill>
+                  </a:tcPr>
+                </a:tc>
+                <a:tc>
+                  <a:txBody>
+                    <a:bodyPr wrap="square"/>
+                    <a:lstStyle/>
+                    <a:p>
+                      <a:pPr algn="l">
+                        <a:defRPr sz="650">
+                          <a:solidFill>
+                            <a:srgbClr val="1E242B"/>
+                          </a:solidFill>
+                          <a:latin typeface="Meiryo UI"/>
+                        </a:defRPr>
+                      </a:pPr>
+                      <a:r>
+                        <a:t>A8：Halftone MonoをCheck Blackへ統合 -&gt; Mono廃止</a:t>
+                      </a:r>
+                    </a:p>
+                  </a:txBody>
+                  <a:tcPr anchor="ctr" marL="36576" marR="36576" marT="9144" marB="9144">
+                    <a:solidFill>
+                      <a:srgbClr val="EAF7EE"/>
+                    </a:solidFill>
+                  </a:tcPr>
+                </a:tc>
+                <a:tc>
+                  <a:txBody>
+                    <a:bodyPr wrap="square"/>
+                    <a:lstStyle/>
+                    <a:p>
+                      <a:pPr algn="l">
+                        <a:defRPr sz="650">
+                          <a:solidFill>
+                            <a:srgbClr val="1E242B"/>
+                          </a:solidFill>
+                          <a:latin typeface="Meiryo UI"/>
+                        </a:defRPr>
+                      </a:pPr>
+                      <a:r>
+                        <a:t>白黒グラデーション確認のためHalftone Monoを別印刷。右カバー開閉確認のため手動でドアを開閉（-8.88s）。</a:t>
+                      </a:r>
+                    </a:p>
+                  </a:txBody>
+                  <a:tcPr anchor="ctr" marL="36576" marR="36576" marT="9144" marB="9144">
+                    <a:solidFill>
+                      <a:srgbClr val="EAF7EE"/>
+                    </a:solidFill>
+                  </a:tcPr>
+                </a:tc>
+                <a:tc>
+                  <a:txBody>
+                    <a:bodyPr wrap="square"/>
+                    <a:lstStyle/>
+                    <a:p>
+                      <a:pPr algn="l">
+                        <a:defRPr sz="650">
+                          <a:solidFill>
+                            <a:srgbClr val="1E242B"/>
+                          </a:solidFill>
+                          <a:latin typeface="Meiryo UI"/>
+                        </a:defRPr>
+                      </a:pPr>
+                      <a:r>
+                        <a:t>Halftone Mono検査項目をCheck Blackテストチャートへ統合し、Halftone Mono印刷を廃止。ドアスイッチはソフト自動検知へ統合。</a:t>
+                      </a:r>
+                    </a:p>
+                  </a:txBody>
+                  <a:tcPr anchor="ctr" marL="36576" marR="36576" marT="9144" marB="9144">
+                    <a:solidFill>
+                      <a:srgbClr val="EAF7EE"/>
+                    </a:solidFill>
+                  </a:tcPr>
+                </a:tc>
+                <a:tc>
+                  <a:txBody>
+                    <a:bodyPr wrap="square"/>
+                    <a:lstStyle/>
+                    <a:p>
+                      <a:pPr algn="l">
+                        <a:defRPr sz="650">
+                          <a:solidFill>
+                            <a:srgbClr val="1E242B"/>
+                          </a:solidFill>
+                          <a:latin typeface="Meiryo UI"/>
+                        </a:defRPr>
+                      </a:pPr>
+                      <a:r>
+                        <a:t>• 印刷1枚削減（Mono廃止）</a:t>
+                      </a:r>
+                      <a:br/>
+                      <a:r>
+                        <a:t>• ドアスイッチ手押し 8.88s減</a:t>
+                      </a:r>
+                    </a:p>
+                  </a:txBody>
+                  <a:tcPr anchor="ctr" marL="36576" marR="36576" marT="9144" marB="9144">
+                    <a:solidFill>
+                      <a:srgbClr val="EAF7EE"/>
+                    </a:solidFill>
+                  </a:tcPr>
+                </a:tc>
+                <a:tc>
+                  <a:txBody>
+                    <a:bodyPr wrap="square"/>
+                    <a:lstStyle/>
+                    <a:p>
+                      <a:pPr algn="l">
+                        <a:defRPr sz="650">
+                          <a:solidFill>
+                            <a:srgbClr val="1E242B"/>
+                          </a:solidFill>
+                          <a:latin typeface="Meiryo UI"/>
+                        </a:defRPr>
+                      </a:pPr>
+                      <a:r>
+                        <a:t>設計 / 品保（日本）</a:t>
+                      </a:r>
+                      <a:br/>
+                      <a:r>
+                        <a:t>（スイッチ検知は先行）</a:t>
+                      </a:r>
+                    </a:p>
+                  </a:txBody>
+                  <a:tcPr anchor="ctr" marL="36576" marR="36576" marT="9144" marB="9144">
+                    <a:solidFill>
+                      <a:srgbClr val="EAF7EE"/>
                     </a:solidFill>
                   </a:tcPr>
                 </a:tc>
               </a:tr>
-              <a:tr h="241069">
-                <a:tc>
-                  <a:txBody>
-                    <a:bodyPr wrap="square"/>
-                    <a:lstStyle/>
-                    <a:p>
-                      <a:pPr algn="ctr">
-                        <a:defRPr sz="530" b="1">
-                          <a:solidFill>
-                            <a:srgbClr val="1E242B"/>
-                          </a:solidFill>
-                          <a:latin typeface="Meiryo UI"/>
-                        </a:defRPr>
-                      </a:pPr>
-                      <a:r>
-                        <a:t>No.22</a:t>
-                      </a:r>
-                      <a:br/>
-                      <a:r>
-                        <a:t>合計</a:t>
-                      </a:r>
-                    </a:p>
-                  </a:txBody>
-                  <a:tcPr anchor="ctr" marL="36576" marR="36576" marT="9144" marB="9144">
-                    <a:solidFill>
-                      <a:srgbClr val="EAF7EE"/>
-                    </a:solidFill>
-                  </a:tcPr>
-                </a:tc>
-                <a:tc>
-                  <a:txBody>
-                    <a:bodyPr wrap="square"/>
-                    <a:lstStyle/>
-                    <a:p>
-                      <a:pPr algn="l">
-                        <a:defRPr sz="530" b="1">
-                          <a:solidFill>
-                            <a:srgbClr val="1E242B"/>
-                          </a:solidFill>
-                          <a:latin typeface="Meiryo UI"/>
-                        </a:defRPr>
-                      </a:pPr>
-                      <a:r>
-                        <a:t>案件 1（No.22 アース導通・耐電圧自動検査治具）合計 【案 A：先行申請】</a:t>
-                      </a:r>
-                      <a:br/>
-                      <a:r>
-                        <a:t>（内訳明細：101,700,000 VND / 3,911.54 USD ｜ サマリー表丸め値：4,000 USD）</a:t>
-                      </a:r>
-                    </a:p>
-                  </a:txBody>
-                  <a:tcPr anchor="ctr" marL="36576" marR="36576" marT="9144" marB="9144">
-                    <a:solidFill>
-                      <a:srgbClr val="EAF7EE"/>
-                    </a:solidFill>
-                  </a:tcPr>
-                </a:tc>
-                <a:tc>
-                  <a:txBody>
-                    <a:bodyPr wrap="square"/>
-                    <a:lstStyle/>
-                    <a:p>
-                      <a:pPr algn="r">
-                        <a:defRPr sz="530" b="1">
-                          <a:solidFill>
-                            <a:srgbClr val="1E6E3E"/>
-                          </a:solidFill>
-                          <a:latin typeface="Meiryo UI"/>
-                        </a:defRPr>
-                      </a:pPr>
-                      <a:r>
-                        <a:t>101,690,000 VND</a:t>
-                      </a:r>
-                    </a:p>
-                  </a:txBody>
-                  <a:tcPr anchor="ctr" marL="36576" marR="36576" marT="9144" marB="9144">
-                    <a:solidFill>
-                      <a:srgbClr val="EAF7EE"/>
-                    </a:solidFill>
-                  </a:tcPr>
-                </a:tc>
-                <a:tc>
-                  <a:txBody>
-                    <a:bodyPr wrap="square"/>
-                    <a:lstStyle/>
-                    <a:p>
-                      <a:pPr algn="r">
-                        <a:defRPr sz="530">
-                          <a:solidFill>
-                            <a:srgbClr val="1E242B"/>
-                          </a:solidFill>
-                          <a:latin typeface="Meiryo UI"/>
-                        </a:defRPr>
-                      </a:pPr>
-                      <a:r>
-                        <a:t>3,911.15 USD</a:t>
-                      </a:r>
-                      <a:br/>
-                      <a:r>
-                        <a:t>（丸め値: 4,000$）</a:t>
-                      </a:r>
-                    </a:p>
-                  </a:txBody>
-                  <a:tcPr anchor="ctr" marL="36576" marR="36576" marT="9144" marB="9144">
-                    <a:solidFill>
-                      <a:srgbClr val="EAF7EE"/>
-                    </a:solidFill>
-                  </a:tcPr>
-                </a:tc>
-                <a:tc>
-                  <a:txBody>
-                    <a:bodyPr wrap="square"/>
-                    <a:lstStyle/>
-                    <a:p>
-                      <a:pPr algn="l">
-                        <a:defRPr sz="530">
-                          <a:solidFill>
-                            <a:srgbClr val="1E242B"/>
-                          </a:solidFill>
-                          <a:latin typeface="Meiryo UI"/>
-                        </a:defRPr>
-                      </a:pPr>
-                      <a:r>
-                        <a:t>-30秒/台 短縮</a:t>
-                      </a:r>
-                      <a:br/>
-                      <a:r>
-                        <a:t>年間 29.6M VND削減</a:t>
-                      </a:r>
-                    </a:p>
-                  </a:txBody>
-                  <a:tcPr anchor="ctr" marL="36576" marR="36576" marT="9144" marB="9144">
-                    <a:solidFill>
-                      <a:srgbClr val="EAF7EE"/>
+              <a:tr h="486294">
+                <a:tc>
+                  <a:txBody>
+                    <a:bodyPr wrap="square"/>
+                    <a:lstStyle/>
+                    <a:p>
+                      <a:pPr algn="ctr">
+                        <a:defRPr sz="650" b="1">
+                          <a:solidFill>
+                            <a:srgbClr val="1E242B"/>
+                          </a:solidFill>
+                          <a:latin typeface="Meiryo UI"/>
+                        </a:defRPr>
+                      </a:pPr>
+                      <a:r>
+                        <a:t>No.37</a:t>
+                      </a:r>
+                      <a:br/>
+                      <a:r>
+                        <a:t>(A-4 / A-11)</a:t>
+                      </a:r>
+                    </a:p>
+                  </a:txBody>
+                  <a:tcPr anchor="ctr" marL="36576" marR="36576" marT="9144" marB="9144">
+                    <a:solidFill>
+                      <a:srgbClr val="FFFFFF"/>
+                    </a:solidFill>
+                  </a:tcPr>
+                </a:tc>
+                <a:tc>
+                  <a:txBody>
+                    <a:bodyPr wrap="square"/>
+                    <a:lstStyle/>
+                    <a:p>
+                      <a:pPr algn="l">
+                        <a:defRPr sz="650">
+                          <a:solidFill>
+                            <a:srgbClr val="1E242B"/>
+                          </a:solidFill>
+                          <a:latin typeface="Meiryo UI"/>
+                        </a:defRPr>
+                      </a:pPr>
+                      <a:r>
+                        <a:t>A11：RCGコピー確認の統合検討および転写ベルト蛇行測定の廃止</a:t>
+                      </a:r>
+                    </a:p>
+                  </a:txBody>
+                  <a:tcPr anchor="ctr" marL="36576" marR="36576" marT="9144" marB="9144">
+                    <a:solidFill>
+                      <a:srgbClr val="FFFFFF"/>
+                    </a:solidFill>
+                  </a:tcPr>
+                </a:tc>
+                <a:tc>
+                  <a:txBody>
+                    <a:bodyPr wrap="square"/>
+                    <a:lstStyle/>
+                    <a:p>
+                      <a:pPr algn="l">
+                        <a:defRPr sz="650">
+                          <a:solidFill>
+                            <a:srgbClr val="1E242B"/>
+                          </a:solidFill>
+                          <a:latin typeface="Meiryo UI"/>
+                        </a:defRPr>
+                      </a:pPr>
+                      <a:r>
+                        <a:t>K8にてRCGコピー確認を実施（60s）。K4にて転写ベルト蛇行を手動測定（5s～15.36s、ベトナムにて月1～2台のNG発生実績あり）。</a:t>
+                      </a:r>
+                    </a:p>
+                  </a:txBody>
+                  <a:tcPr anchor="ctr" marL="36576" marR="36576" marT="9144" marB="9144">
+                    <a:solidFill>
+                      <a:srgbClr val="FFFFFF"/>
+                    </a:solidFill>
+                  </a:tcPr>
+                </a:tc>
+                <a:tc>
+                  <a:txBody>
+                    <a:bodyPr wrap="square"/>
+                    <a:lstStyle/>
+                    <a:p>
+                      <a:pPr algn="l">
+                        <a:defRPr sz="650">
+                          <a:solidFill>
+                            <a:srgbClr val="1E242B"/>
+                          </a:solidFill>
+                          <a:latin typeface="Meiryo UI"/>
+                        </a:defRPr>
+                      </a:pPr>
+                      <a:r>
+                        <a:t>RCGコピー確認を前工程へ統合。転写ベルトは35°面取りプーリ＋新ベルト材質の量産適用によりCpk ≥ 1.33達成後に測定廃止。</a:t>
+                      </a:r>
+                    </a:p>
+                  </a:txBody>
+                  <a:tcPr anchor="ctr" marL="36576" marR="36576" marT="9144" marB="9144">
+                    <a:solidFill>
+                      <a:srgbClr val="FFFFFF"/>
+                    </a:solidFill>
+                  </a:tcPr>
+                </a:tc>
+                <a:tc>
+                  <a:txBody>
+                    <a:bodyPr wrap="square"/>
+                    <a:lstStyle/>
+                    <a:p>
+                      <a:pPr algn="l">
+                        <a:defRPr sz="650">
+                          <a:solidFill>
+                            <a:srgbClr val="1E242B"/>
+                          </a:solidFill>
+                          <a:latin typeface="Meiryo UI"/>
+                        </a:defRPr>
+                      </a:pPr>
+                      <a:r>
+                        <a:t>• コピー確認60s ＆ ベルト15s減</a:t>
+                      </a:r>
+                      <a:br/>
+                      <a:r>
+                        <a:t>（現場設備費 0 円）</a:t>
+                      </a:r>
+                    </a:p>
+                  </a:txBody>
+                  <a:tcPr anchor="ctr" marL="36576" marR="36576" marT="9144" marB="9144">
+                    <a:solidFill>
+                      <a:srgbClr val="FFFFFF"/>
+                    </a:solidFill>
+                  </a:tcPr>
+                </a:tc>
+                <a:tc>
+                  <a:txBody>
+                    <a:bodyPr wrap="square"/>
+                    <a:lstStyle/>
+                    <a:p>
+                      <a:pPr algn="l">
+                        <a:defRPr sz="650">
+                          <a:solidFill>
+                            <a:srgbClr val="1E242B"/>
+                          </a:solidFill>
+                          <a:latin typeface="Meiryo UI"/>
+                        </a:defRPr>
+                      </a:pPr>
+                      <a:r>
+                        <a:t>品保 ＆ 日本設計</a:t>
+                      </a:r>
+                      <a:br/>
+                      <a:r>
+                        <a:t>（新プーリ検証待ち）</a:t>
+                      </a:r>
+                    </a:p>
+                  </a:txBody>
+                  <a:tcPr anchor="ctr" marL="36576" marR="36576" marT="9144" marB="9144">
+                    <a:solidFill>
+                      <a:srgbClr val="FFFFFF"/>
                     </a:solidFill>
                   </a:tcPr>
                 </a:tc>
               </a:tr>
-              <a:tr h="241069">
-                <a:tc>
-                  <a:txBody>
-                    <a:bodyPr wrap="square"/>
-                    <a:lstStyle/>
-                    <a:p>
-                      <a:pPr algn="ctr">
-                        <a:defRPr sz="530" b="1">
-                          <a:solidFill>
-                            <a:srgbClr val="1E242B"/>
-                          </a:solidFill>
-                          <a:latin typeface="Meiryo UI"/>
-                        </a:defRPr>
-                      </a:pPr>
-                      <a:r>
-                        <a:t>No.23</a:t>
-                      </a:r>
-                      <a:br/>
-                      <a:r>
-                        <a:t>（案件2）</a:t>
+              <a:tr h="486300">
+                <a:tc>
+                  <a:txBody>
+                    <a:bodyPr wrap="square"/>
+                    <a:lstStyle/>
+                    <a:p>
+                      <a:pPr algn="ctr">
+                        <a:defRPr sz="650" b="1">
+                          <a:solidFill>
+                            <a:srgbClr val="1E242B"/>
+                          </a:solidFill>
+                          <a:latin typeface="Meiryo UI"/>
+                        </a:defRPr>
+                      </a:pPr>
+                      <a:r>
+                        <a:t>2026年10月度</a:t>
+                      </a:r>
+                      <a:br/>
+                      <a:r>
+                        <a:t>実績（確定）</a:t>
                       </a:r>
                     </a:p>
                   </a:txBody>
@@ -5298,19 +5833,15 @@
                     <a:lstStyle/>
                     <a:p>
                       <a:pPr algn="l">
-                        <a:defRPr sz="530">
-                          <a:solidFill>
-                            <a:srgbClr val="1E242B"/>
-                          </a:solidFill>
-                          <a:latin typeface="Meiryo UI"/>
-                        </a:defRPr>
-                      </a:pPr>
-                      <a:r>
-                        <a:t>案件 2（No.23 原稿自動セットロボット：U411＋SITC-2＋Halftone）：</a:t>
-                      </a:r>
-                      <a:br/>
-                      <a:r>
-                        <a:t>コンベア2セル（200M/$7,692）＋電源（50M/$1,923）＋配線（50M/$1,923）＋ロボット（350M/$13,462）</a:t>
+                        <a:defRPr sz="650">
+                          <a:solidFill>
+                            <a:srgbClr val="1E242B"/>
+                          </a:solidFill>
+                          <a:latin typeface="Meiryo UI"/>
+                        </a:defRPr>
+                      </a:pPr>
+                      <a:r>
+                        <a:t>【2026年10月度 完了実績】 英語切替2ステップおよびトナー警告確認2ステップの作業票からの削除</a:t>
                       </a:r>
                     </a:p>
                   </a:txBody>
@@ -5325,16 +5856,16 @@
                     <a:bodyPr wrap="square"/>
                     <a:lstStyle/>
                     <a:p>
-                      <a:pPr algn="r">
-                        <a:defRPr sz="530">
-                          <a:solidFill>
-                            <a:srgbClr val="1E242B"/>
-                          </a:solidFill>
-                          <a:latin typeface="Meiryo UI"/>
-                        </a:defRPr>
-                      </a:pPr>
-                      <a:r>
-                        <a:t>650,000,000 VND</a:t>
+                      <a:pPr algn="l">
+                        <a:defRPr sz="650">
+                          <a:solidFill>
+                            <a:srgbClr val="1E242B"/>
+                          </a:solidFill>
+                          <a:latin typeface="Meiryo UI"/>
+                        </a:defRPr>
+                      </a:pPr>
+                      <a:r>
+                        <a:t>作業者が言語選択でEnglishをタップ（0.72s×2＝1.44s）、トナー警告表示の出現と消去を目視確認（1.44s×2＝2.88s）。</a:t>
                       </a:r>
                     </a:p>
                   </a:txBody>
@@ -5349,16 +5880,16 @@
                     <a:bodyPr wrap="square"/>
                     <a:lstStyle/>
                     <a:p>
-                      <a:pPr algn="r">
-                        <a:defRPr sz="530">
-                          <a:solidFill>
-                            <a:srgbClr val="1E242B"/>
-                          </a:solidFill>
-                          <a:latin typeface="Meiryo UI"/>
-                        </a:defRPr>
-                      </a:pPr>
-                      <a:r>
-                        <a:t>25,000.00 USD</a:t>
+                      <a:pPr algn="l">
+                        <a:defRPr sz="650">
+                          <a:solidFill>
+                            <a:srgbClr val="1E242B"/>
+                          </a:solidFill>
+                          <a:latin typeface="Meiryo UI"/>
+                        </a:defRPr>
+                      </a:pPr>
+                      <a:r>
+                        <a:t>手作業不要であることを実機検証・確認完了し、2026年10月度作業票（作業確実シート）から上記4ステップを正式に削除。</a:t>
                       </a:r>
                     </a:p>
                   </a:txBody>
@@ -5374,19 +5905,19 @@
                     <a:lstStyle/>
                     <a:p>
                       <a:pPr algn="l">
-                        <a:defRPr sz="530">
-                          <a:solidFill>
-                            <a:srgbClr val="1E242B"/>
-                          </a:solidFill>
-                          <a:latin typeface="Meiryo UI"/>
-                        </a:defRPr>
-                      </a:pPr>
-                      <a:r>
-                        <a:t>-110秒/台 短縮</a:t>
-                      </a:r>
-                      <a:br/>
-                      <a:r>
-                        <a:t>年間 108.5M VND削減</a:t>
+                        <a:defRPr sz="650">
+                          <a:solidFill>
+                            <a:srgbClr val="1E242B"/>
+                          </a:solidFill>
+                          <a:latin typeface="Meiryo UI"/>
+                        </a:defRPr>
+                      </a:pPr>
+                      <a:r>
+                        <a:t>• 実作業削減実績：</a:t>
+                      </a:r>
+                      <a:br/>
+                      <a:r>
+                        <a:t>  4.32 秒 / 台 削減</a:t>
                       </a:r>
                     </a:p>
                   </a:txBody>
@@ -5396,271 +5927,31 @@
                     </a:solidFill>
                   </a:tcPr>
                 </a:tc>
-              </a:tr>
-              <a:tr h="241069">
-                <a:tc>
-                  <a:txBody>
-                    <a:bodyPr wrap="square"/>
-                    <a:lstStyle/>
-                    <a:p>
-                      <a:pPr algn="ctr">
-                        <a:defRPr sz="530" b="1">
-                          <a:solidFill>
-                            <a:srgbClr val="1E242B"/>
-                          </a:solidFill>
-                          <a:latin typeface="Meiryo UI"/>
-                        </a:defRPr>
-                      </a:pPr>
-                      <a:r>
-                        <a:t>No.24</a:t>
-                      </a:r>
-                      <a:br/>
-                      <a:r>
-                        <a:t>（案件3）</a:t>
+                <a:tc>
+                  <a:txBody>
+                    <a:bodyPr wrap="square"/>
+                    <a:lstStyle/>
+                    <a:p>
+                      <a:pPr algn="l">
+                        <a:defRPr sz="650">
+                          <a:solidFill>
+                            <a:srgbClr val="1E242B"/>
+                          </a:solidFill>
+                          <a:latin typeface="Meiryo UI"/>
+                        </a:defRPr>
+                      </a:pPr>
+                      <a:r>
+                        <a:t>KDTVN-PE-3</a:t>
+                      </a:r>
+                      <a:br/>
+                      <a:r>
+                        <a:t>（2026年10月度完了）</a:t>
                       </a:r>
                     </a:p>
                   </a:txBody>
                   <a:tcPr anchor="ctr" marL="36576" marR="36576" marT="9144" marB="9144">
                     <a:solidFill>
                       <a:srgbClr val="E8EEF5"/>
-                    </a:solidFill>
-                  </a:tcPr>
-                </a:tc>
-                <a:tc>
-                  <a:txBody>
-                    <a:bodyPr wrap="square"/>
-                    <a:lstStyle/>
-                    <a:p>
-                      <a:pPr algn="l">
-                        <a:defRPr sz="530">
-                          <a:solidFill>
-                            <a:srgbClr val="1E242B"/>
-                          </a:solidFill>
-                          <a:latin typeface="Meiryo UI"/>
-                        </a:defRPr>
-                      </a:pPr>
-                      <a:r>
-                        <a:t>案件 3（No.24 USB自動接続、パネル判定カメラおよびAIタッチロボット）</a:t>
-                      </a:r>
-                    </a:p>
-                  </a:txBody>
-                  <a:tcPr anchor="ctr" marL="36576" marR="36576" marT="9144" marB="9144">
-                    <a:solidFill>
-                      <a:srgbClr val="E8EEF5"/>
-                    </a:solidFill>
-                  </a:tcPr>
-                </a:tc>
-                <a:tc>
-                  <a:txBody>
-                    <a:bodyPr wrap="square"/>
-                    <a:lstStyle/>
-                    <a:p>
-                      <a:pPr algn="r">
-                        <a:defRPr sz="530">
-                          <a:solidFill>
-                            <a:srgbClr val="1E242B"/>
-                          </a:solidFill>
-                          <a:latin typeface="Meiryo UI"/>
-                        </a:defRPr>
-                      </a:pPr>
-                      <a:r>
-                        <a:t>104,000,000 VND</a:t>
-                      </a:r>
-                    </a:p>
-                  </a:txBody>
-                  <a:tcPr anchor="ctr" marL="36576" marR="36576" marT="9144" marB="9144">
-                    <a:solidFill>
-                      <a:srgbClr val="E8EEF5"/>
-                    </a:solidFill>
-                  </a:tcPr>
-                </a:tc>
-                <a:tc>
-                  <a:txBody>
-                    <a:bodyPr wrap="square"/>
-                    <a:lstStyle/>
-                    <a:p>
-                      <a:pPr algn="r">
-                        <a:defRPr sz="530">
-                          <a:solidFill>
-                            <a:srgbClr val="1E242B"/>
-                          </a:solidFill>
-                          <a:latin typeface="Meiryo UI"/>
-                        </a:defRPr>
-                      </a:pPr>
-                      <a:r>
-                        <a:t>4,000.00 USD</a:t>
-                      </a:r>
-                    </a:p>
-                  </a:txBody>
-                  <a:tcPr anchor="ctr" marL="36576" marR="36576" marT="9144" marB="9144">
-                    <a:solidFill>
-                      <a:srgbClr val="E8EEF5"/>
-                    </a:solidFill>
-                  </a:tcPr>
-                </a:tc>
-                <a:tc>
-                  <a:txBody>
-                    <a:bodyPr wrap="square"/>
-                    <a:lstStyle/>
-                    <a:p>
-                      <a:pPr algn="l">
-                        <a:defRPr sz="530">
-                          <a:solidFill>
-                            <a:srgbClr val="1E242B"/>
-                          </a:solidFill>
-                          <a:latin typeface="Meiryo UI"/>
-                        </a:defRPr>
-                      </a:pPr>
-                      <a:r>
-                        <a:t>-30秒/台 短縮</a:t>
-                      </a:r>
-                      <a:br/>
-                      <a:r>
-                        <a:t>年間 29.6M VND削減</a:t>
-                      </a:r>
-                    </a:p>
-                  </a:txBody>
-                  <a:tcPr anchor="ctr" marL="36576" marR="36576" marT="9144" marB="9144">
-                    <a:solidFill>
-                      <a:srgbClr val="E8EEF5"/>
-                    </a:solidFill>
-                  </a:tcPr>
-                </a:tc>
-              </a:tr>
-              <a:tr h="241070">
-                <a:tc>
-                  <a:txBody>
-                    <a:bodyPr wrap="square"/>
-                    <a:lstStyle/>
-                    <a:p>
-                      <a:pPr algn="ctr">
-                        <a:defRPr sz="530" b="1">
-                          <a:solidFill>
-                            <a:srgbClr val="1E242B"/>
-                          </a:solidFill>
-                          <a:latin typeface="Meiryo UI"/>
-                        </a:defRPr>
-                      </a:pPr>
-                      <a:r>
-                        <a:t>3案件</a:t>
-                      </a:r>
-                      <a:br/>
-                      <a:r>
-                        <a:t>総計</a:t>
-                      </a:r>
-                    </a:p>
-                  </a:txBody>
-                  <a:tcPr anchor="ctr" marL="36576" marR="36576" marT="9144" marB="9144">
-                    <a:solidFill>
-                      <a:srgbClr val="EAF7EE"/>
-                    </a:solidFill>
-                  </a:tcPr>
-                </a:tc>
-                <a:tc>
-                  <a:txBody>
-                    <a:bodyPr wrap="square"/>
-                    <a:lstStyle/>
-                    <a:p>
-                      <a:pPr algn="l">
-                        <a:defRPr sz="530" b="1">
-                          <a:solidFill>
-                            <a:srgbClr val="1E242B"/>
-                          </a:solidFill>
-                          <a:latin typeface="Meiryo UI"/>
-                        </a:defRPr>
-                      </a:pPr>
-                      <a:r>
-                        <a:t>見積書記載 3案件合計（No.22 ＋ No.23 ＋ No.24） 【案 B：一括申請】</a:t>
-                      </a:r>
-                      <a:br/>
-                      <a:r>
-                        <a:t>（内訳明細計：855,700,000 VND / 32,911.54 USD ｜ サマリー表記載：858,000,000 VND / 33,000 USD）</a:t>
-                      </a:r>
-                    </a:p>
-                  </a:txBody>
-                  <a:tcPr anchor="ctr" marL="36576" marR="36576" marT="9144" marB="9144">
-                    <a:solidFill>
-                      <a:srgbClr val="EAF7EE"/>
-                    </a:solidFill>
-                  </a:tcPr>
-                </a:tc>
-                <a:tc>
-                  <a:txBody>
-                    <a:bodyPr wrap="square"/>
-                    <a:lstStyle/>
-                    <a:p>
-                      <a:pPr algn="r">
-                        <a:defRPr sz="530">
-                          <a:solidFill>
-                            <a:srgbClr val="1E242B"/>
-                          </a:solidFill>
-                          <a:latin typeface="Meiryo UI"/>
-                        </a:defRPr>
-                      </a:pPr>
-                      <a:r>
-                        <a:t>855,690,000 VND</a:t>
-                      </a:r>
-                    </a:p>
-                  </a:txBody>
-                  <a:tcPr anchor="ctr" marL="36576" marR="36576" marT="9144" marB="9144">
-                    <a:solidFill>
-                      <a:srgbClr val="EAF7EE"/>
-                    </a:solidFill>
-                  </a:tcPr>
-                </a:tc>
-                <a:tc>
-                  <a:txBody>
-                    <a:bodyPr wrap="square"/>
-                    <a:lstStyle/>
-                    <a:p>
-                      <a:pPr algn="r">
-                        <a:defRPr sz="530">
-                          <a:solidFill>
-                            <a:srgbClr val="1E242B"/>
-                          </a:solidFill>
-                          <a:latin typeface="Meiryo UI"/>
-                        </a:defRPr>
-                      </a:pPr>
-                      <a:r>
-                        <a:t>32,911.15 USD</a:t>
-                      </a:r>
-                      <a:br/>
-                      <a:r>
-                        <a:t>（丸め値: 33,000$）</a:t>
-                      </a:r>
-                    </a:p>
-                  </a:txBody>
-                  <a:tcPr anchor="ctr" marL="36576" marR="36576" marT="9144" marB="9144">
-                    <a:solidFill>
-                      <a:srgbClr val="EAF7EE"/>
-                    </a:solidFill>
-                  </a:tcPr>
-                </a:tc>
-                <a:tc>
-                  <a:txBody>
-                    <a:bodyPr wrap="square"/>
-                    <a:lstStyle/>
-                    <a:p>
-                      <a:pPr algn="l">
-                        <a:defRPr sz="530">
-                          <a:solidFill>
-                            <a:srgbClr val="1E242B"/>
-                          </a:solidFill>
-                          <a:latin typeface="Meiryo UI"/>
-                        </a:defRPr>
-                      </a:pPr>
-                      <a:r>
-                        <a:t>-170秒/台 短縮</a:t>
-                      </a:r>
-                      <a:br/>
-                      <a:r>
-                        <a:t>年間 167.7M VND削減</a:t>
-                      </a:r>
-                    </a:p>
-                  </a:txBody>
-                  <a:tcPr anchor="ctr" marL="36576" marR="36576" marT="9144" marB="9144">
-                    <a:solidFill>
-                      <a:srgbClr val="EAF7EE"/>
                     </a:solidFill>
                   </a:tcPr>
                 </a:tc>
@@ -5669,736 +5960,6 @@
           </a:graphicData>
         </a:graphic>
       </p:graphicFrame>
-      <p:sp>
-        <p:nvSpPr>
-          <p:cNvPr id="9" name="TextBox 8"/>
-          <p:cNvSpPr txBox="1"/>
-          <p:nvPr/>
-        </p:nvSpPr>
-        <p:spPr>
-          <a:xfrm>
-            <a:off x="256032" y="4069080"/>
-            <a:ext cx="6629400" cy="182880"/>
-          </a:xfrm>
-          <a:prstGeom prst="rect">
-            <a:avLst/>
-          </a:prstGeom>
-          <a:noFill/>
-        </p:spPr>
-        <p:txBody>
-          <a:bodyPr wrap="square" lIns="18288" rIns="18288" tIns="9144" bIns="9144">
-            <a:spAutoFit/>
-          </a:bodyPr>
-          <a:lstStyle/>
-          <a:p>
-            <a:pPr>
-              <a:defRPr sz="780" b="1">
-                <a:solidFill>
-                  <a:srgbClr val="1B365D"/>
-                </a:solidFill>
-                <a:latin typeface="Meiryo UI"/>
-              </a:defRPr>
-            </a:pPr>
-            <a:r>
-              <a:t>■ 2. 部門長への技術相談および意思決定要請事項</a:t>
-            </a:r>
-          </a:p>
-        </p:txBody>
-      </p:sp>
-      <p:graphicFrame>
-        <p:nvGraphicFramePr>
-          <p:cNvPr id="10" name="Table 9"/>
-          <p:cNvGraphicFramePr>
-            <a:graphicFrameLocks noGrp="1"/>
-          </p:cNvGraphicFramePr>
-          <p:nvPr/>
-        </p:nvGraphicFramePr>
-        <p:xfrm>
-          <a:off x="256032" y="4261104"/>
-          <a:ext cx="6629400" cy="2212848"/>
-        </p:xfrm>
-        <a:graphic>
-          <a:graphicData uri="http://schemas.openxmlformats.org/drawingml/2006/table">
-            <a:tbl>
-              <a:tblPr firstRow="1" bandRow="1">
-                <a:tableStyleId>{5C22544A-7EE6-4342-B048-85BDC9FD1C3A}</a:tableStyleId>
-              </a:tblPr>
-              <a:tblGrid>
-                <a:gridCol w="1325880"/>
-                <a:gridCol w="3337560"/>
-                <a:gridCol w="1965960"/>
-              </a:tblGrid>
-              <a:tr h="442569">
-                <a:tc>
-                  <a:txBody>
-                    <a:bodyPr wrap="square"/>
-                    <a:lstStyle/>
-                    <a:p>
-                      <a:pPr algn="ctr">
-                        <a:defRPr sz="650" b="1">
-                          <a:solidFill>
-                            <a:srgbClr val="FFFFFF"/>
-                          </a:solidFill>
-                          <a:latin typeface="Meiryo UI"/>
-                        </a:defRPr>
-                      </a:pPr>
-                      <a:r>
-                        <a:t>相談項目</a:t>
-                      </a:r>
-                    </a:p>
-                  </a:txBody>
-                  <a:tcPr anchor="ctr" marL="36576" marR="36576" marT="9144" marB="9144">
-                    <a:solidFill>
-                      <a:srgbClr val="1B365D"/>
-                    </a:solidFill>
-                  </a:tcPr>
-                </a:tc>
-                <a:tc>
-                  <a:txBody>
-                    <a:bodyPr wrap="square"/>
-                    <a:lstStyle/>
-                    <a:p>
-                      <a:pPr algn="ctr">
-                        <a:defRPr sz="650" b="1">
-                          <a:solidFill>
-                            <a:srgbClr val="FFFFFF"/>
-                          </a:solidFill>
-                          <a:latin typeface="Meiryo UI"/>
-                        </a:defRPr>
-                      </a:pPr>
-                      <a:r>
-                        <a:t>現状およびKDTVN製造技術部からの提案内容</a:t>
-                      </a:r>
-                    </a:p>
-                  </a:txBody>
-                  <a:tcPr anchor="ctr" marL="36576" marR="36576" marT="9144" marB="9144">
-                    <a:solidFill>
-                      <a:srgbClr val="1B365D"/>
-                    </a:solidFill>
-                  </a:tcPr>
-                </a:tc>
-                <a:tc>
-                  <a:txBody>
-                    <a:bodyPr wrap="square"/>
-                    <a:lstStyle/>
-                    <a:p>
-                      <a:pPr algn="ctr">
-                        <a:defRPr sz="650" b="1">
-                          <a:solidFill>
-                            <a:srgbClr val="FFFFFF"/>
-                          </a:solidFill>
-                          <a:latin typeface="Meiryo UI"/>
-                        </a:defRPr>
-                      </a:pPr>
-                      <a:r>
-                        <a:t>決定を仰ぎたい事項</a:t>
-                      </a:r>
-                    </a:p>
-                  </a:txBody>
-                  <a:tcPr anchor="ctr" marL="36576" marR="36576" marT="9144" marB="9144">
-                    <a:solidFill>
-                      <a:srgbClr val="1B365D"/>
-                    </a:solidFill>
-                  </a:tcPr>
-                </a:tc>
-              </a:tr>
-              <a:tr h="442569">
-                <a:tc>
-                  <a:txBody>
-                    <a:bodyPr wrap="square"/>
-                    <a:lstStyle/>
-                    <a:p>
-                      <a:pPr algn="l">
-                        <a:defRPr sz="580" b="1">
-                          <a:solidFill>
-                            <a:srgbClr val="1E242B"/>
-                          </a:solidFill>
-                          <a:latin typeface="Meiryo UI"/>
-                        </a:defRPr>
-                      </a:pPr>
-                      <a:r>
-                        <a:t>1. 第1期・第2期</a:t>
-                      </a:r>
-                      <a:br/>
-                      <a:r>
-                        <a:t>投資方針の選択</a:t>
-                      </a:r>
-                    </a:p>
-                  </a:txBody>
-                  <a:tcPr anchor="ctr" marL="36576" marR="36576" marT="9144" marB="9144">
-                    <a:solidFill>
-                      <a:srgbClr val="EAF7EE"/>
-                    </a:solidFill>
-                  </a:tcPr>
-                </a:tc>
-                <a:tc>
-                  <a:txBody>
-                    <a:bodyPr wrap="square"/>
-                    <a:lstStyle/>
-                    <a:p>
-                      <a:pPr algn="l">
-                        <a:defRPr sz="580">
-                          <a:solidFill>
-                            <a:srgbClr val="1E242B"/>
-                          </a:solidFill>
-                          <a:latin typeface="Meiryo UI"/>
-                        </a:defRPr>
-                      </a:pPr>
-                      <a:r>
-                        <a:t>• 案 A（推奨）：No.22（101.69M VND）を先行承認。高額ロボットNo.23, 24はDP連続スキャン（No.25）およびHost PCログ照合へ置換。第2期にカメラNo.27（-177s）とDP No.25を申請。</a:t>
-                      </a:r>
-                      <a:br/>
-                      <a:r>
-                        <a:t>• 案 B：見積書記載の3案件（855.69M VND / 32,911.15 USD）を一括承認。</a:t>
-                      </a:r>
-                    </a:p>
-                  </a:txBody>
-                  <a:tcPr anchor="ctr" marL="36576" marR="36576" marT="9144" marB="9144">
-                    <a:solidFill>
-                      <a:srgbClr val="EAF7EE"/>
-                    </a:solidFill>
-                  </a:tcPr>
-                </a:tc>
-                <a:tc>
-                  <a:txBody>
-                    <a:bodyPr wrap="square"/>
-                    <a:lstStyle/>
-                    <a:p>
-                      <a:pPr algn="l">
-                        <a:defRPr sz="580">
-                          <a:solidFill>
-                            <a:srgbClr val="1E242B"/>
-                          </a:solidFill>
-                          <a:latin typeface="Meiryo UI"/>
-                        </a:defRPr>
-                      </a:pPr>
-                      <a:r>
-                        <a:t>11月15日までに案Aまたは案Bのご決裁を要請</a:t>
-                      </a:r>
-                    </a:p>
-                  </a:txBody>
-                  <a:tcPr anchor="ctr" marL="36576" marR="36576" marT="9144" marB="9144">
-                    <a:solidFill>
-                      <a:srgbClr val="EAF7EE"/>
-                    </a:solidFill>
-                  </a:tcPr>
-                </a:tc>
-              </a:tr>
-              <a:tr h="442569">
-                <a:tc>
-                  <a:txBody>
-                    <a:bodyPr wrap="square"/>
-                    <a:lstStyle/>
-                    <a:p>
-                      <a:pPr algn="l">
-                        <a:defRPr sz="580" b="1">
-                          <a:solidFill>
-                            <a:srgbClr val="1E242B"/>
-                          </a:solidFill>
-                          <a:latin typeface="Meiryo UI"/>
-                        </a:defRPr>
-                      </a:pPr>
-                      <a:r>
-                        <a:t>2. カバー6枚組付け</a:t>
-                      </a:r>
-                      <a:br/>
-                      <a:r>
-                        <a:t>工程の移管（No.33）</a:t>
-                      </a:r>
-                    </a:p>
-                  </a:txBody>
-                  <a:tcPr anchor="ctr" marL="36576" marR="36576" marT="9144" marB="9144">
-                    <a:solidFill>
-                      <a:srgbClr val="F7F9FC"/>
-                    </a:solidFill>
-                  </a:tcPr>
-                </a:tc>
-                <a:tc>
-                  <a:txBody>
-                    <a:bodyPr wrap="square"/>
-                    <a:lstStyle/>
-                    <a:p>
-                      <a:pPr algn="l">
-                        <a:defRPr sz="580">
-                          <a:solidFill>
-                            <a:srgbClr val="1E242B"/>
-                          </a:solidFill>
-                          <a:latin typeface="Meiryo UI"/>
-                        </a:defRPr>
-                      </a:pPr>
-                      <a:r>
-                        <a:t>K3（A-3）にて耐圧測定前に外装カバー6枚を手動組付けし48～90秒を要している。カバー組付け工程を本体組立ライン（本体組立）末尾へ正式移管することを提案（現場設備費0円）。</a:t>
-                      </a:r>
-                    </a:p>
-                  </a:txBody>
-                  <a:tcPr anchor="ctr" marL="36576" marR="36576" marT="9144" marB="9144">
-                    <a:solidFill>
-                      <a:srgbClr val="F7F9FC"/>
-                    </a:solidFill>
-                  </a:tcPr>
-                </a:tc>
-                <a:tc>
-                  <a:txBody>
-                    <a:bodyPr wrap="square"/>
-                    <a:lstStyle/>
-                    <a:p>
-                      <a:pPr algn="l">
-                        <a:defRPr sz="580">
-                          <a:solidFill>
-                            <a:srgbClr val="1E242B"/>
-                          </a:solidFill>
-                          <a:latin typeface="Meiryo UI"/>
-                        </a:defRPr>
-                      </a:pPr>
-                      <a:r>
-                        <a:t>組立部門および日本PEとの交渉・合意推進</a:t>
-                      </a:r>
-                    </a:p>
-                  </a:txBody>
-                  <a:tcPr anchor="ctr" marL="36576" marR="36576" marT="9144" marB="9144">
-                    <a:solidFill>
-                      <a:srgbClr val="F7F9FC"/>
-                    </a:solidFill>
-                  </a:tcPr>
-                </a:tc>
-              </a:tr>
-              <a:tr h="442569">
-                <a:tc>
-                  <a:txBody>
-                    <a:bodyPr wrap="square"/>
-                    <a:lstStyle/>
-                    <a:p>
-                      <a:pPr algn="l">
-                        <a:defRPr sz="580" b="1">
-                          <a:solidFill>
-                            <a:srgbClr val="1E242B"/>
-                          </a:solidFill>
-                          <a:latin typeface="Meiryo UI"/>
-                        </a:defRPr>
-                      </a:pPr>
-                      <a:r>
-                        <a:t>3. 工程DR日程および</a:t>
-                      </a:r>
-                      <a:br/>
-                      <a:r>
-                        <a:t>転写ベルト廃止判断</a:t>
-                      </a:r>
-                    </a:p>
-                  </a:txBody>
-                  <a:tcPr anchor="ctr" marL="36576" marR="36576" marT="9144" marB="9144">
-                    <a:solidFill>
-                      <a:srgbClr val="FEF7E6"/>
-                    </a:solidFill>
-                  </a:tcPr>
-                </a:tc>
-                <a:tc>
-                  <a:txBody>
-                    <a:bodyPr wrap="square"/>
-                    <a:lstStyle/>
-                    <a:p>
-                      <a:pPr algn="l">
-                        <a:defRPr sz="580">
-                          <a:solidFill>
-                            <a:srgbClr val="1E242B"/>
-                          </a:solidFill>
-                          <a:latin typeface="Meiryo UI"/>
-                        </a:defRPr>
-                      </a:pPr>
-                      <a:r>
-                        <a:t>• 日本設計/生技に対し工程DR日程の確定およびベトナムからの基板・FW改善要請6件の11月中回答を要請（PMT1試作12月への反映）。</a:t>
-                      </a:r>
-                      <a:br/>
-                      <a:r>
-                        <a:t>• 転写ベルト蛇行測定は新プーリ（35°面取り）＋新ベルトロットでCpk ≥ 1.33確認後に廃止。</a:t>
-                      </a:r>
-                    </a:p>
-                  </a:txBody>
-                  <a:tcPr anchor="ctr" marL="36576" marR="36576" marT="9144" marB="9144">
-                    <a:solidFill>
-                      <a:srgbClr val="FEF7E6"/>
-                    </a:solidFill>
-                  </a:tcPr>
-                </a:tc>
-                <a:tc>
-                  <a:txBody>
-                    <a:bodyPr wrap="square"/>
-                    <a:lstStyle/>
-                    <a:p>
-                      <a:pPr algn="l">
-                        <a:defRPr sz="580">
-                          <a:solidFill>
-                            <a:srgbClr val="1E242B"/>
-                          </a:solidFill>
-                          <a:latin typeface="Meiryo UI"/>
-                        </a:defRPr>
-                      </a:pPr>
-                      <a:r>
-                        <a:t>日本PEへの働きかけおよび品保との合意支援</a:t>
-                      </a:r>
-                    </a:p>
-                  </a:txBody>
-                  <a:tcPr anchor="ctr" marL="36576" marR="36576" marT="9144" marB="9144">
-                    <a:solidFill>
-                      <a:srgbClr val="FEF7E6"/>
-                    </a:solidFill>
-                  </a:tcPr>
-                </a:tc>
-              </a:tr>
-              <a:tr h="442572">
-                <a:tc>
-                  <a:txBody>
-                    <a:bodyPr wrap="square"/>
-                    <a:lstStyle/>
-                    <a:p>
-                      <a:pPr algn="l">
-                        <a:defRPr sz="580" b="1">
-                          <a:solidFill>
-                            <a:srgbClr val="1E242B"/>
-                          </a:solidFill>
-                          <a:latin typeface="Meiryo UI"/>
-                        </a:defRPr>
-                      </a:pPr>
-                      <a:r>
-                        <a:t>4. Spica仕様に基づく</a:t>
-                      </a:r>
-                      <a:br/>
-                      <a:r>
-                        <a:t>社内LANインフラ整備</a:t>
-                      </a:r>
-                    </a:p>
-                  </a:txBody>
-                  <a:tcPr anchor="ctr" marL="36576" marR="36576" marT="9144" marB="9144">
-                    <a:solidFill>
-                      <a:srgbClr val="F7F9FC"/>
-                    </a:solidFill>
-                  </a:tcPr>
-                </a:tc>
-                <a:tc>
-                  <a:txBody>
-                    <a:bodyPr wrap="square"/>
-                    <a:lstStyle/>
-                    <a:p>
-                      <a:pPr algn="l">
-                        <a:defRPr sz="580">
-                          <a:solidFill>
-                            <a:srgbClr val="1E242B"/>
-                          </a:solidFill>
-                          <a:latin typeface="Meiryo UI"/>
-                        </a:defRPr>
-                      </a:pPr>
-                      <a:r>
-                        <a:t>AthenaのRaspberry Pi＋バッテリー方式は電池劣化・Wi-Fi途絶が発生したため、IrisEXPではSpica Mini PC方式（約4万円/台、商用AC電源、有線LAN/VLAN）へ統一を要請。</a:t>
-                      </a:r>
-                    </a:p>
-                  </a:txBody>
-                  <a:tcPr anchor="ctr" marL="36576" marR="36576" marT="9144" marB="9144">
-                    <a:solidFill>
-                      <a:srgbClr val="F7F9FC"/>
-                    </a:solidFill>
-                  </a:tcPr>
-                </a:tc>
-                <a:tc>
-                  <a:txBody>
-                    <a:bodyPr wrap="square"/>
-                    <a:lstStyle/>
-                    <a:p>
-                      <a:pPr algn="l">
-                        <a:defRPr sz="580">
-                          <a:solidFill>
-                            <a:srgbClr val="1E242B"/>
-                          </a:solidFill>
-                          <a:latin typeface="Meiryo UI"/>
-                        </a:defRPr>
-                      </a:pPr>
-                      <a:r>
-                        <a:t>Spica統一方針の承認および有線LAN配線手配</a:t>
-                      </a:r>
-                    </a:p>
-                  </a:txBody>
-                  <a:tcPr anchor="ctr" marL="36576" marR="36576" marT="9144" marB="9144">
-                    <a:solidFill>
-                      <a:srgbClr val="F7F9FC"/>
-                    </a:solidFill>
-                  </a:tcPr>
-                </a:tc>
-              </a:tr>
-            </a:tbl>
-          </a:graphicData>
-        </a:graphic>
-      </p:graphicFrame>
-      <p:pic>
-        <p:nvPicPr>
-          <p:cNvPr id="11" name="Picture 10" descr="chart_s15_bom22.png"/>
-          <p:cNvPicPr>
-            <a:picLocks noChangeAspect="1"/>
-          </p:cNvPicPr>
-          <p:nvPr/>
-        </p:nvPicPr>
-        <p:blipFill>
-          <a:blip r:embed="rId2"/>
-          <a:stretch>
-            <a:fillRect/>
-          </a:stretch>
-        </p:blipFill>
-        <p:spPr>
-          <a:xfrm>
-            <a:off x="6995160" y="1188720"/>
-            <a:ext cx="4919472" cy="2723279"/>
-          </a:xfrm>
-          <a:prstGeom prst="rect">
-            <a:avLst/>
-          </a:prstGeom>
-        </p:spPr>
-      </p:pic>
-      <p:sp>
-        <p:nvSpPr>
-          <p:cNvPr id="12" name="Rectangle 11"/>
-          <p:cNvSpPr/>
-          <p:nvPr/>
-        </p:nvSpPr>
-        <p:spPr>
-          <a:xfrm>
-            <a:off x="6995160" y="4261104"/>
-            <a:ext cx="4919472" cy="2212848"/>
-          </a:xfrm>
-          <a:prstGeom prst="rect">
-            <a:avLst/>
-          </a:prstGeom>
-          <a:solidFill>
-            <a:srgbClr val="EAF7EE"/>
-          </a:solidFill>
-          <a:ln w="12700">
-            <a:solidFill>
-              <a:srgbClr val="1E6E3E"/>
-            </a:solidFill>
-          </a:ln>
-        </p:spPr>
-        <p:style>
-          <a:lnRef idx="1">
-            <a:schemeClr val="accent1"/>
-          </a:lnRef>
-          <a:fillRef idx="3">
-            <a:schemeClr val="accent1"/>
-          </a:fillRef>
-          <a:effectRef idx="2">
-            <a:schemeClr val="accent1"/>
-          </a:effectRef>
-          <a:fontRef idx="minor">
-            <a:schemeClr val="lt1"/>
-          </a:fontRef>
-        </p:style>
-        <p:txBody>
-          <a:bodyPr rtlCol="0" anchor="ctr"/>
-          <a:lstStyle/>
-          <a:p>
-            <a:pPr algn="ctr"/>
-          </a:p>
-        </p:txBody>
-      </p:sp>
-      <p:sp>
-        <p:nvSpPr>
-          <p:cNvPr id="13" name="Rectangle 12"/>
-          <p:cNvSpPr/>
-          <p:nvPr/>
-        </p:nvSpPr>
-        <p:spPr>
-          <a:xfrm>
-            <a:off x="6995160" y="4261104"/>
-            <a:ext cx="4919472" cy="292608"/>
-          </a:xfrm>
-          <a:prstGeom prst="rect">
-            <a:avLst/>
-          </a:prstGeom>
-          <a:solidFill>
-            <a:srgbClr val="1E6E3E"/>
-          </a:solidFill>
-          <a:ln>
-            <a:noFill/>
-          </a:ln>
-        </p:spPr>
-        <p:style>
-          <a:lnRef idx="1">
-            <a:schemeClr val="accent1"/>
-          </a:lnRef>
-          <a:fillRef idx="3">
-            <a:schemeClr val="accent1"/>
-          </a:fillRef>
-          <a:effectRef idx="2">
-            <a:schemeClr val="accent1"/>
-          </a:effectRef>
-          <a:fontRef idx="minor">
-            <a:schemeClr val="lt1"/>
-          </a:fontRef>
-        </p:style>
-        <p:txBody>
-          <a:bodyPr rtlCol="0" anchor="ctr" wrap="square" tIns="27432"/>
-          <a:lstStyle/>
-          <a:p>
-            <a:pPr algn="ctr">
-              <a:defRPr sz="930" b="1">
-                <a:solidFill>
-                  <a:srgbClr val="FFFFFF"/>
-                </a:solidFill>
-                <a:latin typeface="Meiryo UI"/>
-              </a:defRPr>
-            </a:pPr>
-            <a:r>
-              <a:t>投資予算申請 2つの選択案の比較まとめ</a:t>
-            </a:r>
-          </a:p>
-        </p:txBody>
-      </p:sp>
-      <p:sp>
-        <p:nvSpPr>
-          <p:cNvPr id="14" name="TextBox 13"/>
-          <p:cNvSpPr txBox="1"/>
-          <p:nvPr/>
-        </p:nvSpPr>
-        <p:spPr>
-          <a:xfrm>
-            <a:off x="7068312" y="4581144"/>
-            <a:ext cx="4773168" cy="1865376"/>
-          </a:xfrm>
-          <a:prstGeom prst="rect">
-            <a:avLst/>
-          </a:prstGeom>
-          <a:noFill/>
-        </p:spPr>
-        <p:txBody>
-          <a:bodyPr wrap="square" lIns="36576" rIns="36576" tIns="18288" bIns="18288">
-            <a:spAutoFit/>
-          </a:bodyPr>
-          <a:lstStyle/>
-          <a:p>
-            <a:pPr>
-              <a:spcAft>
-                <a:spcPts val="220"/>
-              </a:spcAft>
-              <a:defRPr sz="720" b="1">
-                <a:solidFill>
-                  <a:srgbClr val="1E242B"/>
-                </a:solidFill>
-                <a:latin typeface="Meiryo UI"/>
-              </a:defRPr>
-            </a:pPr>
-            <a:r>
-              <a:t>■ 案 A（推奨：No.22を先行導入、ロボットをDP/Host PCへ置換）：</a:t>
-            </a:r>
-          </a:p>
-          <a:p>
-            <a:pPr>
-              <a:spcAft>
-                <a:spcPts val="220"/>
-              </a:spcAft>
-              <a:defRPr sz="720">
-                <a:solidFill>
-                  <a:srgbClr val="1E242B"/>
-                </a:solidFill>
-                <a:latin typeface="Meiryo UI"/>
-              </a:defRPr>
-            </a:pPr>
-            <a:r>
-              <a:t>   • 先行申請額：No.22（BOM 25項目） 101,690,000 VND（3,911.15 USD）</a:t>
-            </a:r>
-          </a:p>
-          <a:p>
-            <a:pPr>
-              <a:spcAft>
-                <a:spcPts val="220"/>
-              </a:spcAft>
-              <a:defRPr sz="720">
-                <a:solidFill>
-                  <a:srgbClr val="1E242B"/>
-                </a:solidFill>
-                <a:latin typeface="Meiryo UI"/>
-              </a:defRPr>
-            </a:pPr>
-            <a:r>
-              <a:t>   • 効果：30秒/台 短縮、年間 29,600,000 VND（1,138.46 USD）削減。</a:t>
-            </a:r>
-          </a:p>
-          <a:p>
-            <a:pPr>
-              <a:spcAft>
-                <a:spcPts val="220"/>
-              </a:spcAft>
-              <a:defRPr sz="720">
-                <a:solidFill>
-                  <a:srgbClr val="1E242B"/>
-                </a:solidFill>
-                <a:latin typeface="Meiryo UI"/>
-              </a:defRPr>
-            </a:pPr>
-            <a:r>
-              <a:t>   • 見積取得中の案件（No.25 DP、No.27 HIKROBOTカメラ、No.21 オプション治具、No.28 出荷設定LAN）は仕様確定後に第2期として分割申請。</a:t>
-            </a:r>
-          </a:p>
-          <a:p>
-            <a:pPr>
-              <a:spcAft>
-                <a:spcPts val="220"/>
-              </a:spcAft>
-              <a:defRPr sz="720" b="1">
-                <a:solidFill>
-                  <a:srgbClr val="1E242B"/>
-                </a:solidFill>
-                <a:latin typeface="Meiryo UI"/>
-              </a:defRPr>
-            </a:pPr>
-            <a:r>
-              <a:t>■ 案 B（見積書記載 3案件の一括申請）：</a:t>
-            </a:r>
-          </a:p>
-          <a:p>
-            <a:pPr>
-              <a:spcAft>
-                <a:spcPts val="220"/>
-              </a:spcAft>
-              <a:defRPr sz="720">
-                <a:solidFill>
-                  <a:srgbClr val="1E242B"/>
-                </a:solidFill>
-                <a:latin typeface="Meiryo UI"/>
-              </a:defRPr>
-            </a:pPr>
-            <a:r>
-              <a:t>   • No.22（101.69M）＋ No.23 原稿ロボット（650M）＋ No.24 USB/U201ロボット（104M）</a:t>
-            </a:r>
-          </a:p>
-          <a:p>
-            <a:pPr>
-              <a:spcAft>
-                <a:spcPts val="220"/>
-              </a:spcAft>
-              <a:defRPr sz="720">
-                <a:solidFill>
-                  <a:srgbClr val="1E242B"/>
-                </a:solidFill>
-                <a:latin typeface="Meiryo UI"/>
-              </a:defRPr>
-            </a:pPr>
-            <a:r>
-              <a:t>   • 一括申請総額：855,690,000 VND（32,911.15 USD / 丸め値 33,000 USD）</a:t>
-            </a:r>
-          </a:p>
-          <a:p>
-            <a:pPr>
-              <a:spcAft>
-                <a:spcPts val="220"/>
-              </a:spcAft>
-              <a:defRPr sz="720">
-                <a:solidFill>
-                  <a:srgbClr val="1E242B"/>
-                </a:solidFill>
-                <a:latin typeface="Meiryo UI"/>
-              </a:defRPr>
-            </a:pPr>
-            <a:r>
-              <a:t>   • 効果：170秒/台 短縮、年間 167,733,333 VND（6,451.28 USD）削減。</a:t>
-            </a:r>
-          </a:p>
-        </p:txBody>
-      </p:sp>
     </p:spTree>
   </p:cSld>
   <p:clrMapOvr>
@@ -6627,7 +6188,7 @@
           <a:lstStyle/>
           <a:p>
             <a:pPr algn="ctr">
-              <a:defRPr sz="960" b="1">
+              <a:defRPr sz="1200" b="1">
                 <a:solidFill>
                   <a:srgbClr val="1B365D"/>
                 </a:solidFill>
@@ -6635,6 +6196,12 @@
               </a:defRPr>
             </a:pPr>
             <a:r>
+              <a:rPr sz="1200" b="1">
+                <a:solidFill>
+                  <a:srgbClr val="1B365D"/>
+                </a:solidFill>
+                <a:latin typeface="Meiryo UI"/>
+              </a:rPr>
               <a:t>■ DMT -&gt; PMT1（2026年12月）-&gt; PMT2（2027年2月）-&gt; MP（2027年3月）の計画推進により、労働生産性を2倍に向上（15.19 -&gt; ≥30.38台/人/日）、正味工数を50%削減し、現行ラインでの日産300台を確実に完遂する。</a:t>
             </a:r>
           </a:p>
@@ -9054,7 +8621,7 @@
           <a:lstStyle/>
           <a:p>
             <a:pPr algn="ctr">
-              <a:defRPr sz="960" b="1">
+              <a:defRPr sz="1200" b="1">
                 <a:solidFill>
                   <a:srgbClr val="1B365D"/>
                 </a:solidFill>
@@ -9062,6 +8629,12 @@
               </a:defRPr>
             </a:pPr>
             <a:r>
+              <a:rPr sz="1200" b="1">
+                <a:solidFill>
+                  <a:srgbClr val="1B365D"/>
+                </a:solidFill>
+                <a:latin typeface="Meiryo UI"/>
+              </a:rPr>
               <a:t>■ 3拠点（日本・中国・ベトナム）における改善提案数、工数削減効果、人員体制および設備投資試算の総合対照表。報告書末尾に参考資料として掲載。</a:t>
             </a:r>
           </a:p>
@@ -10920,7 +10493,7 @@
           <a:lstStyle/>
           <a:p>
             <a:pPr algn="ctr">
-              <a:defRPr sz="960" b="1">
+              <a:defRPr sz="1200" b="1">
                 <a:solidFill>
                   <a:srgbClr val="1B365D"/>
                 </a:solidFill>
@@ -10928,6 +10501,12 @@
               </a:defRPr>
             </a:pPr>
             <a:r>
+              <a:rPr sz="1200" b="1">
+                <a:solidFill>
+                  <a:srgbClr val="1B365D"/>
+                </a:solidFill>
+                <a:latin typeface="Meiryo UI"/>
+              </a:rPr>
               <a:t>■ 総合管理表（IrisEXP改善提案まとめ.xlsx）に登録されている日本および中国の改善提案一覧と、ベトナム工場への水平展開状況。</a:t>
             </a:r>
           </a:p>
@@ -14037,7 +13616,7 @@
           <a:lstStyle/>
           <a:p>
             <a:pPr algn="ctr">
-              <a:defRPr sz="960" b="1">
+              <a:defRPr sz="1200" b="1">
                 <a:solidFill>
                   <a:srgbClr val="1B365D"/>
                 </a:solidFill>
@@ -14045,6 +13624,12 @@
               </a:defRPr>
             </a:pPr>
             <a:r>
+              <a:rPr sz="1200" b="1">
+                <a:solidFill>
+                  <a:srgbClr val="1B365D"/>
+                </a:solidFill>
+                <a:latin typeface="Meiryo UI"/>
+              </a:rPr>
               <a:t>■ 保証工程連携会およびDR4で抽出された6大技術・コスト課題に対し、品質目標（Cpk ≥ 1.33）および投資回収性を両立させるために合意した対策一覧。</a:t>
             </a:r>
           </a:p>
@@ -15253,7 +14838,7 @@
           <a:lstStyle/>
           <a:p>
             <a:pPr algn="ctr">
-              <a:defRPr sz="960" b="1">
+              <a:defRPr sz="1200" b="1">
                 <a:solidFill>
                   <a:srgbClr val="1B365D"/>
                 </a:solidFill>
@@ -15261,6 +14846,12 @@
               </a:defRPr>
             </a:pPr>
             <a:r>
+              <a:rPr sz="1200" b="1">
+                <a:solidFill>
+                  <a:srgbClr val="1B365D"/>
+                </a:solidFill>
+                <a:latin typeface="Meiryo UI"/>
+              </a:rPr>
               <a:t>■ 3拠点全38提案（日本：No.1～7 ｜ 中国：No.8～17, No.38 ｜ ベトナム：No.18～37）の管理マスターテーブル。統合管理シート（IrisEXP改善提案まとめ.xlsx）と完全一致。</a:t>
             </a:r>
           </a:p>
@@ -19470,7 +19061,7 @@
           <a:lstStyle/>
           <a:p>
             <a:pPr algn="ctr">
-              <a:defRPr sz="960" b="1">
+              <a:defRPr sz="1200" b="1">
                 <a:solidFill>
                   <a:srgbClr val="1B365D"/>
                 </a:solidFill>
@@ -19478,6 +19069,12 @@
               </a:defRPr>
             </a:pPr>
             <a:r>
+              <a:rPr sz="1200" b="1">
+                <a:solidFill>
+                  <a:srgbClr val="1B365D"/>
+                </a:solidFill>
+                <a:latin typeface="Meiryo UI"/>
+              </a:rPr>
               <a:t>■ 現行Iris2024ラインは作業者16名（調整7名＋画像9名）で243台/日（15.19台/人/日）。IrisEXP（タクト97秒・300台/日）へ未改善のまま移行した場合18名が必要となり、現行ラインのスペース・能力では生産を確保できない。</a:t>
             </a:r>
           </a:p>
@@ -20836,7 +20433,7 @@
           <a:lstStyle/>
           <a:p>
             <a:pPr algn="ctr">
-              <a:defRPr sz="960" b="1">
+              <a:defRPr sz="1200" b="1">
                 <a:solidFill>
                   <a:srgbClr val="1B365D"/>
                 </a:solidFill>
@@ -20844,6 +20441,12 @@
               </a:defRPr>
             </a:pPr>
             <a:r>
+              <a:rPr sz="1200" b="1">
+                <a:solidFill>
+                  <a:srgbClr val="1B365D"/>
+                </a:solidFill>
+                <a:latin typeface="Meiryo UI"/>
+              </a:rPr>
               <a:t>■ 現行Iris2024調整ラインの実機レイアウト図面（全長57m、全幅2.7m；A1～A11の11ポジション、作業者16名：調整7名＋画像9名）。現行の配置と工数構造では日産243台（15.19台/人/日）に留まり、IrisEXPのタクト97秒（300台/日）を満たすことはできない。</a:t>
             </a:r>
           </a:p>
@@ -21930,7 +21533,7 @@
           <a:lstStyle/>
           <a:p>
             <a:pPr algn="ctr">
-              <a:defRPr sz="960" b="1">
+              <a:defRPr sz="1200" b="1">
                 <a:solidFill>
                   <a:srgbClr val="1B365D"/>
                 </a:solidFill>
@@ -21938,6 +21541,12 @@
               </a:defRPr>
             </a:pPr>
             <a:r>
+              <a:rPr sz="1200" b="1">
+                <a:solidFill>
+                  <a:srgbClr val="1B365D"/>
+                </a:solidFill>
+                <a:latin typeface="Meiryo UI"/>
+              </a:rPr>
               <a:t>■ 生産性2倍向上（作業者1人当たり日産台数を現行15.19台から ≥30.38～33.33台へ倍増）、正味工数50%削減および作業者半減を達成し、現行Iris2024ライン上でIrisEXP（300台/日・タクト97秒）の生産を確保する。</a:t>
             </a:r>
           </a:p>
@@ -21952,7 +21561,7 @@
         <p:spPr>
           <a:xfrm>
             <a:off x="256032" y="1170432"/>
-            <a:ext cx="3767328" cy="2057400"/>
+            <a:ext cx="3767328" cy="3600000"/>
           </a:xfrm>
           <a:prstGeom prst="rect">
             <a:avLst/>
@@ -22050,7 +21659,7 @@
         <p:spPr>
           <a:xfrm>
             <a:off x="329184" y="1490472"/>
-            <a:ext cx="3621024" cy="1709928"/>
+            <a:ext cx="3621024" cy="3540000"/>
           </a:xfrm>
           <a:prstGeom prst="rect">
             <a:avLst/>
@@ -22065,9 +21674,25 @@
           <a:p>
             <a:pPr>
               <a:spcAft>
-                <a:spcPts val="220"/>
+                <a:spcPts val="200"/>
               </a:spcAft>
-              <a:defRPr sz="830" b="1">
+              <a:defRPr sz="1250" b="1">
+                <a:solidFill>
+                  <a:srgbClr val="1B365D"/>
+                </a:solidFill>
+                <a:latin typeface="Meiryo UI"/>
+              </a:defRPr>
+            </a:pPr>
+            <a:r>
+              <a:t>■ 工程設計方針：</a:t>
+            </a:r>
+          </a:p>
+          <a:p>
+            <a:pPr>
+              <a:spcAft>
+                <a:spcPts val="1400"/>
+              </a:spcAft>
+              <a:defRPr sz="1150">
                 <a:solidFill>
                   <a:srgbClr val="1E242B"/>
                 </a:solidFill>
@@ -22075,15 +21700,31 @@
               </a:defRPr>
             </a:pPr>
             <a:r>
-              <a:t>■ 方針：</a:t>
+              <a:t>モジュールごとに保証を完結させる工程設計基盤を構築し、検査項目を前工程（組立・UNIT）へ移管。</a:t>
             </a:r>
           </a:p>
           <a:p>
             <a:pPr>
               <a:spcAft>
-                <a:spcPts val="220"/>
+                <a:spcPts val="200"/>
               </a:spcAft>
-              <a:defRPr sz="830">
+              <a:defRPr sz="1250" b="1">
+                <a:solidFill>
+                  <a:srgbClr val="1B365D"/>
+                </a:solidFill>
+                <a:latin typeface="Meiryo UI"/>
+              </a:defRPr>
+            </a:pPr>
+            <a:r>
+              <a:t>■ 重複・無駄の徹底排除：</a:t>
+            </a:r>
+          </a:p>
+          <a:p>
+            <a:pPr>
+              <a:spcAft>
+                <a:spcPts val="1400"/>
+              </a:spcAft>
+              <a:defRPr sz="1150">
                 <a:solidFill>
                   <a:srgbClr val="1E242B"/>
                 </a:solidFill>
@@ -22091,15 +21732,31 @@
               </a:defRPr>
             </a:pPr>
             <a:r>
-              <a:t>• モジュールごとに保証を完結させる工程設計基盤を構築する。</a:t>
+              <a:t>現行Iris2024調整工程の全項目を見直し、重複作業および無駄工数を徹底的に排除。</a:t>
             </a:r>
           </a:p>
           <a:p>
             <a:pPr>
               <a:spcAft>
-                <a:spcPts val="220"/>
+                <a:spcPts val="200"/>
               </a:spcAft>
-              <a:defRPr sz="830">
+              <a:defRPr sz="1250" b="1">
+                <a:solidFill>
+                  <a:srgbClr val="1B365D"/>
+                </a:solidFill>
+                <a:latin typeface="Meiryo UI"/>
+              </a:defRPr>
+            </a:pPr>
+            <a:r>
+              <a:t>■ 達成目標：</a:t>
+            </a:r>
+          </a:p>
+          <a:p>
+            <a:pPr>
+              <a:spcAft>
+                <a:spcPts val="0"/>
+              </a:spcAft>
+              <a:defRPr sz="1150">
                 <a:solidFill>
                   <a:srgbClr val="1E242B"/>
                 </a:solidFill>
@@ -22107,39 +21764,7 @@
               </a:defRPr>
             </a:pPr>
             <a:r>
-              <a:t>• 現行Iris2024調整工程の全項目を見直し、重複作業・無駄工数を徹底排除。</a:t>
-            </a:r>
-          </a:p>
-          <a:p>
-            <a:pPr>
-              <a:spcAft>
-                <a:spcPts val="220"/>
-              </a:spcAft>
-              <a:defRPr sz="830" b="1">
-                <a:solidFill>
-                  <a:srgbClr val="1E242B"/>
-                </a:solidFill>
-                <a:latin typeface="Meiryo UI"/>
-              </a:defRPr>
-            </a:pPr>
-            <a:r>
-              <a:t>■ 達成目標 ①：</a:t>
-            </a:r>
-          </a:p>
-          <a:p>
-            <a:pPr>
-              <a:spcAft>
-                <a:spcPts val="220"/>
-              </a:spcAft>
-              <a:defRPr sz="830">
-                <a:solidFill>
-                  <a:srgbClr val="1E242B"/>
-                </a:solidFill>
-                <a:latin typeface="Meiryo UI"/>
-              </a:defRPr>
-            </a:pPr>
-            <a:r>
-              <a:t>• Iris2024で行っている手動検査を廃止、または3項目以上で工数を半減（WTB U155廃止、転写ベルト測定廃止、耐圧測定の自動化）。</a:t>
+              <a:t>Iris2024で行っている手動検査を廃止、または3項目以上で工数を半減。</a:t>
             </a:r>
           </a:p>
         </p:txBody>
@@ -22153,7 +21778,7 @@
         <p:spPr>
           <a:xfrm>
             <a:off x="4206240" y="1170432"/>
-            <a:ext cx="3767328" cy="2057400"/>
+            <a:ext cx="3767328" cy="3600000"/>
           </a:xfrm>
           <a:prstGeom prst="rect">
             <a:avLst/>
@@ -22251,7 +21876,7 @@
         <p:spPr>
           <a:xfrm>
             <a:off x="4279392" y="1490472"/>
-            <a:ext cx="3621024" cy="1709928"/>
+            <a:ext cx="3621024" cy="3540000"/>
           </a:xfrm>
           <a:prstGeom prst="rect">
             <a:avLst/>
@@ -22266,9 +21891,25 @@
           <a:p>
             <a:pPr>
               <a:spcAft>
-                <a:spcPts val="220"/>
+                <a:spcPts val="200"/>
               </a:spcAft>
-              <a:defRPr sz="830" b="1">
+              <a:defRPr sz="1250" b="1">
+                <a:solidFill>
+                  <a:srgbClr val="1B365D"/>
+                </a:solidFill>
+                <a:latin typeface="Meiryo UI"/>
+              </a:defRPr>
+            </a:pPr>
+            <a:r>
+              <a:t>■ 標準作業時間短縮（正味50%削減）：</a:t>
+            </a:r>
+          </a:p>
+          <a:p>
+            <a:pPr>
+              <a:spcAft>
+                <a:spcPts val="1200"/>
+              </a:spcAft>
+              <a:defRPr sz="1150">
                 <a:solidFill>
                   <a:srgbClr val="1E242B"/>
                 </a:solidFill>
@@ -22276,15 +21917,31 @@
               </a:defRPr>
             </a:pPr>
             <a:r>
-              <a:t>■ 方針：</a:t>
+              <a:t>正味作業時間を1,083s -&gt; ≤ 541s/台へ半減（総滞留時間：2,350s -&gt; ≤ 1,175s）。</a:t>
             </a:r>
           </a:p>
           <a:p>
             <a:pPr>
               <a:spcAft>
-                <a:spcPts val="220"/>
+                <a:spcPts val="200"/>
               </a:spcAft>
-              <a:defRPr sz="830">
+              <a:defRPr sz="1250" b="1">
+                <a:solidFill>
+                  <a:srgbClr val="1B365D"/>
+                </a:solidFill>
+                <a:latin typeface="Meiryo UI"/>
+              </a:defRPr>
+            </a:pPr>
+            <a:r>
+              <a:t>■ テストチャート印刷枚数半減：</a:t>
+            </a:r>
+          </a:p>
+          <a:p>
+            <a:pPr>
+              <a:spcAft>
+                <a:spcPts val="1200"/>
+              </a:spcAft>
+              <a:defRPr sz="1150">
                 <a:solidFill>
                   <a:srgbClr val="1E242B"/>
                 </a:solidFill>
@@ -22292,15 +21949,39 @@
               </a:defRPr>
             </a:pPr>
             <a:r>
-              <a:t>• 調整工程全体の正味作業時間を大幅に短縮する。</a:t>
+              <a:t>印刷チャート枚数を大幅削減：</a:t>
+            </a:r>
+            <a:br/>
+            <a:r>
+              <a:t>• 印刷画像パターン：17枚 -&gt; 9枚</a:t>
+            </a:r>
+            <a:br/>
+            <a:r>
+              <a:t>• コピー枚数：2枚 -&gt; 1枚</a:t>
             </a:r>
           </a:p>
           <a:p>
             <a:pPr>
               <a:spcAft>
-                <a:spcPts val="220"/>
+                <a:spcPts val="200"/>
               </a:spcAft>
-              <a:defRPr sz="830">
+              <a:defRPr sz="1250" b="1">
+                <a:solidFill>
+                  <a:srgbClr val="1B365D"/>
+                </a:solidFill>
+                <a:latin typeface="Meiryo UI"/>
+              </a:defRPr>
+            </a:pPr>
+            <a:r>
+              <a:t>■ ソフトウェア・AI活用：</a:t>
+            </a:r>
+          </a:p>
+          <a:p>
+            <a:pPr>
+              <a:spcAft>
+                <a:spcPts val="0"/>
+              </a:spcAft>
+              <a:defRPr sz="1150">
                 <a:solidFill>
                   <a:srgbClr val="1E242B"/>
                 </a:solidFill>
@@ -22308,55 +21989,7 @@
               </a:defRPr>
             </a:pPr>
             <a:r>
-              <a:t>• 画像検査におけるチャート印刷枚数を半減させる。</a:t>
-            </a:r>
-          </a:p>
-          <a:p>
-            <a:pPr>
-              <a:spcAft>
-                <a:spcPts val="220"/>
-              </a:spcAft>
-              <a:defRPr sz="830" b="1">
-                <a:solidFill>
-                  <a:srgbClr val="1E242B"/>
-                </a:solidFill>
-                <a:latin typeface="Meiryo UI"/>
-              </a:defRPr>
-            </a:pPr>
-            <a:r>
-              <a:t>■ 達成目標 ② ＆ ③：</a:t>
-            </a:r>
-          </a:p>
-          <a:p>
-            <a:pPr>
-              <a:spcAft>
-                <a:spcPts val="220"/>
-              </a:spcAft>
-              <a:defRPr sz="830">
-                <a:solidFill>
-                  <a:srgbClr val="1E242B"/>
-                </a:solidFill>
-                <a:latin typeface="Meiryo UI"/>
-              </a:defRPr>
-            </a:pPr>
-            <a:r>
-              <a:t>• 印刷画像パターン数を17枚 → 9枚、コピー枚数を2枚 → 1枚に削減。</a:t>
-            </a:r>
-          </a:p>
-          <a:p>
-            <a:pPr>
-              <a:spcAft>
-                <a:spcPts val="220"/>
-              </a:spcAft>
-              <a:defRPr sz="830">
-                <a:solidFill>
-                  <a:srgbClr val="1E242B"/>
-                </a:solidFill>
-                <a:latin typeface="Meiryo UI"/>
-              </a:defRPr>
-            </a:pPr>
-            <a:r>
-              <a:t>• Iris2024比で作業工数を半減（-50%短縮：工程見直し＋AI動画動作分析の併用）。</a:t>
+              <a:t>AI動画動作分析による無駄排除およびコマンド自動化による検査効率化。</a:t>
             </a:r>
           </a:p>
         </p:txBody>
@@ -22370,7 +22003,7 @@
         <p:spPr>
           <a:xfrm>
             <a:off x="8156448" y="1170432"/>
-            <a:ext cx="3779215" cy="2057400"/>
+            <a:ext cx="3779215" cy="3600000"/>
           </a:xfrm>
           <a:prstGeom prst="rect">
             <a:avLst/>
@@ -22468,7 +22101,7 @@
         <p:spPr>
           <a:xfrm>
             <a:off x="8229600" y="1490472"/>
-            <a:ext cx="3632911" cy="1709928"/>
+            <a:ext cx="3632911" cy="3540000"/>
           </a:xfrm>
           <a:prstGeom prst="rect">
             <a:avLst/>
@@ -22483,9 +22116,25 @@
           <a:p>
             <a:pPr>
               <a:spcAft>
-                <a:spcPts val="220"/>
+                <a:spcPts val="200"/>
               </a:spcAft>
-              <a:defRPr sz="830" b="1">
+              <a:defRPr sz="1250" b="1">
+                <a:solidFill>
+                  <a:srgbClr val="1B365D"/>
+                </a:solidFill>
+                <a:latin typeface="Meiryo UI"/>
+              </a:defRPr>
+            </a:pPr>
+            <a:r>
+              <a:t>■ 7大作業ブロック自動化推進：</a:t>
+            </a:r>
+          </a:p>
+          <a:p>
+            <a:pPr>
+              <a:spcAft>
+                <a:spcPts val="1200"/>
+              </a:spcAft>
+              <a:defRPr sz="1150">
                 <a:solidFill>
                   <a:srgbClr val="1E242B"/>
                 </a:solidFill>
@@ -22493,15 +22142,31 @@
               </a:defRPr>
             </a:pPr>
             <a:r>
-              <a:t>■ 方針：</a:t>
+              <a:t>耐電圧治具、カメラ濃度測定、DP自動スキャン、Spicaネットワークによる自動化を推進。</a:t>
             </a:r>
           </a:p>
           <a:p>
             <a:pPr>
               <a:spcAft>
-                <a:spcPts val="220"/>
+                <a:spcPts val="200"/>
               </a:spcAft>
-              <a:defRPr sz="830">
+              <a:defRPr sz="1250" b="1">
+                <a:solidFill>
+                  <a:srgbClr val="1B365D"/>
+                </a:solidFill>
+                <a:latin typeface="Meiryo UI"/>
+              </a:defRPr>
+            </a:pPr>
+            <a:r>
+              <a:t>■ KDTVNにおける達成目標：</a:t>
+            </a:r>
+          </a:p>
+          <a:p>
+            <a:pPr>
+              <a:spcAft>
+                <a:spcPts val="0"/>
+              </a:spcAft>
+              <a:defRPr sz="1150">
                 <a:solidFill>
                   <a:srgbClr val="1E242B"/>
                 </a:solidFill>
@@ -22509,15 +22174,75 @@
               </a:defRPr>
             </a:pPr>
             <a:r>
-              <a:t>• 自動化生産に向けた次世代製造基盤を構築する。</a:t>
+              <a:t>• 作業者1人当たり日産台数倍増：15.19台 -&gt; ≥ 30.38 ～ 33.33台/人/日</a:t>
+            </a:r>
+            <a:br/>
+            <a:r>
+              <a:t>• 作業者半減：16～18名 -&gt; 8～9名へ集約</a:t>
+            </a:r>
+            <a:br/>
+            <a:r>
+              <a:t>• 量産時工程能力：Cpk ≥ 1.33を達成</a:t>
+            </a:r>
+          </a:p>
+        </p:txBody>
+      </p:sp>
+      <p:sp>
+        <p:nvSpPr>
+          <p:cNvPr id="16" name="Rectangle 15"/>
+          <p:cNvSpPr/>
+          <p:nvPr/>
+        </p:nvSpPr>
+        <p:spPr>
+          <a:xfrm>
+            <a:off x="347472" y="5350000"/>
+            <a:ext cx="11497056" cy="1100000"/>
+          </a:xfrm>
+          <a:prstGeom prst="rect">
+            <a:avLst/>
+          </a:prstGeom>
+          <a:solidFill>
+            <a:srgbClr val="E8EEF5"/>
+          </a:solidFill>
+          <a:ln w="19050">
+            <a:solidFill>
+              <a:srgbClr val="2B547E"/>
+            </a:solidFill>
+          </a:ln>
+        </p:spPr>
+        <p:style>
+          <a:lnRef idx="1">
+            <a:schemeClr val="accent1"/>
+          </a:lnRef>
+          <a:fillRef idx="3">
+            <a:schemeClr val="accent1"/>
+          </a:fillRef>
+          <a:effectRef idx="2">
+            <a:schemeClr val="accent1"/>
+          </a:effectRef>
+          <a:fontRef idx="minor">
+            <a:schemeClr val="lt1"/>
+          </a:fontRef>
+        </p:style>
+        <p:txBody>
+          <a:bodyPr rtlCol="0" anchor="ctr" wrap="square" lIns="152400" rIns="152400" tIns="101600" bIns="101600"/>
+          <a:lstStyle/>
+          <a:p>
+            <a:pPr algn="ctr">
+              <a:defRPr sz="1250" b="1">
+                <a:solidFill>
+                  <a:srgbClr val="1B365D"/>
+                </a:solidFill>
+                <a:latin typeface="Meiryo UI"/>
+              </a:defRPr>
+            </a:pPr>
+            <a:r>
+              <a:t>3大方針の三位一体推進：工程再構築  ＋  チャート半減  ＋  自動化設備導入</a:t>
             </a:r>
           </a:p>
           <a:p>
-            <a:pPr>
-              <a:spcAft>
-                <a:spcPts val="220"/>
-              </a:spcAft>
-              <a:defRPr sz="830">
+            <a:pPr algn="ctr">
+              <a:defRPr sz="1150">
                 <a:solidFill>
                   <a:srgbClr val="1E242B"/>
                 </a:solidFill>
@@ -22525,641 +22250,11 @@
               </a:defRPr>
             </a:pPr>
             <a:r>
-              <a:t>• 3拠点（日本・中国・ベトナム）が連携し、省人化と生産性倍増を強力に推進。</a:t>
-            </a:r>
-          </a:p>
-          <a:p>
-            <a:pPr>
-              <a:spcAft>
-                <a:spcPts val="220"/>
-              </a:spcAft>
-              <a:defRPr sz="830" b="1">
-                <a:solidFill>
-                  <a:srgbClr val="1E242B"/>
-                </a:solidFill>
-                <a:latin typeface="Meiryo UI"/>
-              </a:defRPr>
-            </a:pPr>
-            <a:r>
-              <a:t>■ KDTVNにおける具体的目標：</a:t>
-            </a:r>
-          </a:p>
-          <a:p>
-            <a:pPr>
-              <a:spcAft>
-                <a:spcPts val="220"/>
-              </a:spcAft>
-              <a:defRPr sz="830">
-                <a:solidFill>
-                  <a:srgbClr val="1E242B"/>
-                </a:solidFill>
-                <a:latin typeface="Meiryo UI"/>
-              </a:defRPr>
-            </a:pPr>
-            <a:r>
-              <a:t>• 作業者1人当たり日産台数を倍増：15.19台 → ≥ 30.38 ～ 33.33台/人/日。</a:t>
-            </a:r>
-          </a:p>
-          <a:p>
-            <a:pPr>
-              <a:spcAft>
-                <a:spcPts val="220"/>
-              </a:spcAft>
-              <a:defRPr sz="830">
-                <a:solidFill>
-                  <a:srgbClr val="1E242B"/>
-                </a:solidFill>
-                <a:latin typeface="Meiryo UI"/>
-              </a:defRPr>
-            </a:pPr>
-            <a:r>
-              <a:t>• 作業者を50%削減（16～18名 → 8～9名）し、現行ラインで300台/日を達成。</a:t>
+              <a:t>工場増床や大幅増員を行わず、現行Iris2024ライン面積の制約内でIrisEXPのタクト97秒（日産300台）を確実に達成する。</a:t>
             </a:r>
           </a:p>
         </p:txBody>
       </p:sp>
-      <p:graphicFrame>
-        <p:nvGraphicFramePr>
-          <p:cNvPr id="16" name="Table 15"/>
-          <p:cNvGraphicFramePr>
-            <a:graphicFrameLocks noGrp="1"/>
-          </p:cNvGraphicFramePr>
-          <p:nvPr/>
-        </p:nvGraphicFramePr>
-        <p:xfrm>
-          <a:off x="256032" y="3337560"/>
-          <a:ext cx="11679631" cy="3200400"/>
-        </p:xfrm>
-        <a:graphic>
-          <a:graphicData uri="http://schemas.openxmlformats.org/drawingml/2006/table">
-            <a:tbl>
-              <a:tblPr firstRow="1" bandRow="1">
-                <a:tableStyleId>{5C22544A-7EE6-4342-B048-85BDC9FD1C3A}</a:tableStyleId>
-              </a:tblPr>
-              <a:tblGrid>
-                <a:gridCol w="1920240"/>
-                <a:gridCol w="1691640"/>
-                <a:gridCol w="2331720"/>
-                <a:gridCol w="5736031"/>
-              </a:tblGrid>
-              <a:tr h="640080">
-                <a:tc>
-                  <a:txBody>
-                    <a:bodyPr wrap="square"/>
-                    <a:lstStyle/>
-                    <a:p>
-                      <a:pPr algn="ctr">
-                        <a:defRPr sz="800" b="1">
-                          <a:solidFill>
-                            <a:srgbClr val="FFFFFF"/>
-                          </a:solidFill>
-                          <a:latin typeface="Meiryo UI"/>
-                        </a:defRPr>
-                      </a:pPr>
-                      <a:r>
-                        <a:t>全体目標</a:t>
-                      </a:r>
-                    </a:p>
-                  </a:txBody>
-                  <a:tcPr anchor="ctr" marL="45720" marR="45720" marT="18288" marB="18288">
-                    <a:solidFill>
-                      <a:srgbClr val="1B365D"/>
-                    </a:solidFill>
-                  </a:tcPr>
-                </a:tc>
-                <a:tc>
-                  <a:txBody>
-                    <a:bodyPr wrap="square"/>
-                    <a:lstStyle/>
-                    <a:p>
-                      <a:pPr algn="ctr">
-                        <a:defRPr sz="800" b="1">
-                          <a:solidFill>
-                            <a:srgbClr val="FFFFFF"/>
-                          </a:solidFill>
-                          <a:latin typeface="Meiryo UI"/>
-                        </a:defRPr>
-                      </a:pPr>
-                      <a:r>
-                        <a:t>定量目標</a:t>
-                      </a:r>
-                    </a:p>
-                  </a:txBody>
-                  <a:tcPr anchor="ctr" marL="45720" marR="45720" marT="18288" marB="18288">
-                    <a:solidFill>
-                      <a:srgbClr val="1B365D"/>
-                    </a:solidFill>
-                  </a:tcPr>
-                </a:tc>
-                <a:tc>
-                  <a:txBody>
-                    <a:bodyPr wrap="square"/>
-                    <a:lstStyle/>
-                    <a:p>
-                      <a:pPr algn="ctr">
-                        <a:defRPr sz="800" b="1">
-                          <a:solidFill>
-                            <a:srgbClr val="FFFFFF"/>
-                          </a:solidFill>
-                          <a:latin typeface="Meiryo UI"/>
-                        </a:defRPr>
-                      </a:pPr>
-                      <a:r>
-                        <a:t>基本開発活動</a:t>
-                      </a:r>
-                    </a:p>
-                  </a:txBody>
-                  <a:tcPr anchor="ctr" marL="45720" marR="45720" marT="18288" marB="18288">
-                    <a:solidFill>
-                      <a:srgbClr val="1B365D"/>
-                    </a:solidFill>
-                  </a:tcPr>
-                </a:tc>
-                <a:tc>
-                  <a:txBody>
-                    <a:bodyPr wrap="square"/>
-                    <a:lstStyle/>
-                    <a:p>
-                      <a:pPr algn="ctr">
-                        <a:defRPr sz="800" b="1">
-                          <a:solidFill>
-                            <a:srgbClr val="FFFFFF"/>
-                          </a:solidFill>
-                          <a:latin typeface="Meiryo UI"/>
-                        </a:defRPr>
-                      </a:pPr>
-                      <a:r>
-                        <a:t>ベトナム工場における重点実施提案（開発目標VN1シートより）</a:t>
-                      </a:r>
-                    </a:p>
-                  </a:txBody>
-                  <a:tcPr anchor="ctr" marL="45720" marR="45720" marT="18288" marB="18288">
-                    <a:solidFill>
-                      <a:srgbClr val="1B365D"/>
-                    </a:solidFill>
-                  </a:tcPr>
-                </a:tc>
-              </a:tr>
-              <a:tr h="640080">
-                <a:tc>
-                  <a:txBody>
-                    <a:bodyPr wrap="square"/>
-                    <a:lstStyle/>
-                    <a:p>
-                      <a:pPr algn="l">
-                        <a:defRPr sz="710" b="1">
-                          <a:solidFill>
-                            <a:srgbClr val="1E242B"/>
-                          </a:solidFill>
-                          <a:latin typeface="Meiryo UI"/>
-                        </a:defRPr>
-                      </a:pPr>
-                      <a:r>
-                        <a:t>調整工程の再設計による</a:t>
-                      </a:r>
-                      <a:br/>
-                      <a:r>
-                        <a:t>生産性2倍向上</a:t>
-                      </a:r>
-                      <a:br/>
-                      <a:r>
-                        <a:t>（現行ラインでの生産確保）</a:t>
-                      </a:r>
-                    </a:p>
-                  </a:txBody>
-                  <a:tcPr anchor="ctr" marL="45720" marR="45720" marT="18288" marB="18288">
-                    <a:solidFill>
-                      <a:srgbClr val="E8EEF5"/>
-                    </a:solidFill>
-                  </a:tcPr>
-                </a:tc>
-                <a:tc>
-                  <a:txBody>
-                    <a:bodyPr wrap="square"/>
-                    <a:lstStyle/>
-                    <a:p>
-                      <a:pPr algn="l">
-                        <a:defRPr sz="710">
-                          <a:solidFill>
-                            <a:srgbClr val="1E242B"/>
-                          </a:solidFill>
-                          <a:latin typeface="Meiryo UI"/>
-                        </a:defRPr>
-                      </a:pPr>
-                      <a:r>
-                        <a:t>• 生産性：2倍向上</a:t>
-                      </a:r>
-                      <a:br/>
-                      <a:r>
-                        <a:t>（15.19 -&gt; ≥30.38台/人/日）</a:t>
-                      </a:r>
-                      <a:br/>
-                      <a:r>
-                        <a:t>• 作業者：50%削減</a:t>
-                      </a:r>
-                    </a:p>
-                  </a:txBody>
-                  <a:tcPr anchor="ctr" marL="45720" marR="45720" marT="18288" marB="18288">
-                    <a:solidFill>
-                      <a:srgbClr val="E8EEF5"/>
-                    </a:solidFill>
-                  </a:tcPr>
-                </a:tc>
-                <a:tc>
-                  <a:txBody>
-                    <a:bodyPr wrap="square"/>
-                    <a:lstStyle/>
-                    <a:p>
-                      <a:pPr algn="l">
-                        <a:defRPr sz="710">
-                          <a:solidFill>
-                            <a:srgbClr val="1E242B"/>
-                          </a:solidFill>
-                          <a:latin typeface="Meiryo UI"/>
-                        </a:defRPr>
-                      </a:pPr>
-                      <a:r>
-                        <a:t>1. 工程再設計とUNIT保証：</a:t>
-                      </a:r>
-                      <a:br/>
-                      <a:r>
-                        <a:t>UNITで実施可能な検査は前工程へ移行または廃止し、UNIT機能を保証する</a:t>
-                      </a:r>
-                    </a:p>
-                  </a:txBody>
-                  <a:tcPr anchor="ctr" marL="45720" marR="45720" marT="18288" marB="18288">
-                    <a:solidFill>
-                      <a:srgbClr val="E8EEF5"/>
-                    </a:solidFill>
-                  </a:tcPr>
-                </a:tc>
-                <a:tc>
-                  <a:txBody>
-                    <a:bodyPr wrap="square"/>
-                    <a:lstStyle/>
-                    <a:p>
-                      <a:pPr algn="l">
-                        <a:defRPr sz="710">
-                          <a:solidFill>
-                            <a:srgbClr val="1E242B"/>
-                          </a:solidFill>
-                          <a:latin typeface="Meiryo UI"/>
-                        </a:defRPr>
-                      </a:pPr>
-                      <a:r>
-                        <a:t>• Athena/Spica系の調整モデル（Host PC ～ Tablet ～ Mini PC ～ Machine）をIrisEXPへ適用し、4ステーション（A-1～A-4）へ集約。</a:t>
-                      </a:r>
-                      <a:br/>
-                      <a:r>
-                        <a:t>• 廃トナー満杯検知U155のライン設定を廃止（本体側Push Switch追加・Sub-Assy抵抗測定保証）；U201手押し確認を廃止（Host PCログ照合）；カバー6枚組付けを組立工程へ移管。</a:t>
-                      </a:r>
-                    </a:p>
-                  </a:txBody>
-                  <a:tcPr anchor="ctr" marL="45720" marR="45720" marT="18288" marB="18288">
-                    <a:solidFill>
-                      <a:srgbClr val="E8EEF5"/>
-                    </a:solidFill>
-                  </a:tcPr>
-                </a:tc>
-              </a:tr>
-              <a:tr h="640080">
-                <a:tc>
-                  <a:txBody>
-                    <a:bodyPr wrap="square"/>
-                    <a:lstStyle/>
-                    <a:p>
-                      <a:pPr algn="l">
-                        <a:defRPr sz="710" b="1">
-                          <a:solidFill>
-                            <a:srgbClr val="1E242B"/>
-                          </a:solidFill>
-                          <a:latin typeface="Meiryo UI"/>
-                        </a:defRPr>
-                      </a:pPr>
-                      <a:r>
-                        <a:t>不要作業・手待ちの排除と</a:t>
-                      </a:r>
-                      <a:br/>
-                      <a:r>
-                        <a:t>テストチャート印刷削減</a:t>
-                      </a:r>
-                    </a:p>
-                  </a:txBody>
-                  <a:tcPr anchor="ctr" marL="45720" marR="45720" marT="18288" marB="18288">
-                    <a:solidFill>
-                      <a:srgbClr val="F7F9FC"/>
-                    </a:solidFill>
-                  </a:tcPr>
-                </a:tc>
-                <a:tc>
-                  <a:txBody>
-                    <a:bodyPr wrap="square"/>
-                    <a:lstStyle/>
-                    <a:p>
-                      <a:pPr algn="l">
-                        <a:defRPr sz="710">
-                          <a:solidFill>
-                            <a:srgbClr val="1E242B"/>
-                          </a:solidFill>
-                          <a:latin typeface="Meiryo UI"/>
-                        </a:defRPr>
-                      </a:pPr>
-                      <a:r>
-                        <a:t>• 作業時間 50% 削減：</a:t>
-                      </a:r>
-                      <a:br/>
-                      <a:r>
-                        <a:t>  - 正味時間：1,083s -&gt; ≤ 541s</a:t>
-                      </a:r>
-                      <a:br/>
-                      <a:r>
-                        <a:t>  - 総滞留：2,350s -&gt; ≤ 1,175s</a:t>
-                      </a:r>
-                      <a:br/>
-                      <a:r>
-                        <a:t>• 印刷枚数削減：</a:t>
-                      </a:r>
-                      <a:br/>
-                      <a:r>
-                        <a:t>  - 印刷：17枚 -&gt; 9枚</a:t>
-                      </a:r>
-                      <a:br/>
-                      <a:r>
-                        <a:t>  - コピー：2枚 -&gt; 1枚</a:t>
-                      </a:r>
-                    </a:p>
-                  </a:txBody>
-                  <a:tcPr anchor="ctr" marL="45720" marR="45720" marT="18288" marB="18288">
-                    <a:solidFill>
-                      <a:srgbClr val="F7F9FC"/>
-                    </a:solidFill>
-                  </a:tcPr>
-                </a:tc>
-                <a:tc>
-                  <a:txBody>
-                    <a:bodyPr wrap="square"/>
-                    <a:lstStyle/>
-                    <a:p>
-                      <a:pPr algn="l">
-                        <a:defRPr sz="710">
-                          <a:solidFill>
-                            <a:srgbClr val="1E242B"/>
-                          </a:solidFill>
-                          <a:latin typeface="Meiryo UI"/>
-                        </a:defRPr>
-                      </a:pPr>
-                      <a:r>
-                        <a:t>2. チャート印刷削減と手作業排除：</a:t>
-                      </a:r>
-                      <a:br/>
-                      <a:r>
-                        <a:t>重複スキャンの廃止、チャート統合、およびコマンド自動化</a:t>
-                      </a:r>
-                    </a:p>
-                  </a:txBody>
-                  <a:tcPr anchor="ctr" marL="45720" marR="45720" marT="18288" marB="18288">
-                    <a:solidFill>
-                      <a:srgbClr val="F7F9FC"/>
-                    </a:solidFill>
-                  </a:tcPr>
-                </a:tc>
-                <a:tc>
-                  <a:txBody>
-                    <a:bodyPr wrap="square"/>
-                    <a:lstStyle/>
-                    <a:p>
-                      <a:pPr algn="l">
-                        <a:defRPr sz="710">
-                          <a:solidFill>
-                            <a:srgbClr val="1E242B"/>
-                          </a:solidFill>
-                          <a:latin typeface="Meiryo UI"/>
-                        </a:defRPr>
-                      </a:pPr>
-                      <a:r>
-                        <a:t>1) USBによるライン上でのFW再書き込み廃止（更新時のみ実施、-13s～25s） ｜ 2) 初期設定後の英語自動切替 ｜ 3) 無負荷カセット開閉確認廃止 ｜ 4) U950前RCG印刷廃止（2Wayクラッチ確認をColor Registへ統合） ｜ 5) AI動画動作分析による無駄排除 ｜ 6) コマンドによるMaintenance Mode Uxxx即時突入 ｜ 7) RCG LedgerをColor Registへ統合 ｜ 8) RCG LSU SkewをColor Registへ統合 ｜ 9) U410 Halftoneキャリブレーション一括実行 ｜ 10) Halftone MonoをCheck Blackへ統合 ｜ 11) 厚紙/封筒印刷コマンド統合 ｜ 12) DC-1とGrayコピーを1枚に統合。</a:t>
-                      </a:r>
-                    </a:p>
-                  </a:txBody>
-                  <a:tcPr anchor="ctr" marL="45720" marR="45720" marT="18288" marB="18288">
-                    <a:solidFill>
-                      <a:srgbClr val="F7F9FC"/>
-                    </a:solidFill>
-                  </a:tcPr>
-                </a:tc>
-              </a:tr>
-              <a:tr h="640080">
-                <a:tc>
-                  <a:txBody>
-                    <a:bodyPr wrap="square"/>
-                    <a:lstStyle/>
-                    <a:p>
-                      <a:pPr algn="l">
-                        <a:defRPr sz="710" b="1">
-                          <a:solidFill>
-                            <a:srgbClr val="1E242B"/>
-                          </a:solidFill>
-                          <a:latin typeface="Meiryo UI"/>
-                        </a:defRPr>
-                      </a:pPr>
-                      <a:r>
-                        <a:t>自動化設備・治具導入と</a:t>
-                      </a:r>
-                      <a:br/>
-                      <a:r>
-                        <a:t>次世代機（IrisX）への展開</a:t>
-                      </a:r>
-                    </a:p>
-                  </a:txBody>
-                  <a:tcPr anchor="ctr" marL="45720" marR="45720" marT="18288" marB="18288">
-                    <a:solidFill>
-                      <a:srgbClr val="EAF7EE"/>
-                    </a:solidFill>
-                  </a:tcPr>
-                </a:tc>
-                <a:tc>
-                  <a:txBody>
-                    <a:bodyPr wrap="square"/>
-                    <a:lstStyle/>
-                    <a:p>
-                      <a:pPr algn="l">
-                        <a:defRPr sz="710">
-                          <a:solidFill>
-                            <a:srgbClr val="1E242B"/>
-                          </a:solidFill>
-                          <a:latin typeface="Meiryo UI"/>
-                        </a:defRPr>
-                      </a:pPr>
-                      <a:r>
-                        <a:t>• 7大作業ブロックの自動化</a:t>
-                      </a:r>
-                      <a:br/>
-                      <a:r>
-                        <a:t>• 量産時工程能力：Cpk ≥ 1.33</a:t>
-                      </a:r>
-                    </a:p>
-                  </a:txBody>
-                  <a:tcPr anchor="ctr" marL="45720" marR="45720" marT="18288" marB="18288">
-                    <a:solidFill>
-                      <a:srgbClr val="EAF7EE"/>
-                    </a:solidFill>
-                  </a:tcPr>
-                </a:tc>
-                <a:tc>
-                  <a:txBody>
-                    <a:bodyPr wrap="square"/>
-                    <a:lstStyle/>
-                    <a:p>
-                      <a:pPr algn="l">
-                        <a:defRPr sz="710">
-                          <a:solidFill>
-                            <a:srgbClr val="1E242B"/>
-                          </a:solidFill>
-                          <a:latin typeface="Meiryo UI"/>
-                        </a:defRPr>
-                      </a:pPr>
-                      <a:r>
-                        <a:t>3. 治具・カメラ・DP・ソフト自動化：</a:t>
-                      </a:r>
-                      <a:br/>
-                      <a:r>
-                        <a:t>Iris2024で未取得のデータを採取し、モジュール品質と画像を関連付ける</a:t>
-                      </a:r>
-                    </a:p>
-                  </a:txBody>
-                  <a:tcPr anchor="ctr" marL="45720" marR="45720" marT="18288" marB="18288">
-                    <a:solidFill>
-                      <a:srgbClr val="EAF7EE"/>
-                    </a:solidFill>
-                  </a:tcPr>
-                </a:tc>
-                <a:tc>
-                  <a:txBody>
-                    <a:bodyPr wrap="square"/>
-                    <a:lstStyle/>
-                    <a:p>
-                      <a:pPr algn="l">
-                        <a:defRPr sz="710">
-                          <a:solidFill>
-                            <a:srgbClr val="1E242B"/>
-                          </a:solidFill>
-                          <a:latin typeface="Meiryo UI"/>
-                        </a:defRPr>
-                      </a:pPr>
-                      <a:r>
-                        <a:t>1) オプション接続ワンタッチ治具 ｜ 2) カバー全閉状態でのアース導通・耐電圧自動検査治具（No.22） ｜ 3) 原稿自動搬送（ロボット方式から実機DPスキャン方式へ見直し） ｜ 4) USB認識およびU201タッチパネル自動検証 ｜ 5) 実機検査機へのDP増設による連続スキャン・PC自動判定 ｜ 6) 異音自動判定ソフトウェア ｜ 7) HIKROBOT工業用カメラによる濃度自動測定、余白測定およびPPTスキャン統合。</a:t>
-                      </a:r>
-                    </a:p>
-                  </a:txBody>
-                  <a:tcPr anchor="ctr" marL="45720" marR="45720" marT="18288" marB="18288">
-                    <a:solidFill>
-                      <a:srgbClr val="EAF7EE"/>
-                    </a:solidFill>
-                  </a:tcPr>
-                </a:tc>
-              </a:tr>
-              <a:tr h="640080">
-                <a:tc>
-                  <a:txBody>
-                    <a:bodyPr wrap="square"/>
-                    <a:lstStyle/>
-                    <a:p>
-                      <a:pPr algn="l">
-                        <a:defRPr sz="710" b="1">
-                          <a:solidFill>
-                            <a:srgbClr val="1E242B"/>
-                          </a:solidFill>
-                          <a:latin typeface="Meiryo UI"/>
-                        </a:defRPr>
-                      </a:pPr>
-                      <a:r>
-                        <a:t>開発目標総括</a:t>
-                      </a:r>
-                    </a:p>
-                  </a:txBody>
-                  <a:tcPr anchor="ctr" marL="45720" marR="45720" marT="18288" marB="18288">
-                    <a:solidFill>
-                      <a:srgbClr val="FEF7E6"/>
-                    </a:solidFill>
-                  </a:tcPr>
-                </a:tc>
-                <a:tc>
-                  <a:txBody>
-                    <a:bodyPr wrap="square"/>
-                    <a:lstStyle/>
-                    <a:p>
-                      <a:pPr algn="l">
-                        <a:defRPr sz="710">
-                          <a:solidFill>
-                            <a:srgbClr val="1E242B"/>
-                          </a:solidFill>
-                          <a:latin typeface="Meiryo UI"/>
-                        </a:defRPr>
-                      </a:pPr>
-                      <a:r>
-                        <a:t>作業者1人当たり日産台数倍増</a:t>
-                      </a:r>
-                    </a:p>
-                  </a:txBody>
-                  <a:tcPr anchor="ctr" marL="45720" marR="45720" marT="18288" marB="18288">
-                    <a:solidFill>
-                      <a:srgbClr val="FEF7E6"/>
-                    </a:solidFill>
-                  </a:tcPr>
-                </a:tc>
-                <a:tc>
-                  <a:txBody>
-                    <a:bodyPr wrap="square"/>
-                    <a:lstStyle/>
-                    <a:p>
-                      <a:pPr algn="l">
-                        <a:defRPr sz="710">
-                          <a:solidFill>
-                            <a:srgbClr val="1E242B"/>
-                          </a:solidFill>
-                          <a:latin typeface="Meiryo UI"/>
-                        </a:defRPr>
-                      </a:pPr>
-                      <a:r>
-                        <a:t>工程再構築 ＋ チャート半減 ＋ 自動化の三位一体推進</a:t>
-                      </a:r>
-                    </a:p>
-                  </a:txBody>
-                  <a:tcPr anchor="ctr" marL="45720" marR="45720" marT="18288" marB="18288">
-                    <a:solidFill>
-                      <a:srgbClr val="FEF7E6"/>
-                    </a:solidFill>
-                  </a:tcPr>
-                </a:tc>
-                <a:tc>
-                  <a:txBody>
-                    <a:bodyPr wrap="square"/>
-                    <a:lstStyle/>
-                    <a:p>
-                      <a:pPr algn="l">
-                        <a:defRPr sz="710">
-                          <a:solidFill>
-                            <a:srgbClr val="1E242B"/>
-                          </a:solidFill>
-                          <a:latin typeface="Meiryo UI"/>
-                        </a:defRPr>
-                      </a:pPr>
-                      <a:r>
-                        <a:t>工場増床や大幅増員を行わず、現行Iris2024ライン面積の制約内でIrisEXPのタクト97秒（日産300台）を確実に達成する。</a:t>
-                      </a:r>
-                    </a:p>
-                  </a:txBody>
-                  <a:tcPr anchor="ctr" marL="45720" marR="45720" marT="18288" marB="18288">
-                    <a:solidFill>
-                      <a:srgbClr val="FEF7E6"/>
-                    </a:solidFill>
-                  </a:tcPr>
-                </a:tc>
-              </a:tr>
-            </a:tbl>
-          </a:graphicData>
-        </a:graphic>
-      </p:graphicFrame>
     </p:spTree>
   </p:cSld>
   <p:clrMapOvr>
@@ -23388,7 +22483,7 @@
           <a:lstStyle/>
           <a:p>
             <a:pPr algn="ctr">
-              <a:defRPr sz="960" b="1">
+              <a:defRPr sz="1200" b="1">
                 <a:solidFill>
                   <a:srgbClr val="1B365D"/>
                 </a:solidFill>
@@ -23396,6 +22491,12 @@
               </a:defRPr>
             </a:pPr>
             <a:r>
+              <a:rPr sz="1200" b="1">
+                <a:solidFill>
+                  <a:srgbClr val="1B365D"/>
+                </a:solidFill>
+                <a:latin typeface="Meiryo UI"/>
+              </a:rPr>
               <a:t>■ 日本が全体設計・レビューを担い、ベトナム・中国が現場視点で改善を立案推進。3拠点が共通ファイルと定例連携会で共有し、ベトナムは現場分析から実証検証・進捗管理までを主体的に推進する。</a:t>
             </a:r>
           </a:p>
@@ -24730,7 +23831,7 @@
           <a:lstStyle/>
           <a:p>
             <a:pPr algn="ctr">
-              <a:defRPr sz="960" b="1">
+              <a:defRPr sz="1200" b="1">
                 <a:solidFill>
                   <a:srgbClr val="1B365D"/>
                 </a:solidFill>
@@ -24738,6 +23839,12 @@
               </a:defRPr>
             </a:pPr>
             <a:r>
+              <a:rPr sz="1200" b="1">
+                <a:solidFill>
+                  <a:srgbClr val="1B365D"/>
+                </a:solidFill>
+                <a:latin typeface="Meiryo UI"/>
+              </a:rPr>
               <a:t>■ ベトナムは第1次11提案＋第2次追加9提案の計20提案を立案。見積書（Iris EXPのVN提案.xlsx）に記載の自動化3提案は総額 855.69百万VND（32,911.15 USD）。このうちNo.22（耐圧安全検査治具 101.69百万VND）を先行申請する。</a:t>
             </a:r>
           </a:p>
@@ -26064,6 +25171,2466 @@
               </a:defRPr>
             </a:pPr>
             <a:r>
+              <a:t>4.5 投資試算・承認申請</a:t>
+            </a:r>
+          </a:p>
+        </p:txBody>
+      </p:sp>
+      <p:sp>
+        <p:nvSpPr>
+          <p:cNvPr id="4" name="TextBox 3"/>
+          <p:cNvSpPr txBox="1"/>
+          <p:nvPr/>
+        </p:nvSpPr>
+        <p:spPr>
+          <a:xfrm>
+            <a:off x="2377440" y="54864"/>
+            <a:ext cx="8961120" cy="457200"/>
+          </a:xfrm>
+          <a:prstGeom prst="rect">
+            <a:avLst/>
+          </a:prstGeom>
+          <a:noFill/>
+        </p:spPr>
+        <p:txBody>
+          <a:bodyPr wrap="square" lIns="18288" rIns="18288">
+            <a:spAutoFit/>
+          </a:bodyPr>
+          <a:lstStyle/>
+          <a:p>
+            <a:pPr>
+              <a:defRPr sz="1450" b="1">
+                <a:solidFill>
+                  <a:srgbClr val="FFFFFF"/>
+                </a:solidFill>
+                <a:latin typeface="Meiryo UI"/>
+              </a:defRPr>
+            </a:pPr>
+            <a:r>
+              <a:t>No.22詳細見積（101.69百万VND / 3,911.15 USD）と稟議承認申請の2つの選択案</a:t>
+            </a:r>
+          </a:p>
+        </p:txBody>
+      </p:sp>
+      <p:sp>
+        <p:nvSpPr>
+          <p:cNvPr id="5" name="TextBox 4"/>
+          <p:cNvSpPr txBox="1"/>
+          <p:nvPr/>
+        </p:nvSpPr>
+        <p:spPr>
+          <a:xfrm>
+            <a:off x="11292840" y="109728"/>
+            <a:ext cx="731520" cy="347472"/>
+          </a:xfrm>
+          <a:prstGeom prst="rect">
+            <a:avLst/>
+          </a:prstGeom>
+          <a:noFill/>
+        </p:spPr>
+        <p:txBody>
+          <a:bodyPr wrap="none">
+            <a:spAutoFit/>
+          </a:bodyPr>
+          <a:lstStyle/>
+          <a:p>
+            <a:pPr>
+              <a:defRPr sz="1200">
+                <a:solidFill>
+                  <a:srgbClr val="D0D8E8"/>
+                </a:solidFill>
+                <a:latin typeface="Meiryo UI"/>
+              </a:defRPr>
+            </a:pPr>
+            <a:r>
+              <a:t>7 / 15</a:t>
+            </a:r>
+          </a:p>
+        </p:txBody>
+      </p:sp>
+      <p:sp>
+        <p:nvSpPr>
+          <p:cNvPr id="6" name="Rectangle 5"/>
+          <p:cNvSpPr/>
+          <p:nvPr/>
+        </p:nvSpPr>
+        <p:spPr>
+          <a:xfrm>
+            <a:off x="256032" y="640080"/>
+            <a:ext cx="11679631" cy="475488"/>
+          </a:xfrm>
+          <a:prstGeom prst="rect">
+            <a:avLst/>
+          </a:prstGeom>
+          <a:solidFill>
+            <a:srgbClr val="E8EEF5"/>
+          </a:solidFill>
+          <a:ln w="12700">
+            <a:solidFill>
+              <a:srgbClr val="2B547E"/>
+            </a:solidFill>
+          </a:ln>
+        </p:spPr>
+        <p:style>
+          <a:lnRef idx="1">
+            <a:schemeClr val="accent1"/>
+          </a:lnRef>
+          <a:fillRef idx="3">
+            <a:schemeClr val="accent1"/>
+          </a:fillRef>
+          <a:effectRef idx="2">
+            <a:schemeClr val="accent1"/>
+          </a:effectRef>
+          <a:fontRef idx="minor">
+            <a:schemeClr val="lt1"/>
+          </a:fontRef>
+        </p:style>
+        <p:txBody>
+          <a:bodyPr rtlCol="0" anchor="ctr" wrap="square" lIns="109728" rIns="109728" tIns="27432" bIns="27432"/>
+          <a:lstStyle/>
+          <a:p>
+            <a:pPr algn="ctr">
+              <a:defRPr sz="1200" b="1">
+                <a:solidFill>
+                  <a:srgbClr val="1B365D"/>
+                </a:solidFill>
+                <a:latin typeface="Meiryo UI"/>
+              </a:defRPr>
+            </a:pPr>
+            <a:r>
+              <a:rPr sz="1200" b="1">
+                <a:solidFill>
+                  <a:srgbClr val="1B365D"/>
+                </a:solidFill>
+                <a:latin typeface="Meiryo UI"/>
+              </a:rPr>
+              <a:t>■ 案A（推奨：No.22耐圧安全検査治具 101,690,000 VND / 3,911.15 USDの先行承認、高額ロボットNo.23, 24はDP・Host PCへ置換）または 案B（見積書3案件一括：855,690,000 VND / 32,911.15 USD）の決裁を仰ぐ。</a:t>
+            </a:r>
+          </a:p>
+        </p:txBody>
+      </p:sp>
+      <p:sp>
+        <p:nvSpPr>
+          <p:cNvPr id="7" name="TextBox 6"/>
+          <p:cNvSpPr txBox="1"/>
+          <p:nvPr/>
+        </p:nvSpPr>
+        <p:spPr>
+          <a:xfrm>
+            <a:off x="256032" y="1152144"/>
+            <a:ext cx="6629400" cy="201168"/>
+          </a:xfrm>
+          <a:prstGeom prst="rect">
+            <a:avLst/>
+          </a:prstGeom>
+          <a:noFill/>
+        </p:spPr>
+        <p:txBody>
+          <a:bodyPr wrap="square" lIns="18288" rIns="18288" tIns="9144" bIns="9144">
+            <a:spAutoFit/>
+          </a:bodyPr>
+          <a:lstStyle/>
+          <a:p>
+            <a:pPr>
+              <a:defRPr sz="780" b="1">
+                <a:solidFill>
+                  <a:srgbClr val="1E6E3E"/>
+                </a:solidFill>
+                <a:latin typeface="Meiryo UI"/>
+              </a:defRPr>
+            </a:pPr>
+            <a:r>
+              <a:t>■ 1. 投資試算シート（IRIS EXPのVN提案.xlsx）記載の費用構成（社内レート 26,000 VND/USD）</a:t>
+            </a:r>
+          </a:p>
+        </p:txBody>
+      </p:sp>
+      <p:graphicFrame>
+        <p:nvGraphicFramePr>
+          <p:cNvPr id="8" name="Table 7"/>
+          <p:cNvGraphicFramePr>
+            <a:graphicFrameLocks noGrp="1"/>
+          </p:cNvGraphicFramePr>
+          <p:nvPr/>
+        </p:nvGraphicFramePr>
+        <p:xfrm>
+          <a:off x="256032" y="1353312"/>
+          <a:ext cx="6629400" cy="2651760"/>
+        </p:xfrm>
+        <a:graphic>
+          <a:graphicData uri="http://schemas.openxmlformats.org/drawingml/2006/table">
+            <a:tbl>
+              <a:tblPr firstRow="1" bandRow="1">
+                <a:tableStyleId>{5C22544A-7EE6-4342-B048-85BDC9FD1C3A}</a:tableStyleId>
+              </a:tblPr>
+              <a:tblGrid>
+                <a:gridCol w="502920"/>
+                <a:gridCol w="2697480"/>
+                <a:gridCol w="1188720"/>
+                <a:gridCol w="1097280"/>
+                <a:gridCol w="1143000"/>
+              </a:tblGrid>
+              <a:tr h="241069">
+                <a:tc>
+                  <a:txBody>
+                    <a:bodyPr wrap="square"/>
+                    <a:lstStyle/>
+                    <a:p>
+                      <a:pPr algn="ctr">
+                        <a:defRPr sz="620" b="1">
+                          <a:solidFill>
+                            <a:srgbClr val="FFFFFF"/>
+                          </a:solidFill>
+                          <a:latin typeface="Meiryo UI"/>
+                        </a:defRPr>
+                      </a:pPr>
+                      <a:r>
+                        <a:t>項目</a:t>
+                      </a:r>
+                    </a:p>
+                  </a:txBody>
+                  <a:tcPr anchor="ctr" marL="36576" marR="36576" marT="9144" marB="9144">
+                    <a:solidFill>
+                      <a:srgbClr val="1B365D"/>
+                    </a:solidFill>
+                  </a:tcPr>
+                </a:tc>
+                <a:tc>
+                  <a:txBody>
+                    <a:bodyPr wrap="square"/>
+                    <a:lstStyle/>
+                    <a:p>
+                      <a:pPr algn="ctr">
+                        <a:defRPr sz="620" b="1">
+                          <a:solidFill>
+                            <a:srgbClr val="FFFFFF"/>
+                          </a:solidFill>
+                          <a:latin typeface="Meiryo UI"/>
+                        </a:defRPr>
+                      </a:pPr>
+                      <a:r>
+                        <a:t>設備項目（Iris EXPのVN提案.xlsx）</a:t>
+                      </a:r>
+                    </a:p>
+                  </a:txBody>
+                  <a:tcPr anchor="ctr" marL="36576" marR="36576" marT="9144" marB="9144">
+                    <a:solidFill>
+                      <a:srgbClr val="1B365D"/>
+                    </a:solidFill>
+                  </a:tcPr>
+                </a:tc>
+                <a:tc>
+                  <a:txBody>
+                    <a:bodyPr wrap="square"/>
+                    <a:lstStyle/>
+                    <a:p>
+                      <a:pPr algn="ctr">
+                        <a:defRPr sz="620" b="1">
+                          <a:solidFill>
+                            <a:srgbClr val="FFFFFF"/>
+                          </a:solidFill>
+                          <a:latin typeface="Meiryo UI"/>
+                        </a:defRPr>
+                      </a:pPr>
+                      <a:r>
+                        <a:t>金額（VND）</a:t>
+                      </a:r>
+                    </a:p>
+                  </a:txBody>
+                  <a:tcPr anchor="ctr" marL="36576" marR="36576" marT="9144" marB="9144">
+                    <a:solidFill>
+                      <a:srgbClr val="1B365D"/>
+                    </a:solidFill>
+                  </a:tcPr>
+                </a:tc>
+                <a:tc>
+                  <a:txBody>
+                    <a:bodyPr wrap="square"/>
+                    <a:lstStyle/>
+                    <a:p>
+                      <a:pPr algn="ctr">
+                        <a:defRPr sz="620" b="1">
+                          <a:solidFill>
+                            <a:srgbClr val="FFFFFF"/>
+                          </a:solidFill>
+                          <a:latin typeface="Meiryo UI"/>
+                        </a:defRPr>
+                      </a:pPr>
+                      <a:r>
+                        <a:t>換算額（USD）</a:t>
+                      </a:r>
+                    </a:p>
+                  </a:txBody>
+                  <a:tcPr anchor="ctr" marL="36576" marR="36576" marT="9144" marB="9144">
+                    <a:solidFill>
+                      <a:srgbClr val="1B365D"/>
+                    </a:solidFill>
+                  </a:tcPr>
+                </a:tc>
+                <a:tc>
+                  <a:txBody>
+                    <a:bodyPr wrap="square"/>
+                    <a:lstStyle/>
+                    <a:p>
+                      <a:pPr algn="ctr">
+                        <a:defRPr sz="620" b="1">
+                          <a:solidFill>
+                            <a:srgbClr val="FFFFFF"/>
+                          </a:solidFill>
+                          <a:latin typeface="Meiryo UI"/>
+                        </a:defRPr>
+                      </a:pPr>
+                      <a:r>
+                        <a:t>効果および費用割合</a:t>
+                      </a:r>
+                    </a:p>
+                  </a:txBody>
+                  <a:tcPr anchor="ctr" marL="36576" marR="36576" marT="9144" marB="9144">
+                    <a:solidFill>
+                      <a:srgbClr val="1B365D"/>
+                    </a:solidFill>
+                  </a:tcPr>
+                </a:tc>
+              </a:tr>
+              <a:tr h="241069">
+                <a:tc>
+                  <a:txBody>
+                    <a:bodyPr wrap="square"/>
+                    <a:lstStyle/>
+                    <a:p>
+                      <a:pPr algn="ctr">
+                        <a:defRPr sz="530" b="1">
+                          <a:solidFill>
+                            <a:srgbClr val="1E242B"/>
+                          </a:solidFill>
+                          <a:latin typeface="Meiryo UI"/>
+                        </a:defRPr>
+                      </a:pPr>
+                      <a:r>
+                        <a:t>No.22</a:t>
+                      </a:r>
+                      <a:br/>
+                      <a:r>
+                        <a:t>グループ1</a:t>
+                      </a:r>
+                    </a:p>
+                  </a:txBody>
+                  <a:tcPr anchor="ctr" marL="36576" marR="36576" marT="9144" marB="9144">
+                    <a:solidFill>
+                      <a:srgbClr val="FFFFFF"/>
+                    </a:solidFill>
+                  </a:tcPr>
+                </a:tc>
+                <a:tc>
+                  <a:txBody>
+                    <a:bodyPr wrap="square"/>
+                    <a:lstStyle/>
+                    <a:p>
+                      <a:pPr algn="l">
+                        <a:defRPr sz="530">
+                          <a:solidFill>
+                            <a:srgbClr val="1E242B"/>
+                          </a:solidFill>
+                          <a:latin typeface="Meiryo UI"/>
+                        </a:defRPr>
+                      </a:pPr>
+                      <a:r>
+                        <a:t>SMCエア機器（No.18～19）：電磁弁 SY5120-5LZD 5個（5M）＋シリンダ MGCLB16-50（4M）、CXSL15-50（5.1M）、CXSL15-70（5.6M）、CXSL15-100 3本（18M）</a:t>
+                      </a:r>
+                    </a:p>
+                  </a:txBody>
+                  <a:tcPr anchor="ctr" marL="36576" marR="36576" marT="9144" marB="9144">
+                    <a:solidFill>
+                      <a:srgbClr val="FFFFFF"/>
+                    </a:solidFill>
+                  </a:tcPr>
+                </a:tc>
+                <a:tc>
+                  <a:txBody>
+                    <a:bodyPr wrap="square"/>
+                    <a:lstStyle/>
+                    <a:p>
+                      <a:pPr algn="r">
+                        <a:defRPr sz="530">
+                          <a:solidFill>
+                            <a:srgbClr val="1E242B"/>
+                          </a:solidFill>
+                          <a:latin typeface="Meiryo UI"/>
+                        </a:defRPr>
+                      </a:pPr>
+                      <a:r>
+                        <a:t>37,700,000 VND</a:t>
+                      </a:r>
+                    </a:p>
+                  </a:txBody>
+                  <a:tcPr anchor="ctr" marL="36576" marR="36576" marT="9144" marB="9144">
+                    <a:solidFill>
+                      <a:srgbClr val="FFFFFF"/>
+                    </a:solidFill>
+                  </a:tcPr>
+                </a:tc>
+                <a:tc>
+                  <a:txBody>
+                    <a:bodyPr wrap="square"/>
+                    <a:lstStyle/>
+                    <a:p>
+                      <a:pPr algn="r">
+                        <a:defRPr sz="530">
+                          <a:solidFill>
+                            <a:srgbClr val="1E242B"/>
+                          </a:solidFill>
+                          <a:latin typeface="Meiryo UI"/>
+                        </a:defRPr>
+                      </a:pPr>
+                      <a:r>
+                        <a:t>1,450.00 USD</a:t>
+                      </a:r>
+                    </a:p>
+                  </a:txBody>
+                  <a:tcPr anchor="ctr" marL="36576" marR="36576" marT="9144" marB="9144">
+                    <a:solidFill>
+                      <a:srgbClr val="FFFFFF"/>
+                    </a:solidFill>
+                  </a:tcPr>
+                </a:tc>
+                <a:tc>
+                  <a:txBody>
+                    <a:bodyPr wrap="square"/>
+                    <a:lstStyle/>
+                    <a:p>
+                      <a:pPr algn="l">
+                        <a:defRPr sz="530">
+                          <a:solidFill>
+                            <a:srgbClr val="1E242B"/>
+                          </a:solidFill>
+                          <a:latin typeface="Meiryo UI"/>
+                        </a:defRPr>
+                      </a:pPr>
+                      <a:r>
+                        <a:t>No.22全体の 37.1%</a:t>
+                      </a:r>
+                    </a:p>
+                  </a:txBody>
+                  <a:tcPr anchor="ctr" marL="36576" marR="36576" marT="9144" marB="9144">
+                    <a:solidFill>
+                      <a:srgbClr val="FFFFFF"/>
+                    </a:solidFill>
+                  </a:tcPr>
+                </a:tc>
+              </a:tr>
+              <a:tr h="241069">
+                <a:tc>
+                  <a:txBody>
+                    <a:bodyPr wrap="square"/>
+                    <a:lstStyle/>
+                    <a:p>
+                      <a:pPr algn="ctr">
+                        <a:defRPr sz="530" b="1">
+                          <a:solidFill>
+                            <a:srgbClr val="1E242B"/>
+                          </a:solidFill>
+                          <a:latin typeface="Meiryo UI"/>
+                        </a:defRPr>
+                      </a:pPr>
+                      <a:r>
+                        <a:t>No.22</a:t>
+                      </a:r>
+                      <a:br/>
+                      <a:r>
+                        <a:t>グループ2</a:t>
+                      </a:r>
+                    </a:p>
+                  </a:txBody>
+                  <a:tcPr anchor="ctr" marL="36576" marR="36576" marT="9144" marB="9144">
+                    <a:solidFill>
+                      <a:srgbClr val="F7F9FC"/>
+                    </a:solidFill>
+                  </a:tcPr>
+                </a:tc>
+                <a:tc>
+                  <a:txBody>
+                    <a:bodyPr wrap="square"/>
+                    <a:lstStyle/>
+                    <a:p>
+                      <a:pPr algn="l">
+                        <a:defRPr sz="530">
+                          <a:solidFill>
+                            <a:srgbClr val="1E242B"/>
+                          </a:solidFill>
+                          <a:latin typeface="Meiryo UI"/>
+                        </a:defRPr>
+                      </a:pPr>
+                      <a:r>
+                        <a:t>治具機械加工費および副資材（No.25：治具ブロック加工費および発生追加電気資材）</a:t>
+                      </a:r>
+                    </a:p>
+                  </a:txBody>
+                  <a:tcPr anchor="ctr" marL="36576" marR="36576" marT="9144" marB="9144">
+                    <a:solidFill>
+                      <a:srgbClr val="F7F9FC"/>
+                    </a:solidFill>
+                  </a:tcPr>
+                </a:tc>
+                <a:tc>
+                  <a:txBody>
+                    <a:bodyPr wrap="square"/>
+                    <a:lstStyle/>
+                    <a:p>
+                      <a:pPr algn="r">
+                        <a:defRPr sz="530">
+                          <a:solidFill>
+                            <a:srgbClr val="1E242B"/>
+                          </a:solidFill>
+                          <a:latin typeface="Meiryo UI"/>
+                        </a:defRPr>
+                      </a:pPr>
+                      <a:r>
+                        <a:t>20,000,000 VND</a:t>
+                      </a:r>
+                    </a:p>
+                  </a:txBody>
+                  <a:tcPr anchor="ctr" marL="36576" marR="36576" marT="9144" marB="9144">
+                    <a:solidFill>
+                      <a:srgbClr val="F7F9FC"/>
+                    </a:solidFill>
+                  </a:tcPr>
+                </a:tc>
+                <a:tc>
+                  <a:txBody>
+                    <a:bodyPr wrap="square"/>
+                    <a:lstStyle/>
+                    <a:p>
+                      <a:pPr algn="r">
+                        <a:defRPr sz="530">
+                          <a:solidFill>
+                            <a:srgbClr val="1E242B"/>
+                          </a:solidFill>
+                          <a:latin typeface="Meiryo UI"/>
+                        </a:defRPr>
+                      </a:pPr>
+                      <a:r>
+                        <a:t>769.23 USD</a:t>
+                      </a:r>
+                    </a:p>
+                  </a:txBody>
+                  <a:tcPr anchor="ctr" marL="36576" marR="36576" marT="9144" marB="9144">
+                    <a:solidFill>
+                      <a:srgbClr val="F7F9FC"/>
+                    </a:solidFill>
+                  </a:tcPr>
+                </a:tc>
+                <a:tc>
+                  <a:txBody>
+                    <a:bodyPr wrap="square"/>
+                    <a:lstStyle/>
+                    <a:p>
+                      <a:pPr algn="l">
+                        <a:defRPr sz="530">
+                          <a:solidFill>
+                            <a:srgbClr val="1E242B"/>
+                          </a:solidFill>
+                          <a:latin typeface="Meiryo UI"/>
+                        </a:defRPr>
+                      </a:pPr>
+                      <a:r>
+                        <a:t>No.22全体の 19.7%</a:t>
+                      </a:r>
+                    </a:p>
+                  </a:txBody>
+                  <a:tcPr anchor="ctr" marL="36576" marR="36576" marT="9144" marB="9144">
+                    <a:solidFill>
+                      <a:srgbClr val="F7F9FC"/>
+                    </a:solidFill>
+                  </a:tcPr>
+                </a:tc>
+              </a:tr>
+              <a:tr h="241069">
+                <a:tc>
+                  <a:txBody>
+                    <a:bodyPr wrap="square"/>
+                    <a:lstStyle/>
+                    <a:p>
+                      <a:pPr algn="ctr">
+                        <a:defRPr sz="530" b="1">
+                          <a:solidFill>
+                            <a:srgbClr val="1E242B"/>
+                          </a:solidFill>
+                          <a:latin typeface="Meiryo UI"/>
+                        </a:defRPr>
+                      </a:pPr>
+                      <a:r>
+                        <a:t>No.22</a:t>
+                      </a:r>
+                      <a:br/>
+                      <a:r>
+                        <a:t>グループ3</a:t>
+                      </a:r>
+                    </a:p>
+                  </a:txBody>
+                  <a:tcPr anchor="ctr" marL="36576" marR="36576" marT="9144" marB="9144">
+                    <a:solidFill>
+                      <a:srgbClr val="FFFFFF"/>
+                    </a:solidFill>
+                  </a:tcPr>
+                </a:tc>
+                <a:tc>
+                  <a:txBody>
+                    <a:bodyPr wrap="square"/>
+                    <a:lstStyle/>
+                    <a:p>
+                      <a:pPr algn="l">
+                        <a:defRPr sz="530">
+                          <a:solidFill>
+                            <a:srgbClr val="1E242B"/>
+                          </a:solidFill>
+                          <a:latin typeface="Meiryo UI"/>
+                        </a:defRPr>
+                      </a:pPr>
+                      <a:r>
+                        <a:t>制御機器・センサ（No.1, 3, 20, 21）：PLC FX5U-64MT/ES（9.5M）＋増設FX5-16EYR（2M）＋HMI Wecon（5M）＋オムロン光電センサ2個（3M）</a:t>
+                      </a:r>
+                    </a:p>
+                  </a:txBody>
+                  <a:tcPr anchor="ctr" marL="36576" marR="36576" marT="9144" marB="9144">
+                    <a:solidFill>
+                      <a:srgbClr val="FFFFFF"/>
+                    </a:solidFill>
+                  </a:tcPr>
+                </a:tc>
+                <a:tc>
+                  <a:txBody>
+                    <a:bodyPr wrap="square"/>
+                    <a:lstStyle/>
+                    <a:p>
+                      <a:pPr algn="r">
+                        <a:defRPr sz="530">
+                          <a:solidFill>
+                            <a:srgbClr val="1E242B"/>
+                          </a:solidFill>
+                          <a:latin typeface="Meiryo UI"/>
+                        </a:defRPr>
+                      </a:pPr>
+                      <a:r>
+                        <a:t>19,500,000 VND</a:t>
+                      </a:r>
+                    </a:p>
+                  </a:txBody>
+                  <a:tcPr anchor="ctr" marL="36576" marR="36576" marT="9144" marB="9144">
+                    <a:solidFill>
+                      <a:srgbClr val="FFFFFF"/>
+                    </a:solidFill>
+                  </a:tcPr>
+                </a:tc>
+                <a:tc>
+                  <a:txBody>
+                    <a:bodyPr wrap="square"/>
+                    <a:lstStyle/>
+                    <a:p>
+                      <a:pPr algn="r">
+                        <a:defRPr sz="530">
+                          <a:solidFill>
+                            <a:srgbClr val="1E242B"/>
+                          </a:solidFill>
+                          <a:latin typeface="Meiryo UI"/>
+                        </a:defRPr>
+                      </a:pPr>
+                      <a:r>
+                        <a:t>750.00 USD</a:t>
+                      </a:r>
+                    </a:p>
+                  </a:txBody>
+                  <a:tcPr anchor="ctr" marL="36576" marR="36576" marT="9144" marB="9144">
+                    <a:solidFill>
+                      <a:srgbClr val="FFFFFF"/>
+                    </a:solidFill>
+                  </a:tcPr>
+                </a:tc>
+                <a:tc>
+                  <a:txBody>
+                    <a:bodyPr wrap="square"/>
+                    <a:lstStyle/>
+                    <a:p>
+                      <a:pPr algn="l">
+                        <a:defRPr sz="530">
+                          <a:solidFill>
+                            <a:srgbClr val="1E242B"/>
+                          </a:solidFill>
+                          <a:latin typeface="Meiryo UI"/>
+                        </a:defRPr>
+                      </a:pPr>
+                      <a:r>
+                        <a:t>No.22全体の 19.2%</a:t>
+                      </a:r>
+                    </a:p>
+                  </a:txBody>
+                  <a:tcPr anchor="ctr" marL="36576" marR="36576" marT="9144" marB="9144">
+                    <a:solidFill>
+                      <a:srgbClr val="FFFFFF"/>
+                    </a:solidFill>
+                  </a:tcPr>
+                </a:tc>
+              </a:tr>
+              <a:tr h="241069">
+                <a:tc>
+                  <a:txBody>
+                    <a:bodyPr wrap="square"/>
+                    <a:lstStyle/>
+                    <a:p>
+                      <a:pPr algn="ctr">
+                        <a:defRPr sz="530" b="1">
+                          <a:solidFill>
+                            <a:srgbClr val="1E242B"/>
+                          </a:solidFill>
+                          <a:latin typeface="Meiryo UI"/>
+                        </a:defRPr>
+                      </a:pPr>
+                      <a:r>
+                        <a:t>No.22</a:t>
+                      </a:r>
+                      <a:br/>
+                      <a:r>
+                        <a:t>グループ4</a:t>
+                      </a:r>
+                    </a:p>
+                  </a:txBody>
+                  <a:tcPr anchor="ctr" marL="36576" marR="36576" marT="9144" marB="9144">
+                    <a:solidFill>
+                      <a:srgbClr val="F7F9FC"/>
+                    </a:solidFill>
+                  </a:tcPr>
+                </a:tc>
+                <a:tc>
+                  <a:txBody>
+                    <a:bodyPr wrap="square"/>
+                    <a:lstStyle/>
+                    <a:p>
+                      <a:pPr algn="l">
+                        <a:defRPr sz="530">
+                          <a:solidFill>
+                            <a:srgbClr val="1E242B"/>
+                          </a:solidFill>
+                          <a:latin typeface="Meiryo UI"/>
+                        </a:defRPr>
+                      </a:pPr>
+                      <a:r>
+                        <a:t>ミスミアルミフレーム（No.22～24）：アルミフレーム15本 LCF8-4040-2000（7.5M）＋コーナーブラケット50個（3M）＋ナット100個（2M）</a:t>
+                      </a:r>
+                    </a:p>
+                  </a:txBody>
+                  <a:tcPr anchor="ctr" marL="36576" marR="36576" marT="9144" marB="9144">
+                    <a:solidFill>
+                      <a:srgbClr val="F7F9FC"/>
+                    </a:solidFill>
+                  </a:tcPr>
+                </a:tc>
+                <a:tc>
+                  <a:txBody>
+                    <a:bodyPr wrap="square"/>
+                    <a:lstStyle/>
+                    <a:p>
+                      <a:pPr algn="r">
+                        <a:defRPr sz="530">
+                          <a:solidFill>
+                            <a:srgbClr val="1E242B"/>
+                          </a:solidFill>
+                          <a:latin typeface="Meiryo UI"/>
+                        </a:defRPr>
+                      </a:pPr>
+                      <a:r>
+                        <a:t>12,500,000 VND</a:t>
+                      </a:r>
+                    </a:p>
+                  </a:txBody>
+                  <a:tcPr anchor="ctr" marL="36576" marR="36576" marT="9144" marB="9144">
+                    <a:solidFill>
+                      <a:srgbClr val="F7F9FC"/>
+                    </a:solidFill>
+                  </a:tcPr>
+                </a:tc>
+                <a:tc>
+                  <a:txBody>
+                    <a:bodyPr wrap="square"/>
+                    <a:lstStyle/>
+                    <a:p>
+                      <a:pPr algn="r">
+                        <a:defRPr sz="530">
+                          <a:solidFill>
+                            <a:srgbClr val="1E242B"/>
+                          </a:solidFill>
+                          <a:latin typeface="Meiryo UI"/>
+                        </a:defRPr>
+                      </a:pPr>
+                      <a:r>
+                        <a:t>480.77 USD</a:t>
+                      </a:r>
+                    </a:p>
+                  </a:txBody>
+                  <a:tcPr anchor="ctr" marL="36576" marR="36576" marT="9144" marB="9144">
+                    <a:solidFill>
+                      <a:srgbClr val="F7F9FC"/>
+                    </a:solidFill>
+                  </a:tcPr>
+                </a:tc>
+                <a:tc>
+                  <a:txBody>
+                    <a:bodyPr wrap="square"/>
+                    <a:lstStyle/>
+                    <a:p>
+                      <a:pPr algn="l">
+                        <a:defRPr sz="530">
+                          <a:solidFill>
+                            <a:srgbClr val="1E242B"/>
+                          </a:solidFill>
+                          <a:latin typeface="Meiryo UI"/>
+                        </a:defRPr>
+                      </a:pPr>
+                      <a:r>
+                        <a:t>No.22全体の 12.3%</a:t>
+                      </a:r>
+                    </a:p>
+                  </a:txBody>
+                  <a:tcPr anchor="ctr" marL="36576" marR="36576" marT="9144" marB="9144">
+                    <a:solidFill>
+                      <a:srgbClr val="F7F9FC"/>
+                    </a:solidFill>
+                  </a:tcPr>
+                </a:tc>
+              </a:tr>
+              <a:tr h="241069">
+                <a:tc>
+                  <a:txBody>
+                    <a:bodyPr wrap="square"/>
+                    <a:lstStyle/>
+                    <a:p>
+                      <a:pPr algn="ctr">
+                        <a:defRPr sz="530" b="1">
+                          <a:solidFill>
+                            <a:srgbClr val="1E242B"/>
+                          </a:solidFill>
+                          <a:latin typeface="Meiryo UI"/>
+                        </a:defRPr>
+                      </a:pPr>
+                      <a:r>
+                        <a:t>No.22</a:t>
+                      </a:r>
+                      <a:br/>
+                      <a:r>
+                        <a:t>グループ5</a:t>
+                      </a:r>
+                    </a:p>
+                  </a:txBody>
+                  <a:tcPr anchor="ctr" marL="36576" marR="36576" marT="9144" marB="9144">
+                    <a:solidFill>
+                      <a:srgbClr val="FFFFFF"/>
+                    </a:solidFill>
+                  </a:tcPr>
+                </a:tc>
+                <a:tc>
+                  <a:txBody>
+                    <a:bodyPr wrap="square"/>
+                    <a:lstStyle/>
+                    <a:p>
+                      <a:pPr algn="l">
+                        <a:defRPr sz="530">
+                          <a:solidFill>
+                            <a:srgbClr val="1E242B"/>
+                          </a:solidFill>
+                          <a:latin typeface="Meiryo UI"/>
+                        </a:defRPr>
+                      </a:pPr>
+                      <a:r>
+                        <a:t>制御盤内電装部品（No.2, 4～16）：ブレーカ CP30-BA（0.65M）、電磁接触器3個（1.5M）、電源S8VK（0.7M）、端子台・リレー・スイッチ・ランプ（4.14M）</a:t>
+                      </a:r>
+                    </a:p>
+                  </a:txBody>
+                  <a:tcPr anchor="ctr" marL="36576" marR="36576" marT="9144" marB="9144">
+                    <a:solidFill>
+                      <a:srgbClr val="FFFFFF"/>
+                    </a:solidFill>
+                  </a:tcPr>
+                </a:tc>
+                <a:tc>
+                  <a:txBody>
+                    <a:bodyPr wrap="square"/>
+                    <a:lstStyle/>
+                    <a:p>
+                      <a:pPr algn="r">
+                        <a:defRPr sz="530">
+                          <a:solidFill>
+                            <a:srgbClr val="1E242B"/>
+                          </a:solidFill>
+                          <a:latin typeface="Meiryo UI"/>
+                        </a:defRPr>
+                      </a:pPr>
+                      <a:r>
+                        <a:t>6,990,000 VND</a:t>
+                      </a:r>
+                    </a:p>
+                  </a:txBody>
+                  <a:tcPr anchor="ctr" marL="36576" marR="36576" marT="9144" marB="9144">
+                    <a:solidFill>
+                      <a:srgbClr val="FFFFFF"/>
+                    </a:solidFill>
+                  </a:tcPr>
+                </a:tc>
+                <a:tc>
+                  <a:txBody>
+                    <a:bodyPr wrap="square"/>
+                    <a:lstStyle/>
+                    <a:p>
+                      <a:pPr algn="r">
+                        <a:defRPr sz="530">
+                          <a:solidFill>
+                            <a:srgbClr val="1E242B"/>
+                          </a:solidFill>
+                          <a:latin typeface="Meiryo UI"/>
+                        </a:defRPr>
+                      </a:pPr>
+                      <a:r>
+                        <a:t>268.85 USD</a:t>
+                      </a:r>
+                    </a:p>
+                  </a:txBody>
+                  <a:tcPr anchor="ctr" marL="36576" marR="36576" marT="9144" marB="9144">
+                    <a:solidFill>
+                      <a:srgbClr val="FFFFFF"/>
+                    </a:solidFill>
+                  </a:tcPr>
+                </a:tc>
+                <a:tc>
+                  <a:txBody>
+                    <a:bodyPr wrap="square"/>
+                    <a:lstStyle/>
+                    <a:p>
+                      <a:pPr algn="l">
+                        <a:defRPr sz="530">
+                          <a:solidFill>
+                            <a:srgbClr val="1E242B"/>
+                          </a:solidFill>
+                          <a:latin typeface="Meiryo UI"/>
+                        </a:defRPr>
+                      </a:pPr>
+                      <a:r>
+                        <a:t>No.22全体の 6.9%</a:t>
+                      </a:r>
+                    </a:p>
+                  </a:txBody>
+                  <a:tcPr anchor="ctr" marL="36576" marR="36576" marT="9144" marB="9144">
+                    <a:solidFill>
+                      <a:srgbClr val="FFFFFF"/>
+                    </a:solidFill>
+                  </a:tcPr>
+                </a:tc>
+              </a:tr>
+              <a:tr h="241069">
+                <a:tc>
+                  <a:txBody>
+                    <a:bodyPr wrap="square"/>
+                    <a:lstStyle/>
+                    <a:p>
+                      <a:pPr algn="ctr">
+                        <a:defRPr sz="530" b="1">
+                          <a:solidFill>
+                            <a:srgbClr val="1E242B"/>
+                          </a:solidFill>
+                          <a:latin typeface="Meiryo UI"/>
+                        </a:defRPr>
+                      </a:pPr>
+                      <a:r>
+                        <a:t>No.22</a:t>
+                      </a:r>
+                      <a:br/>
+                      <a:r>
+                        <a:t>グループ6</a:t>
+                      </a:r>
+                    </a:p>
+                  </a:txBody>
+                  <a:tcPr anchor="ctr" marL="36576" marR="36576" marT="9144" marB="9144">
+                    <a:solidFill>
+                      <a:srgbClr val="F7F9FC"/>
+                    </a:solidFill>
+                  </a:tcPr>
+                </a:tc>
+                <a:tc>
+                  <a:txBody>
+                    <a:bodyPr wrap="square"/>
+                    <a:lstStyle/>
+                    <a:p>
+                      <a:pPr algn="l">
+                        <a:defRPr sz="530">
+                          <a:solidFill>
+                            <a:srgbClr val="1E242B"/>
+                          </a:solidFill>
+                          <a:latin typeface="Meiryo UI"/>
+                        </a:defRPr>
+                      </a:pPr>
+                      <a:r>
+                        <a:t>制御盤ボックス（No.17：電装ボックス1台 5,000,000 VND；参考欄に「見積依頼中」と注記）</a:t>
+                      </a:r>
+                    </a:p>
+                  </a:txBody>
+                  <a:tcPr anchor="ctr" marL="36576" marR="36576" marT="9144" marB="9144">
+                    <a:solidFill>
+                      <a:srgbClr val="F7F9FC"/>
+                    </a:solidFill>
+                  </a:tcPr>
+                </a:tc>
+                <a:tc>
+                  <a:txBody>
+                    <a:bodyPr wrap="square"/>
+                    <a:lstStyle/>
+                    <a:p>
+                      <a:pPr algn="r">
+                        <a:defRPr sz="530">
+                          <a:solidFill>
+                            <a:srgbClr val="1E242B"/>
+                          </a:solidFill>
+                          <a:latin typeface="Meiryo UI"/>
+                        </a:defRPr>
+                      </a:pPr>
+                      <a:r>
+                        <a:t>5,000,000 VND</a:t>
+                      </a:r>
+                    </a:p>
+                  </a:txBody>
+                  <a:tcPr anchor="ctr" marL="36576" marR="36576" marT="9144" marB="9144">
+                    <a:solidFill>
+                      <a:srgbClr val="F7F9FC"/>
+                    </a:solidFill>
+                  </a:tcPr>
+                </a:tc>
+                <a:tc>
+                  <a:txBody>
+                    <a:bodyPr wrap="square"/>
+                    <a:lstStyle/>
+                    <a:p>
+                      <a:pPr algn="r">
+                        <a:defRPr sz="530">
+                          <a:solidFill>
+                            <a:srgbClr val="1E242B"/>
+                          </a:solidFill>
+                          <a:latin typeface="Meiryo UI"/>
+                        </a:defRPr>
+                      </a:pPr>
+                      <a:r>
+                        <a:t>192.31 USD</a:t>
+                      </a:r>
+                    </a:p>
+                  </a:txBody>
+                  <a:tcPr anchor="ctr" marL="36576" marR="36576" marT="9144" marB="9144">
+                    <a:solidFill>
+                      <a:srgbClr val="F7F9FC"/>
+                    </a:solidFill>
+                  </a:tcPr>
+                </a:tc>
+                <a:tc>
+                  <a:txBody>
+                    <a:bodyPr wrap="square"/>
+                    <a:lstStyle/>
+                    <a:p>
+                      <a:pPr algn="l">
+                        <a:defRPr sz="530">
+                          <a:solidFill>
+                            <a:srgbClr val="1E242B"/>
+                          </a:solidFill>
+                          <a:latin typeface="Meiryo UI"/>
+                        </a:defRPr>
+                      </a:pPr>
+                      <a:r>
+                        <a:t>No.22全体の 4.9%</a:t>
+                      </a:r>
+                    </a:p>
+                  </a:txBody>
+                  <a:tcPr anchor="ctr" marL="36576" marR="36576" marT="9144" marB="9144">
+                    <a:solidFill>
+                      <a:srgbClr val="F7F9FC"/>
+                    </a:solidFill>
+                  </a:tcPr>
+                </a:tc>
+              </a:tr>
+              <a:tr h="241069">
+                <a:tc>
+                  <a:txBody>
+                    <a:bodyPr wrap="square"/>
+                    <a:lstStyle/>
+                    <a:p>
+                      <a:pPr algn="ctr">
+                        <a:defRPr sz="530" b="1">
+                          <a:solidFill>
+                            <a:srgbClr val="1E242B"/>
+                          </a:solidFill>
+                          <a:latin typeface="Meiryo UI"/>
+                        </a:defRPr>
+                      </a:pPr>
+                      <a:r>
+                        <a:t>No.22</a:t>
+                      </a:r>
+                      <a:br/>
+                      <a:r>
+                        <a:t>合計</a:t>
+                      </a:r>
+                    </a:p>
+                  </a:txBody>
+                  <a:tcPr anchor="ctr" marL="36576" marR="36576" marT="9144" marB="9144">
+                    <a:solidFill>
+                      <a:srgbClr val="EAF7EE"/>
+                    </a:solidFill>
+                  </a:tcPr>
+                </a:tc>
+                <a:tc>
+                  <a:txBody>
+                    <a:bodyPr wrap="square"/>
+                    <a:lstStyle/>
+                    <a:p>
+                      <a:pPr algn="l">
+                        <a:defRPr sz="530" b="1">
+                          <a:solidFill>
+                            <a:srgbClr val="1E242B"/>
+                          </a:solidFill>
+                          <a:latin typeface="Meiryo UI"/>
+                        </a:defRPr>
+                      </a:pPr>
+                      <a:r>
+                        <a:t>案件 1（No.22 アース導通・耐電圧自動検査治具）合計 【案 A：先行申請】</a:t>
+                      </a:r>
+                      <a:br/>
+                      <a:r>
+                        <a:t>（内訳明細：101,700,000 VND / 3,911.54 USD ｜ サマリー表丸め値：4,000 USD）</a:t>
+                      </a:r>
+                    </a:p>
+                  </a:txBody>
+                  <a:tcPr anchor="ctr" marL="36576" marR="36576" marT="9144" marB="9144">
+                    <a:solidFill>
+                      <a:srgbClr val="EAF7EE"/>
+                    </a:solidFill>
+                  </a:tcPr>
+                </a:tc>
+                <a:tc>
+                  <a:txBody>
+                    <a:bodyPr wrap="square"/>
+                    <a:lstStyle/>
+                    <a:p>
+                      <a:pPr algn="r">
+                        <a:defRPr sz="530" b="1">
+                          <a:solidFill>
+                            <a:srgbClr val="1E6E3E"/>
+                          </a:solidFill>
+                          <a:latin typeface="Meiryo UI"/>
+                        </a:defRPr>
+                      </a:pPr>
+                      <a:r>
+                        <a:t>101,690,000 VND</a:t>
+                      </a:r>
+                    </a:p>
+                  </a:txBody>
+                  <a:tcPr anchor="ctr" marL="36576" marR="36576" marT="9144" marB="9144">
+                    <a:solidFill>
+                      <a:srgbClr val="EAF7EE"/>
+                    </a:solidFill>
+                  </a:tcPr>
+                </a:tc>
+                <a:tc>
+                  <a:txBody>
+                    <a:bodyPr wrap="square"/>
+                    <a:lstStyle/>
+                    <a:p>
+                      <a:pPr algn="r">
+                        <a:defRPr sz="530">
+                          <a:solidFill>
+                            <a:srgbClr val="1E242B"/>
+                          </a:solidFill>
+                          <a:latin typeface="Meiryo UI"/>
+                        </a:defRPr>
+                      </a:pPr>
+                      <a:r>
+                        <a:t>3,911.15 USD</a:t>
+                      </a:r>
+                      <a:br/>
+                      <a:r>
+                        <a:t>（丸め値: 4,000$）</a:t>
+                      </a:r>
+                    </a:p>
+                  </a:txBody>
+                  <a:tcPr anchor="ctr" marL="36576" marR="36576" marT="9144" marB="9144">
+                    <a:solidFill>
+                      <a:srgbClr val="EAF7EE"/>
+                    </a:solidFill>
+                  </a:tcPr>
+                </a:tc>
+                <a:tc>
+                  <a:txBody>
+                    <a:bodyPr wrap="square"/>
+                    <a:lstStyle/>
+                    <a:p>
+                      <a:pPr algn="l">
+                        <a:defRPr sz="530">
+                          <a:solidFill>
+                            <a:srgbClr val="1E242B"/>
+                          </a:solidFill>
+                          <a:latin typeface="Meiryo UI"/>
+                        </a:defRPr>
+                      </a:pPr>
+                      <a:r>
+                        <a:t>-30秒/台 短縮</a:t>
+                      </a:r>
+                      <a:br/>
+                      <a:r>
+                        <a:t>年間 29.6M VND削減</a:t>
+                      </a:r>
+                    </a:p>
+                  </a:txBody>
+                  <a:tcPr anchor="ctr" marL="36576" marR="36576" marT="9144" marB="9144">
+                    <a:solidFill>
+                      <a:srgbClr val="EAF7EE"/>
+                    </a:solidFill>
+                  </a:tcPr>
+                </a:tc>
+              </a:tr>
+              <a:tr h="241069">
+                <a:tc>
+                  <a:txBody>
+                    <a:bodyPr wrap="square"/>
+                    <a:lstStyle/>
+                    <a:p>
+                      <a:pPr algn="ctr">
+                        <a:defRPr sz="530" b="1">
+                          <a:solidFill>
+                            <a:srgbClr val="1E242B"/>
+                          </a:solidFill>
+                          <a:latin typeface="Meiryo UI"/>
+                        </a:defRPr>
+                      </a:pPr>
+                      <a:r>
+                        <a:t>No.23</a:t>
+                      </a:r>
+                      <a:br/>
+                      <a:r>
+                        <a:t>（案件2）</a:t>
+                      </a:r>
+                    </a:p>
+                  </a:txBody>
+                  <a:tcPr anchor="ctr" marL="36576" marR="36576" marT="9144" marB="9144">
+                    <a:solidFill>
+                      <a:srgbClr val="E8EEF5"/>
+                    </a:solidFill>
+                  </a:tcPr>
+                </a:tc>
+                <a:tc>
+                  <a:txBody>
+                    <a:bodyPr wrap="square"/>
+                    <a:lstStyle/>
+                    <a:p>
+                      <a:pPr algn="l">
+                        <a:defRPr sz="530">
+                          <a:solidFill>
+                            <a:srgbClr val="1E242B"/>
+                          </a:solidFill>
+                          <a:latin typeface="Meiryo UI"/>
+                        </a:defRPr>
+                      </a:pPr>
+                      <a:r>
+                        <a:t>案件 2（No.23 原稿自動セットロボット：U411＋SITC-2＋Halftone）：</a:t>
+                      </a:r>
+                      <a:br/>
+                      <a:r>
+                        <a:t>コンベア2セル（200M/$7,692）＋電源（50M/$1,923）＋配線（50M/$1,923）＋ロボット（350M/$13,462）</a:t>
+                      </a:r>
+                    </a:p>
+                  </a:txBody>
+                  <a:tcPr anchor="ctr" marL="36576" marR="36576" marT="9144" marB="9144">
+                    <a:solidFill>
+                      <a:srgbClr val="E8EEF5"/>
+                    </a:solidFill>
+                  </a:tcPr>
+                </a:tc>
+                <a:tc>
+                  <a:txBody>
+                    <a:bodyPr wrap="square"/>
+                    <a:lstStyle/>
+                    <a:p>
+                      <a:pPr algn="r">
+                        <a:defRPr sz="530">
+                          <a:solidFill>
+                            <a:srgbClr val="1E242B"/>
+                          </a:solidFill>
+                          <a:latin typeface="Meiryo UI"/>
+                        </a:defRPr>
+                      </a:pPr>
+                      <a:r>
+                        <a:t>650,000,000 VND</a:t>
+                      </a:r>
+                    </a:p>
+                  </a:txBody>
+                  <a:tcPr anchor="ctr" marL="36576" marR="36576" marT="9144" marB="9144">
+                    <a:solidFill>
+                      <a:srgbClr val="E8EEF5"/>
+                    </a:solidFill>
+                  </a:tcPr>
+                </a:tc>
+                <a:tc>
+                  <a:txBody>
+                    <a:bodyPr wrap="square"/>
+                    <a:lstStyle/>
+                    <a:p>
+                      <a:pPr algn="r">
+                        <a:defRPr sz="530">
+                          <a:solidFill>
+                            <a:srgbClr val="1E242B"/>
+                          </a:solidFill>
+                          <a:latin typeface="Meiryo UI"/>
+                        </a:defRPr>
+                      </a:pPr>
+                      <a:r>
+                        <a:t>25,000.00 USD</a:t>
+                      </a:r>
+                    </a:p>
+                  </a:txBody>
+                  <a:tcPr anchor="ctr" marL="36576" marR="36576" marT="9144" marB="9144">
+                    <a:solidFill>
+                      <a:srgbClr val="E8EEF5"/>
+                    </a:solidFill>
+                  </a:tcPr>
+                </a:tc>
+                <a:tc>
+                  <a:txBody>
+                    <a:bodyPr wrap="square"/>
+                    <a:lstStyle/>
+                    <a:p>
+                      <a:pPr algn="l">
+                        <a:defRPr sz="530">
+                          <a:solidFill>
+                            <a:srgbClr val="1E242B"/>
+                          </a:solidFill>
+                          <a:latin typeface="Meiryo UI"/>
+                        </a:defRPr>
+                      </a:pPr>
+                      <a:r>
+                        <a:t>-110秒/台 短縮</a:t>
+                      </a:r>
+                      <a:br/>
+                      <a:r>
+                        <a:t>年間 108.5M VND削減</a:t>
+                      </a:r>
+                    </a:p>
+                  </a:txBody>
+                  <a:tcPr anchor="ctr" marL="36576" marR="36576" marT="9144" marB="9144">
+                    <a:solidFill>
+                      <a:srgbClr val="E8EEF5"/>
+                    </a:solidFill>
+                  </a:tcPr>
+                </a:tc>
+              </a:tr>
+              <a:tr h="241069">
+                <a:tc>
+                  <a:txBody>
+                    <a:bodyPr wrap="square"/>
+                    <a:lstStyle/>
+                    <a:p>
+                      <a:pPr algn="ctr">
+                        <a:defRPr sz="530" b="1">
+                          <a:solidFill>
+                            <a:srgbClr val="1E242B"/>
+                          </a:solidFill>
+                          <a:latin typeface="Meiryo UI"/>
+                        </a:defRPr>
+                      </a:pPr>
+                      <a:r>
+                        <a:t>No.24</a:t>
+                      </a:r>
+                      <a:br/>
+                      <a:r>
+                        <a:t>（案件3）</a:t>
+                      </a:r>
+                    </a:p>
+                  </a:txBody>
+                  <a:tcPr anchor="ctr" marL="36576" marR="36576" marT="9144" marB="9144">
+                    <a:solidFill>
+                      <a:srgbClr val="E8EEF5"/>
+                    </a:solidFill>
+                  </a:tcPr>
+                </a:tc>
+                <a:tc>
+                  <a:txBody>
+                    <a:bodyPr wrap="square"/>
+                    <a:lstStyle/>
+                    <a:p>
+                      <a:pPr algn="l">
+                        <a:defRPr sz="530">
+                          <a:solidFill>
+                            <a:srgbClr val="1E242B"/>
+                          </a:solidFill>
+                          <a:latin typeface="Meiryo UI"/>
+                        </a:defRPr>
+                      </a:pPr>
+                      <a:r>
+                        <a:t>案件 3（No.24 USB自動接続、パネル判定カメラおよびAIタッチロボット）</a:t>
+                      </a:r>
+                    </a:p>
+                  </a:txBody>
+                  <a:tcPr anchor="ctr" marL="36576" marR="36576" marT="9144" marB="9144">
+                    <a:solidFill>
+                      <a:srgbClr val="E8EEF5"/>
+                    </a:solidFill>
+                  </a:tcPr>
+                </a:tc>
+                <a:tc>
+                  <a:txBody>
+                    <a:bodyPr wrap="square"/>
+                    <a:lstStyle/>
+                    <a:p>
+                      <a:pPr algn="r">
+                        <a:defRPr sz="530">
+                          <a:solidFill>
+                            <a:srgbClr val="1E242B"/>
+                          </a:solidFill>
+                          <a:latin typeface="Meiryo UI"/>
+                        </a:defRPr>
+                      </a:pPr>
+                      <a:r>
+                        <a:t>104,000,000 VND</a:t>
+                      </a:r>
+                    </a:p>
+                  </a:txBody>
+                  <a:tcPr anchor="ctr" marL="36576" marR="36576" marT="9144" marB="9144">
+                    <a:solidFill>
+                      <a:srgbClr val="E8EEF5"/>
+                    </a:solidFill>
+                  </a:tcPr>
+                </a:tc>
+                <a:tc>
+                  <a:txBody>
+                    <a:bodyPr wrap="square"/>
+                    <a:lstStyle/>
+                    <a:p>
+                      <a:pPr algn="r">
+                        <a:defRPr sz="530">
+                          <a:solidFill>
+                            <a:srgbClr val="1E242B"/>
+                          </a:solidFill>
+                          <a:latin typeface="Meiryo UI"/>
+                        </a:defRPr>
+                      </a:pPr>
+                      <a:r>
+                        <a:t>4,000.00 USD</a:t>
+                      </a:r>
+                    </a:p>
+                  </a:txBody>
+                  <a:tcPr anchor="ctr" marL="36576" marR="36576" marT="9144" marB="9144">
+                    <a:solidFill>
+                      <a:srgbClr val="E8EEF5"/>
+                    </a:solidFill>
+                  </a:tcPr>
+                </a:tc>
+                <a:tc>
+                  <a:txBody>
+                    <a:bodyPr wrap="square"/>
+                    <a:lstStyle/>
+                    <a:p>
+                      <a:pPr algn="l">
+                        <a:defRPr sz="530">
+                          <a:solidFill>
+                            <a:srgbClr val="1E242B"/>
+                          </a:solidFill>
+                          <a:latin typeface="Meiryo UI"/>
+                        </a:defRPr>
+                      </a:pPr>
+                      <a:r>
+                        <a:t>-30秒/台 短縮</a:t>
+                      </a:r>
+                      <a:br/>
+                      <a:r>
+                        <a:t>年間 29.6M VND削減</a:t>
+                      </a:r>
+                    </a:p>
+                  </a:txBody>
+                  <a:tcPr anchor="ctr" marL="36576" marR="36576" marT="9144" marB="9144">
+                    <a:solidFill>
+                      <a:srgbClr val="E8EEF5"/>
+                    </a:solidFill>
+                  </a:tcPr>
+                </a:tc>
+              </a:tr>
+              <a:tr h="241070">
+                <a:tc>
+                  <a:txBody>
+                    <a:bodyPr wrap="square"/>
+                    <a:lstStyle/>
+                    <a:p>
+                      <a:pPr algn="ctr">
+                        <a:defRPr sz="530" b="1">
+                          <a:solidFill>
+                            <a:srgbClr val="1E242B"/>
+                          </a:solidFill>
+                          <a:latin typeface="Meiryo UI"/>
+                        </a:defRPr>
+                      </a:pPr>
+                      <a:r>
+                        <a:t>3案件</a:t>
+                      </a:r>
+                      <a:br/>
+                      <a:r>
+                        <a:t>総計</a:t>
+                      </a:r>
+                    </a:p>
+                  </a:txBody>
+                  <a:tcPr anchor="ctr" marL="36576" marR="36576" marT="9144" marB="9144">
+                    <a:solidFill>
+                      <a:srgbClr val="EAF7EE"/>
+                    </a:solidFill>
+                  </a:tcPr>
+                </a:tc>
+                <a:tc>
+                  <a:txBody>
+                    <a:bodyPr wrap="square"/>
+                    <a:lstStyle/>
+                    <a:p>
+                      <a:pPr algn="l">
+                        <a:defRPr sz="530" b="1">
+                          <a:solidFill>
+                            <a:srgbClr val="1E242B"/>
+                          </a:solidFill>
+                          <a:latin typeface="Meiryo UI"/>
+                        </a:defRPr>
+                      </a:pPr>
+                      <a:r>
+                        <a:t>見積書記載 3案件合計（No.22 ＋ No.23 ＋ No.24） 【案 B：一括申請】</a:t>
+                      </a:r>
+                      <a:br/>
+                      <a:r>
+                        <a:t>（内訳明細計：855,700,000 VND / 32,911.54 USD ｜ サマリー表記載：858,000,000 VND / 33,000 USD）</a:t>
+                      </a:r>
+                    </a:p>
+                  </a:txBody>
+                  <a:tcPr anchor="ctr" marL="36576" marR="36576" marT="9144" marB="9144">
+                    <a:solidFill>
+                      <a:srgbClr val="EAF7EE"/>
+                    </a:solidFill>
+                  </a:tcPr>
+                </a:tc>
+                <a:tc>
+                  <a:txBody>
+                    <a:bodyPr wrap="square"/>
+                    <a:lstStyle/>
+                    <a:p>
+                      <a:pPr algn="r">
+                        <a:defRPr sz="530">
+                          <a:solidFill>
+                            <a:srgbClr val="1E242B"/>
+                          </a:solidFill>
+                          <a:latin typeface="Meiryo UI"/>
+                        </a:defRPr>
+                      </a:pPr>
+                      <a:r>
+                        <a:t>855,690,000 VND</a:t>
+                      </a:r>
+                    </a:p>
+                  </a:txBody>
+                  <a:tcPr anchor="ctr" marL="36576" marR="36576" marT="9144" marB="9144">
+                    <a:solidFill>
+                      <a:srgbClr val="EAF7EE"/>
+                    </a:solidFill>
+                  </a:tcPr>
+                </a:tc>
+                <a:tc>
+                  <a:txBody>
+                    <a:bodyPr wrap="square"/>
+                    <a:lstStyle/>
+                    <a:p>
+                      <a:pPr algn="r">
+                        <a:defRPr sz="530">
+                          <a:solidFill>
+                            <a:srgbClr val="1E242B"/>
+                          </a:solidFill>
+                          <a:latin typeface="Meiryo UI"/>
+                        </a:defRPr>
+                      </a:pPr>
+                      <a:r>
+                        <a:t>32,911.15 USD</a:t>
+                      </a:r>
+                      <a:br/>
+                      <a:r>
+                        <a:t>（丸め値: 33,000$）</a:t>
+                      </a:r>
+                    </a:p>
+                  </a:txBody>
+                  <a:tcPr anchor="ctr" marL="36576" marR="36576" marT="9144" marB="9144">
+                    <a:solidFill>
+                      <a:srgbClr val="EAF7EE"/>
+                    </a:solidFill>
+                  </a:tcPr>
+                </a:tc>
+                <a:tc>
+                  <a:txBody>
+                    <a:bodyPr wrap="square"/>
+                    <a:lstStyle/>
+                    <a:p>
+                      <a:pPr algn="l">
+                        <a:defRPr sz="530">
+                          <a:solidFill>
+                            <a:srgbClr val="1E242B"/>
+                          </a:solidFill>
+                          <a:latin typeface="Meiryo UI"/>
+                        </a:defRPr>
+                      </a:pPr>
+                      <a:r>
+                        <a:t>-170秒/台 短縮</a:t>
+                      </a:r>
+                      <a:br/>
+                      <a:r>
+                        <a:t>年間 167.7M VND削減</a:t>
+                      </a:r>
+                    </a:p>
+                  </a:txBody>
+                  <a:tcPr anchor="ctr" marL="36576" marR="36576" marT="9144" marB="9144">
+                    <a:solidFill>
+                      <a:srgbClr val="EAF7EE"/>
+                    </a:solidFill>
+                  </a:tcPr>
+                </a:tc>
+              </a:tr>
+            </a:tbl>
+          </a:graphicData>
+        </a:graphic>
+      </p:graphicFrame>
+      <p:sp>
+        <p:nvSpPr>
+          <p:cNvPr id="9" name="TextBox 8"/>
+          <p:cNvSpPr txBox="1"/>
+          <p:nvPr/>
+        </p:nvSpPr>
+        <p:spPr>
+          <a:xfrm>
+            <a:off x="256032" y="4069080"/>
+            <a:ext cx="6629400" cy="182880"/>
+          </a:xfrm>
+          <a:prstGeom prst="rect">
+            <a:avLst/>
+          </a:prstGeom>
+          <a:noFill/>
+        </p:spPr>
+        <p:txBody>
+          <a:bodyPr wrap="square" lIns="18288" rIns="18288" tIns="9144" bIns="9144">
+            <a:spAutoFit/>
+          </a:bodyPr>
+          <a:lstStyle/>
+          <a:p>
+            <a:pPr>
+              <a:defRPr sz="780" b="1">
+                <a:solidFill>
+                  <a:srgbClr val="1B365D"/>
+                </a:solidFill>
+                <a:latin typeface="Meiryo UI"/>
+              </a:defRPr>
+            </a:pPr>
+            <a:r>
+              <a:t>■ 2. 部門長への技術相談および意思決定要請事項</a:t>
+            </a:r>
+          </a:p>
+        </p:txBody>
+      </p:sp>
+      <p:graphicFrame>
+        <p:nvGraphicFramePr>
+          <p:cNvPr id="10" name="Table 9"/>
+          <p:cNvGraphicFramePr>
+            <a:graphicFrameLocks noGrp="1"/>
+          </p:cNvGraphicFramePr>
+          <p:nvPr/>
+        </p:nvGraphicFramePr>
+        <p:xfrm>
+          <a:off x="256032" y="4261104"/>
+          <a:ext cx="6629400" cy="2212848"/>
+        </p:xfrm>
+        <a:graphic>
+          <a:graphicData uri="http://schemas.openxmlformats.org/drawingml/2006/table">
+            <a:tbl>
+              <a:tblPr firstRow="1" bandRow="1">
+                <a:tableStyleId>{5C22544A-7EE6-4342-B048-85BDC9FD1C3A}</a:tableStyleId>
+              </a:tblPr>
+              <a:tblGrid>
+                <a:gridCol w="1325880"/>
+                <a:gridCol w="3337560"/>
+                <a:gridCol w="1965960"/>
+              </a:tblGrid>
+              <a:tr h="442569">
+                <a:tc>
+                  <a:txBody>
+                    <a:bodyPr wrap="square"/>
+                    <a:lstStyle/>
+                    <a:p>
+                      <a:pPr algn="ctr">
+                        <a:defRPr sz="650" b="1">
+                          <a:solidFill>
+                            <a:srgbClr val="FFFFFF"/>
+                          </a:solidFill>
+                          <a:latin typeface="Meiryo UI"/>
+                        </a:defRPr>
+                      </a:pPr>
+                      <a:r>
+                        <a:t>相談項目</a:t>
+                      </a:r>
+                    </a:p>
+                  </a:txBody>
+                  <a:tcPr anchor="ctr" marL="36576" marR="36576" marT="9144" marB="9144">
+                    <a:solidFill>
+                      <a:srgbClr val="1B365D"/>
+                    </a:solidFill>
+                  </a:tcPr>
+                </a:tc>
+                <a:tc>
+                  <a:txBody>
+                    <a:bodyPr wrap="square"/>
+                    <a:lstStyle/>
+                    <a:p>
+                      <a:pPr algn="ctr">
+                        <a:defRPr sz="650" b="1">
+                          <a:solidFill>
+                            <a:srgbClr val="FFFFFF"/>
+                          </a:solidFill>
+                          <a:latin typeface="Meiryo UI"/>
+                        </a:defRPr>
+                      </a:pPr>
+                      <a:r>
+                        <a:t>現状およびKDTVN製造技術部からの提案内容</a:t>
+                      </a:r>
+                    </a:p>
+                  </a:txBody>
+                  <a:tcPr anchor="ctr" marL="36576" marR="36576" marT="9144" marB="9144">
+                    <a:solidFill>
+                      <a:srgbClr val="1B365D"/>
+                    </a:solidFill>
+                  </a:tcPr>
+                </a:tc>
+                <a:tc>
+                  <a:txBody>
+                    <a:bodyPr wrap="square"/>
+                    <a:lstStyle/>
+                    <a:p>
+                      <a:pPr algn="ctr">
+                        <a:defRPr sz="650" b="1">
+                          <a:solidFill>
+                            <a:srgbClr val="FFFFFF"/>
+                          </a:solidFill>
+                          <a:latin typeface="Meiryo UI"/>
+                        </a:defRPr>
+                      </a:pPr>
+                      <a:r>
+                        <a:t>決定を仰ぎたい事項</a:t>
+                      </a:r>
+                    </a:p>
+                  </a:txBody>
+                  <a:tcPr anchor="ctr" marL="36576" marR="36576" marT="9144" marB="9144">
+                    <a:solidFill>
+                      <a:srgbClr val="1B365D"/>
+                    </a:solidFill>
+                  </a:tcPr>
+                </a:tc>
+              </a:tr>
+              <a:tr h="442569">
+                <a:tc>
+                  <a:txBody>
+                    <a:bodyPr wrap="square"/>
+                    <a:lstStyle/>
+                    <a:p>
+                      <a:pPr algn="l">
+                        <a:defRPr sz="580" b="1">
+                          <a:solidFill>
+                            <a:srgbClr val="1E242B"/>
+                          </a:solidFill>
+                          <a:latin typeface="Meiryo UI"/>
+                        </a:defRPr>
+                      </a:pPr>
+                      <a:r>
+                        <a:t>1. 第1期・第2期</a:t>
+                      </a:r>
+                      <a:br/>
+                      <a:r>
+                        <a:t>投資方針の選択</a:t>
+                      </a:r>
+                    </a:p>
+                  </a:txBody>
+                  <a:tcPr anchor="ctr" marL="36576" marR="36576" marT="9144" marB="9144">
+                    <a:solidFill>
+                      <a:srgbClr val="EAF7EE"/>
+                    </a:solidFill>
+                  </a:tcPr>
+                </a:tc>
+                <a:tc>
+                  <a:txBody>
+                    <a:bodyPr wrap="square"/>
+                    <a:lstStyle/>
+                    <a:p>
+                      <a:pPr algn="l">
+                        <a:defRPr sz="580">
+                          <a:solidFill>
+                            <a:srgbClr val="1E242B"/>
+                          </a:solidFill>
+                          <a:latin typeface="Meiryo UI"/>
+                        </a:defRPr>
+                      </a:pPr>
+                      <a:r>
+                        <a:t>• 案 A（推奨）：No.22（101.69M VND）を先行承認。高額ロボットNo.23, 24はDP連続スキャン（No.25）およびHost PCログ照合へ置換。第2期にカメラNo.27（-177s）とDP No.25を申請。</a:t>
+                      </a:r>
+                      <a:br/>
+                      <a:r>
+                        <a:t>• 案 B：見積書記載の3案件（855.69M VND / 32,911.15 USD）を一括承認。</a:t>
+                      </a:r>
+                    </a:p>
+                  </a:txBody>
+                  <a:tcPr anchor="ctr" marL="36576" marR="36576" marT="9144" marB="9144">
+                    <a:solidFill>
+                      <a:srgbClr val="EAF7EE"/>
+                    </a:solidFill>
+                  </a:tcPr>
+                </a:tc>
+                <a:tc>
+                  <a:txBody>
+                    <a:bodyPr wrap="square"/>
+                    <a:lstStyle/>
+                    <a:p>
+                      <a:pPr algn="l">
+                        <a:defRPr sz="580">
+                          <a:solidFill>
+                            <a:srgbClr val="1E242B"/>
+                          </a:solidFill>
+                          <a:latin typeface="Meiryo UI"/>
+                        </a:defRPr>
+                      </a:pPr>
+                      <a:r>
+                        <a:t>11月15日までに案Aまたは案Bのご決裁を要請</a:t>
+                      </a:r>
+                    </a:p>
+                  </a:txBody>
+                  <a:tcPr anchor="ctr" marL="36576" marR="36576" marT="9144" marB="9144">
+                    <a:solidFill>
+                      <a:srgbClr val="EAF7EE"/>
+                    </a:solidFill>
+                  </a:tcPr>
+                </a:tc>
+              </a:tr>
+              <a:tr h="442569">
+                <a:tc>
+                  <a:txBody>
+                    <a:bodyPr wrap="square"/>
+                    <a:lstStyle/>
+                    <a:p>
+                      <a:pPr algn="l">
+                        <a:defRPr sz="580" b="1">
+                          <a:solidFill>
+                            <a:srgbClr val="1E242B"/>
+                          </a:solidFill>
+                          <a:latin typeface="Meiryo UI"/>
+                        </a:defRPr>
+                      </a:pPr>
+                      <a:r>
+                        <a:t>2. カバー6枚組付け</a:t>
+                      </a:r>
+                      <a:br/>
+                      <a:r>
+                        <a:t>工程の移管（No.33）</a:t>
+                      </a:r>
+                    </a:p>
+                  </a:txBody>
+                  <a:tcPr anchor="ctr" marL="36576" marR="36576" marT="9144" marB="9144">
+                    <a:solidFill>
+                      <a:srgbClr val="F7F9FC"/>
+                    </a:solidFill>
+                  </a:tcPr>
+                </a:tc>
+                <a:tc>
+                  <a:txBody>
+                    <a:bodyPr wrap="square"/>
+                    <a:lstStyle/>
+                    <a:p>
+                      <a:pPr algn="l">
+                        <a:defRPr sz="580">
+                          <a:solidFill>
+                            <a:srgbClr val="1E242B"/>
+                          </a:solidFill>
+                          <a:latin typeface="Meiryo UI"/>
+                        </a:defRPr>
+                      </a:pPr>
+                      <a:r>
+                        <a:t>K3（A-3）にて耐圧測定前に外装カバー6枚を手動組付けし48～90秒を要している。カバー組付け工程を本体組立ライン（本体組立）末尾へ正式移管することを提案（現場設備費0円）。</a:t>
+                      </a:r>
+                    </a:p>
+                  </a:txBody>
+                  <a:tcPr anchor="ctr" marL="36576" marR="36576" marT="9144" marB="9144">
+                    <a:solidFill>
+                      <a:srgbClr val="F7F9FC"/>
+                    </a:solidFill>
+                  </a:tcPr>
+                </a:tc>
+                <a:tc>
+                  <a:txBody>
+                    <a:bodyPr wrap="square"/>
+                    <a:lstStyle/>
+                    <a:p>
+                      <a:pPr algn="l">
+                        <a:defRPr sz="580">
+                          <a:solidFill>
+                            <a:srgbClr val="1E242B"/>
+                          </a:solidFill>
+                          <a:latin typeface="Meiryo UI"/>
+                        </a:defRPr>
+                      </a:pPr>
+                      <a:r>
+                        <a:t>組立部門および日本PEとの交渉・合意推進</a:t>
+                      </a:r>
+                    </a:p>
+                  </a:txBody>
+                  <a:tcPr anchor="ctr" marL="36576" marR="36576" marT="9144" marB="9144">
+                    <a:solidFill>
+                      <a:srgbClr val="F7F9FC"/>
+                    </a:solidFill>
+                  </a:tcPr>
+                </a:tc>
+              </a:tr>
+              <a:tr h="442569">
+                <a:tc>
+                  <a:txBody>
+                    <a:bodyPr wrap="square"/>
+                    <a:lstStyle/>
+                    <a:p>
+                      <a:pPr algn="l">
+                        <a:defRPr sz="580" b="1">
+                          <a:solidFill>
+                            <a:srgbClr val="1E242B"/>
+                          </a:solidFill>
+                          <a:latin typeface="Meiryo UI"/>
+                        </a:defRPr>
+                      </a:pPr>
+                      <a:r>
+                        <a:t>3. 工程DR日程および</a:t>
+                      </a:r>
+                      <a:br/>
+                      <a:r>
+                        <a:t>転写ベルト廃止判断</a:t>
+                      </a:r>
+                    </a:p>
+                  </a:txBody>
+                  <a:tcPr anchor="ctr" marL="36576" marR="36576" marT="9144" marB="9144">
+                    <a:solidFill>
+                      <a:srgbClr val="FEF7E6"/>
+                    </a:solidFill>
+                  </a:tcPr>
+                </a:tc>
+                <a:tc>
+                  <a:txBody>
+                    <a:bodyPr wrap="square"/>
+                    <a:lstStyle/>
+                    <a:p>
+                      <a:pPr algn="l">
+                        <a:defRPr sz="580">
+                          <a:solidFill>
+                            <a:srgbClr val="1E242B"/>
+                          </a:solidFill>
+                          <a:latin typeface="Meiryo UI"/>
+                        </a:defRPr>
+                      </a:pPr>
+                      <a:r>
+                        <a:t>• 日本設計/生技に対し工程DR日程の確定およびベトナムからの基板・FW改善要請6件の11月中回答を要請（PMT1試作12月への反映）。</a:t>
+                      </a:r>
+                      <a:br/>
+                      <a:r>
+                        <a:t>• 転写ベルト蛇行測定は新プーリ（35°面取り）＋新ベルトロットでCpk ≥ 1.33確認後に廃止。</a:t>
+                      </a:r>
+                    </a:p>
+                  </a:txBody>
+                  <a:tcPr anchor="ctr" marL="36576" marR="36576" marT="9144" marB="9144">
+                    <a:solidFill>
+                      <a:srgbClr val="FEF7E6"/>
+                    </a:solidFill>
+                  </a:tcPr>
+                </a:tc>
+                <a:tc>
+                  <a:txBody>
+                    <a:bodyPr wrap="square"/>
+                    <a:lstStyle/>
+                    <a:p>
+                      <a:pPr algn="l">
+                        <a:defRPr sz="580">
+                          <a:solidFill>
+                            <a:srgbClr val="1E242B"/>
+                          </a:solidFill>
+                          <a:latin typeface="Meiryo UI"/>
+                        </a:defRPr>
+                      </a:pPr>
+                      <a:r>
+                        <a:t>日本PEへの働きかけおよび品保との合意支援</a:t>
+                      </a:r>
+                    </a:p>
+                  </a:txBody>
+                  <a:tcPr anchor="ctr" marL="36576" marR="36576" marT="9144" marB="9144">
+                    <a:solidFill>
+                      <a:srgbClr val="FEF7E6"/>
+                    </a:solidFill>
+                  </a:tcPr>
+                </a:tc>
+              </a:tr>
+              <a:tr h="442572">
+                <a:tc>
+                  <a:txBody>
+                    <a:bodyPr wrap="square"/>
+                    <a:lstStyle/>
+                    <a:p>
+                      <a:pPr algn="l">
+                        <a:defRPr sz="580" b="1">
+                          <a:solidFill>
+                            <a:srgbClr val="1E242B"/>
+                          </a:solidFill>
+                          <a:latin typeface="Meiryo UI"/>
+                        </a:defRPr>
+                      </a:pPr>
+                      <a:r>
+                        <a:t>4. Spica仕様に基づく</a:t>
+                      </a:r>
+                      <a:br/>
+                      <a:r>
+                        <a:t>社内LANインフラ整備</a:t>
+                      </a:r>
+                    </a:p>
+                  </a:txBody>
+                  <a:tcPr anchor="ctr" marL="36576" marR="36576" marT="9144" marB="9144">
+                    <a:solidFill>
+                      <a:srgbClr val="F7F9FC"/>
+                    </a:solidFill>
+                  </a:tcPr>
+                </a:tc>
+                <a:tc>
+                  <a:txBody>
+                    <a:bodyPr wrap="square"/>
+                    <a:lstStyle/>
+                    <a:p>
+                      <a:pPr algn="l">
+                        <a:defRPr sz="580">
+                          <a:solidFill>
+                            <a:srgbClr val="1E242B"/>
+                          </a:solidFill>
+                          <a:latin typeface="Meiryo UI"/>
+                        </a:defRPr>
+                      </a:pPr>
+                      <a:r>
+                        <a:t>AthenaのRaspberry Pi＋バッテリー方式は電池劣化・Wi-Fi途絶が発生したため、IrisEXPではSpica Mini PC方式（約4万円/台、商用AC電源、有線LAN/VLAN）へ統一を要請。</a:t>
+                      </a:r>
+                    </a:p>
+                  </a:txBody>
+                  <a:tcPr anchor="ctr" marL="36576" marR="36576" marT="9144" marB="9144">
+                    <a:solidFill>
+                      <a:srgbClr val="F7F9FC"/>
+                    </a:solidFill>
+                  </a:tcPr>
+                </a:tc>
+                <a:tc>
+                  <a:txBody>
+                    <a:bodyPr wrap="square"/>
+                    <a:lstStyle/>
+                    <a:p>
+                      <a:pPr algn="l">
+                        <a:defRPr sz="580">
+                          <a:solidFill>
+                            <a:srgbClr val="1E242B"/>
+                          </a:solidFill>
+                          <a:latin typeface="Meiryo UI"/>
+                        </a:defRPr>
+                      </a:pPr>
+                      <a:r>
+                        <a:t>Spica統一方針の承認および有線LAN配線手配</a:t>
+                      </a:r>
+                    </a:p>
+                  </a:txBody>
+                  <a:tcPr anchor="ctr" marL="36576" marR="36576" marT="9144" marB="9144">
+                    <a:solidFill>
+                      <a:srgbClr val="F7F9FC"/>
+                    </a:solidFill>
+                  </a:tcPr>
+                </a:tc>
+              </a:tr>
+            </a:tbl>
+          </a:graphicData>
+        </a:graphic>
+      </p:graphicFrame>
+      <p:pic>
+        <p:nvPicPr>
+          <p:cNvPr id="11" name="Picture 10" descr="chart_s15_bom22.png"/>
+          <p:cNvPicPr>
+            <a:picLocks noChangeAspect="1"/>
+          </p:cNvPicPr>
+          <p:nvPr/>
+        </p:nvPicPr>
+        <p:blipFill>
+          <a:blip r:embed="rId2"/>
+          <a:stretch>
+            <a:fillRect/>
+          </a:stretch>
+        </p:blipFill>
+        <p:spPr>
+          <a:xfrm>
+            <a:off x="6995160" y="1188720"/>
+            <a:ext cx="4919472" cy="2723279"/>
+          </a:xfrm>
+          <a:prstGeom prst="rect">
+            <a:avLst/>
+          </a:prstGeom>
+        </p:spPr>
+      </p:pic>
+      <p:sp>
+        <p:nvSpPr>
+          <p:cNvPr id="12" name="Rectangle 11"/>
+          <p:cNvSpPr/>
+          <p:nvPr/>
+        </p:nvSpPr>
+        <p:spPr>
+          <a:xfrm>
+            <a:off x="6995160" y="4261104"/>
+            <a:ext cx="4919472" cy="2212848"/>
+          </a:xfrm>
+          <a:prstGeom prst="rect">
+            <a:avLst/>
+          </a:prstGeom>
+          <a:solidFill>
+            <a:srgbClr val="EAF7EE"/>
+          </a:solidFill>
+          <a:ln w="12700">
+            <a:solidFill>
+              <a:srgbClr val="1E6E3E"/>
+            </a:solidFill>
+          </a:ln>
+        </p:spPr>
+        <p:style>
+          <a:lnRef idx="1">
+            <a:schemeClr val="accent1"/>
+          </a:lnRef>
+          <a:fillRef idx="3">
+            <a:schemeClr val="accent1"/>
+          </a:fillRef>
+          <a:effectRef idx="2">
+            <a:schemeClr val="accent1"/>
+          </a:effectRef>
+          <a:fontRef idx="minor">
+            <a:schemeClr val="lt1"/>
+          </a:fontRef>
+        </p:style>
+        <p:txBody>
+          <a:bodyPr rtlCol="0" anchor="ctr"/>
+          <a:lstStyle/>
+          <a:p>
+            <a:pPr algn="ctr"/>
+          </a:p>
+        </p:txBody>
+      </p:sp>
+      <p:sp>
+        <p:nvSpPr>
+          <p:cNvPr id="13" name="Rectangle 12"/>
+          <p:cNvSpPr/>
+          <p:nvPr/>
+        </p:nvSpPr>
+        <p:spPr>
+          <a:xfrm>
+            <a:off x="6995160" y="4261104"/>
+            <a:ext cx="4919472" cy="292608"/>
+          </a:xfrm>
+          <a:prstGeom prst="rect">
+            <a:avLst/>
+          </a:prstGeom>
+          <a:solidFill>
+            <a:srgbClr val="1E6E3E"/>
+          </a:solidFill>
+          <a:ln>
+            <a:noFill/>
+          </a:ln>
+        </p:spPr>
+        <p:style>
+          <a:lnRef idx="1">
+            <a:schemeClr val="accent1"/>
+          </a:lnRef>
+          <a:fillRef idx="3">
+            <a:schemeClr val="accent1"/>
+          </a:fillRef>
+          <a:effectRef idx="2">
+            <a:schemeClr val="accent1"/>
+          </a:effectRef>
+          <a:fontRef idx="minor">
+            <a:schemeClr val="lt1"/>
+          </a:fontRef>
+        </p:style>
+        <p:txBody>
+          <a:bodyPr rtlCol="0" anchor="ctr" wrap="square" tIns="27432"/>
+          <a:lstStyle/>
+          <a:p>
+            <a:pPr algn="ctr">
+              <a:defRPr sz="930" b="1">
+                <a:solidFill>
+                  <a:srgbClr val="FFFFFF"/>
+                </a:solidFill>
+                <a:latin typeface="Meiryo UI"/>
+              </a:defRPr>
+            </a:pPr>
+            <a:r>
+              <a:t>投資予算申請 2つの選択案の比較まとめ</a:t>
+            </a:r>
+          </a:p>
+        </p:txBody>
+      </p:sp>
+      <p:sp>
+        <p:nvSpPr>
+          <p:cNvPr id="14" name="TextBox 13"/>
+          <p:cNvSpPr txBox="1"/>
+          <p:nvPr/>
+        </p:nvSpPr>
+        <p:spPr>
+          <a:xfrm>
+            <a:off x="7068312" y="4581144"/>
+            <a:ext cx="4773168" cy="1865376"/>
+          </a:xfrm>
+          <a:prstGeom prst="rect">
+            <a:avLst/>
+          </a:prstGeom>
+          <a:noFill/>
+        </p:spPr>
+        <p:txBody>
+          <a:bodyPr wrap="square" lIns="36576" rIns="36576" tIns="18288" bIns="18288">
+            <a:spAutoFit/>
+          </a:bodyPr>
+          <a:lstStyle/>
+          <a:p>
+            <a:pPr>
+              <a:spcAft>
+                <a:spcPts val="220"/>
+              </a:spcAft>
+              <a:defRPr sz="720" b="1">
+                <a:solidFill>
+                  <a:srgbClr val="1E242B"/>
+                </a:solidFill>
+                <a:latin typeface="Meiryo UI"/>
+              </a:defRPr>
+            </a:pPr>
+            <a:r>
+              <a:t>■ 案 A（推奨：No.22を先行導入、ロボットをDP/Host PCへ置換）：</a:t>
+            </a:r>
+          </a:p>
+          <a:p>
+            <a:pPr>
+              <a:spcAft>
+                <a:spcPts val="220"/>
+              </a:spcAft>
+              <a:defRPr sz="720">
+                <a:solidFill>
+                  <a:srgbClr val="1E242B"/>
+                </a:solidFill>
+                <a:latin typeface="Meiryo UI"/>
+              </a:defRPr>
+            </a:pPr>
+            <a:r>
+              <a:t>   • 先行申請額：No.22（BOM 25項目） 101,690,000 VND（3,911.15 USD）</a:t>
+            </a:r>
+          </a:p>
+          <a:p>
+            <a:pPr>
+              <a:spcAft>
+                <a:spcPts val="220"/>
+              </a:spcAft>
+              <a:defRPr sz="720">
+                <a:solidFill>
+                  <a:srgbClr val="1E242B"/>
+                </a:solidFill>
+                <a:latin typeface="Meiryo UI"/>
+              </a:defRPr>
+            </a:pPr>
+            <a:r>
+              <a:t>   • 効果：30秒/台 短縮、年間 29,600,000 VND（1,138.46 USD）削減。</a:t>
+            </a:r>
+          </a:p>
+          <a:p>
+            <a:pPr>
+              <a:spcAft>
+                <a:spcPts val="220"/>
+              </a:spcAft>
+              <a:defRPr sz="720">
+                <a:solidFill>
+                  <a:srgbClr val="1E242B"/>
+                </a:solidFill>
+                <a:latin typeface="Meiryo UI"/>
+              </a:defRPr>
+            </a:pPr>
+            <a:r>
+              <a:t>   • 見積取得中の案件（No.25 DP、No.27 HIKROBOTカメラ、No.21 オプション治具、No.28 出荷設定LAN）は仕様確定後に第2期として分割申請。</a:t>
+            </a:r>
+          </a:p>
+          <a:p>
+            <a:pPr>
+              <a:spcAft>
+                <a:spcPts val="220"/>
+              </a:spcAft>
+              <a:defRPr sz="720" b="1">
+                <a:solidFill>
+                  <a:srgbClr val="1E242B"/>
+                </a:solidFill>
+                <a:latin typeface="Meiryo UI"/>
+              </a:defRPr>
+            </a:pPr>
+            <a:r>
+              <a:t>■ 案 B（見積書記載 3案件の一括申請）：</a:t>
+            </a:r>
+          </a:p>
+          <a:p>
+            <a:pPr>
+              <a:spcAft>
+                <a:spcPts val="220"/>
+              </a:spcAft>
+              <a:defRPr sz="720">
+                <a:solidFill>
+                  <a:srgbClr val="1E242B"/>
+                </a:solidFill>
+                <a:latin typeface="Meiryo UI"/>
+              </a:defRPr>
+            </a:pPr>
+            <a:r>
+              <a:t>   • No.22（101.69M）＋ No.23 原稿ロボット（650M）＋ No.24 USB/U201ロボット（104M）</a:t>
+            </a:r>
+          </a:p>
+          <a:p>
+            <a:pPr>
+              <a:spcAft>
+                <a:spcPts val="220"/>
+              </a:spcAft>
+              <a:defRPr sz="720">
+                <a:solidFill>
+                  <a:srgbClr val="1E242B"/>
+                </a:solidFill>
+                <a:latin typeface="Meiryo UI"/>
+              </a:defRPr>
+            </a:pPr>
+            <a:r>
+              <a:t>   • 一括申請総額：855,690,000 VND（32,911.15 USD / 丸め値 33,000 USD）</a:t>
+            </a:r>
+          </a:p>
+          <a:p>
+            <a:pPr>
+              <a:spcAft>
+                <a:spcPts val="220"/>
+              </a:spcAft>
+              <a:defRPr sz="720">
+                <a:solidFill>
+                  <a:srgbClr val="1E242B"/>
+                </a:solidFill>
+                <a:latin typeface="Meiryo UI"/>
+              </a:defRPr>
+            </a:pPr>
+            <a:r>
+              <a:t>   • 効果：170秒/台 短縮、年間 167,733,333 VND（6,451.28 USD）削減。</a:t>
+            </a:r>
+          </a:p>
+        </p:txBody>
+      </p:sp>
+    </p:spTree>
+  </p:cSld>
+  <p:clrMapOvr>
+    <a:masterClrMapping/>
+  </p:clrMapOvr>
+</p:sld>
+</file>
+
+<file path=ppt/slides/slide8.xml><?xml version="1.0" encoding="utf-8"?>
+<p:sld xmlns:a="http://schemas.openxmlformats.org/drawingml/2006/main" xmlns:p="http://schemas.openxmlformats.org/presentationml/2006/main" xmlns:r="http://schemas.openxmlformats.org/officeDocument/2006/relationships">
+  <p:cSld>
+    <p:spTree>
+      <p:nvGrpSpPr>
+        <p:cNvPr id="1" name=""/>
+        <p:cNvGrpSpPr/>
+        <p:nvPr/>
+      </p:nvGrpSpPr>
+      <p:grpSpPr/>
+      <p:sp>
+        <p:nvSpPr>
+          <p:cNvPr id="2" name="Rectangle 1"/>
+          <p:cNvSpPr/>
+          <p:nvPr/>
+        </p:nvSpPr>
+        <p:spPr>
+          <a:xfrm>
+            <a:off x="0" y="0"/>
+            <a:ext cx="12191695" cy="566928"/>
+          </a:xfrm>
+          <a:prstGeom prst="rect">
+            <a:avLst/>
+          </a:prstGeom>
+          <a:solidFill>
+            <a:srgbClr val="1B365D"/>
+          </a:solidFill>
+          <a:ln>
+            <a:noFill/>
+          </a:ln>
+        </p:spPr>
+        <p:style>
+          <a:lnRef idx="1">
+            <a:schemeClr val="accent1"/>
+          </a:lnRef>
+          <a:fillRef idx="3">
+            <a:schemeClr val="accent1"/>
+          </a:fillRef>
+          <a:effectRef idx="2">
+            <a:schemeClr val="accent1"/>
+          </a:effectRef>
+          <a:fontRef idx="minor">
+            <a:schemeClr val="lt1"/>
+          </a:fontRef>
+        </p:style>
+        <p:txBody>
+          <a:bodyPr rtlCol="0" anchor="ctr"/>
+          <a:lstStyle/>
+          <a:p>
+            <a:pPr algn="ctr"/>
+          </a:p>
+        </p:txBody>
+      </p:sp>
+      <p:sp>
+        <p:nvSpPr>
+          <p:cNvPr id="3" name="Rounded Rectangle 2"/>
+          <p:cNvSpPr/>
+          <p:nvPr/>
+        </p:nvSpPr>
+        <p:spPr>
+          <a:xfrm>
+            <a:off x="256032" y="91440"/>
+            <a:ext cx="2057400" cy="384048"/>
+          </a:xfrm>
+          <a:prstGeom prst="roundRect">
+            <a:avLst/>
+          </a:prstGeom>
+          <a:solidFill>
+            <a:srgbClr val="D96B27"/>
+          </a:solidFill>
+          <a:ln>
+            <a:noFill/>
+          </a:ln>
+        </p:spPr>
+        <p:style>
+          <a:lnRef idx="1">
+            <a:schemeClr val="accent1"/>
+          </a:lnRef>
+          <a:fillRef idx="3">
+            <a:schemeClr val="accent1"/>
+          </a:fillRef>
+          <a:effectRef idx="2">
+            <a:schemeClr val="accent1"/>
+          </a:effectRef>
+          <a:fontRef idx="minor">
+            <a:schemeClr val="lt1"/>
+          </a:fontRef>
+        </p:style>
+        <p:txBody>
+          <a:bodyPr rtlCol="0" anchor="ctr" wrap="square" lIns="45720" rIns="45720" tIns="18288" bIns="18288"/>
+          <a:lstStyle/>
+          <a:p>
+            <a:pPr algn="ctr">
+              <a:defRPr sz="950" b="1">
+                <a:solidFill>
+                  <a:srgbClr val="FFFFFF"/>
+                </a:solidFill>
+                <a:latin typeface="Meiryo UI"/>
+              </a:defRPr>
+            </a:pPr>
+            <a:r>
               <a:t>4.2 前半工程改善</a:t>
             </a:r>
           </a:p>
@@ -26127,8 +27694,8 @@
           </a:bodyPr>
           <a:lstStyle/>
           <a:p>
-            <a:pPr algn="r">
-              <a:defRPr sz="1000" b="1">
+            <a:pPr>
+              <a:defRPr sz="1200">
                 <a:solidFill>
                   <a:srgbClr val="D0D8E8"/>
                 </a:solidFill>
@@ -26136,7 +27703,7 @@
               </a:defRPr>
             </a:pPr>
             <a:r>
-              <a:t>7 / 15</a:t>
+              <a:t>8 / 15</a:t>
             </a:r>
           </a:p>
         </p:txBody>
@@ -26183,7 +27750,7 @@
           <a:lstStyle/>
           <a:p>
             <a:pPr algn="ctr">
-              <a:defRPr sz="960" b="1">
+              <a:defRPr sz="1200" b="1">
                 <a:solidFill>
                   <a:srgbClr val="1B365D"/>
                 </a:solidFill>
@@ -26191,6 +27758,12 @@
               </a:defRPr>
             </a:pPr>
             <a:r>
+              <a:rPr sz="1200" b="1">
+                <a:solidFill>
+                  <a:srgbClr val="1B365D"/>
+                </a:solidFill>
+                <a:latin typeface="Meiryo UI"/>
+              </a:rPr>
               <a:t>■ 前半工程の改善により約173秒～185秒短縮し、A-1ステーションで作業者1名を削減。No.22（耐圧安全検査治具）はBOM 25項目で101,690,000 VND（3,911.15 USD）の見積が完了し、第1期先行導入を申請する。</a:t>
             </a:r>
           </a:p>
@@ -27533,7 +29106,7 @@
 </p:sld>
 </file>
 
-<file path=ppt/slides/slide8.xml><?xml version="1.0" encoding="utf-8"?>
+<file path=ppt/slides/slide9.xml><?xml version="1.0" encoding="utf-8"?>
 <p:sld xmlns:a="http://schemas.openxmlformats.org/drawingml/2006/main" xmlns:p="http://schemas.openxmlformats.org/presentationml/2006/main" xmlns:r="http://schemas.openxmlformats.org/officeDocument/2006/relationships">
   <p:cSld>
     <p:spTree>
@@ -27697,8 +29270,8 @@
           </a:bodyPr>
           <a:lstStyle/>
           <a:p>
-            <a:pPr algn="r">
-              <a:defRPr sz="1000" b="1">
+            <a:pPr>
+              <a:defRPr sz="1200">
                 <a:solidFill>
                   <a:srgbClr val="D0D8E8"/>
                 </a:solidFill>
@@ -27706,7 +29279,7 @@
               </a:defRPr>
             </a:pPr>
             <a:r>
-              <a:t>8 / 15</a:t>
+              <a:t>9 / 15</a:t>
             </a:r>
           </a:p>
         </p:txBody>
@@ -27753,7 +29326,7 @@
           <a:lstStyle/>
           <a:p>
             <a:pPr algn="ctr">
-              <a:defRPr sz="960" b="1">
+              <a:defRPr sz="1200" b="1">
                 <a:solidFill>
                   <a:srgbClr val="1B365D"/>
                 </a:solidFill>
@@ -27761,6 +29334,12 @@
               </a:defRPr>
             </a:pPr>
             <a:r>
+              <a:rPr sz="1200" b="1">
+                <a:solidFill>
+                  <a:srgbClr val="1B365D"/>
+                </a:solidFill>
+                <a:latin typeface="Meiryo UI"/>
+              </a:rPr>
               <a:t>■ 画像検査の最大ボトルネック（作業者9名）に対し、DP連続スキャン＋PC自動判定（No.25、25,000ドルのロボットNo.23を代替）とHIKROBOTカメラによる濃度・余白測定（No.27、177s～215s短縮）で劇的な工数削減を図る。</a:t>
             </a:r>
           </a:p>
@@ -29284,2015 +30863,6 @@
           </a:p>
         </p:txBody>
       </p:sp>
-    </p:spTree>
-  </p:cSld>
-  <p:clrMapOvr>
-    <a:masterClrMapping/>
-  </p:clrMapOvr>
-</p:sld>
-</file>
-
-<file path=ppt/slides/slide9.xml><?xml version="1.0" encoding="utf-8"?>
-<p:sld xmlns:a="http://schemas.openxmlformats.org/drawingml/2006/main" xmlns:p="http://schemas.openxmlformats.org/presentationml/2006/main" xmlns:r="http://schemas.openxmlformats.org/officeDocument/2006/relationships">
-  <p:cSld>
-    <p:spTree>
-      <p:nvGrpSpPr>
-        <p:cNvPr id="1" name=""/>
-        <p:cNvGrpSpPr/>
-        <p:nvPr/>
-      </p:nvGrpSpPr>
-      <p:grpSpPr/>
-      <p:sp>
-        <p:nvSpPr>
-          <p:cNvPr id="2" name="Rectangle 1"/>
-          <p:cNvSpPr/>
-          <p:nvPr/>
-        </p:nvSpPr>
-        <p:spPr>
-          <a:xfrm>
-            <a:off x="0" y="0"/>
-            <a:ext cx="12191695" cy="566928"/>
-          </a:xfrm>
-          <a:prstGeom prst="rect">
-            <a:avLst/>
-          </a:prstGeom>
-          <a:solidFill>
-            <a:srgbClr val="1B365D"/>
-          </a:solidFill>
-          <a:ln>
-            <a:noFill/>
-          </a:ln>
-        </p:spPr>
-        <p:style>
-          <a:lnRef idx="1">
-            <a:schemeClr val="accent1"/>
-          </a:lnRef>
-          <a:fillRef idx="3">
-            <a:schemeClr val="accent1"/>
-          </a:fillRef>
-          <a:effectRef idx="2">
-            <a:schemeClr val="accent1"/>
-          </a:effectRef>
-          <a:fontRef idx="minor">
-            <a:schemeClr val="lt1"/>
-          </a:fontRef>
-        </p:style>
-        <p:txBody>
-          <a:bodyPr rtlCol="0" anchor="ctr"/>
-          <a:lstStyle/>
-          <a:p>
-            <a:pPr algn="ctr"/>
-          </a:p>
-        </p:txBody>
-      </p:sp>
-      <p:sp>
-        <p:nvSpPr>
-          <p:cNvPr id="3" name="Rounded Rectangle 2"/>
-          <p:cNvSpPr/>
-          <p:nvPr/>
-        </p:nvSpPr>
-        <p:spPr>
-          <a:xfrm>
-            <a:off x="256032" y="91440"/>
-            <a:ext cx="2057400" cy="384048"/>
-          </a:xfrm>
-          <a:prstGeom prst="roundRect">
-            <a:avLst/>
-          </a:prstGeom>
-          <a:solidFill>
-            <a:srgbClr val="D96B27"/>
-          </a:solidFill>
-          <a:ln>
-            <a:noFill/>
-          </a:ln>
-        </p:spPr>
-        <p:style>
-          <a:lnRef idx="1">
-            <a:schemeClr val="accent1"/>
-          </a:lnRef>
-          <a:fillRef idx="3">
-            <a:schemeClr val="accent1"/>
-          </a:fillRef>
-          <a:effectRef idx="2">
-            <a:schemeClr val="accent1"/>
-          </a:effectRef>
-          <a:fontRef idx="minor">
-            <a:schemeClr val="lt1"/>
-          </a:fontRef>
-        </p:style>
-        <p:txBody>
-          <a:bodyPr rtlCol="0" anchor="ctr" wrap="square" lIns="45720" rIns="45720" tIns="18288" bIns="18288"/>
-          <a:lstStyle/>
-          <a:p>
-            <a:pPr algn="ctr">
-              <a:defRPr sz="950" b="1">
-                <a:solidFill>
-                  <a:srgbClr val="FFFFFF"/>
-                </a:solidFill>
-                <a:latin typeface="Meiryo UI"/>
-              </a:defRPr>
-            </a:pPr>
-            <a:r>
-              <a:t>4.4 追加提案・PDCA</a:t>
-            </a:r>
-          </a:p>
-        </p:txBody>
-      </p:sp>
-      <p:sp>
-        <p:nvSpPr>
-          <p:cNvPr id="4" name="TextBox 3"/>
-          <p:cNvSpPr txBox="1"/>
-          <p:nvPr/>
-        </p:nvSpPr>
-        <p:spPr>
-          <a:xfrm>
-            <a:off x="2377440" y="54864"/>
-            <a:ext cx="8961120" cy="457200"/>
-          </a:xfrm>
-          <a:prstGeom prst="rect">
-            <a:avLst/>
-          </a:prstGeom>
-          <a:noFill/>
-        </p:spPr>
-        <p:txBody>
-          <a:bodyPr wrap="square" lIns="18288" rIns="18288">
-            <a:spAutoFit/>
-          </a:bodyPr>
-          <a:lstStyle/>
-          <a:p>
-            <a:pPr>
-              <a:defRPr sz="1450" b="1">
-                <a:solidFill>
-                  <a:srgbClr val="FFFFFF"/>
-                </a:solidFill>
-                <a:latin typeface="Meiryo UI"/>
-              </a:defRPr>
-            </a:pPr>
-            <a:r>
-              <a:t>ベトナム第2次追加提案（No.29 ～ No.37）と2026年10月度PDCA実績</a:t>
-            </a:r>
-          </a:p>
-        </p:txBody>
-      </p:sp>
-      <p:sp>
-        <p:nvSpPr>
-          <p:cNvPr id="5" name="TextBox 4"/>
-          <p:cNvSpPr txBox="1"/>
-          <p:nvPr/>
-        </p:nvSpPr>
-        <p:spPr>
-          <a:xfrm>
-            <a:off x="11292840" y="109728"/>
-            <a:ext cx="731520" cy="347472"/>
-          </a:xfrm>
-          <a:prstGeom prst="rect">
-            <a:avLst/>
-          </a:prstGeom>
-          <a:noFill/>
-        </p:spPr>
-        <p:txBody>
-          <a:bodyPr wrap="none">
-            <a:spAutoFit/>
-          </a:bodyPr>
-          <a:lstStyle/>
-          <a:p>
-            <a:pPr algn="r">
-              <a:defRPr sz="1000" b="1">
-                <a:solidFill>
-                  <a:srgbClr val="D0D8E8"/>
-                </a:solidFill>
-                <a:latin typeface="Meiryo UI"/>
-              </a:defRPr>
-            </a:pPr>
-            <a:r>
-              <a:t>9 / 15</a:t>
-            </a:r>
-          </a:p>
-        </p:txBody>
-      </p:sp>
-      <p:sp>
-        <p:nvSpPr>
-          <p:cNvPr id="6" name="Rectangle 5"/>
-          <p:cNvSpPr/>
-          <p:nvPr/>
-        </p:nvSpPr>
-        <p:spPr>
-          <a:xfrm>
-            <a:off x="256032" y="640080"/>
-            <a:ext cx="11679631" cy="475488"/>
-          </a:xfrm>
-          <a:prstGeom prst="rect">
-            <a:avLst/>
-          </a:prstGeom>
-          <a:solidFill>
-            <a:srgbClr val="E8EEF5"/>
-          </a:solidFill>
-          <a:ln w="12700">
-            <a:solidFill>
-              <a:srgbClr val="2B547E"/>
-            </a:solidFill>
-          </a:ln>
-        </p:spPr>
-        <p:style>
-          <a:lnRef idx="1">
-            <a:schemeClr val="accent1"/>
-          </a:lnRef>
-          <a:fillRef idx="3">
-            <a:schemeClr val="accent1"/>
-          </a:fillRef>
-          <a:effectRef idx="2">
-            <a:schemeClr val="accent1"/>
-          </a:effectRef>
-          <a:fontRef idx="minor">
-            <a:schemeClr val="lt1"/>
-          </a:fontRef>
-        </p:style>
-        <p:txBody>
-          <a:bodyPr rtlCol="0" anchor="ctr" wrap="square" lIns="109728" rIns="109728" tIns="27432" bIns="27432"/>
-          <a:lstStyle/>
-          <a:p>
-            <a:pPr algn="ctr">
-              <a:defRPr sz="960" b="1">
-                <a:solidFill>
-                  <a:srgbClr val="1B365D"/>
-                </a:solidFill>
-                <a:latin typeface="Meiryo UI"/>
-              </a:defRPr>
-            </a:pPr>
-            <a:r>
-              <a:t>■ 追加9提案（No.29～37）は基板・ソフトの自己診断改善およびチャート統合（RCG Ledger、LSU Skew、Halftone U410、Mono）を推進し、低設備投資で工数削減。2026年10月度にはSOP改定により4工程を先行削除（-4.32s/台）。</a:t>
-            </a:r>
-          </a:p>
-        </p:txBody>
-      </p:sp>
-      <p:graphicFrame>
-        <p:nvGraphicFramePr>
-          <p:cNvPr id="7" name="Table 6"/>
-          <p:cNvGraphicFramePr>
-            <a:graphicFrameLocks noGrp="1"/>
-          </p:cNvGraphicFramePr>
-          <p:nvPr/>
-        </p:nvGraphicFramePr>
-        <p:xfrm>
-          <a:off x="256032" y="1170432"/>
-          <a:ext cx="11679631" cy="5349240"/>
-        </p:xfrm>
-        <a:graphic>
-          <a:graphicData uri="http://schemas.openxmlformats.org/drawingml/2006/table">
-            <a:tbl>
-              <a:tblPr firstRow="1" bandRow="1">
-                <a:tableStyleId>{5C22544A-7EE6-4342-B048-85BDC9FD1C3A}</a:tableStyleId>
-              </a:tblPr>
-              <a:tblGrid>
-                <a:gridCol w="868680"/>
-                <a:gridCol w="2331720"/>
-                <a:gridCol w="2423160"/>
-                <a:gridCol w="2971800"/>
-                <a:gridCol w="1508760"/>
-                <a:gridCol w="1575511"/>
-              </a:tblGrid>
-              <a:tr h="486294">
-                <a:tc>
-                  <a:txBody>
-                    <a:bodyPr wrap="square"/>
-                    <a:lstStyle/>
-                    <a:p>
-                      <a:pPr algn="ctr">
-                        <a:defRPr sz="740" b="1">
-                          <a:solidFill>
-                            <a:srgbClr val="FFFFFF"/>
-                          </a:solidFill>
-                          <a:latin typeface="Meiryo UI"/>
-                        </a:defRPr>
-                      </a:pPr>
-                      <a:r>
-                        <a:t>提案番号</a:t>
-                      </a:r>
-                      <a:br/>
-                      <a:r>
-                        <a:t>（担当工程）</a:t>
-                      </a:r>
-                    </a:p>
-                  </a:txBody>
-                  <a:tcPr anchor="ctr" marL="36576" marR="36576" marT="9144" marB="9144">
-                    <a:solidFill>
-                      <a:srgbClr val="1B365D"/>
-                    </a:solidFill>
-                  </a:tcPr>
-                </a:tc>
-                <a:tc>
-                  <a:txBody>
-                    <a:bodyPr wrap="square"/>
-                    <a:lstStyle/>
-                    <a:p>
-                      <a:pPr algn="ctr">
-                        <a:defRPr sz="740" b="1">
-                          <a:solidFill>
-                            <a:srgbClr val="FFFFFF"/>
-                          </a:solidFill>
-                          <a:latin typeface="Meiryo UI"/>
-                        </a:defRPr>
-                      </a:pPr>
-                      <a:r>
-                        <a:t>ベトナム追加提案名称</a:t>
-                      </a:r>
-                    </a:p>
-                  </a:txBody>
-                  <a:tcPr anchor="ctr" marL="36576" marR="36576" marT="9144" marB="9144">
-                    <a:solidFill>
-                      <a:srgbClr val="1B365D"/>
-                    </a:solidFill>
-                  </a:tcPr>
-                </a:tc>
-                <a:tc>
-                  <a:txBody>
-                    <a:bodyPr wrap="square"/>
-                    <a:lstStyle/>
-                    <a:p>
-                      <a:pPr algn="ctr">
-                        <a:defRPr sz="740" b="1">
-                          <a:solidFill>
-                            <a:srgbClr val="FFFFFF"/>
-                          </a:solidFill>
-                          <a:latin typeface="Meiryo UI"/>
-                        </a:defRPr>
-                      </a:pPr>
-                      <a:r>
-                        <a:t>現行ラインの作業実態</a:t>
-                      </a:r>
-                      <a:br/>
-                      <a:r>
-                        <a:t>（工程表および一覧表記載内容）</a:t>
-                      </a:r>
-                    </a:p>
-                  </a:txBody>
-                  <a:tcPr anchor="ctr" marL="36576" marR="36576" marT="9144" marB="9144">
-                    <a:solidFill>
-                      <a:srgbClr val="1B365D"/>
-                    </a:solidFill>
-                  </a:tcPr>
-                </a:tc>
-                <a:tc>
-                  <a:txBody>
-                    <a:bodyPr wrap="square"/>
-                    <a:lstStyle/>
-                    <a:p>
-                      <a:pPr algn="ctr">
-                        <a:defRPr sz="740" b="1">
-                          <a:solidFill>
-                            <a:srgbClr val="FFFFFF"/>
-                          </a:solidFill>
-                          <a:latin typeface="Meiryo UI"/>
-                        </a:defRPr>
-                      </a:pPr>
-                      <a:r>
-                        <a:t>改善技術内容およびチャート統合・自動化</a:t>
-                      </a:r>
-                    </a:p>
-                  </a:txBody>
-                  <a:tcPr anchor="ctr" marL="36576" marR="36576" marT="9144" marB="9144">
-                    <a:solidFill>
-                      <a:srgbClr val="1B365D"/>
-                    </a:solidFill>
-                  </a:tcPr>
-                </a:tc>
-                <a:tc>
-                  <a:txBody>
-                    <a:bodyPr wrap="square"/>
-                    <a:lstStyle/>
-                    <a:p>
-                      <a:pPr algn="ctr">
-                        <a:defRPr sz="740" b="1">
-                          <a:solidFill>
-                            <a:srgbClr val="FFFFFF"/>
-                          </a:solidFill>
-                          <a:latin typeface="Meiryo UI"/>
-                        </a:defRPr>
-                      </a:pPr>
-                      <a:r>
-                        <a:t>工数削減効果</a:t>
-                      </a:r>
-                      <a:br/>
-                      <a:r>
-                        <a:t>および設備費</a:t>
-                      </a:r>
-                    </a:p>
-                  </a:txBody>
-                  <a:tcPr anchor="ctr" marL="36576" marR="36576" marT="9144" marB="9144">
-                    <a:solidFill>
-                      <a:srgbClr val="1B365D"/>
-                    </a:solidFill>
-                  </a:tcPr>
-                </a:tc>
-                <a:tc>
-                  <a:txBody>
-                    <a:bodyPr wrap="square"/>
-                    <a:lstStyle/>
-                    <a:p>
-                      <a:pPr algn="ctr">
-                        <a:defRPr sz="740" b="1">
-                          <a:solidFill>
-                            <a:srgbClr val="FFFFFF"/>
-                          </a:solidFill>
-                          <a:latin typeface="Meiryo UI"/>
-                        </a:defRPr>
-                      </a:pPr>
-                      <a:r>
-                        <a:t>連携部署</a:t>
-                      </a:r>
-                      <a:br/>
-                      <a:r>
-                        <a:t>および進捗</a:t>
-                      </a:r>
-                    </a:p>
-                  </a:txBody>
-                  <a:tcPr anchor="ctr" marL="36576" marR="36576" marT="9144" marB="9144">
-                    <a:solidFill>
-                      <a:srgbClr val="1B365D"/>
-                    </a:solidFill>
-                  </a:tcPr>
-                </a:tc>
-              </a:tr>
-              <a:tr h="486294">
-                <a:tc>
-                  <a:txBody>
-                    <a:bodyPr wrap="square"/>
-                    <a:lstStyle/>
-                    <a:p>
-                      <a:pPr algn="ctr">
-                        <a:defRPr sz="650" b="1">
-                          <a:solidFill>
-                            <a:srgbClr val="1E242B"/>
-                          </a:solidFill>
-                          <a:latin typeface="Meiryo UI"/>
-                        </a:defRPr>
-                      </a:pPr>
-                      <a:r>
-                        <a:t>No.29</a:t>
-                      </a:r>
-                      <a:br/>
-                      <a:r>
-                        <a:t>(A-1 / K1)</a:t>
-                      </a:r>
-                    </a:p>
-                  </a:txBody>
-                  <a:tcPr anchor="ctr" marL="36576" marR="36576" marT="9144" marB="9144">
-                    <a:solidFill>
-                      <a:srgbClr val="FFFFFF"/>
-                    </a:solidFill>
-                  </a:tcPr>
-                </a:tc>
-                <a:tc>
-                  <a:txBody>
-                    <a:bodyPr wrap="square"/>
-                    <a:lstStyle/>
-                    <a:p>
-                      <a:pPr algn="l">
-                        <a:defRPr sz="650">
-                          <a:solidFill>
-                            <a:srgbClr val="1E242B"/>
-                          </a:solidFill>
-                          <a:latin typeface="Meiryo UI"/>
-                        </a:defRPr>
-                      </a:pPr>
-                      <a:r>
-                        <a:t>A1：トナーコンテナ認識の基板・FW改善による自動化</a:t>
-                      </a:r>
-                    </a:p>
-                  </a:txBody>
-                  <a:tcPr anchor="ctr" marL="36576" marR="36576" marT="9144" marB="9144">
-                    <a:solidFill>
-                      <a:srgbClr val="FFFFFF"/>
-                    </a:solidFill>
-                  </a:tcPr>
-                </a:tc>
-                <a:tc>
-                  <a:txBody>
-                    <a:bodyPr wrap="square"/>
-                    <a:lstStyle/>
-                    <a:p>
-                      <a:pPr algn="l">
-                        <a:defRPr sz="650">
-                          <a:solidFill>
-                            <a:srgbClr val="1E242B"/>
-                          </a:solidFill>
-                          <a:latin typeface="Meiryo UI"/>
-                        </a:defRPr>
-                      </a:pPr>
-                      <a:r>
-                        <a:t>ライン投入時に「トナーコンテナが正しくセットされていません」等の警告が出現し、治具着脱に55秒を要している。</a:t>
-                      </a:r>
-                    </a:p>
-                  </a:txBody>
-                  <a:tcPr anchor="ctr" marL="36576" marR="36576" marT="9144" marB="9144">
-                    <a:solidFill>
-                      <a:srgbClr val="FFFFFF"/>
-                    </a:solidFill>
-                  </a:tcPr>
-                </a:tc>
-                <a:tc>
-                  <a:txBody>
-                    <a:bodyPr wrap="square"/>
-                    <a:lstStyle/>
-                    <a:p>
-                      <a:pPr algn="l">
-                        <a:defRPr sz="650">
-                          <a:solidFill>
-                            <a:srgbClr val="1E242B"/>
-                          </a:solidFill>
-                          <a:latin typeface="Meiryo UI"/>
-                        </a:defRPr>
-                      </a:pPr>
-                      <a:r>
-                        <a:t>設計部門へ基板・FWの自己診断改善を要請し、治具着脱なしでトナーコンテナ装着を自動検知可能とする。</a:t>
-                      </a:r>
-                    </a:p>
-                  </a:txBody>
-                  <a:tcPr anchor="ctr" marL="36576" marR="36576" marT="9144" marB="9144">
-                    <a:solidFill>
-                      <a:srgbClr val="FFFFFF"/>
-                    </a:solidFill>
-                  </a:tcPr>
-                </a:tc>
-                <a:tc>
-                  <a:txBody>
-                    <a:bodyPr wrap="square"/>
-                    <a:lstStyle/>
-                    <a:p>
-                      <a:pPr algn="l">
-                        <a:defRPr sz="650">
-                          <a:solidFill>
-                            <a:srgbClr val="1E242B"/>
-                          </a:solidFill>
-                          <a:latin typeface="Meiryo UI"/>
-                        </a:defRPr>
-                      </a:pPr>
-                      <a:r>
-                        <a:t>トナー治具着脱の廃止</a:t>
-                      </a:r>
-                      <a:br/>
-                      <a:r>
-                        <a:t>（現場設備費 0 円）</a:t>
-                      </a:r>
-                    </a:p>
-                  </a:txBody>
-                  <a:tcPr anchor="ctr" marL="36576" marR="36576" marT="9144" marB="9144">
-                    <a:solidFill>
-                      <a:srgbClr val="FFFFFF"/>
-                    </a:solidFill>
-                  </a:tcPr>
-                </a:tc>
-                <a:tc>
-                  <a:txBody>
-                    <a:bodyPr wrap="square"/>
-                    <a:lstStyle/>
-                    <a:p>
-                      <a:pPr algn="l">
-                        <a:defRPr sz="650">
-                          <a:solidFill>
-                            <a:srgbClr val="1E242B"/>
-                          </a:solidFill>
-                          <a:latin typeface="Meiryo UI"/>
-                        </a:defRPr>
-                      </a:pPr>
-                      <a:r>
-                        <a:t>日本設計側確認中</a:t>
-                      </a:r>
-                    </a:p>
-                  </a:txBody>
-                  <a:tcPr anchor="ctr" marL="36576" marR="36576" marT="9144" marB="9144">
-                    <a:solidFill>
-                      <a:srgbClr val="FFFFFF"/>
-                    </a:solidFill>
-                  </a:tcPr>
-                </a:tc>
-              </a:tr>
-              <a:tr h="486294">
-                <a:tc>
-                  <a:txBody>
-                    <a:bodyPr wrap="square"/>
-                    <a:lstStyle/>
-                    <a:p>
-                      <a:pPr algn="ctr">
-                        <a:defRPr sz="650" b="1">
-                          <a:solidFill>
-                            <a:srgbClr val="1E242B"/>
-                          </a:solidFill>
-                          <a:latin typeface="Meiryo UI"/>
-                        </a:defRPr>
-                      </a:pPr>
-                      <a:r>
-                        <a:t>No.30</a:t>
-                      </a:r>
-                      <a:br/>
-                      <a:r>
-                        <a:t>(A-1 / K1)</a:t>
-                      </a:r>
-                    </a:p>
-                  </a:txBody>
-                  <a:tcPr anchor="ctr" marL="36576" marR="36576" marT="9144" marB="9144">
-                    <a:solidFill>
-                      <a:srgbClr val="EAF7EE"/>
-                    </a:solidFill>
-                  </a:tcPr>
-                </a:tc>
-                <a:tc>
-                  <a:txBody>
-                    <a:bodyPr wrap="square"/>
-                    <a:lstStyle/>
-                    <a:p>
-                      <a:pPr algn="l">
-                        <a:defRPr sz="650">
-                          <a:solidFill>
-                            <a:srgbClr val="1E242B"/>
-                          </a:solidFill>
-                          <a:latin typeface="Meiryo UI"/>
-                        </a:defRPr>
-                      </a:pPr>
-                      <a:r>
-                        <a:t>A1：本体バーコード自動読取および廃トナーU155設定廃止</a:t>
-                      </a:r>
-                    </a:p>
-                  </a:txBody>
-                  <a:tcPr anchor="ctr" marL="36576" marR="36576" marT="9144" marB="9144">
-                    <a:solidFill>
-                      <a:srgbClr val="EAF7EE"/>
-                    </a:solidFill>
-                  </a:tcPr>
-                </a:tc>
-                <a:tc>
-                  <a:txBody>
-                    <a:bodyPr wrap="square"/>
-                    <a:lstStyle/>
-                    <a:p>
-                      <a:pPr algn="l">
-                        <a:defRPr sz="650">
-                          <a:solidFill>
-                            <a:srgbClr val="1E242B"/>
-                          </a:solidFill>
-                          <a:latin typeface="Meiryo UI"/>
-                        </a:defRPr>
-                      </a:pPr>
-                      <a:r>
-                        <a:t>バーコードの手動スキャンおよび廃トナー満杯しきい値U155の設定作業（標準29.16s / K1にて60s＋WTB確認10s）。</a:t>
-                      </a:r>
-                    </a:p>
-                  </a:txBody>
-                  <a:tcPr anchor="ctr" marL="36576" marR="36576" marT="9144" marB="9144">
-                    <a:solidFill>
-                      <a:srgbClr val="EAF7EE"/>
-                    </a:solidFill>
-                  </a:tcPr>
-                </a:tc>
-                <a:tc>
-                  <a:txBody>
-                    <a:bodyPr wrap="square"/>
-                    <a:lstStyle/>
-                    <a:p>
-                      <a:pPr algn="l">
-                        <a:defRPr sz="650">
-                          <a:solidFill>
-                            <a:srgbClr val="1E242B"/>
-                          </a:solidFill>
-                          <a:latin typeface="Meiryo UI"/>
-                        </a:defRPr>
-                      </a:pPr>
-                      <a:r>
-                        <a:t>A-1にてバーコード自動読取機を導入（生技製作）。本体側Push Switch追加とSub-Assy抵抗測定保証によりU155設定を全廃。</a:t>
-                      </a:r>
-                    </a:p>
-                  </a:txBody>
-                  <a:tcPr anchor="ctr" marL="36576" marR="36576" marT="9144" marB="9144">
-                    <a:solidFill>
-                      <a:srgbClr val="EAF7EE"/>
-                    </a:solidFill>
-                  </a:tcPr>
-                </a:tc>
-                <a:tc>
-                  <a:txBody>
-                    <a:bodyPr wrap="square"/>
-                    <a:lstStyle/>
-                    <a:p>
-                      <a:pPr algn="l">
-                        <a:defRPr sz="650">
-                          <a:solidFill>
-                            <a:srgbClr val="1E242B"/>
-                          </a:solidFill>
-                          <a:latin typeface="Meiryo UI"/>
-                        </a:defRPr>
-                      </a:pPr>
-                      <a:r>
-                        <a:t>• 29.16秒/台 短縮</a:t>
-                      </a:r>
-                      <a:br/>
-                      <a:r>
-                        <a:t>• 21ステップを全削除</a:t>
-                      </a:r>
-                    </a:p>
-                  </a:txBody>
-                  <a:tcPr anchor="ctr" marL="36576" marR="36576" marT="9144" marB="9144">
-                    <a:solidFill>
-                      <a:srgbClr val="EAF7EE"/>
-                    </a:solidFill>
-                  </a:tcPr>
-                </a:tc>
-                <a:tc>
-                  <a:txBody>
-                    <a:bodyPr wrap="square"/>
-                    <a:lstStyle/>
-                    <a:p>
-                      <a:pPr algn="l">
-                        <a:defRPr sz="650">
-                          <a:solidFill>
-                            <a:srgbClr val="1E242B"/>
-                          </a:solidFill>
-                          <a:latin typeface="Meiryo UI"/>
-                        </a:defRPr>
-                      </a:pPr>
-                      <a:r>
-                        <a:t>生技 ＆ 日本設計</a:t>
-                      </a:r>
-                      <a:br/>
-                      <a:r>
-                        <a:t>（U155廃止確定済）</a:t>
-                      </a:r>
-                    </a:p>
-                  </a:txBody>
-                  <a:tcPr anchor="ctr" marL="36576" marR="36576" marT="9144" marB="9144">
-                    <a:solidFill>
-                      <a:srgbClr val="EAF7EE"/>
-                    </a:solidFill>
-                  </a:tcPr>
-                </a:tc>
-              </a:tr>
-              <a:tr h="486294">
-                <a:tc>
-                  <a:txBody>
-                    <a:bodyPr wrap="square"/>
-                    <a:lstStyle/>
-                    <a:p>
-                      <a:pPr algn="ctr">
-                        <a:defRPr sz="650" b="1">
-                          <a:solidFill>
-                            <a:srgbClr val="1E242B"/>
-                          </a:solidFill>
-                          <a:latin typeface="Meiryo UI"/>
-                        </a:defRPr>
-                      </a:pPr>
-                      <a:r>
-                        <a:t>No.31</a:t>
-                      </a:r>
-                      <a:br/>
-                      <a:r>
-                        <a:t>(A-2 / A-5)</a:t>
-                      </a:r>
-                    </a:p>
-                  </a:txBody>
-                  <a:tcPr anchor="ctr" marL="36576" marR="36576" marT="9144" marB="9144">
-                    <a:solidFill>
-                      <a:srgbClr val="FFFFFF"/>
-                    </a:solidFill>
-                  </a:tcPr>
-                </a:tc>
-                <a:tc>
-                  <a:txBody>
-                    <a:bodyPr wrap="square"/>
-                    <a:lstStyle/>
-                    <a:p>
-                      <a:pPr algn="l">
-                        <a:defRPr sz="650">
-                          <a:solidFill>
-                            <a:srgbClr val="1E242B"/>
-                          </a:solidFill>
-                          <a:latin typeface="Meiryo UI"/>
-                        </a:defRPr>
-                      </a:pPr>
-                      <a:r>
-                        <a:t>A5：2Wayクラッチ確認をColor Registへ統合 -&gt; U950前RCG廃止</a:t>
-                      </a:r>
-                    </a:p>
-                  </a:txBody>
-                  <a:tcPr anchor="ctr" marL="36576" marR="36576" marT="9144" marB="9144">
-                    <a:solidFill>
-                      <a:srgbClr val="FFFFFF"/>
-                    </a:solidFill>
-                  </a:tcPr>
-                </a:tc>
-                <a:tc>
-                  <a:txBody>
-                    <a:bodyPr wrap="square"/>
-                    <a:lstStyle/>
-                    <a:p>
-                      <a:pPr algn="l">
-                        <a:defRPr sz="650">
-                          <a:solidFill>
-                            <a:srgbClr val="1E242B"/>
-                          </a:solidFill>
-                          <a:latin typeface="Meiryo UI"/>
-                        </a:defRPr>
-                      </a:pPr>
-                      <a:r>
-                        <a:t>K4においてU950前にRCG印刷を実施（標準17.36s / K4にて25s）。K2で重りを用いた有負荷カセット開閉確認（20s）。</a:t>
-                      </a:r>
-                    </a:p>
-                  </a:txBody>
-                  <a:tcPr anchor="ctr" marL="36576" marR="36576" marT="9144" marB="9144">
-                    <a:solidFill>
-                      <a:srgbClr val="FFFFFF"/>
-                    </a:solidFill>
-                  </a:tcPr>
-                </a:tc>
-                <a:tc>
-                  <a:txBody>
-                    <a:bodyPr wrap="square"/>
-                    <a:lstStyle/>
-                    <a:p>
-                      <a:pPr algn="l">
-                        <a:defRPr sz="650">
-                          <a:solidFill>
-                            <a:srgbClr val="1E242B"/>
-                          </a:solidFill>
-                          <a:latin typeface="Meiryo UI"/>
-                        </a:defRPr>
-                      </a:pPr>
-                      <a:r>
-                        <a:t>2Wayクラッチの動作確認を後工程のRCG Color Regist印刷へ統合し、U950前のRCG印刷を完全廃止。有負荷試験治具の自動化を検討。</a:t>
-                      </a:r>
-                    </a:p>
-                  </a:txBody>
-                  <a:tcPr anchor="ctr" marL="36576" marR="36576" marT="9144" marB="9144">
-                    <a:solidFill>
-                      <a:srgbClr val="FFFFFF"/>
-                    </a:solidFill>
-                  </a:tcPr>
-                </a:tc>
-                <a:tc>
-                  <a:txBody>
-                    <a:bodyPr wrap="square"/>
-                    <a:lstStyle/>
-                    <a:p>
-                      <a:pPr algn="l">
-                        <a:defRPr sz="650">
-                          <a:solidFill>
-                            <a:srgbClr val="1E242B"/>
-                          </a:solidFill>
-                          <a:latin typeface="Meiryo UI"/>
-                        </a:defRPr>
-                      </a:pPr>
-                      <a:r>
-                        <a:t>• 17.36s～25s（RCG 1枚削減）</a:t>
-                      </a:r>
-                      <a:br/>
-                      <a:r>
-                        <a:t>• カセット有負荷確認短縮</a:t>
-                      </a:r>
-                    </a:p>
-                  </a:txBody>
-                  <a:tcPr anchor="ctr" marL="36576" marR="36576" marT="9144" marB="9144">
-                    <a:solidFill>
-                      <a:srgbClr val="FFFFFF"/>
-                    </a:solidFill>
-                  </a:tcPr>
-                </a:tc>
-                <a:tc>
-                  <a:txBody>
-                    <a:bodyPr wrap="square"/>
-                    <a:lstStyle/>
-                    <a:p>
-                      <a:pPr algn="l">
-                        <a:defRPr sz="650">
-                          <a:solidFill>
-                            <a:srgbClr val="1E242B"/>
-                          </a:solidFill>
-                          <a:latin typeface="Meiryo UI"/>
-                        </a:defRPr>
-                      </a:pPr>
-                      <a:r>
-                        <a:t>設計 ＆ 生技</a:t>
-                      </a:r>
-                      <a:br/>
-                      <a:r>
-                        <a:t>（確認中）</a:t>
-                      </a:r>
-                    </a:p>
-                  </a:txBody>
-                  <a:tcPr anchor="ctr" marL="36576" marR="36576" marT="9144" marB="9144">
-                    <a:solidFill>
-                      <a:srgbClr val="FFFFFF"/>
-                    </a:solidFill>
-                  </a:tcPr>
-                </a:tc>
-              </a:tr>
-              <a:tr h="486294">
-                <a:tc>
-                  <a:txBody>
-                    <a:bodyPr wrap="square"/>
-                    <a:lstStyle/>
-                    <a:p>
-                      <a:pPr algn="ctr">
-                        <a:defRPr sz="650" b="1">
-                          <a:solidFill>
-                            <a:srgbClr val="1E242B"/>
-                          </a:solidFill>
-                          <a:latin typeface="Meiryo UI"/>
-                        </a:defRPr>
-                      </a:pPr>
-                      <a:r>
-                        <a:t>No.32</a:t>
-                      </a:r>
-                      <a:br/>
-                      <a:r>
-                        <a:t>(A-2 / A-7)</a:t>
-                      </a:r>
-                    </a:p>
-                  </a:txBody>
-                  <a:tcPr anchor="ctr" marL="36576" marR="36576" marT="9144" marB="9144">
-                    <a:solidFill>
-                      <a:srgbClr val="F7F9FC"/>
-                    </a:solidFill>
-                  </a:tcPr>
-                </a:tc>
-                <a:tc>
-                  <a:txBody>
-                    <a:bodyPr wrap="square"/>
-                    <a:lstStyle/>
-                    <a:p>
-                      <a:pPr algn="l">
-                        <a:defRPr sz="650">
-                          <a:solidFill>
-                            <a:srgbClr val="1E242B"/>
-                          </a:solidFill>
-                          <a:latin typeface="Meiryo UI"/>
-                        </a:defRPr>
-                      </a:pPr>
-                      <a:r>
-                        <a:t>A7：エージングU950の工程見直し短縮およびオプション非接触検査</a:t>
-                      </a:r>
-                    </a:p>
-                  </a:txBody>
-                  <a:tcPr anchor="ctr" marL="36576" marR="36576" marT="9144" marB="9144">
-                    <a:solidFill>
-                      <a:srgbClr val="F7F9FC"/>
-                    </a:solidFill>
-                  </a:tcPr>
-                </a:tc>
-                <a:tc>
-                  <a:txBody>
-                    <a:bodyPr wrap="square"/>
-                    <a:lstStyle/>
-                    <a:p>
-                      <a:pPr algn="l">
-                        <a:defRPr sz="650">
-                          <a:solidFill>
-                            <a:srgbClr val="1E242B"/>
-                          </a:solidFill>
-                          <a:latin typeface="Meiryo UI"/>
-                        </a:defRPr>
-                      </a:pPr>
-                      <a:r>
-                        <a:t>K4におけるエージングU950が285秒を要し全工程中最大ボトルネック。K2でのオプション接続確認に90秒。</a:t>
-                      </a:r>
-                    </a:p>
-                  </a:txBody>
-                  <a:tcPr anchor="ctr" marL="36576" marR="36576" marT="9144" marB="9144">
-                    <a:solidFill>
-                      <a:srgbClr val="F7F9FC"/>
-                    </a:solidFill>
-                  </a:tcPr>
-                </a:tc>
-                <a:tc>
-                  <a:txBody>
-                    <a:bodyPr wrap="square"/>
-                    <a:lstStyle/>
-                    <a:p>
-                      <a:pPr algn="l">
-                        <a:defRPr sz="650">
-                          <a:solidFill>
-                            <a:srgbClr val="1E242B"/>
-                          </a:solidFill>
-                          <a:latin typeface="Meiryo UI"/>
-                        </a:defRPr>
-                      </a:pPr>
-                      <a:r>
-                        <a:t>エージングU950の技術条件を再検証し運転時間を短縮。オプション接続確認はFW自己診断によりケーブル挿抜なしで完結。</a:t>
-                      </a:r>
-                    </a:p>
-                  </a:txBody>
-                  <a:tcPr anchor="ctr" marL="36576" marR="36576" marT="9144" marB="9144">
-                    <a:solidFill>
-                      <a:srgbClr val="F7F9FC"/>
-                    </a:solidFill>
-                  </a:tcPr>
-                </a:tc>
-                <a:tc>
-                  <a:txBody>
-                    <a:bodyPr wrap="square"/>
-                    <a:lstStyle/>
-                    <a:p>
-                      <a:pPr algn="l">
-                        <a:defRPr sz="650">
-                          <a:solidFill>
-                            <a:srgbClr val="1E242B"/>
-                          </a:solidFill>
-                          <a:latin typeface="Meiryo UI"/>
-                        </a:defRPr>
-                      </a:pPr>
-                      <a:r>
-                        <a:t>• 285sエージング短縮</a:t>
-                      </a:r>
-                      <a:br/>
-                      <a:r>
-                        <a:t>• オプション接続工数短縮</a:t>
-                      </a:r>
-                    </a:p>
-                  </a:txBody>
-                  <a:tcPr anchor="ctr" marL="36576" marR="36576" marT="9144" marB="9144">
-                    <a:solidFill>
-                      <a:srgbClr val="F7F9FC"/>
-                    </a:solidFill>
-                  </a:tcPr>
-                </a:tc>
-                <a:tc>
-                  <a:txBody>
-                    <a:bodyPr wrap="square"/>
-                    <a:lstStyle/>
-                    <a:p>
-                      <a:pPr algn="l">
-                        <a:defRPr sz="650">
-                          <a:solidFill>
-                            <a:srgbClr val="1E242B"/>
-                          </a:solidFill>
-                          <a:latin typeface="Meiryo UI"/>
-                        </a:defRPr>
-                      </a:pPr>
-                      <a:r>
-                        <a:t>日本設計 ＆ 機構生技</a:t>
-                      </a:r>
-                      <a:br/>
-                      <a:r>
-                        <a:t>（検討中）</a:t>
-                      </a:r>
-                    </a:p>
-                  </a:txBody>
-                  <a:tcPr anchor="ctr" marL="36576" marR="36576" marT="9144" marB="9144">
-                    <a:solidFill>
-                      <a:srgbClr val="F7F9FC"/>
-                    </a:solidFill>
-                  </a:tcPr>
-                </a:tc>
-              </a:tr>
-              <a:tr h="486294">
-                <a:tc>
-                  <a:txBody>
-                    <a:bodyPr wrap="square"/>
-                    <a:lstStyle/>
-                    <a:p>
-                      <a:pPr algn="ctr">
-                        <a:defRPr sz="650" b="1">
-                          <a:solidFill>
-                            <a:srgbClr val="1E242B"/>
-                          </a:solidFill>
-                          <a:latin typeface="Meiryo UI"/>
-                        </a:defRPr>
-                      </a:pPr>
-                      <a:r>
-                        <a:t>No.33</a:t>
-                      </a:r>
-                      <a:br/>
-                      <a:r>
-                        <a:t>(A-3 / A-8)</a:t>
-                      </a:r>
-                    </a:p>
-                  </a:txBody>
-                  <a:tcPr anchor="ctr" marL="36576" marR="36576" marT="9144" marB="9144">
-                    <a:solidFill>
-                      <a:srgbClr val="FFFFFF"/>
-                    </a:solidFill>
-                  </a:tcPr>
-                </a:tc>
-                <a:tc>
-                  <a:txBody>
-                    <a:bodyPr wrap="square"/>
-                    <a:lstStyle/>
-                    <a:p>
-                      <a:pPr algn="l">
-                        <a:defRPr sz="650">
-                          <a:solidFill>
-                            <a:srgbClr val="1E242B"/>
-                          </a:solidFill>
-                          <a:latin typeface="Meiryo UI"/>
-                        </a:defRPr>
-                      </a:pPr>
-                      <a:r>
-                        <a:t>A8：RCG Ledger直角度確認をColor Registへ統合 -&gt; Ledger廃止</a:t>
-                      </a:r>
-                    </a:p>
-                  </a:txBody>
-                  <a:tcPr anchor="ctr" marL="36576" marR="36576" marT="9144" marB="9144">
-                    <a:solidFill>
-                      <a:srgbClr val="FFFFFF"/>
-                    </a:solidFill>
-                  </a:tcPr>
-                </a:tc>
-                <a:tc>
-                  <a:txBody>
-                    <a:bodyPr wrap="square"/>
-                    <a:lstStyle/>
-                    <a:p>
-                      <a:pPr algn="l">
-                        <a:defRPr sz="650">
-                          <a:solidFill>
-                            <a:srgbClr val="1E242B"/>
-                          </a:solidFill>
-                          <a:latin typeface="Meiryo UI"/>
-                        </a:defRPr>
-                      </a:pPr>
-                      <a:r>
-                        <a:t>KDA/Inch仕向け用にRCG Ledgerを別印刷して直角度を測定（K5にて20s～32s）。K3にて外装カバー6枚を組付け（48.32s～90s）。</a:t>
-                      </a:r>
-                    </a:p>
-                  </a:txBody>
-                  <a:tcPr anchor="ctr" marL="36576" marR="36576" marT="9144" marB="9144">
-                    <a:solidFill>
-                      <a:srgbClr val="FFFFFF"/>
-                    </a:solidFill>
-                  </a:tcPr>
-                </a:tc>
-                <a:tc>
-                  <a:txBody>
-                    <a:bodyPr wrap="square"/>
-                    <a:lstStyle/>
-                    <a:p>
-                      <a:pPr algn="l">
-                        <a:defRPr sz="650">
-                          <a:solidFill>
-                            <a:srgbClr val="1E242B"/>
-                          </a:solidFill>
-                          <a:latin typeface="Meiryo UI"/>
-                        </a:defRPr>
-                      </a:pPr>
-                      <a:r>
-                        <a:t>Ledgerサイズの直角度測定パターンをRCG Color Registへ統合し、RCG Ledger印刷を廃止。カバー6枚組付けは本体組立工程へ移管。</a:t>
-                      </a:r>
-                    </a:p>
-                  </a:txBody>
-                  <a:tcPr anchor="ctr" marL="36576" marR="36576" marT="9144" marB="9144">
-                    <a:solidFill>
-                      <a:srgbClr val="FFFFFF"/>
-                    </a:solidFill>
-                  </a:tcPr>
-                </a:tc>
-                <a:tc>
-                  <a:txBody>
-                    <a:bodyPr wrap="square"/>
-                    <a:lstStyle/>
-                    <a:p>
-                      <a:pPr algn="l">
-                        <a:defRPr sz="650">
-                          <a:solidFill>
-                            <a:srgbClr val="1E242B"/>
-                          </a:solidFill>
-                          <a:latin typeface="Meiryo UI"/>
-                        </a:defRPr>
-                      </a:pPr>
-                      <a:r>
-                        <a:t>• 印刷1枚削減（Ledger廃止）</a:t>
-                      </a:r>
-                      <a:br/>
-                      <a:r>
-                        <a:t>• カバー組付48s～90sを組立へ</a:t>
-                      </a:r>
-                    </a:p>
-                  </a:txBody>
-                  <a:tcPr anchor="ctr" marL="36576" marR="36576" marT="9144" marB="9144">
-                    <a:solidFill>
-                      <a:srgbClr val="FFFFFF"/>
-                    </a:solidFill>
-                  </a:tcPr>
-                </a:tc>
-                <a:tc>
-                  <a:txBody>
-                    <a:bodyPr wrap="square"/>
-                    <a:lstStyle/>
-                    <a:p>
-                      <a:pPr algn="l">
-                        <a:defRPr sz="650">
-                          <a:solidFill>
-                            <a:srgbClr val="1E242B"/>
-                          </a:solidFill>
-                          <a:latin typeface="Meiryo UI"/>
-                        </a:defRPr>
-                      </a:pPr>
-                      <a:r>
-                        <a:t>設計 / 品保 / 組立</a:t>
-                      </a:r>
-                      <a:br/>
-                      <a:r>
-                        <a:t>（工程DR合意済）</a:t>
-                      </a:r>
-                    </a:p>
-                  </a:txBody>
-                  <a:tcPr anchor="ctr" marL="36576" marR="36576" marT="9144" marB="9144">
-                    <a:solidFill>
-                      <a:srgbClr val="FFFFFF"/>
-                    </a:solidFill>
-                  </a:tcPr>
-                </a:tc>
-              </a:tr>
-              <a:tr h="486294">
-                <a:tc>
-                  <a:txBody>
-                    <a:bodyPr wrap="square"/>
-                    <a:lstStyle/>
-                    <a:p>
-                      <a:pPr algn="ctr">
-                        <a:defRPr sz="650" b="1">
-                          <a:solidFill>
-                            <a:srgbClr val="1E242B"/>
-                          </a:solidFill>
-                          <a:latin typeface="Meiryo UI"/>
-                        </a:defRPr>
-                      </a:pPr>
-                      <a:r>
-                        <a:t>No.34</a:t>
-                      </a:r>
-                      <a:br/>
-                      <a:r>
-                        <a:t>(A-3 / A-8)</a:t>
-                      </a:r>
-                    </a:p>
-                  </a:txBody>
-                  <a:tcPr anchor="ctr" marL="36576" marR="36576" marT="9144" marB="9144">
-                    <a:solidFill>
-                      <a:srgbClr val="EAF7EE"/>
-                    </a:solidFill>
-                  </a:tcPr>
-                </a:tc>
-                <a:tc>
-                  <a:txBody>
-                    <a:bodyPr wrap="square"/>
-                    <a:lstStyle/>
-                    <a:p>
-                      <a:pPr algn="l">
-                        <a:defRPr sz="650">
-                          <a:solidFill>
-                            <a:srgbClr val="1E242B"/>
-                          </a:solidFill>
-                          <a:latin typeface="Meiryo UI"/>
-                        </a:defRPr>
-                      </a:pPr>
-                      <a:r>
-                        <a:t>A8：RCG LSU SKEWをColor Registへ統合 -&gt; LSU Skew廃止</a:t>
-                      </a:r>
-                    </a:p>
-                  </a:txBody>
-                  <a:tcPr anchor="ctr" marL="36576" marR="36576" marT="9144" marB="9144">
-                    <a:solidFill>
-                      <a:srgbClr val="EAF7EE"/>
-                    </a:solidFill>
-                  </a:tcPr>
-                </a:tc>
-                <a:tc>
-                  <a:txBody>
-                    <a:bodyPr wrap="square"/>
-                    <a:lstStyle/>
-                    <a:p>
-                      <a:pPr algn="l">
-                        <a:defRPr sz="650">
-                          <a:solidFill>
-                            <a:srgbClr val="1E242B"/>
-                          </a:solidFill>
-                          <a:latin typeface="Meiryo UI"/>
-                        </a:defRPr>
-                      </a:pPr>
-                      <a:r>
-                        <a:t>K5にてRCG LSU Skewの印刷・調整に130秒（標準36.84s）。K3にてカセット1/2の用紙サイズ認識手動確認に65秒（標準66.68s）。</a:t>
-                      </a:r>
-                    </a:p>
-                  </a:txBody>
-                  <a:tcPr anchor="ctr" marL="36576" marR="36576" marT="9144" marB="9144">
-                    <a:solidFill>
-                      <a:srgbClr val="EAF7EE"/>
-                    </a:solidFill>
-                  </a:tcPr>
-                </a:tc>
-                <a:tc>
-                  <a:txBody>
-                    <a:bodyPr wrap="square"/>
-                    <a:lstStyle/>
-                    <a:p>
-                      <a:pPr algn="l">
-                        <a:defRPr sz="650">
-                          <a:solidFill>
-                            <a:srgbClr val="1E242B"/>
-                          </a:solidFill>
-                          <a:latin typeface="Meiryo UI"/>
-                        </a:defRPr>
-                      </a:pPr>
-                      <a:r>
-                        <a:t>LSU Skew測定パターンをRCG Color Registへ統合してLSU Skew印刷を廃止。Host PCからコマンド送信しカセットサイズを自動認識。</a:t>
-                      </a:r>
-                    </a:p>
-                  </a:txBody>
-                  <a:tcPr anchor="ctr" marL="36576" marR="36576" marT="9144" marB="9144">
-                    <a:solidFill>
-                      <a:srgbClr val="EAF7EE"/>
-                    </a:solidFill>
-                  </a:tcPr>
-                </a:tc>
-                <a:tc>
-                  <a:txBody>
-                    <a:bodyPr wrap="square"/>
-                    <a:lstStyle/>
-                    <a:p>
-                      <a:pPr algn="l">
-                        <a:defRPr sz="650">
-                          <a:solidFill>
-                            <a:srgbClr val="1E242B"/>
-                          </a:solidFill>
-                          <a:latin typeface="Meiryo UI"/>
-                        </a:defRPr>
-                      </a:pPr>
-                      <a:r>
-                        <a:t>• 印刷1枚削減（Skew廃止）</a:t>
-                      </a:r>
-                      <a:br/>
-                      <a:r>
-                        <a:t>• カセットサイズ認識 66.68s減</a:t>
-                      </a:r>
-                    </a:p>
-                  </a:txBody>
-                  <a:tcPr anchor="ctr" marL="36576" marR="36576" marT="9144" marB="9144">
-                    <a:solidFill>
-                      <a:srgbClr val="EAF7EE"/>
-                    </a:solidFill>
-                  </a:tcPr>
-                </a:tc>
-                <a:tc>
-                  <a:txBody>
-                    <a:bodyPr wrap="square"/>
-                    <a:lstStyle/>
-                    <a:p>
-                      <a:pPr algn="l">
-                        <a:defRPr sz="650">
-                          <a:solidFill>
-                            <a:srgbClr val="1E242B"/>
-                          </a:solidFill>
-                          <a:latin typeface="Meiryo UI"/>
-                        </a:defRPr>
-                      </a:pPr>
-                      <a:r>
-                        <a:t>日本設計 ＆ 機構生技</a:t>
-                      </a:r>
-                      <a:br/>
-                      <a:r>
-                        <a:t>（カセット自動化は先行）</a:t>
-                      </a:r>
-                    </a:p>
-                  </a:txBody>
-                  <a:tcPr anchor="ctr" marL="36576" marR="36576" marT="9144" marB="9144">
-                    <a:solidFill>
-                      <a:srgbClr val="EAF7EE"/>
-                    </a:solidFill>
-                  </a:tcPr>
-                </a:tc>
-              </a:tr>
-              <a:tr h="486294">
-                <a:tc>
-                  <a:txBody>
-                    <a:bodyPr wrap="square"/>
-                    <a:lstStyle/>
-                    <a:p>
-                      <a:pPr algn="ctr">
-                        <a:defRPr sz="650" b="1">
-                          <a:solidFill>
-                            <a:srgbClr val="1E242B"/>
-                          </a:solidFill>
-                          <a:latin typeface="Meiryo UI"/>
-                        </a:defRPr>
-                      </a:pPr>
-                      <a:r>
-                        <a:t>No.35</a:t>
-                      </a:r>
-                      <a:br/>
-                      <a:r>
-                        <a:t>(A-4 / A-8)</a:t>
-                      </a:r>
-                    </a:p>
-                  </a:txBody>
-                  <a:tcPr anchor="ctr" marL="36576" marR="36576" marT="9144" marB="9144">
-                    <a:solidFill>
-                      <a:srgbClr val="FFFFFF"/>
-                    </a:solidFill>
-                  </a:tcPr>
-                </a:tc>
-                <a:tc>
-                  <a:txBody>
-                    <a:bodyPr wrap="square"/>
-                    <a:lstStyle/>
-                    <a:p>
-                      <a:pPr algn="l">
-                        <a:defRPr sz="650">
-                          <a:solidFill>
-                            <a:srgbClr val="1E242B"/>
-                          </a:solidFill>
-                          <a:latin typeface="Meiryo UI"/>
-                        </a:defRPr>
-                      </a:pPr>
-                      <a:r>
-                        <a:t>A8：U410 Halftoneキャリブレーション一括自動化</a:t>
-                      </a:r>
-                    </a:p>
-                  </a:txBody>
-                  <a:tcPr anchor="ctr" marL="36576" marR="36576" marT="9144" marB="9144">
-                    <a:solidFill>
-                      <a:srgbClr val="FFFFFF"/>
-                    </a:solidFill>
-                  </a:tcPr>
-                </a:tc>
-                <a:tc>
-                  <a:txBody>
-                    <a:bodyPr wrap="square"/>
-                    <a:lstStyle/>
-                    <a:p>
-                      <a:pPr algn="l">
-                        <a:defRPr sz="650">
-                          <a:solidFill>
-                            <a:srgbClr val="1E242B"/>
-                          </a:solidFill>
-                          <a:latin typeface="Meiryo UI"/>
-                        </a:defRPr>
-                      </a:pPr>
-                      <a:r>
-                        <a:t>K5におけるHalftone U410調整（110s）時、キャリブレーションとHalftone測定を別々に画面タップしている。</a:t>
-                      </a:r>
-                    </a:p>
-                  </a:txBody>
-                  <a:tcPr anchor="ctr" marL="36576" marR="36576" marT="9144" marB="9144">
-                    <a:solidFill>
-                      <a:srgbClr val="FFFFFF"/>
-                    </a:solidFill>
-                  </a:tcPr>
-                </a:tc>
-                <a:tc>
-                  <a:txBody>
-                    <a:bodyPr wrap="square"/>
-                    <a:lstStyle/>
-                    <a:p>
-                      <a:pPr algn="l">
-                        <a:defRPr sz="650">
-                          <a:solidFill>
-                            <a:srgbClr val="1E242B"/>
-                          </a:solidFill>
-                          <a:latin typeface="Meiryo UI"/>
-                        </a:defRPr>
-                      </a:pPr>
-                      <a:r>
-                        <a:t>Halftone調整実行時にキャリブレーションシーケンスを1つの自動コマンドへ統合し、手動操作と待ち時間を解消。</a:t>
-                      </a:r>
-                    </a:p>
-                  </a:txBody>
-                  <a:tcPr anchor="ctr" marL="36576" marR="36576" marT="9144" marB="9144">
-                    <a:solidFill>
-                      <a:srgbClr val="FFFFFF"/>
-                    </a:solidFill>
-                  </a:tcPr>
-                </a:tc>
-                <a:tc>
-                  <a:txBody>
-                    <a:bodyPr wrap="square"/>
-                    <a:lstStyle/>
-                    <a:p>
-                      <a:pPr algn="l">
-                        <a:defRPr sz="650">
-                          <a:solidFill>
-                            <a:srgbClr val="1E242B"/>
-                          </a:solidFill>
-                          <a:latin typeface="Meiryo UI"/>
-                        </a:defRPr>
-                      </a:pPr>
-                      <a:r>
-                        <a:t>• U410 110秒工数を短縮</a:t>
-                      </a:r>
-                      <a:br/>
-                      <a:r>
-                        <a:t>（現場設備費 0 円）</a:t>
-                      </a:r>
-                    </a:p>
-                  </a:txBody>
-                  <a:tcPr anchor="ctr" marL="36576" marR="36576" marT="9144" marB="9144">
-                    <a:solidFill>
-                      <a:srgbClr val="FFFFFF"/>
-                    </a:solidFill>
-                  </a:tcPr>
-                </a:tc>
-                <a:tc>
-                  <a:txBody>
-                    <a:bodyPr wrap="square"/>
-                    <a:lstStyle/>
-                    <a:p>
-                      <a:pPr algn="l">
-                        <a:defRPr sz="650">
-                          <a:solidFill>
-                            <a:srgbClr val="1E242B"/>
-                          </a:solidFill>
-                          <a:latin typeface="Meiryo UI"/>
-                        </a:defRPr>
-                      </a:pPr>
-                      <a:r>
-                        <a:t>日本ソフト設計</a:t>
-                      </a:r>
-                      <a:br/>
-                      <a:r>
-                        <a:t>（確認中）</a:t>
-                      </a:r>
-                    </a:p>
-                  </a:txBody>
-                  <a:tcPr anchor="ctr" marL="36576" marR="36576" marT="9144" marB="9144">
-                    <a:solidFill>
-                      <a:srgbClr val="FFFFFF"/>
-                    </a:solidFill>
-                  </a:tcPr>
-                </a:tc>
-              </a:tr>
-              <a:tr h="486294">
-                <a:tc>
-                  <a:txBody>
-                    <a:bodyPr wrap="square"/>
-                    <a:lstStyle/>
-                    <a:p>
-                      <a:pPr algn="ctr">
-                        <a:defRPr sz="650" b="1">
-                          <a:solidFill>
-                            <a:srgbClr val="1E242B"/>
-                          </a:solidFill>
-                          <a:latin typeface="Meiryo UI"/>
-                        </a:defRPr>
-                      </a:pPr>
-                      <a:r>
-                        <a:t>No.36</a:t>
-                      </a:r>
-                      <a:br/>
-                      <a:r>
-                        <a:t>(A-4 / A-8)</a:t>
-                      </a:r>
-                    </a:p>
-                  </a:txBody>
-                  <a:tcPr anchor="ctr" marL="36576" marR="36576" marT="9144" marB="9144">
-                    <a:solidFill>
-                      <a:srgbClr val="EAF7EE"/>
-                    </a:solidFill>
-                  </a:tcPr>
-                </a:tc>
-                <a:tc>
-                  <a:txBody>
-                    <a:bodyPr wrap="square"/>
-                    <a:lstStyle/>
-                    <a:p>
-                      <a:pPr algn="l">
-                        <a:defRPr sz="650">
-                          <a:solidFill>
-                            <a:srgbClr val="1E242B"/>
-                          </a:solidFill>
-                          <a:latin typeface="Meiryo UI"/>
-                        </a:defRPr>
-                      </a:pPr>
-                      <a:r>
-                        <a:t>A8：Halftone MonoをCheck Blackへ統合 -&gt; Mono廃止</a:t>
-                      </a:r>
-                    </a:p>
-                  </a:txBody>
-                  <a:tcPr anchor="ctr" marL="36576" marR="36576" marT="9144" marB="9144">
-                    <a:solidFill>
-                      <a:srgbClr val="EAF7EE"/>
-                    </a:solidFill>
-                  </a:tcPr>
-                </a:tc>
-                <a:tc>
-                  <a:txBody>
-                    <a:bodyPr wrap="square"/>
-                    <a:lstStyle/>
-                    <a:p>
-                      <a:pPr algn="l">
-                        <a:defRPr sz="650">
-                          <a:solidFill>
-                            <a:srgbClr val="1E242B"/>
-                          </a:solidFill>
-                          <a:latin typeface="Meiryo UI"/>
-                        </a:defRPr>
-                      </a:pPr>
-                      <a:r>
-                        <a:t>白黒グラデーション確認のためHalftone Monoを別印刷。右カバー開閉確認のため手動でドアを開閉（-8.88s）。</a:t>
-                      </a:r>
-                    </a:p>
-                  </a:txBody>
-                  <a:tcPr anchor="ctr" marL="36576" marR="36576" marT="9144" marB="9144">
-                    <a:solidFill>
-                      <a:srgbClr val="EAF7EE"/>
-                    </a:solidFill>
-                  </a:tcPr>
-                </a:tc>
-                <a:tc>
-                  <a:txBody>
-                    <a:bodyPr wrap="square"/>
-                    <a:lstStyle/>
-                    <a:p>
-                      <a:pPr algn="l">
-                        <a:defRPr sz="650">
-                          <a:solidFill>
-                            <a:srgbClr val="1E242B"/>
-                          </a:solidFill>
-                          <a:latin typeface="Meiryo UI"/>
-                        </a:defRPr>
-                      </a:pPr>
-                      <a:r>
-                        <a:t>Halftone Mono検査項目をCheck Blackテストチャートへ統合し、Halftone Mono印刷を廃止。ドアスイッチはソフト自動検知へ統合。</a:t>
-                      </a:r>
-                    </a:p>
-                  </a:txBody>
-                  <a:tcPr anchor="ctr" marL="36576" marR="36576" marT="9144" marB="9144">
-                    <a:solidFill>
-                      <a:srgbClr val="EAF7EE"/>
-                    </a:solidFill>
-                  </a:tcPr>
-                </a:tc>
-                <a:tc>
-                  <a:txBody>
-                    <a:bodyPr wrap="square"/>
-                    <a:lstStyle/>
-                    <a:p>
-                      <a:pPr algn="l">
-                        <a:defRPr sz="650">
-                          <a:solidFill>
-                            <a:srgbClr val="1E242B"/>
-                          </a:solidFill>
-                          <a:latin typeface="Meiryo UI"/>
-                        </a:defRPr>
-                      </a:pPr>
-                      <a:r>
-                        <a:t>• 印刷1枚削減（Mono廃止）</a:t>
-                      </a:r>
-                      <a:br/>
-                      <a:r>
-                        <a:t>• ドアスイッチ手押し 8.88s減</a:t>
-                      </a:r>
-                    </a:p>
-                  </a:txBody>
-                  <a:tcPr anchor="ctr" marL="36576" marR="36576" marT="9144" marB="9144">
-                    <a:solidFill>
-                      <a:srgbClr val="EAF7EE"/>
-                    </a:solidFill>
-                  </a:tcPr>
-                </a:tc>
-                <a:tc>
-                  <a:txBody>
-                    <a:bodyPr wrap="square"/>
-                    <a:lstStyle/>
-                    <a:p>
-                      <a:pPr algn="l">
-                        <a:defRPr sz="650">
-                          <a:solidFill>
-                            <a:srgbClr val="1E242B"/>
-                          </a:solidFill>
-                          <a:latin typeface="Meiryo UI"/>
-                        </a:defRPr>
-                      </a:pPr>
-                      <a:r>
-                        <a:t>設計 / 品保（日本）</a:t>
-                      </a:r>
-                      <a:br/>
-                      <a:r>
-                        <a:t>（スイッチ検知は先行）</a:t>
-                      </a:r>
-                    </a:p>
-                  </a:txBody>
-                  <a:tcPr anchor="ctr" marL="36576" marR="36576" marT="9144" marB="9144">
-                    <a:solidFill>
-                      <a:srgbClr val="EAF7EE"/>
-                    </a:solidFill>
-                  </a:tcPr>
-                </a:tc>
-              </a:tr>
-              <a:tr h="486294">
-                <a:tc>
-                  <a:txBody>
-                    <a:bodyPr wrap="square"/>
-                    <a:lstStyle/>
-                    <a:p>
-                      <a:pPr algn="ctr">
-                        <a:defRPr sz="650" b="1">
-                          <a:solidFill>
-                            <a:srgbClr val="1E242B"/>
-                          </a:solidFill>
-                          <a:latin typeface="Meiryo UI"/>
-                        </a:defRPr>
-                      </a:pPr>
-                      <a:r>
-                        <a:t>No.37</a:t>
-                      </a:r>
-                      <a:br/>
-                      <a:r>
-                        <a:t>(A-4 / A-11)</a:t>
-                      </a:r>
-                    </a:p>
-                  </a:txBody>
-                  <a:tcPr anchor="ctr" marL="36576" marR="36576" marT="9144" marB="9144">
-                    <a:solidFill>
-                      <a:srgbClr val="FFFFFF"/>
-                    </a:solidFill>
-                  </a:tcPr>
-                </a:tc>
-                <a:tc>
-                  <a:txBody>
-                    <a:bodyPr wrap="square"/>
-                    <a:lstStyle/>
-                    <a:p>
-                      <a:pPr algn="l">
-                        <a:defRPr sz="650">
-                          <a:solidFill>
-                            <a:srgbClr val="1E242B"/>
-                          </a:solidFill>
-                          <a:latin typeface="Meiryo UI"/>
-                        </a:defRPr>
-                      </a:pPr>
-                      <a:r>
-                        <a:t>A11：RCGコピー確認の統合検討および転写ベルト蛇行測定の廃止</a:t>
-                      </a:r>
-                    </a:p>
-                  </a:txBody>
-                  <a:tcPr anchor="ctr" marL="36576" marR="36576" marT="9144" marB="9144">
-                    <a:solidFill>
-                      <a:srgbClr val="FFFFFF"/>
-                    </a:solidFill>
-                  </a:tcPr>
-                </a:tc>
-                <a:tc>
-                  <a:txBody>
-                    <a:bodyPr wrap="square"/>
-                    <a:lstStyle/>
-                    <a:p>
-                      <a:pPr algn="l">
-                        <a:defRPr sz="650">
-                          <a:solidFill>
-                            <a:srgbClr val="1E242B"/>
-                          </a:solidFill>
-                          <a:latin typeface="Meiryo UI"/>
-                        </a:defRPr>
-                      </a:pPr>
-                      <a:r>
-                        <a:t>K8にてRCGコピー確認を実施（60s）。K4にて転写ベルト蛇行を手動測定（5s～15.36s、ベトナムにて月1～2台のNG発生実績あり）。</a:t>
-                      </a:r>
-                    </a:p>
-                  </a:txBody>
-                  <a:tcPr anchor="ctr" marL="36576" marR="36576" marT="9144" marB="9144">
-                    <a:solidFill>
-                      <a:srgbClr val="FFFFFF"/>
-                    </a:solidFill>
-                  </a:tcPr>
-                </a:tc>
-                <a:tc>
-                  <a:txBody>
-                    <a:bodyPr wrap="square"/>
-                    <a:lstStyle/>
-                    <a:p>
-                      <a:pPr algn="l">
-                        <a:defRPr sz="650">
-                          <a:solidFill>
-                            <a:srgbClr val="1E242B"/>
-                          </a:solidFill>
-                          <a:latin typeface="Meiryo UI"/>
-                        </a:defRPr>
-                      </a:pPr>
-                      <a:r>
-                        <a:t>RCGコピー確認を前工程へ統合。転写ベルトは35°面取りプーリ＋新ベルト材質の量産適用によりCpk ≥ 1.33達成後に測定廃止。</a:t>
-                      </a:r>
-                    </a:p>
-                  </a:txBody>
-                  <a:tcPr anchor="ctr" marL="36576" marR="36576" marT="9144" marB="9144">
-                    <a:solidFill>
-                      <a:srgbClr val="FFFFFF"/>
-                    </a:solidFill>
-                  </a:tcPr>
-                </a:tc>
-                <a:tc>
-                  <a:txBody>
-                    <a:bodyPr wrap="square"/>
-                    <a:lstStyle/>
-                    <a:p>
-                      <a:pPr algn="l">
-                        <a:defRPr sz="650">
-                          <a:solidFill>
-                            <a:srgbClr val="1E242B"/>
-                          </a:solidFill>
-                          <a:latin typeface="Meiryo UI"/>
-                        </a:defRPr>
-                      </a:pPr>
-                      <a:r>
-                        <a:t>• コピー確認60s ＆ ベルト15s減</a:t>
-                      </a:r>
-                      <a:br/>
-                      <a:r>
-                        <a:t>（現場設備費 0 円）</a:t>
-                      </a:r>
-                    </a:p>
-                  </a:txBody>
-                  <a:tcPr anchor="ctr" marL="36576" marR="36576" marT="9144" marB="9144">
-                    <a:solidFill>
-                      <a:srgbClr val="FFFFFF"/>
-                    </a:solidFill>
-                  </a:tcPr>
-                </a:tc>
-                <a:tc>
-                  <a:txBody>
-                    <a:bodyPr wrap="square"/>
-                    <a:lstStyle/>
-                    <a:p>
-                      <a:pPr algn="l">
-                        <a:defRPr sz="650">
-                          <a:solidFill>
-                            <a:srgbClr val="1E242B"/>
-                          </a:solidFill>
-                          <a:latin typeface="Meiryo UI"/>
-                        </a:defRPr>
-                      </a:pPr>
-                      <a:r>
-                        <a:t>品保 ＆ 日本設計</a:t>
-                      </a:r>
-                      <a:br/>
-                      <a:r>
-                        <a:t>（新プーリ検証待ち）</a:t>
-                      </a:r>
-                    </a:p>
-                  </a:txBody>
-                  <a:tcPr anchor="ctr" marL="36576" marR="36576" marT="9144" marB="9144">
-                    <a:solidFill>
-                      <a:srgbClr val="FFFFFF"/>
-                    </a:solidFill>
-                  </a:tcPr>
-                </a:tc>
-              </a:tr>
-              <a:tr h="486300">
-                <a:tc>
-                  <a:txBody>
-                    <a:bodyPr wrap="square"/>
-                    <a:lstStyle/>
-                    <a:p>
-                      <a:pPr algn="ctr">
-                        <a:defRPr sz="650" b="1">
-                          <a:solidFill>
-                            <a:srgbClr val="1E242B"/>
-                          </a:solidFill>
-                          <a:latin typeface="Meiryo UI"/>
-                        </a:defRPr>
-                      </a:pPr>
-                      <a:r>
-                        <a:t>2026年10月度</a:t>
-                      </a:r>
-                      <a:br/>
-                      <a:r>
-                        <a:t>実績（確定）</a:t>
-                      </a:r>
-                    </a:p>
-                  </a:txBody>
-                  <a:tcPr anchor="ctr" marL="36576" marR="36576" marT="9144" marB="9144">
-                    <a:solidFill>
-                      <a:srgbClr val="E8EEF5"/>
-                    </a:solidFill>
-                  </a:tcPr>
-                </a:tc>
-                <a:tc>
-                  <a:txBody>
-                    <a:bodyPr wrap="square"/>
-                    <a:lstStyle/>
-                    <a:p>
-                      <a:pPr algn="l">
-                        <a:defRPr sz="650">
-                          <a:solidFill>
-                            <a:srgbClr val="1E242B"/>
-                          </a:solidFill>
-                          <a:latin typeface="Meiryo UI"/>
-                        </a:defRPr>
-                      </a:pPr>
-                      <a:r>
-                        <a:t>【2026年10月度 完了実績】 英語切替2ステップおよびトナー警告確認2ステップの作業票からの削除</a:t>
-                      </a:r>
-                    </a:p>
-                  </a:txBody>
-                  <a:tcPr anchor="ctr" marL="36576" marR="36576" marT="9144" marB="9144">
-                    <a:solidFill>
-                      <a:srgbClr val="E8EEF5"/>
-                    </a:solidFill>
-                  </a:tcPr>
-                </a:tc>
-                <a:tc>
-                  <a:txBody>
-                    <a:bodyPr wrap="square"/>
-                    <a:lstStyle/>
-                    <a:p>
-                      <a:pPr algn="l">
-                        <a:defRPr sz="650">
-                          <a:solidFill>
-                            <a:srgbClr val="1E242B"/>
-                          </a:solidFill>
-                          <a:latin typeface="Meiryo UI"/>
-                        </a:defRPr>
-                      </a:pPr>
-                      <a:r>
-                        <a:t>作業者が言語選択でEnglishをタップ（0.72s×2＝1.44s）、トナー警告表示の出現と消去を目視確認（1.44s×2＝2.88s）。</a:t>
-                      </a:r>
-                    </a:p>
-                  </a:txBody>
-                  <a:tcPr anchor="ctr" marL="36576" marR="36576" marT="9144" marB="9144">
-                    <a:solidFill>
-                      <a:srgbClr val="E8EEF5"/>
-                    </a:solidFill>
-                  </a:tcPr>
-                </a:tc>
-                <a:tc>
-                  <a:txBody>
-                    <a:bodyPr wrap="square"/>
-                    <a:lstStyle/>
-                    <a:p>
-                      <a:pPr algn="l">
-                        <a:defRPr sz="650">
-                          <a:solidFill>
-                            <a:srgbClr val="1E242B"/>
-                          </a:solidFill>
-                          <a:latin typeface="Meiryo UI"/>
-                        </a:defRPr>
-                      </a:pPr>
-                      <a:r>
-                        <a:t>手作業不要であることを実機検証・確認完了し、2026年10月度作業票（作業確実シート）から上記4ステップを正式に削除。</a:t>
-                      </a:r>
-                    </a:p>
-                  </a:txBody>
-                  <a:tcPr anchor="ctr" marL="36576" marR="36576" marT="9144" marB="9144">
-                    <a:solidFill>
-                      <a:srgbClr val="E8EEF5"/>
-                    </a:solidFill>
-                  </a:tcPr>
-                </a:tc>
-                <a:tc>
-                  <a:txBody>
-                    <a:bodyPr wrap="square"/>
-                    <a:lstStyle/>
-                    <a:p>
-                      <a:pPr algn="l">
-                        <a:defRPr sz="650">
-                          <a:solidFill>
-                            <a:srgbClr val="1E242B"/>
-                          </a:solidFill>
-                          <a:latin typeface="Meiryo UI"/>
-                        </a:defRPr>
-                      </a:pPr>
-                      <a:r>
-                        <a:t>• 実作業削減実績：</a:t>
-                      </a:r>
-                      <a:br/>
-                      <a:r>
-                        <a:t>  4.32 秒 / 台 削減</a:t>
-                      </a:r>
-                    </a:p>
-                  </a:txBody>
-                  <a:tcPr anchor="ctr" marL="36576" marR="36576" marT="9144" marB="9144">
-                    <a:solidFill>
-                      <a:srgbClr val="E8EEF5"/>
-                    </a:solidFill>
-                  </a:tcPr>
-                </a:tc>
-                <a:tc>
-                  <a:txBody>
-                    <a:bodyPr wrap="square"/>
-                    <a:lstStyle/>
-                    <a:p>
-                      <a:pPr algn="l">
-                        <a:defRPr sz="650">
-                          <a:solidFill>
-                            <a:srgbClr val="1E242B"/>
-                          </a:solidFill>
-                          <a:latin typeface="Meiryo UI"/>
-                        </a:defRPr>
-                      </a:pPr>
-                      <a:r>
-                        <a:t>KDTVN-PE-3</a:t>
-                      </a:r>
-                      <a:br/>
-                      <a:r>
-                        <a:t>（2026年10月度完了）</a:t>
-                      </a:r>
-                    </a:p>
-                  </a:txBody>
-                  <a:tcPr anchor="ctr" marL="36576" marR="36576" marT="9144" marB="9144">
-                    <a:solidFill>
-                      <a:srgbClr val="E8EEF5"/>
-                    </a:solidFill>
-                  </a:tcPr>
-                </a:tc>
-              </a:tr>
-            </a:tbl>
-          </a:graphicData>
-        </a:graphic>
-      </p:graphicFrame>
     </p:spTree>
   </p:cSld>
   <p:clrMapOvr>

--- a/IrisEXP_VN改善提案報告_JP.pptx
+++ b/IrisEXP_VN改善提案報告_JP.pptx
@@ -22460,7 +22460,7 @@
           </a:solidFill>
           <a:ln w="12700">
             <a:solidFill>
-              <a:srgbClr val="2B547E"/>
+              <a:srgbClr val="1B365D"/>
             </a:solidFill>
           </a:ln>
         </p:spPr>
@@ -22491,13 +22491,7 @@
               </a:defRPr>
             </a:pPr>
             <a:r>
-              <a:rPr sz="1200" b="1">
-                <a:solidFill>
-                  <a:srgbClr val="1B365D"/>
-                </a:solidFill>
-                <a:latin typeface="Meiryo UI"/>
-              </a:rPr>
-              <a:t>■ 日本が全体設計・レビューを担い、ベトナム・中国が現場視点で改善を立案推進。3拠点が共通ファイルと定例連携会で共有し、ベトナムは現場分析から実証検証・進捗管理までを主体的に推進する。</a:t>
+              <a:t>日本が全体設計・レビューを担い、ベトナム・中国が現場視点で改善を立案推進。3拠点が共通ファイルと定例会で共有し、目標タクト達成へ直結させる。</a:t>
             </a:r>
           </a:p>
         </p:txBody>
@@ -22544,20 +22538,7 @@
           <a:lstStyle/>
           <a:p>
             <a:pPr algn="ctr">
-              <a:defRPr sz="1550" b="1">
-                <a:solidFill>
-                  <a:srgbClr val="F5B041"/>
-                </a:solidFill>
-                <a:latin typeface="Meiryo UI"/>
-              </a:defRPr>
-            </a:pPr>
-            <a:r>
-              <a:t>行動スローガン： 『全体を導く設計 — 現場主体の改善 — 三拠点協調の完遂』</a:t>
-            </a:r>
-          </a:p>
-          <a:p>
-            <a:pPr algn="ctr">
-              <a:defRPr sz="1050">
+              <a:defRPr sz="1200">
                 <a:solidFill>
                   <a:srgbClr val="FFFFFF"/>
                 </a:solidFill>
@@ -22565,7 +22546,20 @@
               </a:defRPr>
             </a:pPr>
             <a:r>
-              <a:t>日本が全体設計・総括・技術連携  |  ベトナム・中国が現場課題を主体的に立案推進  |  三拠点が共通ファイル共有・定例会で連携解決</a:t>
+              <a:t>行動指針： 全体を導く設計 | 現場主体の改善 | 三拠点協調の完遂</a:t>
+            </a:r>
+          </a:p>
+          <a:p>
+            <a:pPr algn="ctr">
+              <a:defRPr sz="1200">
+                <a:solidFill>
+                  <a:srgbClr val="FFFFFF"/>
+                </a:solidFill>
+                <a:latin typeface="Meiryo UI"/>
+              </a:defRPr>
+            </a:pPr>
+            <a:r>
+              <a:t>日本が全体設計・総括・技術連携 | ベトナム・中国が現場課題を主体的に立案推進 | 週次定例会で課題を迅速解決</a:t>
             </a:r>
           </a:p>
         </p:txBody>
@@ -22578,8 +22572,8 @@
         </p:nvSpPr>
         <p:spPr>
           <a:xfrm>
-            <a:off x="256032" y="2139696"/>
-            <a:ext cx="3767328" cy="1965960"/>
+            <a:off x="256032" y="2103120"/>
+            <a:ext cx="3767328" cy="3750000"/>
           </a:xfrm>
           <a:prstGeom prst="rect">
             <a:avLst/>
@@ -22623,8 +22617,8 @@
         </p:nvSpPr>
         <p:spPr>
           <a:xfrm>
-            <a:off x="256032" y="2139696"/>
-            <a:ext cx="3767328" cy="292608"/>
+            <a:off x="256032" y="2103120"/>
+            <a:ext cx="3767328" cy="360000"/>
           </a:xfrm>
           <a:prstGeom prst="rect">
             <a:avLst/>
@@ -22676,8 +22670,8 @@
         </p:nvSpPr>
         <p:spPr>
           <a:xfrm>
-            <a:off x="329184" y="2459736"/>
-            <a:ext cx="3621024" cy="1618488"/>
+            <a:off x="320000" y="2520000"/>
+            <a:ext cx="3640000" cy="3250000"/>
           </a:xfrm>
           <a:prstGeom prst="rect">
             <a:avLst/>
@@ -22685,14 +22679,17 @@
           <a:noFill/>
         </p:spPr>
         <p:txBody>
-          <a:bodyPr wrap="square" lIns="36576" rIns="36576" tIns="18288" bIns="18288">
+          <a:bodyPr wrap="square" lIns="109728" rIns="109728" tIns="109728" bIns="109728">
             <a:spAutoFit/>
           </a:bodyPr>
           <a:lstStyle/>
           <a:p>
             <a:pPr>
+              <a:lnSpc>
+                <a:spcPct val="125000"/>
+              </a:lnSpc>
               <a:spcAft>
-                <a:spcPts val="220"/>
+                <a:spcPts val="1400"/>
               </a:spcAft>
               <a:defRPr sz="860" b="1">
                 <a:solidFill>
@@ -22702,87 +22699,105 @@
               </a:defRPr>
             </a:pPr>
             <a:r>
-              <a:t>■ 全体設計の方向付け：</a:t>
+              <a:rPr sz="1300" b="1">
+                <a:solidFill>
+                  <a:srgbClr val="1B365D"/>
+                </a:solidFill>
+                <a:latin typeface="Meiryo UI"/>
+              </a:rPr>
+              <a:t>• </a:t>
+            </a:r>
+            <a:r>
+              <a:rPr sz="1300" b="1">
+                <a:solidFill>
+                  <a:srgbClr val="1B365D"/>
+                </a:solidFill>
+                <a:latin typeface="Meiryo UI"/>
+              </a:rPr>
+              <a:t>全体設計の方向付け： </a:t>
+            </a:r>
+            <a:r>
+              <a:rPr sz="1300" b="0">
+                <a:solidFill>
+                  <a:srgbClr val="1E242B"/>
+                </a:solidFill>
+                <a:latin typeface="Meiryo UI"/>
+              </a:rPr>
+              <a:t>本体保証工程の標準仕様策定およびIrisEXP全体技術ロードマップの統括。</a:t>
             </a:r>
           </a:p>
           <a:p>
             <a:pPr>
+              <a:lnSpc>
+                <a:spcPct val="125000"/>
+              </a:lnSpc>
               <a:spcAft>
-                <a:spcPts val="220"/>
+                <a:spcPts val="1400"/>
               </a:spcAft>
-              <a:defRPr sz="860">
+            </a:pPr>
+            <a:r>
+              <a:rPr sz="1300" b="1">
+                <a:solidFill>
+                  <a:srgbClr val="1B365D"/>
+                </a:solidFill>
+                <a:latin typeface="Meiryo UI"/>
+              </a:rPr>
+              <a:t>• </a:t>
+            </a:r>
+            <a:r>
+              <a:rPr sz="1300" b="1">
+                <a:solidFill>
+                  <a:srgbClr val="1B365D"/>
+                </a:solidFill>
+                <a:latin typeface="Meiryo UI"/>
+              </a:rPr>
+              <a:t>提案の総括・レビュー： </a:t>
+            </a:r>
+            <a:r>
+              <a:rPr sz="1300" b="0">
                 <a:solidFill>
                   <a:srgbClr val="1E242B"/>
                 </a:solidFill>
                 <a:latin typeface="Meiryo UI"/>
-              </a:defRPr>
-            </a:pPr>
-            <a:r>
-              <a:t>• 本体保証工程の標準仕様策定および全体ロードマップの統括。</a:t>
+              </a:rPr>
+              <a:t>各工場から提出された改善提案の技術的成立性・品質（QA）影響の審査と迅速な承認。</a:t>
             </a:r>
           </a:p>
           <a:p>
             <a:pPr>
+              <a:lnSpc>
+                <a:spcPct val="125000"/>
+              </a:lnSpc>
               <a:spcAft>
-                <a:spcPts val="220"/>
+                <a:spcPts val="1400"/>
               </a:spcAft>
-              <a:defRPr sz="860" b="1">
+            </a:pPr>
+            <a:r>
+              <a:rPr sz="1300" b="1">
+                <a:solidFill>
+                  <a:srgbClr val="1B365D"/>
+                </a:solidFill>
+                <a:latin typeface="Meiryo UI"/>
+              </a:rPr>
+              <a:t>• </a:t>
+            </a:r>
+            <a:r>
+              <a:rPr sz="1300" b="1">
+                <a:solidFill>
+                  <a:srgbClr val="1B365D"/>
+                </a:solidFill>
+                <a:latin typeface="Meiryo UI"/>
+              </a:rPr>
+              <a:t>技術コーディネート： </a:t>
+            </a:r>
+            <a:r>
+              <a:rPr sz="1300" b="0">
                 <a:solidFill>
                   <a:srgbClr val="1E242B"/>
                 </a:solidFill>
                 <a:latin typeface="Meiryo UI"/>
-              </a:defRPr>
-            </a:pPr>
-            <a:r>
-              <a:t>■ 提案の総括・レビュー：</a:t>
-            </a:r>
-          </a:p>
-          <a:p>
-            <a:pPr>
-              <a:spcAft>
-                <a:spcPts val="220"/>
-              </a:spcAft>
-              <a:defRPr sz="860">
-                <a:solidFill>
-                  <a:srgbClr val="1E242B"/>
-                </a:solidFill>
-                <a:latin typeface="Meiryo UI"/>
-              </a:defRPr>
-            </a:pPr>
-            <a:r>
-              <a:t>• 各工場から提出された改善提案の技術的成立性・品質（QA）影響の審査と承認。</a:t>
-            </a:r>
-          </a:p>
-          <a:p>
-            <a:pPr>
-              <a:spcAft>
-                <a:spcPts val="220"/>
-              </a:spcAft>
-              <a:defRPr sz="860" b="1">
-                <a:solidFill>
-                  <a:srgbClr val="1E242B"/>
-                </a:solidFill>
-                <a:latin typeface="Meiryo UI"/>
-              </a:defRPr>
-            </a:pPr>
-            <a:r>
-              <a:t>■ 技術コーディネート：</a:t>
-            </a:r>
-          </a:p>
-          <a:p>
-            <a:pPr>
-              <a:spcAft>
-                <a:spcPts val="220"/>
-              </a:spcAft>
-              <a:defRPr sz="860">
-                <a:solidFill>
-                  <a:srgbClr val="1E242B"/>
-                </a:solidFill>
-                <a:latin typeface="Meiryo UI"/>
-              </a:defRPr>
-            </a:pPr>
-            <a:r>
-              <a:t>• 設計・ソフト開発・品保・生技間の技術課題を迅速に調整・支援。</a:t>
+              </a:rPr>
+              <a:t>設計・ソフト開発・品保・生産技術間の技術課題を迅速に調整し、課題解決を支援。</a:t>
             </a:r>
           </a:p>
         </p:txBody>
@@ -22795,8 +22810,8 @@
         </p:nvSpPr>
         <p:spPr>
           <a:xfrm>
-            <a:off x="4206240" y="2139696"/>
-            <a:ext cx="3767328" cy="1965960"/>
+            <a:off x="4206240" y="2103120"/>
+            <a:ext cx="3767328" cy="3750000"/>
           </a:xfrm>
           <a:prstGeom prst="rect">
             <a:avLst/>
@@ -22840,8 +22855,8 @@
         </p:nvSpPr>
         <p:spPr>
           <a:xfrm>
-            <a:off x="4206240" y="2139696"/>
-            <a:ext cx="3767328" cy="292608"/>
+            <a:off x="4206240" y="2103120"/>
+            <a:ext cx="3767328" cy="360000"/>
           </a:xfrm>
           <a:prstGeom prst="rect">
             <a:avLst/>
@@ -22893,8 +22908,8 @@
         </p:nvSpPr>
         <p:spPr>
           <a:xfrm>
-            <a:off x="4279392" y="2459736"/>
-            <a:ext cx="3621024" cy="1618488"/>
+            <a:off x="4270000" y="2520000"/>
+            <a:ext cx="3640000" cy="3250000"/>
           </a:xfrm>
           <a:prstGeom prst="rect">
             <a:avLst/>
@@ -22902,14 +22917,17 @@
           <a:noFill/>
         </p:spPr>
         <p:txBody>
-          <a:bodyPr wrap="square" lIns="36576" rIns="36576" tIns="18288" bIns="18288">
+          <a:bodyPr wrap="square" lIns="109728" rIns="109728" tIns="109728" bIns="109728">
             <a:spAutoFit/>
           </a:bodyPr>
           <a:lstStyle/>
           <a:p>
             <a:pPr>
+              <a:lnSpc>
+                <a:spcPct val="125000"/>
+              </a:lnSpc>
               <a:spcAft>
-                <a:spcPts val="220"/>
+                <a:spcPts val="1400"/>
               </a:spcAft>
               <a:defRPr sz="860" b="1">
                 <a:solidFill>
@@ -22919,87 +22937,105 @@
               </a:defRPr>
             </a:pPr>
             <a:r>
-              <a:t>■ 現場視点での課題抽出：</a:t>
+              <a:rPr sz="1300" b="1">
+                <a:solidFill>
+                  <a:srgbClr val="1B365D"/>
+                </a:solidFill>
+                <a:latin typeface="Meiryo UI"/>
+              </a:rPr>
+              <a:t>• </a:t>
+            </a:r>
+            <a:r>
+              <a:rPr sz="1300" b="1">
+                <a:solidFill>
+                  <a:srgbClr val="1B365D"/>
+                </a:solidFill>
+                <a:latin typeface="Meiryo UI"/>
+              </a:rPr>
+              <a:t>現場視点での課題抽出： </a:t>
+            </a:r>
+            <a:r>
+              <a:rPr sz="1300" b="0">
+                <a:solidFill>
+                  <a:srgbClr val="1E242B"/>
+                </a:solidFill>
+                <a:latin typeface="Meiryo UI"/>
+              </a:rPr>
+              <a:t>現行ライン（16名体制・1,083秒）の作業動画分析とストップウォッチ測定によりボトルネックを特定。</a:t>
             </a:r>
           </a:p>
           <a:p>
             <a:pPr>
+              <a:lnSpc>
+                <a:spcPct val="125000"/>
+              </a:lnSpc>
               <a:spcAft>
-                <a:spcPts val="220"/>
+                <a:spcPts val="1400"/>
               </a:spcAft>
-              <a:defRPr sz="860">
+            </a:pPr>
+            <a:r>
+              <a:rPr sz="1300" b="1">
+                <a:solidFill>
+                  <a:srgbClr val="1B365D"/>
+                </a:solidFill>
+                <a:latin typeface="Meiryo UI"/>
+              </a:rPr>
+              <a:t>• </a:t>
+            </a:r>
+            <a:r>
+              <a:rPr sz="1300" b="1">
+                <a:solidFill>
+                  <a:srgbClr val="1B365D"/>
+                </a:solidFill>
+                <a:latin typeface="Meiryo UI"/>
+              </a:rPr>
+              <a:t>拠点独自提案の立案： </a:t>
+            </a:r>
+            <a:r>
+              <a:rPr sz="1300" b="0">
                 <a:solidFill>
                   <a:srgbClr val="1E242B"/>
                 </a:solidFill>
                 <a:latin typeface="Meiryo UI"/>
-              </a:defRPr>
-            </a:pPr>
-            <a:r>
-              <a:t>• 実際のライン作業動画分析・ストップウォッチ測定によりボトルネックを特定。</a:t>
+              </a:rPr>
+              <a:t>自社治具設計、高額ロボット廃止（DP給紙トレイ化など）、現場視点での投資対効果（ROI）を試算。</a:t>
             </a:r>
           </a:p>
           <a:p>
             <a:pPr>
+              <a:lnSpc>
+                <a:spcPct val="125000"/>
+              </a:lnSpc>
               <a:spcAft>
-                <a:spcPts val="220"/>
+                <a:spcPts val="1400"/>
               </a:spcAft>
-              <a:defRPr sz="860" b="1">
+            </a:pPr>
+            <a:r>
+              <a:rPr sz="1300" b="1">
+                <a:solidFill>
+                  <a:srgbClr val="1B365D"/>
+                </a:solidFill>
+                <a:latin typeface="Meiryo UI"/>
+              </a:rPr>
+              <a:t>• </a:t>
+            </a:r>
+            <a:r>
+              <a:rPr sz="1300" b="1">
+                <a:solidFill>
+                  <a:srgbClr val="1B365D"/>
+                </a:solidFill>
+                <a:latin typeface="Meiryo UI"/>
+              </a:rPr>
+              <a:t>主体的な導入推進： </a:t>
+            </a:r>
+            <a:r>
+              <a:rPr sz="1300" b="0">
                 <a:solidFill>
                   <a:srgbClr val="1E242B"/>
                 </a:solidFill>
                 <a:latin typeface="Meiryo UI"/>
-              </a:defRPr>
-            </a:pPr>
-            <a:r>
-              <a:t>■ 拠点独自提案の立案：</a:t>
-            </a:r>
-          </a:p>
-          <a:p>
-            <a:pPr>
-              <a:spcAft>
-                <a:spcPts val="220"/>
-              </a:spcAft>
-              <a:defRPr sz="860">
-                <a:solidFill>
-                  <a:srgbClr val="1E242B"/>
-                </a:solidFill>
-                <a:latin typeface="Meiryo UI"/>
-              </a:defRPr>
-            </a:pPr>
-            <a:r>
-              <a:t>• 工場実情に合わせた治具設計・自動化設備選定および投資対効果（ROI）の試算。</a:t>
-            </a:r>
-          </a:p>
-          <a:p>
-            <a:pPr>
-              <a:spcAft>
-                <a:spcPts val="220"/>
-              </a:spcAft>
-              <a:defRPr sz="860" b="1">
-                <a:solidFill>
-                  <a:srgbClr val="1E242B"/>
-                </a:solidFill>
-                <a:latin typeface="Meiryo UI"/>
-              </a:defRPr>
-            </a:pPr>
-            <a:r>
-              <a:t>■ 主体的な導入推進：</a:t>
-            </a:r>
-          </a:p>
-          <a:p>
-            <a:pPr>
-              <a:spcAft>
-                <a:spcPts val="220"/>
-              </a:spcAft>
-              <a:defRPr sz="860">
-                <a:solidFill>
-                  <a:srgbClr val="1E242B"/>
-                </a:solidFill>
-                <a:latin typeface="Meiryo UI"/>
-              </a:defRPr>
-            </a:pPr>
-            <a:r>
-              <a:t>• 実機検証、工程能力データ測定、および承認された施策の現場即時適用。</a:t>
+              </a:rPr>
+              <a:t>品質目標PDCA管理表に基づく自主進捗管理、工程能力検証、および承認済み施策の現場SOP即時反映。</a:t>
             </a:r>
           </a:p>
         </p:txBody>
@@ -23012,8 +23048,8 @@
         </p:nvSpPr>
         <p:spPr>
           <a:xfrm>
-            <a:off x="8156448" y="2139696"/>
-            <a:ext cx="3779215" cy="1965960"/>
+            <a:off x="8156448" y="2103120"/>
+            <a:ext cx="3779215" cy="3750000"/>
           </a:xfrm>
           <a:prstGeom prst="rect">
             <a:avLst/>
@@ -23057,8 +23093,8 @@
         </p:nvSpPr>
         <p:spPr>
           <a:xfrm>
-            <a:off x="8156448" y="2139696"/>
-            <a:ext cx="3779215" cy="292608"/>
+            <a:off x="8156448" y="2103120"/>
+            <a:ext cx="3779215" cy="360000"/>
           </a:xfrm>
           <a:prstGeom prst="rect">
             <a:avLst/>
@@ -23110,8 +23146,8 @@
         </p:nvSpPr>
         <p:spPr>
           <a:xfrm>
-            <a:off x="8229600" y="2459736"/>
-            <a:ext cx="3632911" cy="1618488"/>
+            <a:off x="8220000" y="2520000"/>
+            <a:ext cx="3650000" cy="3250000"/>
           </a:xfrm>
           <a:prstGeom prst="rect">
             <a:avLst/>
@@ -23119,14 +23155,17 @@
           <a:noFill/>
         </p:spPr>
         <p:txBody>
-          <a:bodyPr wrap="square" lIns="36576" rIns="36576" tIns="18288" bIns="18288">
+          <a:bodyPr wrap="square" lIns="109728" rIns="109728" tIns="109728" bIns="109728">
             <a:spAutoFit/>
           </a:bodyPr>
           <a:lstStyle/>
           <a:p>
             <a:pPr>
+              <a:lnSpc>
+                <a:spcPct val="125000"/>
+              </a:lnSpc>
               <a:spcAft>
-                <a:spcPts val="220"/>
+                <a:spcPts val="1400"/>
               </a:spcAft>
               <a:defRPr sz="860" b="1">
                 <a:solidFill>
@@ -23136,87 +23175,105 @@
               </a:defRPr>
             </a:pPr>
             <a:r>
-              <a:t>■ 共通管理ファイルへの更新：</a:t>
+              <a:rPr sz="1300" b="1">
+                <a:solidFill>
+                  <a:srgbClr val="1B365D"/>
+                </a:solidFill>
+                <a:latin typeface="Meiryo UI"/>
+              </a:rPr>
+              <a:t>• </a:t>
+            </a:r>
+            <a:r>
+              <a:rPr sz="1300" b="1">
+                <a:solidFill>
+                  <a:srgbClr val="1B365D"/>
+                </a:solidFill>
+                <a:latin typeface="Meiryo UI"/>
+              </a:rPr>
+              <a:t>共通管理ファイルへの更新： </a:t>
+            </a:r>
+            <a:r>
+              <a:rPr sz="1300" b="0">
+                <a:solidFill>
+                  <a:srgbClr val="1E242B"/>
+                </a:solidFill>
+                <a:latin typeface="Meiryo UI"/>
+              </a:rPr>
+              <a:t>全38提案（日本7、中国11、ベトナム20）を一元管理シートでリアルタイム共有。</a:t>
             </a:r>
           </a:p>
           <a:p>
             <a:pPr>
+              <a:lnSpc>
+                <a:spcPct val="125000"/>
+              </a:lnSpc>
               <a:spcAft>
-                <a:spcPts val="220"/>
+                <a:spcPts val="1400"/>
               </a:spcAft>
-              <a:defRPr sz="860">
+            </a:pPr>
+            <a:r>
+              <a:rPr sz="1300" b="1">
+                <a:solidFill>
+                  <a:srgbClr val="1B365D"/>
+                </a:solidFill>
+                <a:latin typeface="Meiryo UI"/>
+              </a:rPr>
+              <a:t>• </a:t>
+            </a:r>
+            <a:r>
+              <a:rPr sz="1300" b="1">
+                <a:solidFill>
+                  <a:srgbClr val="1B365D"/>
+                </a:solidFill>
+                <a:latin typeface="Meiryo UI"/>
+              </a:rPr>
+              <a:t>週次定例会（保証工程連携会）： </a:t>
+            </a:r>
+            <a:r>
+              <a:rPr sz="1300" b="0">
                 <a:solidFill>
                   <a:srgbClr val="1E242B"/>
                 </a:solidFill>
                 <a:latin typeface="Meiryo UI"/>
-              </a:defRPr>
-            </a:pPr>
-            <a:r>
-              <a:t>• 全38提案（日本7、中国11、ベトナム20）を一元管理シートで進捗共有。</a:t>
+              </a:rPr>
+              <a:t>進捗状況、実機検証データ、および技術課題を率直に共有し合同で対策を協議。</a:t>
             </a:r>
           </a:p>
           <a:p>
             <a:pPr>
+              <a:lnSpc>
+                <a:spcPct val="125000"/>
+              </a:lnSpc>
               <a:spcAft>
-                <a:spcPts val="220"/>
+                <a:spcPts val="1400"/>
               </a:spcAft>
-              <a:defRPr sz="860" b="1">
+            </a:pPr>
+            <a:r>
+              <a:rPr sz="1300" b="1">
+                <a:solidFill>
+                  <a:srgbClr val="1B365D"/>
+                </a:solidFill>
+                <a:latin typeface="Meiryo UI"/>
+              </a:rPr>
+              <a:t>• </a:t>
+            </a:r>
+            <a:r>
+              <a:rPr sz="1300" b="1">
+                <a:solidFill>
+                  <a:srgbClr val="1B365D"/>
+                </a:solidFill>
+                <a:latin typeface="Meiryo UI"/>
+              </a:rPr>
+              <a:t>共同解決と水平展開： </a:t>
+            </a:r>
+            <a:r>
+              <a:rPr sz="1300" b="0">
                 <a:solidFill>
                   <a:srgbClr val="1E242B"/>
                 </a:solidFill>
                 <a:latin typeface="Meiryo UI"/>
-              </a:defRPr>
-            </a:pPr>
-            <a:r>
-              <a:t>■ 週次定例会（保証工程連携会）：</a:t>
-            </a:r>
-          </a:p>
-          <a:p>
-            <a:pPr>
-              <a:spcAft>
-                <a:spcPts val="220"/>
-              </a:spcAft>
-              <a:defRPr sz="860">
-                <a:solidFill>
-                  <a:srgbClr val="1E242B"/>
-                </a:solidFill>
-                <a:latin typeface="Meiryo UI"/>
-              </a:defRPr>
-            </a:pPr>
-            <a:r>
-              <a:t>• 進捗状況、実機検証結果、および発生課題を率直に共有し対策を協議。</a:t>
-            </a:r>
-          </a:p>
-          <a:p>
-            <a:pPr>
-              <a:spcAft>
-                <a:spcPts val="220"/>
-              </a:spcAft>
-              <a:defRPr sz="860" b="1">
-                <a:solidFill>
-                  <a:srgbClr val="1E242B"/>
-                </a:solidFill>
-                <a:latin typeface="Meiryo UI"/>
-              </a:defRPr>
-            </a:pPr>
-            <a:r>
-              <a:t>■ 共同解決と水平展開：</a:t>
-            </a:r>
-          </a:p>
-          <a:p>
-            <a:pPr>
-              <a:spcAft>
-                <a:spcPts val="220"/>
-              </a:spcAft>
-              <a:defRPr sz="860">
-                <a:solidFill>
-                  <a:srgbClr val="1E242B"/>
-                </a:solidFill>
-                <a:latin typeface="Meiryo UI"/>
-              </a:defRPr>
-            </a:pPr>
-            <a:r>
-              <a:t>• 先行工場で成果の出た施策（治具・ソフト）のデータを共有し他拠点へ水平展開。</a:t>
+              </a:rPr>
+              <a:t>先行工場で成果の出た施策（治具・ソフト）のデータを共有し、三拠点へ確実に水平展開。</a:t>
             </a:r>
           </a:p>
         </p:txBody>
@@ -23229,18 +23286,18 @@
         </p:nvSpPr>
         <p:spPr>
           <a:xfrm>
-            <a:off x="256032" y="4251960"/>
-            <a:ext cx="11679631" cy="2286000"/>
+            <a:off x="256032" y="5980000"/>
+            <a:ext cx="11679631" cy="520000"/>
           </a:xfrm>
           <a:prstGeom prst="rect">
             <a:avLst/>
           </a:prstGeom>
           <a:solidFill>
-            <a:srgbClr val="EAF7EE"/>
+            <a:srgbClr val="E8EEF5"/>
           </a:solidFill>
-          <a:ln w="19050">
+          <a:ln w="12700">
             <a:solidFill>
-              <a:srgbClr val="1E6E3E"/>
+              <a:srgbClr val="1B365D"/>
             </a:solidFill>
           </a:ln>
         </p:spPr>
@@ -23259,346 +23316,18 @@
           </a:fontRef>
         </p:style>
         <p:txBody>
-          <a:bodyPr rtlCol="0" anchor="ctr"/>
+          <a:bodyPr rtlCol="0" anchor="ctr" wrap="square" tIns="73152" bIns="73152"/>
           <a:lstStyle/>
           <a:p>
             <a:pPr algn="ctr"/>
-          </a:p>
-        </p:txBody>
-      </p:sp>
-      <p:sp>
-        <p:nvSpPr>
-          <p:cNvPr id="18" name="Rectangle 17"/>
-          <p:cNvSpPr/>
-          <p:nvPr/>
-        </p:nvSpPr>
-        <p:spPr>
-          <a:xfrm>
-            <a:off x="256032" y="4251960"/>
-            <a:ext cx="11679631" cy="329184"/>
-          </a:xfrm>
-          <a:prstGeom prst="rect">
-            <a:avLst/>
-          </a:prstGeom>
-          <a:solidFill>
-            <a:srgbClr val="1E6E3E"/>
-          </a:solidFill>
-          <a:ln>
-            <a:noFill/>
-          </a:ln>
-        </p:spPr>
-        <p:style>
-          <a:lnRef idx="1">
-            <a:schemeClr val="accent1"/>
-          </a:lnRef>
-          <a:fillRef idx="3">
-            <a:schemeClr val="accent1"/>
-          </a:fillRef>
-          <a:effectRef idx="2">
-            <a:schemeClr val="accent1"/>
-          </a:effectRef>
-          <a:fontRef idx="minor">
-            <a:schemeClr val="lt1"/>
-          </a:fontRef>
-        </p:style>
-        <p:txBody>
-          <a:bodyPr rtlCol="0" anchor="ctr"/>
-          <a:lstStyle/>
-          <a:p>
-            <a:pPr algn="ctr">
-              <a:defRPr sz="1000" b="1">
+            <a:r>
+              <a:rPr sz="1300" b="1">
                 <a:solidFill>
-                  <a:srgbClr val="FFFFFF"/>
+                  <a:srgbClr val="1B365D"/>
                 </a:solidFill>
                 <a:latin typeface="Meiryo UI"/>
-              </a:defRPr>
-            </a:pPr>
-            <a:r>
-              <a:t>  ベトナム工場（KDTVN）の重点役割：工程分析から実証検証・三拠点定例報告までを主体的に完遂</a:t>
-            </a:r>
-          </a:p>
-        </p:txBody>
-      </p:sp>
-      <p:sp>
-        <p:nvSpPr>
-          <p:cNvPr id="19" name="Rounded Rectangle 18"/>
-          <p:cNvSpPr/>
-          <p:nvPr/>
-        </p:nvSpPr>
-        <p:spPr>
-          <a:xfrm>
-            <a:off x="402336" y="4681728"/>
-            <a:ext cx="2743200" cy="1719072"/>
-          </a:xfrm>
-          <a:prstGeom prst="roundRect">
-            <a:avLst/>
-          </a:prstGeom>
-          <a:solidFill>
-            <a:srgbClr val="FFFFFF"/>
-          </a:solidFill>
-          <a:ln w="12700">
-            <a:solidFill>
-              <a:srgbClr val="1E6E3E"/>
-            </a:solidFill>
-          </a:ln>
-        </p:spPr>
-        <p:style>
-          <a:lnRef idx="1">
-            <a:schemeClr val="accent1"/>
-          </a:lnRef>
-          <a:fillRef idx="3">
-            <a:schemeClr val="accent1"/>
-          </a:fillRef>
-          <a:effectRef idx="2">
-            <a:schemeClr val="accent1"/>
-          </a:effectRef>
-          <a:fontRef idx="minor">
-            <a:schemeClr val="lt1"/>
-          </a:fontRef>
-        </p:style>
-        <p:txBody>
-          <a:bodyPr rtlCol="0" anchor="ctr" wrap="square" tIns="73152"/>
-          <a:lstStyle/>
-          <a:p>
-            <a:pPr algn="ctr">
-              <a:spcAft>
-                <a:spcPts val="600"/>
-              </a:spcAft>
-              <a:defRPr sz="919" b="1">
-                <a:solidFill>
-                  <a:srgbClr val="1E6E3E"/>
-                </a:solidFill>
-                <a:latin typeface="Meiryo UI"/>
-              </a:defRPr>
-            </a:pPr>
-            <a:r>
-              <a:t>ステップ 1：工程分析と提案立案</a:t>
-            </a:r>
-          </a:p>
-          <a:p>
-            <a:pPr>
-              <a:defRPr sz="860">
-                <a:solidFill>
-                  <a:srgbClr val="1E242B"/>
-                </a:solidFill>
-                <a:latin typeface="Meiryo UI"/>
-              </a:defRPr>
-            </a:pPr>
-            <a:r>
-              <a:t>現行Iris2024ライン（16名体制、標準1,083秒/総工数2,350秒）の動作を詳細に分析し、全体38提案中20件の改善策を主体的に提案。</a:t>
-            </a:r>
-          </a:p>
-        </p:txBody>
-      </p:sp>
-      <p:sp>
-        <p:nvSpPr>
-          <p:cNvPr id="20" name="Rounded Rectangle 19"/>
-          <p:cNvSpPr/>
-          <p:nvPr/>
-        </p:nvSpPr>
-        <p:spPr>
-          <a:xfrm>
-            <a:off x="3273552" y="4681728"/>
-            <a:ext cx="2743200" cy="1719072"/>
-          </a:xfrm>
-          <a:prstGeom prst="roundRect">
-            <a:avLst/>
-          </a:prstGeom>
-          <a:solidFill>
-            <a:srgbClr val="FFFFFF"/>
-          </a:solidFill>
-          <a:ln w="12700">
-            <a:solidFill>
-              <a:srgbClr val="1E6E3E"/>
-            </a:solidFill>
-          </a:ln>
-        </p:spPr>
-        <p:style>
-          <a:lnRef idx="1">
-            <a:schemeClr val="accent1"/>
-          </a:lnRef>
-          <a:fillRef idx="3">
-            <a:schemeClr val="accent1"/>
-          </a:fillRef>
-          <a:effectRef idx="2">
-            <a:schemeClr val="accent1"/>
-          </a:effectRef>
-          <a:fontRef idx="minor">
-            <a:schemeClr val="lt1"/>
-          </a:fontRef>
-        </p:style>
-        <p:txBody>
-          <a:bodyPr rtlCol="0" anchor="ctr" wrap="square" tIns="73152"/>
-          <a:lstStyle/>
-          <a:p>
-            <a:pPr algn="ctr">
-              <a:spcAft>
-                <a:spcPts val="600"/>
-              </a:spcAft>
-              <a:defRPr sz="919" b="1">
-                <a:solidFill>
-                  <a:srgbClr val="1E6E3E"/>
-                </a:solidFill>
-                <a:latin typeface="Meiryo UI"/>
-              </a:defRPr>
-            </a:pPr>
-            <a:r>
-              <a:t>ステップ 2：関係部署との実証検証</a:t>
-            </a:r>
-          </a:p>
-          <a:p>
-            <a:pPr>
-              <a:defRPr sz="860">
-                <a:solidFill>
-                  <a:srgbClr val="1E242B"/>
-                </a:solidFill>
-                <a:latin typeface="Meiryo UI"/>
-              </a:defRPr>
-            </a:pPr>
-            <a:r>
-              <a:t>組立・品保・設計および地元サプライヤーと直接連携し、治具の製作・実機動作検証・BOM詳細見積もりを推進。</a:t>
-            </a:r>
-          </a:p>
-        </p:txBody>
-      </p:sp>
-      <p:sp>
-        <p:nvSpPr>
-          <p:cNvPr id="21" name="Rounded Rectangle 20"/>
-          <p:cNvSpPr/>
-          <p:nvPr/>
-        </p:nvSpPr>
-        <p:spPr>
-          <a:xfrm>
-            <a:off x="6144768" y="4681728"/>
-            <a:ext cx="2743200" cy="1719072"/>
-          </a:xfrm>
-          <a:prstGeom prst="roundRect">
-            <a:avLst/>
-          </a:prstGeom>
-          <a:solidFill>
-            <a:srgbClr val="FFFFFF"/>
-          </a:solidFill>
-          <a:ln w="12700">
-            <a:solidFill>
-              <a:srgbClr val="1E6E3E"/>
-            </a:solidFill>
-          </a:ln>
-        </p:spPr>
-        <p:style>
-          <a:lnRef idx="1">
-            <a:schemeClr val="accent1"/>
-          </a:lnRef>
-          <a:fillRef idx="3">
-            <a:schemeClr val="accent1"/>
-          </a:fillRef>
-          <a:effectRef idx="2">
-            <a:schemeClr val="accent1"/>
-          </a:effectRef>
-          <a:fontRef idx="minor">
-            <a:schemeClr val="lt1"/>
-          </a:fontRef>
-        </p:style>
-        <p:txBody>
-          <a:bodyPr rtlCol="0" anchor="ctr" wrap="square" tIns="73152"/>
-          <a:lstStyle/>
-          <a:p>
-            <a:pPr algn="ctr">
-              <a:spcAft>
-                <a:spcPts val="600"/>
-              </a:spcAft>
-              <a:defRPr sz="919" b="1">
-                <a:solidFill>
-                  <a:srgbClr val="1E6E3E"/>
-                </a:solidFill>
-                <a:latin typeface="Meiryo UI"/>
-              </a:defRPr>
-            </a:pPr>
-            <a:r>
-              <a:t>ステップ 3：月次進捗の自主管理</a:t>
-            </a:r>
-          </a:p>
-          <a:p>
-            <a:pPr>
-              <a:defRPr sz="860">
-                <a:solidFill>
-                  <a:srgbClr val="1E242B"/>
-                </a:solidFill>
-                <a:latin typeface="Meiryo UI"/>
-              </a:defRPr>
-            </a:pPr>
-            <a:r>
-              <a:t>品質目標PDCA管理表（KDTVN-PE-3）に基づき月次で自主管理し、確定項目から現場SOPへ先行反映して工数削減を積み上げ。</a:t>
-            </a:r>
-          </a:p>
-        </p:txBody>
-      </p:sp>
-      <p:sp>
-        <p:nvSpPr>
-          <p:cNvPr id="22" name="Rounded Rectangle 21"/>
-          <p:cNvSpPr/>
-          <p:nvPr/>
-        </p:nvSpPr>
-        <p:spPr>
-          <a:xfrm>
-            <a:off x="9015984" y="4681728"/>
-            <a:ext cx="2743200" cy="1719072"/>
-          </a:xfrm>
-          <a:prstGeom prst="roundRect">
-            <a:avLst/>
-          </a:prstGeom>
-          <a:solidFill>
-            <a:srgbClr val="FFFFFF"/>
-          </a:solidFill>
-          <a:ln w="12700">
-            <a:solidFill>
-              <a:srgbClr val="1E6E3E"/>
-            </a:solidFill>
-          </a:ln>
-        </p:spPr>
-        <p:style>
-          <a:lnRef idx="1">
-            <a:schemeClr val="accent1"/>
-          </a:lnRef>
-          <a:fillRef idx="3">
-            <a:schemeClr val="accent1"/>
-          </a:fillRef>
-          <a:effectRef idx="2">
-            <a:schemeClr val="accent1"/>
-          </a:effectRef>
-          <a:fontRef idx="minor">
-            <a:schemeClr val="lt1"/>
-          </a:fontRef>
-        </p:style>
-        <p:txBody>
-          <a:bodyPr rtlCol="0" anchor="ctr" wrap="square" tIns="73152"/>
-          <a:lstStyle/>
-          <a:p>
-            <a:pPr algn="ctr">
-              <a:spcAft>
-                <a:spcPts val="600"/>
-              </a:spcAft>
-              <a:defRPr sz="919" b="1">
-                <a:solidFill>
-                  <a:srgbClr val="1E6E3E"/>
-                </a:solidFill>
-                <a:latin typeface="Meiryo UI"/>
-              </a:defRPr>
-            </a:pPr>
-            <a:r>
-              <a:t>ステップ 4：情報更新と三拠点報告</a:t>
-            </a:r>
-          </a:p>
-          <a:p>
-            <a:pPr>
-              <a:defRPr sz="860">
-                <a:solidFill>
-                  <a:srgbClr val="1E242B"/>
-                </a:solidFill>
-                <a:latin typeface="Meiryo UI"/>
-              </a:defRPr>
-            </a:pPr>
-            <a:r>
-              <a:t>実証結果・技術リスク・支援要請事項を共通資料へ随時更新し、三拠点定例会で報告して全体合意を形成。</a:t>
+              </a:rPr>
+              <a:t>連携方針：各拠点の強みを最大限に活かし、KDCが全体設計を主導、工場が現場改善を牽引、三拠点が緊密に連携してIrisEXPのタクトタイム半減を達成する。</a:t>
             </a:r>
           </a:p>
         </p:txBody>
@@ -23740,7 +23469,7 @@
           <a:lstStyle/>
           <a:p>
             <a:pPr>
-              <a:defRPr sz="1450" b="1">
+              <a:defRPr sz="1400" b="1">
                 <a:solidFill>
                   <a:srgbClr val="FFFFFF"/>
                 </a:solidFill>
@@ -23748,7 +23477,7 @@
               </a:defRPr>
             </a:pPr>
             <a:r>
-              <a:t>ベトナム工場 20改善提案（No.18 ～ No.37）の全体構造と投資試算</a:t>
+              <a:t>ベトナム工場 20改善提案（No.18 ～ No.37）の全体構造と重点施策</a:t>
             </a:r>
           </a:p>
         </p:txBody>
@@ -23808,7 +23537,7 @@
           </a:solidFill>
           <a:ln w="12700">
             <a:solidFill>
-              <a:srgbClr val="2B547E"/>
+              <a:srgbClr val="1B365D"/>
             </a:solidFill>
           </a:ln>
         </p:spPr>
@@ -23839,13 +23568,7 @@
               </a:defRPr>
             </a:pPr>
             <a:r>
-              <a:rPr sz="1200" b="1">
-                <a:solidFill>
-                  <a:srgbClr val="1B365D"/>
-                </a:solidFill>
-                <a:latin typeface="Meiryo UI"/>
-              </a:rPr>
-              <a:t>■ ベトナムは第1次11提案＋第2次追加9提案の計20提案を立案。見積書（Iris EXPのVN提案.xlsx）に記載の自動化3提案は総額 855.69百万VND（32,911.15 USD）。このうちNo.22（耐圧安全検査治具 101.69百万VND）を先行申請する。</a:t>
+              <a:t>ベトナム20提案：A-1工程ソフト事前書込み（作業者1名削減）および自動化4案件の投資精査（No.22 耐圧安全治具 101.69百万VND先行申請）。</a:t>
             </a:r>
           </a:p>
         </p:txBody>
@@ -24853,8 +24576,8 @@
         </p:nvSpPr>
         <p:spPr>
           <a:xfrm>
-            <a:off x="256032" y="3794760"/>
-            <a:ext cx="11679631" cy="2724912"/>
+            <a:off x="256032" y="3980000"/>
+            <a:ext cx="5739815" cy="2580000"/>
           </a:xfrm>
           <a:prstGeom prst="rect">
             <a:avLst/>
@@ -24864,7 +24587,7 @@
           </a:solidFill>
           <a:ln w="12700">
             <a:solidFill>
-              <a:srgbClr val="C5CDD6"/>
+              <a:srgbClr val="D0D7DE"/>
             </a:solidFill>
           </a:ln>
         </p:spPr>
@@ -24898,8 +24621,8 @@
         </p:nvSpPr>
         <p:spPr>
           <a:xfrm>
-            <a:off x="256032" y="3794760"/>
-            <a:ext cx="11679631" cy="292608"/>
+            <a:off x="256032" y="3980000"/>
+            <a:ext cx="5739815" cy="330000"/>
           </a:xfrm>
           <a:prstGeom prst="rect">
             <a:avLst/>
@@ -24908,7 +24631,9 @@
             <a:srgbClr val="1B365D"/>
           </a:solidFill>
           <a:ln>
-            <a:noFill/>
+            <a:solidFill>
+              <a:srgbClr val="1B365D"/>
+            </a:solidFill>
           </a:ln>
         </p:spPr>
         <p:style>
@@ -24926,11 +24651,11 @@
           </a:fontRef>
         </p:style>
         <p:txBody>
-          <a:bodyPr rtlCol="0" anchor="ctr" wrap="square" tIns="27432"/>
+          <a:bodyPr rtlCol="0" anchor="ctr"/>
           <a:lstStyle/>
           <a:p>
             <a:pPr algn="ctr">
-              <a:defRPr sz="930" b="1">
+              <a:defRPr sz="1200" b="1">
                 <a:solidFill>
                   <a:srgbClr val="FFFFFF"/>
                 </a:solidFill>
@@ -24938,7 +24663,7 @@
               </a:defRPr>
             </a:pPr>
             <a:r>
-              <a:t>ベトナム20提案の構造および投資試算シート（Iris EXPのVN提案.xlsx）における4大案件の整理</a:t>
+              <a:t>見積書（Iris EXPのVN提案.xlsx）における自動化4案件の整理</a:t>
             </a:r>
           </a:p>
         </p:txBody>
@@ -24951,8 +24676,8 @@
         </p:nvSpPr>
         <p:spPr>
           <a:xfrm>
-            <a:off x="329184" y="4114800"/>
-            <a:ext cx="11533327" cy="2377440"/>
+            <a:off x="296032" y="4325000"/>
+            <a:ext cx="5659815" cy="2225000"/>
           </a:xfrm>
           <a:prstGeom prst="rect">
             <a:avLst/>
@@ -24960,104 +24685,327 @@
           <a:noFill/>
         </p:spPr>
         <p:txBody>
-          <a:bodyPr wrap="square" lIns="36576" rIns="36576" tIns="18288" bIns="18288">
+          <a:bodyPr wrap="square" lIns="54864" rIns="54864" tIns="36576" bIns="36576">
             <a:spAutoFit/>
           </a:bodyPr>
           <a:lstStyle/>
           <a:p>
             <a:pPr>
+              <a:lnSpc>
+                <a:spcPct val="115000"/>
+              </a:lnSpc>
               <a:spcAft>
-                <a:spcPts val="220"/>
+                <a:spcPts val="600"/>
               </a:spcAft>
-              <a:defRPr sz="810" b="1">
+            </a:pPr>
+            <a:r>
+              <a:rPr sz="1200" b="1">
+                <a:solidFill>
+                  <a:srgbClr val="1B365D"/>
+                </a:solidFill>
+                <a:latin typeface="Meiryo UI"/>
+              </a:rPr>
+              <a:t>• 案件 1（No.22 - 耐圧安全検査、30秒短縮）：</a:t>
+            </a:r>
+            <a:r>
+              <a:rPr sz="1200" b="0">
                 <a:solidFill>
                   <a:srgbClr val="1E242B"/>
+                </a:solidFill>
+                <a:latin typeface="Meiryo UI"/>
+              </a:rPr>
+              <a:t>全閉カバー状態でPLC+SMC自動測定。BOM 25項目：101.69百万VND（3,911 USD）、年間29.6百万VND削減。先行申請。</a:t>
+            </a:r>
+          </a:p>
+          <a:p>
+            <a:pPr>
+              <a:lnSpc>
+                <a:spcPct val="115000"/>
+              </a:lnSpc>
+              <a:spcAft>
+                <a:spcPts val="600"/>
+              </a:spcAft>
+            </a:pPr>
+            <a:r>
+              <a:rPr sz="1200" b="1">
+                <a:solidFill>
+                  <a:srgbClr val="1B365D"/>
+                </a:solidFill>
+                <a:latin typeface="Meiryo UI"/>
+              </a:rPr>
+              <a:t>• 案件 2＆3（No.23＆No.24 - 高額ロボット廃止、140秒短縮）：</a:t>
+            </a:r>
+            <a:r>
+              <a:rPr sz="1200" b="0">
+                <a:solidFill>
+                  <a:srgbClr val="1E242B"/>
+                </a:solidFill>
+                <a:latin typeface="Meiryo UI"/>
+              </a:rPr>
+              <a:t>ロボット計754百万VND（29,000 USD）を廃止。DP給紙トレイ連続読取およびHost PCログ照合（投資0円）へ方針転換。</a:t>
+            </a:r>
+          </a:p>
+          <a:p>
+            <a:pPr>
+              <a:lnSpc>
+                <a:spcPct val="115000"/>
+              </a:lnSpc>
+              <a:spcAft>
+                <a:spcPts val="600"/>
+              </a:spcAft>
+            </a:pPr>
+            <a:r>
+              <a:rPr sz="1200" b="1">
+                <a:solidFill>
+                  <a:srgbClr val="1B365D"/>
+                </a:solidFill>
+                <a:latin typeface="Meiryo UI"/>
+              </a:rPr>
+              <a:t>• 案件 4（No.25 - 検査実機へのDP増設）：</a:t>
+            </a:r>
+            <a:r>
+              <a:rPr sz="1200" b="0">
+                <a:solidFill>
+                  <a:srgbClr val="1E242B"/>
+                </a:solidFill>
+                <a:latin typeface="Meiryo UI"/>
+              </a:rPr>
+              <a:t>手置き読取をDP連続給紙に変更し、画像データをPCへ自動転送して自動判定。実機読取精度を検証中。</a:t>
+            </a:r>
+          </a:p>
+        </p:txBody>
+      </p:sp>
+      <p:sp>
+        <p:nvSpPr>
+          <p:cNvPr id="12" name="Rectangle 11"/>
+          <p:cNvSpPr/>
+          <p:nvPr/>
+        </p:nvSpPr>
+        <p:spPr>
+          <a:xfrm>
+            <a:off x="6195847" y="3980000"/>
+            <a:ext cx="5739815" cy="2580000"/>
+          </a:xfrm>
+          <a:prstGeom prst="rect">
+            <a:avLst/>
+          </a:prstGeom>
+          <a:solidFill>
+            <a:srgbClr val="FFFFFF"/>
+          </a:solidFill>
+          <a:ln w="12700">
+            <a:solidFill>
+              <a:srgbClr val="D0D7DE"/>
+            </a:solidFill>
+          </a:ln>
+        </p:spPr>
+        <p:style>
+          <a:lnRef idx="1">
+            <a:schemeClr val="accent1"/>
+          </a:lnRef>
+          <a:fillRef idx="3">
+            <a:schemeClr val="accent1"/>
+          </a:fillRef>
+          <a:effectRef idx="2">
+            <a:schemeClr val="accent1"/>
+          </a:effectRef>
+          <a:fontRef idx="minor">
+            <a:schemeClr val="lt1"/>
+          </a:fontRef>
+        </p:style>
+        <p:txBody>
+          <a:bodyPr rtlCol="0" anchor="ctr"/>
+          <a:lstStyle/>
+          <a:p>
+            <a:pPr algn="ctr"/>
+          </a:p>
+        </p:txBody>
+      </p:sp>
+      <p:sp>
+        <p:nvSpPr>
+          <p:cNvPr id="13" name="Rectangle 12"/>
+          <p:cNvSpPr/>
+          <p:nvPr/>
+        </p:nvSpPr>
+        <p:spPr>
+          <a:xfrm>
+            <a:off x="6195847" y="3980000"/>
+            <a:ext cx="5739815" cy="330000"/>
+          </a:xfrm>
+          <a:prstGeom prst="rect">
+            <a:avLst/>
+          </a:prstGeom>
+          <a:solidFill>
+            <a:srgbClr val="005A70"/>
+          </a:solidFill>
+          <a:ln>
+            <a:solidFill>
+              <a:srgbClr val="005A70"/>
+            </a:solidFill>
+          </a:ln>
+        </p:spPr>
+        <p:style>
+          <a:lnRef idx="1">
+            <a:schemeClr val="accent1"/>
+          </a:lnRef>
+          <a:fillRef idx="3">
+            <a:schemeClr val="accent1"/>
+          </a:fillRef>
+          <a:effectRef idx="2">
+            <a:schemeClr val="accent1"/>
+          </a:effectRef>
+          <a:fontRef idx="minor">
+            <a:schemeClr val="lt1"/>
+          </a:fontRef>
+        </p:style>
+        <p:txBody>
+          <a:bodyPr rtlCol="0" anchor="ctr"/>
+          <a:lstStyle/>
+          <a:p>
+            <a:pPr algn="ctr">
+              <a:defRPr sz="1200" b="1">
+                <a:solidFill>
+                  <a:srgbClr val="FFFFFF"/>
                 </a:solidFill>
                 <a:latin typeface="Meiryo UI"/>
               </a:defRPr>
             </a:pPr>
             <a:r>
-              <a:t>■ 1. 投資試算シート（Iris EXPのVN提案.xlsx）に記載の重点自動化4案件（社内レート：26,000 VND/USD）：</a:t>
+              <a:t>重点提案：F/Wソフト書込みのサプライヤー移管（A-1工程）</a:t>
+            </a:r>
+          </a:p>
+        </p:txBody>
+      </p:sp>
+      <p:sp>
+        <p:nvSpPr>
+          <p:cNvPr id="14" name="TextBox 13"/>
+          <p:cNvSpPr txBox="1"/>
+          <p:nvPr/>
+        </p:nvSpPr>
+        <p:spPr>
+          <a:xfrm>
+            <a:off x="6235847" y="4325000"/>
+            <a:ext cx="5659815" cy="2225000"/>
+          </a:xfrm>
+          <a:prstGeom prst="rect">
+            <a:avLst/>
+          </a:prstGeom>
+          <a:noFill/>
+        </p:spPr>
+        <p:txBody>
+          <a:bodyPr wrap="square" lIns="54864" rIns="54864" tIns="36576" bIns="36576">
+            <a:spAutoFit/>
+          </a:bodyPr>
+          <a:lstStyle/>
+          <a:p>
+            <a:pPr>
+              <a:lnSpc>
+                <a:spcPct val="112000"/>
+              </a:lnSpc>
+              <a:spcAft>
+                <a:spcPts val="400"/>
+              </a:spcAft>
+            </a:pPr>
+            <a:r>
+              <a:rPr sz="1200" b="1">
+                <a:solidFill>
+                  <a:srgbClr val="005A70"/>
+                </a:solidFill>
+                <a:latin typeface="Meiryo UI"/>
+              </a:rPr>
+              <a:t>• 目的と効果：</a:t>
+            </a:r>
+            <a:r>
+              <a:rPr sz="1200" b="0">
+                <a:solidFill>
+                  <a:srgbClr val="1E242B"/>
+                </a:solidFill>
+                <a:latin typeface="Meiryo UI"/>
+              </a:rPr>
+              <a:t>本体調整工程でのソフト書込みを廃止し、サプライヤーへ事前移管。作業時間短縮・工程削減・作業者1名削減（生産性倍増へ貢献）。</a:t>
             </a:r>
           </a:p>
           <a:p>
             <a:pPr>
+              <a:lnSpc>
+                <a:spcPct val="112000"/>
+              </a:lnSpc>
               <a:spcAft>
-                <a:spcPts val="220"/>
+                <a:spcPts val="400"/>
               </a:spcAft>
-              <a:defRPr sz="810">
+            </a:pPr>
+            <a:r>
+              <a:rPr sz="1200" b="1">
+                <a:solidFill>
+                  <a:srgbClr val="005A70"/>
+                </a:solidFill>
+                <a:latin typeface="Meiryo UI"/>
+              </a:rPr>
+              <a:t>• 実施計画：</a:t>
+            </a:r>
+            <a:r>
+              <a:rPr sz="1200" b="0">
                 <a:solidFill>
                   <a:srgbClr val="1E242B"/>
                 </a:solidFill>
                 <a:latin typeface="Meiryo UI"/>
-              </a:defRPr>
-            </a:pPr>
-            <a:r>
-              <a:t>   • 案件 1（No.22 - アース導通および耐電圧検査の自動化、30秒削減）：全閉カバー状態で自動接続・測定する治具を製作。30秒/台短縮、年間 29,600,000 VND（1,138.46 USD）削減。BOM 25項目詳細見積：101,690,000 VND（3,911.15 USD；サマリー表記載：4,000 USD）。</a:t>
+              </a:rPr>
+              <a:t>Main、Language、OCR、Engine、Motor、Panel、AI等を事前書込。調整ラインではバージョン照合のみ実施し流出防止。</a:t>
             </a:r>
           </a:p>
           <a:p>
             <a:pPr>
+              <a:lnSpc>
+                <a:spcPct val="112000"/>
+              </a:lnSpc>
               <a:spcAft>
-                <a:spcPts val="220"/>
+                <a:spcPts val="400"/>
               </a:spcAft>
-              <a:defRPr sz="810">
+            </a:pPr>
+            <a:r>
+              <a:rPr sz="1200" b="1">
+                <a:solidFill>
+                  <a:srgbClr val="005A70"/>
+                </a:solidFill>
+                <a:latin typeface="Meiryo UI"/>
+              </a:rPr>
+              <a:t>• 前提条件と課題：</a:t>
+            </a:r>
+            <a:r>
+              <a:rPr sz="1200" b="0">
                 <a:solidFill>
                   <a:srgbClr val="1E242B"/>
                 </a:solidFill>
                 <a:latin typeface="Meiryo UI"/>
-              </a:defRPr>
-            </a:pPr>
-            <a:r>
-              <a:t>   • 案件 2（No.23 - 原稿自動セットによるISU調整U411［45s］＋SITC-2［35s］＋Halftone［30s］＝110秒短縮）：当初案は原稿ロボットハンド製作（コンベア2セル200M＋電源50M＋配線50M＋ロボット350M＝650,000,000 VND / 25,000 USD）。費用対効果を考慮し、DR4後、原稿自動送り装置（DP）による連続スキャン方式（No.25）へ方針転換を提案。</a:t>
+              </a:rPr>
+              <a:t>ソフト変更時のOld/New基板の厳格管理；LSU特性差、SSD容量、中国向け等の理由でMAIN基板共通化が困難（上位統一は基板コスト増）。</a:t>
             </a:r>
           </a:p>
           <a:p>
             <a:pPr>
+              <a:lnSpc>
+                <a:spcPct val="112000"/>
+              </a:lnSpc>
               <a:spcAft>
-                <a:spcPts val="220"/>
+                <a:spcPts val="400"/>
               </a:spcAft>
-              <a:defRPr sz="810">
+            </a:pPr>
+            <a:r>
+              <a:rPr sz="1200" b="1">
+                <a:solidFill>
+                  <a:srgbClr val="005A70"/>
+                </a:solidFill>
+                <a:latin typeface="Meiryo UI"/>
+              </a:rPr>
+              <a:t>• 今後の方向性（花崎様）：</a:t>
+            </a:r>
+            <a:r>
+              <a:rPr sz="1200" b="0">
                 <a:solidFill>
                   <a:srgbClr val="1E242B"/>
                 </a:solidFill>
                 <a:latin typeface="Meiryo UI"/>
-              </a:defRPr>
-            </a:pPr>
-            <a:r>
-              <a:t>   • 案件 3（No.24 - USB認識［15s］＋U201タッチパネル座標確認［15s］＝30秒短縮）：当初案はUSB自動挿抜＋AIタッチロボットで104,000,000 VND（4,000 USD）。代替案としてA-1工程FW書込みでのUSB動作保証（日本No.6）およびHost PCログ読み取り（日本No.3）を採用し、設備費用0円で実現。</a:t>
-            </a:r>
-          </a:p>
-          <a:p>
-            <a:pPr>
-              <a:spcAft>
-                <a:spcPts val="220"/>
-              </a:spcAft>
-              <a:defRPr sz="810">
-                <a:solidFill>
-                  <a:srgbClr val="1E242B"/>
-                </a:solidFill>
-                <a:latin typeface="Meiryo UI"/>
-              </a:defRPr>
-            </a:pPr>
-            <a:r>
-              <a:t>   • 案件 4（No.25 - 検査実機へのDP増設による連続スキャン・PC自動判定）：実機ガラス面スキャンとの読取精度・幾何補正を現在検証中。</a:t>
-            </a:r>
-          </a:p>
-          <a:p>
-            <a:pPr>
-              <a:spcAft>
-                <a:spcPts val="220"/>
-              </a:spcAft>
-              <a:defRPr sz="810" b="1">
-                <a:solidFill>
-                  <a:srgbClr val="1E242B"/>
-                </a:solidFill>
-                <a:latin typeface="Meiryo UI"/>
-              </a:defRPr>
-            </a:pPr>
-            <a:r>
-              <a:t>■ 2. ベトナム提案のその他の構成：地元サプライヤー見積取得中10件、設計・ソフト改善（設備費0円）6件、長期先行研究1件（No.26 AI異音解析、約600万円）。</a:t>
+              </a:rPr>
+              <a:t>単なる数分短縮にとどまらず、社内書込みの歴史的経緯を確認し、ライン上の実質的な「員数削減効果」を厳格評価して推進。</a:t>
             </a:r>
           </a:p>
         </p:txBody>
@@ -28210,16 +28158,16 @@
                     <a:bodyPr wrap="square"/>
                     <a:lstStyle/>
                     <a:p>
-                      <a:pPr algn="l">
-                        <a:defRPr sz="740">
-                          <a:solidFill>
-                            <a:srgbClr val="1E242B"/>
-                          </a:solidFill>
-                          <a:latin typeface="Meiryo UI"/>
-                        </a:defRPr>
-                      </a:pPr>
-                      <a:r>
-                        <a:t>出荷時にソフト書込み済の基板であっても、ライン上で100%全数USBを挿し直して再書込みしている（作業13～25s＋待ち100s）。</a:t>
+                      <a:pPr>
+                        <a:defRPr sz="1050">
+                          <a:solidFill>
+                            <a:srgbClr val="1E242B"/>
+                          </a:solidFill>
+                          <a:latin typeface="Meiryo UI"/>
+                        </a:defRPr>
+                      </a:pPr>
+                      <a:r>
+                        <a:t>Main、Lang、OCR、Engine、Motor、Panel、AI等の全ソフトをサプライヤーで事前書込。ライン上は照合のみ。Old/New切替管理を徹底し、花崎様ご指示に基づき実質的な員数削減効果を厳格評価。</a:t>
                       </a:r>
                     </a:p>
                   </a:txBody>
@@ -28234,16 +28182,16 @@
                     <a:bodyPr wrap="square"/>
                     <a:lstStyle/>
                     <a:p>
-                      <a:pPr algn="l">
-                        <a:defRPr sz="740">
-                          <a:solidFill>
-                            <a:srgbClr val="1E242B"/>
-                          </a:solidFill>
-                          <a:latin typeface="Meiryo UI"/>
-                        </a:defRPr>
-                      </a:pPr>
-                      <a:r>
-                        <a:t>基板出荷時からライン投入までに新版FWが発生した場合のみ再書込みし、通常はスキップ（Set Serialでのバージョン照合により誤品防止）。</a:t>
+                      <a:pPr>
+                        <a:defRPr sz="1050">
+                          <a:solidFill>
+                            <a:srgbClr val="1E242B"/>
+                          </a:solidFill>
+                          <a:latin typeface="Meiryo UI"/>
+                        </a:defRPr>
+                      </a:pPr>
+                      <a:r>
+                        <a:t>手作業13s～25s短縮；A-1工程作業者1名削減へ寄与（生産性倍増目標に貢献）</a:t>
                       </a:r>
                     </a:p>
                   </a:txBody>
@@ -28258,24 +28206,16 @@
                     <a:bodyPr wrap="square"/>
                     <a:lstStyle/>
                     <a:p>
-                      <a:pPr algn="l">
-                        <a:defRPr sz="740">
-                          <a:solidFill>
-                            <a:srgbClr val="1E242B"/>
-                          </a:solidFill>
-                          <a:latin typeface="Meiryo UI"/>
-                        </a:defRPr>
-                      </a:pPr>
-                      <a:r>
-                        <a:t>• 手作業 13s～25s 削減</a:t>
-                      </a:r>
-                      <a:br/>
-                      <a:r>
-                        <a:t>• A-1サイクル 379s-&gt;279s</a:t>
-                      </a:r>
-                      <a:br/>
-                      <a:r>
-                        <a:t>• A-1 作業者1名削減</a:t>
+                      <a:pPr>
+                        <a:defRPr sz="1050">
+                          <a:solidFill>
+                            <a:srgbClr val="1E242B"/>
+                          </a:solidFill>
+                          <a:latin typeface="Meiryo UI"/>
+                        </a:defRPr>
+                      </a:pPr>
+                      <a:r>
+                        <a:t>設備投資0円（Old/New切替運用およびMAIN基板共通化制約を日本設計と協議中）</a:t>
                       </a:r>
                     </a:p>
                   </a:txBody>

--- a/IrisEXP_VN改善提案報告_JP.pptx
+++ b/IrisEXP_VN改善提案報告_JP.pptx
@@ -21532,7 +21532,7 @@
           <a:bodyPr rtlCol="0" anchor="ctr" wrap="square" lIns="109728" rIns="109728" tIns="27432" bIns="27432"/>
           <a:lstStyle/>
           <a:p>
-            <a:pPr algn="ctr">
+            <a:pPr>
               <a:defRPr sz="1200" b="1">
                 <a:solidFill>
                   <a:srgbClr val="1B365D"/>
@@ -21541,13 +21541,7 @@
               </a:defRPr>
             </a:pPr>
             <a:r>
-              <a:rPr sz="1200" b="1">
-                <a:solidFill>
-                  <a:srgbClr val="1B365D"/>
-                </a:solidFill>
-                <a:latin typeface="Meiryo UI"/>
-              </a:rPr>
-              <a:t>■ 生産性2倍向上（作業者1人当たり日産台数を現行15.19台から ≥30.38～33.33台へ倍増）、正味工数50%削減および作業者半減を達成し、現行Iris2024ライン上でIrisEXP（300台/日・タクト97秒）の生産を確保する。</a:t>
+              <a:t>生産性2倍向上（作業者1人当たり日産台数を現行15.19台から ≥30.38～33.33台へ倍増）、正味工数50%削減および作業者半減を達成し、現行Iris2024ライン上でIrisEXP（300台/日・タクト97秒）の生産を確保する。</a:t>
             </a:r>
           </a:p>
         </p:txBody>
@@ -21667,12 +21661,15 @@
           <a:noFill/>
         </p:spPr>
         <p:txBody>
-          <a:bodyPr wrap="square" lIns="36576" rIns="36576" tIns="18288" bIns="18288">
+          <a:bodyPr wrap="square" lIns="109728" rIns="109728" tIns="109728" bIns="109728">
             <a:spAutoFit/>
           </a:bodyPr>
           <a:lstStyle/>
           <a:p>
             <a:pPr>
+              <a:spcBef>
+                <a:spcPts val="0"/>
+              </a:spcBef>
               <a:spcAft>
                 <a:spcPts val="200"/>
               </a:spcAft>
@@ -21684,86 +21681,116 @@
               </a:defRPr>
             </a:pPr>
             <a:r>
-              <a:t>■ 工程設計方針：</a:t>
+              <a:rPr sz="1300" b="1">
+                <a:solidFill>
+                  <a:srgbClr val="1B365D"/>
+                </a:solidFill>
+                <a:latin typeface="Meiryo UI"/>
+              </a:rPr>
+              <a:t>工程設計方針：</a:t>
             </a:r>
           </a:p>
           <a:p>
             <a:pPr>
+              <a:lnSpc>
+                <a:spcPct val="120000"/>
+              </a:lnSpc>
+              <a:spcBef>
+                <a:spcPts val="0"/>
+              </a:spcBef>
               <a:spcAft>
-                <a:spcPts val="1400"/>
+                <a:spcPts val="800"/>
               </a:spcAft>
-              <a:defRPr sz="1150">
+            </a:pPr>
+            <a:r>
+              <a:rPr sz="1250" b="0">
                 <a:solidFill>
                   <a:srgbClr val="1E242B"/>
                 </a:solidFill>
                 <a:latin typeface="Meiryo UI"/>
-              </a:defRPr>
-            </a:pPr>
-            <a:r>
+              </a:rPr>
               <a:t>モジュールごとに保証を完結させる工程設計基盤を構築し、検査項目を前工程（組立・UNIT）へ移管。</a:t>
             </a:r>
           </a:p>
           <a:p>
             <a:pPr>
+              <a:spcBef>
+                <a:spcPts val="800"/>
+              </a:spcBef>
               <a:spcAft>
                 <a:spcPts val="200"/>
               </a:spcAft>
-              <a:defRPr sz="1250" b="1">
+            </a:pPr>
+            <a:r>
+              <a:rPr sz="1300" b="1">
                 <a:solidFill>
                   <a:srgbClr val="1B365D"/>
                 </a:solidFill>
                 <a:latin typeface="Meiryo UI"/>
-              </a:defRPr>
-            </a:pPr>
-            <a:r>
-              <a:t>■ 重複・無駄の徹底排除：</a:t>
+              </a:rPr>
+              <a:t>重複・無駄の徹底排除：</a:t>
             </a:r>
           </a:p>
           <a:p>
             <a:pPr>
+              <a:lnSpc>
+                <a:spcPct val="120000"/>
+              </a:lnSpc>
+              <a:spcBef>
+                <a:spcPts val="0"/>
+              </a:spcBef>
               <a:spcAft>
-                <a:spcPts val="1400"/>
+                <a:spcPts val="800"/>
               </a:spcAft>
-              <a:defRPr sz="1150">
+            </a:pPr>
+            <a:r>
+              <a:rPr sz="1250" b="0">
                 <a:solidFill>
                   <a:srgbClr val="1E242B"/>
                 </a:solidFill>
                 <a:latin typeface="Meiryo UI"/>
-              </a:defRPr>
-            </a:pPr>
-            <a:r>
+              </a:rPr>
               <a:t>現行Iris2024調整工程の全項目を見直し、重複作業および無駄工数を徹底的に排除。</a:t>
             </a:r>
           </a:p>
           <a:p>
             <a:pPr>
+              <a:spcBef>
+                <a:spcPts val="800"/>
+              </a:spcBef>
               <a:spcAft>
                 <a:spcPts val="200"/>
               </a:spcAft>
-              <a:defRPr sz="1250" b="1">
+            </a:pPr>
+            <a:r>
+              <a:rPr sz="1300" b="1">
                 <a:solidFill>
                   <a:srgbClr val="1B365D"/>
                 </a:solidFill>
                 <a:latin typeface="Meiryo UI"/>
-              </a:defRPr>
-            </a:pPr>
-            <a:r>
-              <a:t>■ 達成目標：</a:t>
+              </a:rPr>
+              <a:t>達成目標：</a:t>
             </a:r>
           </a:p>
           <a:p>
             <a:pPr>
+              <a:lnSpc>
+                <a:spcPct val="120000"/>
+              </a:lnSpc>
+              <a:spcBef>
+                <a:spcPts val="0"/>
+              </a:spcBef>
               <a:spcAft>
-                <a:spcPts val="0"/>
+                <a:spcPts val="800"/>
               </a:spcAft>
-              <a:defRPr sz="1150">
+            </a:pPr>
+            <a:r>
+              <a:rPr sz="1250" b="0">
                 <a:solidFill>
                   <a:srgbClr val="1E242B"/>
                 </a:solidFill>
                 <a:latin typeface="Meiryo UI"/>
-              </a:defRPr>
-            </a:pPr>
-            <a:r>
+              </a:rPr>
               <a:t>Iris2024で行っている手動検査を廃止、または3項目以上で工数を半減。</a:t>
             </a:r>
           </a:p>
@@ -21884,12 +21911,15 @@
           <a:noFill/>
         </p:spPr>
         <p:txBody>
-          <a:bodyPr wrap="square" lIns="36576" rIns="36576" tIns="18288" bIns="18288">
+          <a:bodyPr wrap="square" lIns="109728" rIns="109728" tIns="109728" bIns="109728">
             <a:spAutoFit/>
           </a:bodyPr>
           <a:lstStyle/>
           <a:p>
             <a:pPr>
+              <a:spcBef>
+                <a:spcPts val="0"/>
+              </a:spcBef>
               <a:spcAft>
                 <a:spcPts val="200"/>
               </a:spcAft>
@@ -21901,94 +21931,116 @@
               </a:defRPr>
             </a:pPr>
             <a:r>
-              <a:t>■ 標準作業時間短縮（正味50%削減）：</a:t>
+              <a:rPr sz="1300" b="1">
+                <a:solidFill>
+                  <a:srgbClr val="1B365D"/>
+                </a:solidFill>
+                <a:latin typeface="Meiryo UI"/>
+              </a:rPr>
+              <a:t>標準作業時間短縮（正味50%削減）：</a:t>
             </a:r>
           </a:p>
           <a:p>
             <a:pPr>
+              <a:lnSpc>
+                <a:spcPct val="120000"/>
+              </a:lnSpc>
+              <a:spcBef>
+                <a:spcPts val="0"/>
+              </a:spcBef>
               <a:spcAft>
-                <a:spcPts val="1200"/>
+                <a:spcPts val="800"/>
               </a:spcAft>
-              <a:defRPr sz="1150">
+            </a:pPr>
+            <a:r>
+              <a:rPr sz="1250" b="0">
                 <a:solidFill>
                   <a:srgbClr val="1E242B"/>
                 </a:solidFill>
                 <a:latin typeface="Meiryo UI"/>
-              </a:defRPr>
-            </a:pPr>
-            <a:r>
+              </a:rPr>
               <a:t>正味作業時間を1,083s -&gt; ≤ 541s/台へ半減（総滞留時間：2,350s -&gt; ≤ 1,175s）。</a:t>
             </a:r>
           </a:p>
           <a:p>
             <a:pPr>
+              <a:spcBef>
+                <a:spcPts val="800"/>
+              </a:spcBef>
               <a:spcAft>
                 <a:spcPts val="200"/>
               </a:spcAft>
-              <a:defRPr sz="1250" b="1">
+            </a:pPr>
+            <a:r>
+              <a:rPr sz="1300" b="1">
                 <a:solidFill>
                   <a:srgbClr val="1B365D"/>
                 </a:solidFill>
                 <a:latin typeface="Meiryo UI"/>
-              </a:defRPr>
-            </a:pPr>
-            <a:r>
-              <a:t>■ テストチャート印刷枚数半減：</a:t>
+              </a:rPr>
+              <a:t>テストチャート印刷枚数半減：</a:t>
             </a:r>
           </a:p>
           <a:p>
             <a:pPr>
+              <a:lnSpc>
+                <a:spcPct val="120000"/>
+              </a:lnSpc>
+              <a:spcBef>
+                <a:spcPts val="0"/>
+              </a:spcBef>
               <a:spcAft>
-                <a:spcPts val="1200"/>
+                <a:spcPts val="800"/>
               </a:spcAft>
-              <a:defRPr sz="1150">
+            </a:pPr>
+            <a:r>
+              <a:rPr sz="1250" b="0">
                 <a:solidFill>
                   <a:srgbClr val="1E242B"/>
                 </a:solidFill>
                 <a:latin typeface="Meiryo UI"/>
-              </a:defRPr>
-            </a:pPr>
-            <a:r>
-              <a:t>印刷チャート枚数を大幅削減：</a:t>
-            </a:r>
-            <a:br/>
-            <a:r>
-              <a:t>• 印刷画像パターン：17枚 -&gt; 9枚</a:t>
-            </a:r>
-            <a:br/>
-            <a:r>
-              <a:t>• コピー枚数：2枚 -&gt; 1枚</a:t>
+              </a:rPr>
+              <a:t>印刷チャート枚数を大幅削減： • 印刷パターン：17枚 -&gt; 9枚 • コピー枚数：2枚 -&gt; 1枚</a:t>
             </a:r>
           </a:p>
           <a:p>
             <a:pPr>
+              <a:spcBef>
+                <a:spcPts val="800"/>
+              </a:spcBef>
               <a:spcAft>
                 <a:spcPts val="200"/>
               </a:spcAft>
-              <a:defRPr sz="1250" b="1">
+            </a:pPr>
+            <a:r>
+              <a:rPr sz="1300" b="1">
                 <a:solidFill>
                   <a:srgbClr val="1B365D"/>
                 </a:solidFill>
                 <a:latin typeface="Meiryo UI"/>
-              </a:defRPr>
-            </a:pPr>
-            <a:r>
-              <a:t>■ ソフトウェア・AI活用：</a:t>
+              </a:rPr>
+              <a:t>ソフトウェア・AI活用：</a:t>
             </a:r>
           </a:p>
           <a:p>
             <a:pPr>
+              <a:lnSpc>
+                <a:spcPct val="120000"/>
+              </a:lnSpc>
+              <a:spcBef>
+                <a:spcPts val="0"/>
+              </a:spcBef>
               <a:spcAft>
-                <a:spcPts val="0"/>
+                <a:spcPts val="800"/>
               </a:spcAft>
-              <a:defRPr sz="1150">
+            </a:pPr>
+            <a:r>
+              <a:rPr sz="1250" b="0">
                 <a:solidFill>
                   <a:srgbClr val="1E242B"/>
                 </a:solidFill>
                 <a:latin typeface="Meiryo UI"/>
-              </a:defRPr>
-            </a:pPr>
-            <a:r>
+              </a:rPr>
               <a:t>AI動画動作分析による無駄排除およびコマンド自動化による検査効率化。</a:t>
             </a:r>
           </a:p>
@@ -22109,12 +22161,15 @@
           <a:noFill/>
         </p:spPr>
         <p:txBody>
-          <a:bodyPr wrap="square" lIns="36576" rIns="36576" tIns="18288" bIns="18288">
+          <a:bodyPr wrap="square" lIns="109728" rIns="109728" tIns="109728" bIns="109728">
             <a:spAutoFit/>
           </a:bodyPr>
           <a:lstStyle/>
           <a:p>
             <a:pPr>
+              <a:spcBef>
+                <a:spcPts val="0"/>
+              </a:spcBef>
               <a:spcAft>
                 <a:spcPts val="200"/>
               </a:spcAft>
@@ -22126,63 +22181,117 @@
               </a:defRPr>
             </a:pPr>
             <a:r>
-              <a:t>■ 7大作業ブロック自動化推進：</a:t>
+              <a:rPr sz="1300" b="1">
+                <a:solidFill>
+                  <a:srgbClr val="1B5E20"/>
+                </a:solidFill>
+                <a:latin typeface="Meiryo UI"/>
+              </a:rPr>
+              <a:t>作業者1人当たり生産性（倍増達成）：</a:t>
             </a:r>
           </a:p>
           <a:p>
             <a:pPr>
+              <a:lnSpc>
+                <a:spcPct val="120000"/>
+              </a:lnSpc>
+              <a:spcBef>
+                <a:spcPts val="0"/>
+              </a:spcBef>
               <a:spcAft>
-                <a:spcPts val="1200"/>
+                <a:spcPts val="800"/>
               </a:spcAft>
-              <a:defRPr sz="1150">
+            </a:pPr>
+            <a:r>
+              <a:rPr sz="1250" b="0">
                 <a:solidFill>
                   <a:srgbClr val="1E242B"/>
                 </a:solidFill>
                 <a:latin typeface="Meiryo UI"/>
-              </a:defRPr>
-            </a:pPr>
-            <a:r>
-              <a:t>耐電圧治具、カメラ濃度測定、DP自動スキャン、Spicaネットワークによる自動化を推進。</a:t>
+              </a:rPr>
+              <a:t>日産 ≥ 30.38 ～ 33.33台/人（現行15.19台/人から倍増を達成）。</a:t>
             </a:r>
           </a:p>
           <a:p>
             <a:pPr>
+              <a:spcBef>
+                <a:spcPts val="800"/>
+              </a:spcBef>
               <a:spcAft>
                 <a:spcPts val="200"/>
               </a:spcAft>
-              <a:defRPr sz="1250" b="1">
+            </a:pPr>
+            <a:r>
+              <a:rPr sz="1300" b="1">
                 <a:solidFill>
-                  <a:srgbClr val="1B365D"/>
+                  <a:srgbClr val="1B5E20"/>
                 </a:solidFill>
                 <a:latin typeface="Meiryo UI"/>
-              </a:defRPr>
-            </a:pPr>
-            <a:r>
-              <a:t>■ KDTVNにおける達成目標：</a:t>
+              </a:rPr>
+              <a:t>作業人員のスリム化（50%削減）：</a:t>
             </a:r>
           </a:p>
           <a:p>
             <a:pPr>
+              <a:lnSpc>
+                <a:spcPct val="120000"/>
+              </a:lnSpc>
+              <a:spcBef>
+                <a:spcPts val="0"/>
+              </a:spcBef>
               <a:spcAft>
-                <a:spcPts val="0"/>
+                <a:spcPts val="800"/>
               </a:spcAft>
-              <a:defRPr sz="1150">
+            </a:pPr>
+            <a:r>
+              <a:rPr sz="1250" b="0">
                 <a:solidFill>
                   <a:srgbClr val="1E242B"/>
                 </a:solidFill>
                 <a:latin typeface="Meiryo UI"/>
-              </a:defRPr>
+              </a:rPr>
+              <a:t>現行16 ～ 18名体制から 8 ～ 9名体制へ集約・半減。</a:t>
+            </a:r>
+          </a:p>
+          <a:p>
+            <a:pPr>
+              <a:spcBef>
+                <a:spcPts val="800"/>
+              </a:spcBef>
+              <a:spcAft>
+                <a:spcPts val="200"/>
+              </a:spcAft>
             </a:pPr>
             <a:r>
-              <a:t>• 作業者1人当たり日産台数倍増：15.19台 -&gt; ≥ 30.38 ～ 33.33台/人/日</a:t>
+              <a:rPr sz="1300" b="1">
+                <a:solidFill>
+                  <a:srgbClr val="1B5E20"/>
+                </a:solidFill>
+                <a:latin typeface="Meiryo UI"/>
+              </a:rPr>
+              <a:t>量産時工程能力指数の確保：</a:t>
             </a:r>
-            <a:br/>
+          </a:p>
+          <a:p>
+            <a:pPr>
+              <a:lnSpc>
+                <a:spcPct val="120000"/>
+              </a:lnSpc>
+              <a:spcBef>
+                <a:spcPts val="0"/>
+              </a:spcBef>
+              <a:spcAft>
+                <a:spcPts val="800"/>
+              </a:spcAft>
+            </a:pPr>
             <a:r>
-              <a:t>• 作業者半減：16～18名 -&gt; 8～9名へ集約</a:t>
-            </a:r>
-            <a:br/>
-            <a:r>
-              <a:t>• 量産時工程能力：Cpk ≥ 1.33を達成</a:t>
+              <a:rPr sz="1250" b="0">
+                <a:solidFill>
+                  <a:srgbClr val="1E242B"/>
+                </a:solidFill>
+                <a:latin typeface="Meiryo UI"/>
+              </a:rPr>
+              <a:t>量産（MP）移行時に工程能力指数 Cpk ≥ 1.33 を確実に達成・維持。</a:t>
             </a:r>
           </a:p>
         </p:txBody>
